--- a/qsbg_smart_tour_presentation_large_font.pptx
+++ b/qsbg_smart_tour_presentation_large_font.pptx
@@ -6,17 +6,18 @@
   </p:sldMasterIdLst>
   <p:sldIdLst>
     <p:sldId id="256" r:id="rId7"/>
-    <p:sldId id="257" r:id="rId9"/>
-    <p:sldId id="258" r:id="rId10"/>
-    <p:sldId id="259" r:id="rId11"/>
-    <p:sldId id="260" r:id="rId12"/>
-    <p:sldId id="261" r:id="rId13"/>
-    <p:sldId id="262" r:id="rId14"/>
-    <p:sldId id="263" r:id="rId15"/>
-    <p:sldId id="264" r:id="rId16"/>
-    <p:sldId id="265" r:id="rId17"/>
-    <p:sldId id="266" r:id="rId18"/>
-    <p:sldId id="267" r:id="rId19"/>
+    <p:sldId id="257" r:id="rId8"/>
+    <p:sldId id="258" r:id="rId9"/>
+    <p:sldId id="259" r:id="rId10"/>
+    <p:sldId id="260" r:id="rId11"/>
+    <p:sldId id="261" r:id="rId12"/>
+    <p:sldId id="262" r:id="rId13"/>
+    <p:sldId id="263" r:id="rId14"/>
+    <p:sldId id="264" r:id="rId15"/>
+    <p:sldId id="265" r:id="rId16"/>
+    <p:sldId id="266" r:id="rId17"/>
+    <p:sldId id="267" r:id="rId18"/>
+    <p:sldId id="268" r:id="rId19"/>
   </p:sldIdLst>
   <p:sldSz cx="12191695" cy="6858000" type="screen4x3"/>
   <p:notesSz cx="6858000" cy="9144000"/>
@@ -513,7 +514,7 @@
           <a:lstStyle/>
           <a:p>
             <a:r>
-              <a:t>สคริปต์บทพูดหน้าปก (1.0 นาที):</a:t>
+              <a:t>สคริปต์พูดหน้าปก (1.0 นาที):</a:t>
             </a:r>
           </a:p>
           <a:p>
@@ -526,10 +527,9 @@
               <a:t>ในวันนี้ผมมีความยินดีอย่างยิ่งที่จะนำเสนอ 'Smart Electric Tour Bus Management System Design: โครงการออกแบบและพัฒนาระบบจัดการรถนำเที่ยวไฟฟ้า สวนพฤกษศาสตร์สมเด็จพระนางเจ้าสิริกิติ์ จังหวัดเชียงใหม่'</a:t>
             </a:r>
           </a:p>
-          <a:p/>
-          <a:p>
-            <a:r>
-              <a:t>โครงการนี้เป็นการผสานสองหัวใจสำคัญเข้าด้วยกัน นั่นคือ 'การท่องเที่ยวสีเขียว (Green Tourism)' ด้วยยานยนต์ไฟฟ้า EV 100% ควบคู่กับ 'Smart Tourism Platform' เพื่อยกระดับประสบการณ์การท่องเที่ยวเชิงนิเวศและการอนุรักษ์ธรรมชาติในพื้นที่ 6,500 ไร่ สู่มาตรฐานสวนพฤกษศาสตร์ระดับโลกอย่างยั่งยืนครับ</a:t>
+          <a:p>
+            <a:r>
+              <a:t>ภาพที่ท่านเห็นทางขวามือคือรถนำเที่ยวไฟฟ้าจริงทั้ง 3 คันที่จะนำมาให้บริการในพื้นที่ 6,500 ไร่ โครงการนี้คือการผสานการท่องเที่ยวสีเขียว Green EV 100% ควบคู่กับ Smart Tourism Platform ยกระดับสวนพฤกษศาสตร์สู่ระดับสากลครับ</a:t>
             </a:r>
           </a:p>
         </p:txBody>
@@ -599,27 +599,12 @@
           <a:lstStyle/>
           <a:p>
             <a:r>
-              <a:t>สคริปต์บทพูดหน้าที่ 10 : แผนการดำเนินงาน 9 เดือน (1.0 นาที):</a:t>
-            </a:r>
-          </a:p>
-          <a:p>
-            <a:r>
-              <a:t>แผนการดำเนินงานแบ่งเป็น 3 ระยะอย่างชัดเจน:</a:t>
-            </a:r>
-          </a:p>
-          <a:p>
-            <a:r>
-              <a:t>- Phase 1 (เดือนที่ 1-3) Core Foundation: ออกแบบฐานข้อมูล, พัฒนา API, ตู้ Kiosk, เชื่อมต่อ Payment Gateway และ Driver App บนแท็บเล็ต</a:t>
-            </a:r>
-          </a:p>
-          <a:p>
-            <a:r>
-              <a:t>- Phase 2 (เดือนที่ 4-6) Realtime &amp; Mobile: ติดตั้ง WebSocket Server, พัฒนา Mobile App (iOS/Android) และทดสอบระบบ Live Tracking บนพื้นที่จริง 6 สถานี</a:t>
-            </a:r>
-          </a:p>
-          <a:p>
-            <a:r>
-              <a:t>- Phase 3 (เดือนที่ 7-9) Advanced Features: เปิดระบบ Push Notification, Analytics Dashboard สำหรับผู้บริหาร, เปิดระบบจองออนไลน์ล่วงหน้า จัดอบรมบุคลากร และส่งมอบงานสมบูรณ์ครับ</a:t>
+              <a:t>สคริปต์พูดหน้าที่ 10 : เทคโนโลยีที่เลือกใช้ (1.5 นาที):</a:t>
+            </a:r>
+          </a:p>
+          <a:p>
+            <a:r>
+              <a:t>Tech Stack ระดับ Enterprise: Frontend ใช้ Next.js และ React Native Backend ใช้ Node.js + Fastify และ Socket.io สตรีม GPS Database ใช้ PostgreSQL, Redis และ TimescaleDB และวางระบบบน Docker / Kubernetes บน Cloud การันตี Uptime 99.9% พร้อมรับนักท่องเที่ยวช่วงเทศกาลครับ</a:t>
             </a:r>
           </a:p>
         </p:txBody>
@@ -689,32 +674,12 @@
           <a:lstStyle/>
           <a:p>
             <a:r>
-              <a:t>สคริปต์บทพูดหน้าที่ 11 : ประโยชน์ที่คาดว่าจะได้รับ (1.5 นาที):</a:t>
-            </a:r>
-          </a:p>
-          <a:p>
-            <a:r>
-              <a:t>ผลประโยชน์และความคุ้มค่าเกิดขึ้นใน 4 มิติ:</a:t>
-            </a:r>
-          </a:p>
-          <a:p>
-            <a:r>
-              <a:t>1. นักท่องเที่ยว: ได้รับความสะดวกสบาย ซื้อตั๋วง่าย ทราบเวลารถชัดเจน สัมผัสธรรมชาติที่เงียบสงบ</a:t>
-            </a:r>
-          </a:p>
-          <a:p>
-            <a:r>
-              <a:t>2. เจ้าหน้าที่ &amp; คนขับ: สแกนตรวจตั๋วรวดเร็ว ทราบจำนวนคนรอสถานีถัดไป ลดภาระงานและความขัดแย้งหน้างาน</a:t>
-            </a:r>
-          </a:p>
-          <a:p>
-            <a:r>
-              <a:t>3. ผู้บริหาร: มี Data-Driven Dashboard เห็นข้อมูลสถิติเชิงลึกและรายได้อย่างโปร่งใส 100% นำไปวางแผนพัฒนาสวนฯ ได้อย่างแม่นยำ</a:t>
-            </a:r>
-          </a:p>
-          <a:p>
-            <a:r>
-              <a:t>4. สิ่งแวดล้อม: ลดการปล่อยคาร์บอนด้วยรถ EV 100% ไร้เสียง ไร้ควัน ยกระดับสวนพฤกษศาสตร์ไทยสู่มาตรฐานสากลครับ</a:t>
+              <a:t>สคริปต์พูดหน้าที่ 11 : แผนการดำเนินงาน 9 เดือน (1.0 นาที):</a:t>
+            </a:r>
+          </a:p>
+          <a:p>
+            <a:r>
+              <a:t>แผนงาน 9 เดือนแบ่ง 3 ระยะ: Phase 1 (ด.1-3) วางรากฐาน ฐานข้อมูล ตู้ Kiosk และ Driver App Phase 2 (ด.4-6) พัฒนาระบบเรียลไทม์ Mobile App และทดสอบบนพื้นที่จริง 6 สถานี และ Phase 3 (ด.7-9) Notification, Analytics Dashboard อบรมบุคลากร และส่งมอบงานสมบูรณ์ครับ</a:t>
             </a:r>
           </a:p>
         </p:txBody>
@@ -784,23 +749,87 @@
           <a:lstStyle/>
           <a:p>
             <a:r>
-              <a:t>สคริปต์บทพูดหน้าที่ 12 : บทสรุปและการถาม-ตอบ (1.0 นาที):</a:t>
-            </a:r>
-          </a:p>
-          <a:p>
-            <a:r>
-              <a:t>โดยสรุปแล้ว โครงการออกแบบและพัฒนาระบบจัดการรถนำเที่ยวไฟฟ้า สวนพฤกษศาสตร์สมเด็จพระนางเจ้าสิริกิติ์ คือการผสานรวมพลังงานสะอาดเข้ากับนวัตกรรมดิจิทัล เพื่อสร้างอนาคตสีเขียวที่ยั่งยืนอย่างแท้จริง</a:t>
-            </a:r>
-          </a:p>
-          <a:p/>
-          <a:p>
-            <a:r>
-              <a:t>ทางทีมงานมีความพร้อมที่จะเริ่มดำเนินงานตามแผนงาน Phase 1 ทันทีครับ</a:t>
-            </a:r>
-          </a:p>
-          <a:p>
-            <a:r>
-              <a:t>ผมขอขอบพระคุณท่านประธานและคณะกรรมการทุกท่านเป็นอย่างสูง และยินดีรับฟังข้อเสนอแนะรวมถึงตอบข้อซักถามครับ ขอบคุณครับ</a:t>
+              <a:t>สคริปต์พูดหน้าที่ 12 : ประโยชน์และคุณค่าที่ได้รับ (1.5 นาที):</a:t>
+            </a:r>
+          </a:p>
+          <a:p>
+            <a:r>
+              <a:t>ความคุ้มค่าเกิดขึ้นใน 4 มิติ: นักท่องเที่ยวสะดวกสบาย เจ้าหน้าที่ทำงานง่ายขึ้น ผู้บริหารมี Real-time Dashboard ข้อมูลสถิติเชิงลึก และด้านสิ่งแวดล้อม (ดังภาพจุดชาร์จ EV Charger จริง) การเปลี่ยนมาใช้รถ EV 100% ช่วยลดมลพิษ ปกป้องระบบนิเวศในพื้นที่ 6,500 ไร่อย่างยั่งยืนครับ</a:t>
+            </a:r>
+          </a:p>
+        </p:txBody>
+      </p:sp>
+      <p:sp>
+        <p:nvSpPr>
+          <p:cNvPr id="4" name="Slide Number Placeholder 3"/>
+          <p:cNvSpPr>
+            <a:spLocks noGrp="1"/>
+          </p:cNvSpPr>
+          <p:nvPr>
+            <p:ph type="sldNum" idx="5" sz="quarter"/>
+          </p:nvPr>
+        </p:nvSpPr>
+        <p:spPr/>
+      </p:sp>
+    </p:spTree>
+  </p:cSld>
+  <p:clrMapOvr>
+    <a:masterClrMapping/>
+  </p:clrMapOvr>
+</p:notes>
+</file>
+
+<file path=ppt/notesSlides/notesSlide13.xml><?xml version="1.0" encoding="utf-8"?>
+<p:notes xmlns:a="http://schemas.openxmlformats.org/drawingml/2006/main" xmlns:p="http://schemas.openxmlformats.org/presentationml/2006/main" xmlns:r="http://schemas.openxmlformats.org/officeDocument/2006/relationships">
+  <p:cSld>
+    <p:spTree>
+      <p:nvGrpSpPr>
+        <p:cNvPr id="1" name=""/>
+        <p:cNvGrpSpPr/>
+        <p:nvPr/>
+      </p:nvGrpSpPr>
+      <p:grpSpPr>
+        <a:xfrm>
+          <a:off x="0" y="0"/>
+          <a:ext cx="0" cy="0"/>
+          <a:chOff x="0" y="0"/>
+          <a:chExt cx="0" cy="0"/>
+        </a:xfrm>
+      </p:grpSpPr>
+      <p:sp>
+        <p:nvSpPr>
+          <p:cNvPr id="2" name="Slide Image Placeholder 1"/>
+          <p:cNvSpPr>
+            <a:spLocks noGrp="1"/>
+          </p:cNvSpPr>
+          <p:nvPr>
+            <p:ph type="sldImg" idx="2"/>
+          </p:nvPr>
+        </p:nvSpPr>
+        <p:spPr/>
+      </p:sp>
+      <p:sp>
+        <p:nvSpPr>
+          <p:cNvPr id="3" name="Notes Placeholder 2"/>
+          <p:cNvSpPr>
+            <a:spLocks noGrp="1"/>
+          </p:cNvSpPr>
+          <p:nvPr>
+            <p:ph type="body" idx="3" sz="quarter"/>
+          </p:nvPr>
+        </p:nvSpPr>
+        <p:spPr/>
+        <p:txBody>
+          <a:bodyPr/>
+          <a:lstStyle/>
+          <a:p>
+            <a:r>
+              <a:t>สคริปต์พูดหน้าที่ 13 : บทสรุปและการถาม-ตอบ (1.0 นาที):</a:t>
+            </a:r>
+          </a:p>
+          <a:p>
+            <a:r>
+              <a:t>โครงการพัฒนาระบบจัดการรถนำเที่ยวไฟฟ้า สวนพฤกษศาสตร์สมเด็จพระนางเจ้าสิริกิติ์ คือการผสานเทคโนโลยีเข้ากับธรรมชาติอย่างลงตัว ทีมงานพร้อมเดินหน้าตามแผนงาน Phase 1 ทันทีครับ ขอขอบพระคุณคณะกรรมการทุกท่าน และยินดีรับฟังข้อเสนอแนะรวมถึงตอบข้อซักถามครับ ขอบคุณครับ</a:t>
             </a:r>
           </a:p>
         </p:txBody>
@@ -870,33 +899,12 @@
           <a:lstStyle/>
           <a:p>
             <a:r>
-              <a:t>สคริปต์บทพูดหน้าที่ 2 : บริบทและปัญหาเดิม (1.5 นาที):</a:t>
-            </a:r>
-          </a:p>
-          <a:p>
-            <a:r>
-              <a:t>สวนพฤกษศาสตร์สมเด็จพระนางเจ้าสิริกิติ์ อำเภอแม่ริม มีพื้นที่กว้างใหญ่ถึง 6,500 ไร่ มีแลนด์มาร์กสำคัญระดับประเทศ เช่น Canopy Walkway ทางเดินเรือนยอดไม้, กลุ่มเรือนกระจกเฉลิมพระเกียรติ และพิพิธภัณฑ์ธรรมชาติวิทยา</a:t>
-            </a:r>
-          </a:p>
-          <a:p/>
-          <a:p>
-            <a:r>
-              <a:t>แต่ในปัจจุบันเราเผชิญปัญหาหลัก 3 ประการ:</a:t>
-            </a:r>
-          </a:p>
-          <a:p>
-            <a:r>
-              <a:t>1. มลพิษและเสียง: เดิมใช้รถนำเที่ยวเครื่องยนต์สันดาปเพียง 2 คัน มีเสียงดังและปล่อยควันไอเสียรบกวนบรรยากาศธรรมชาติ</a:t>
-            </a:r>
-          </a:p>
-          <a:p>
-            <a:r>
-              <a:t>2. ขาดระบบติดตาม: นักท่องเที่ยวไม่ทราบเวลารถที่จะมาถึงสถานี (No ETA) ทำให้ต้องรอคอยอย่างไร้จุดหมาย เกิดความแออัดสะสม</a:t>
-            </a:r>
-          </a:p>
-          <a:p>
-            <a:r>
-              <a:t>3. ขาดฐานข้อมูลเชิงระบบ: ผู้บริหารไม่มีข้อมูลสถิติดิจิทัลเชิงพื้นที่ ทำให้ไม่สามารถวิเคราะห์และวางแผนการเดินรถได้อย่างตรงจุดครับ</a:t>
+              <a:t>สคริปต์พูดหน้าที่ 2 : บริบทและปัญหาเดิม (1.5 นาที):</a:t>
+            </a:r>
+          </a:p>
+          <a:p>
+            <a:r>
+              <a:t>สวนพฤกษศาสตร์สมเด็จพระนางเจ้าสิริกิติ์ มีพื้นที่กว้างถึง 6,500 ไร่ แต่เดิมเรามีข้อจำกัด 3 ข้อ: 1. รถสันดาปเดิม 2 คัน มีเสียงดังและปล่อยควันไอเสีย 2. นักท่องเที่ยวไม่ทราบเวลาที่รถจะมาถึงสถานี (No ETA) ทำให้รอคอยอย่างไร้จุดหมาย และ 3. ขาดข้อมูลสถิติดิจิทัลเชิงพื้นที่ ทำให้ผู้บริหารวางแผนได้ยาก นี่จึงเป็นที่มาของโครงการนี้ครับ</a:t>
             </a:r>
           </a:p>
         </p:txBody>
@@ -966,28 +974,12 @@
           <a:lstStyle/>
           <a:p>
             <a:r>
-              <a:t>สคริปต์บทพูดหน้าที่ 3 : วิสัยทัศน์และวัตถุประสงค์ (1.5 นาที):</a:t>
-            </a:r>
-          </a:p>
-          <a:p>
-            <a:r>
-              <a:t>วิสัยทัศน์ของโครงการคือ 'เปลี่ยนผ่านสู่ รถนำเที่ยวไฟฟ้า (EV) เพื่อพลังงานสะอาด พร้อมยกระดับสู่ Smart Tourism Ecosystem อย่างครบวงจร'</a:t>
-            </a:r>
-          </a:p>
-          <a:p/>
-          <a:p>
-            <a:r>
-              <a:t>โดยกำหนด 2 วัตถุประสงค์หลัก:</a:t>
-            </a:r>
-          </a:p>
-          <a:p>
-            <a:r>
-              <a:t>1. ออกแบบระบบ (System Design): วิเคราะห์และออกแบบระบบจัดการข้อมูลสารสนเทศรถนำเที่ยวไฟฟ้า เพื่อการบริหารจัดการเชิงพื้นที่ที่แม่นยำและมีประสิทธิภาพสูงสุด</a:t>
-            </a:r>
-          </a:p>
-          <a:p>
-            <a:r>
-              <a:t>2. พัฒนาแพลตฟอร์ม (App Development): พัฒนาแอปพลิเคชันเพื่อเพิ่มความสะดวกสบายแบบไร้รอยต่อ (Seamless Experience) ให้แก่นักท่องเที่ยว เจ้าหน้าที่ และผู้บริหารครับ</a:t>
+              <a:t>สคริปต์พูดหน้าที่ 3 : วิสัยทัศน์และวัตถุประสงค์ (1.5 นาที):</a:t>
+            </a:r>
+          </a:p>
+          <a:p>
+            <a:r>
+              <a:t>วิสัยทัศน์คือเปลี่ยนผ่านสู่รถนำเที่ยวไฟฟ้า EV 100% พร้อมสร้าง Smart Tourism Ecosystem อย่างครบวงจร โดยมี 2 วัตถุประสงค์หลัก คือ 1. ออกแบบระบบสารสนเทศ และ 2. พัฒนาแอปพลิเคชันจัดการรถนำเที่ยวครบวงจร ภาพทางขวามือคือตัวรถ EV จริงที่เปิดโล่งสัมผัสธรรมชาติ ไร้ควัน ไร้เสียง พร้อมติดตั้งแท็บเล็ตดิจิทัลครับ</a:t>
             </a:r>
           </a:p>
         </p:txBody>
@@ -1057,32 +1049,12 @@
           <a:lstStyle/>
           <a:p>
             <a:r>
-              <a:t>สคริปต์บทพูดหน้าที่ 4 : ภาพรวมสถาปัตยกรรมระบบ (1.5 นาที):</a:t>
-            </a:r>
-          </a:p>
-          <a:p>
-            <a:r>
-              <a:t>เราได้วางสถาปัตยกรรมระบบเป็น 4 ชั้น (4-Tier Architecture) ตามมาตรฐานสากล:</a:t>
-            </a:r>
-          </a:p>
-          <a:p>
-            <a:r>
-              <a:t>- ชั้นที่ 1 Frontend / ช่องทางลูกค้า: รองรับ Web App (จองออนไลน์), Mobile App (iOS/Android), ตู้ Kiosk ประจำสถานี และ Driver App บนแท็บเล็ตคนขับ</a:t>
-            </a:r>
-          </a:p>
-          <a:p>
-            <a:r>
-              <a:t>- ชั้นที่ 2 API Gateway &amp; Backend Services: แยกบริการอย่างเป็นสัดส่วน ทั้ง Ticket Service, Bus Tracking, Station Service สำหรับ 6 สถานี และ Payment Service</a:t>
-            </a:r>
-          </a:p>
-          <a:p>
-            <a:r>
-              <a:t>- ชั้นที่ 3 Realtime &amp; IoT Layer: เชื่อมโยงอุปกรณ์ GPS บนรถ EV ทั้ง 3 คัน ส่งพิกัดผ่าน WebSocket ทุก 5 วินาที พร้อมระบบ QR/RFID Scanner</a:t>
-            </a:r>
-          </a:p>
-          <a:p>
-            <a:r>
-              <a:t>- ชั้นที่ 4 Database &amp; Storage: ใช้ PostgreSQL เป็นฐานข้อมูลหลัก และใช้ TimescaleDB สำหรับจัดเก็บพิกัด Time-series GPS นับล้านเรคคอร์ดได้อย่างรวดเร็วครับ</a:t>
+              <a:t>สคริปต์พูดหน้าที่ 4 : สถาปัตยกรรมระบบ 4 ชั้น (1.5 นาที):</a:t>
+            </a:r>
+          </a:p>
+          <a:p>
+            <a:r>
+              <a:t>เราออกแบบระบบเป็น 4 ชั้น: Layer 1 Frontend รองรับ Web, Mobile, Kiosk และแท็บเล็ตคนขับ Layer 2 Backend แยก Microservices ชัดเจน Layer 3 Realtime &amp; IoT สตรีมพิกัด GPS จากรถ 3 คัน ทุก 5 วินาที และ Layer 4 Data แยก PostgreSQL และ TimescaleDB สำหรับ Big Data พิกัด GPS ครับ</a:t>
             </a:r>
           </a:p>
         </p:txBody>
@@ -1152,32 +1124,12 @@
           <a:lstStyle/>
           <a:p>
             <a:r>
-              <a:t>สคริปต์บทพูดหน้าที่ 5 : ประสบการณ์การซื้อตั๋วอัจฉริยะ (1.5 นาที):</a:t>
-            </a:r>
-          </a:p>
-          <a:p>
-            <a:r>
-              <a:t>ระบบจำหน่ายตั๋ว e-Ticket แบ่งเป็น 4 ขั้นตอนที่สะดวกและปลอดภัย:</a:t>
-            </a:r>
-          </a:p>
-          <a:p>
-            <a:r>
-              <a:t>1. เลือกและซื้อ (Select): นักท่องเที่ยวเลือกประเภทตั๋วผ่าน Web, Mobile App หรือกดซื้อที่ตู้ Kiosk หน้าสถานี</a:t>
-            </a:r>
-          </a:p>
-          <a:p>
-            <a:r>
-              <a:t>2. ชำระเงิน (Pay): รองรับ QR PromptPay ตามมาตรฐาน EMVCo ทุกธนาคาร, บัตรเครดิต หรือเงินสดที่ Kiosk</a:t>
-            </a:r>
-          </a:p>
-          <a:p>
-            <a:r>
-              <a:t>3. ออก e-Ticket (Receive): ระบบสร้าง One-Time QR Code ส่งเข้า App, SMS หรือสลิปพิมพ์ พร้อมบันทึกสถานะ 'ยังไม่ใช้'</a:t>
-            </a:r>
-          </a:p>
-          <a:p>
-            <a:r>
-              <a:t>4. สแกนขึ้นรถ (Ride): คนขับใช้แท็บเล็ตประจำรถสแกน QR Code ตรวจสอบสิทธิ์ใน 1 วินาที ตัดสิทธิ์เป็น 'ใช้แล้ว' ทันที ป้องกันการนำกลับมาใช้ซ้ำ 100% ครับ</a:t>
+              <a:t>สคริปต์พูดหน้าที่ 5 : e-Ticket Flow 5 ขั้นตอน (1.5 นาที):</a:t>
+            </a:r>
+          </a:p>
+          <a:p>
+            <a:r>
+              <a:t>กระบวนการซื้อตั๋ว 5 ขั้นตอน: 1. เลือกซื้อตั๋วผ่านแอป/เว็บ/Kiosk 2. ชำระเงินผ่าน PromptPay QR EMVCo 3. ระบบสร้าง One-Time QR Code 4. ผู้โดยสารเปิดตั๋วบนมือถือ และ 5. สแกน Check-in บนรถ คนขับใช้แท็บเล็ตตรวจ 1 วินาที ตัดสิทธิ์ทันที ป้องกันการนำกลับมาใช้ซ้ำ 100% ครับ</a:t>
             </a:r>
           </a:p>
         </p:txBody>
@@ -1247,27 +1199,12 @@
           <a:lstStyle/>
           <a:p>
             <a:r>
-              <a:t>สคริปต์บทพูดหน้าที่ 6 : ระบบติดตามรถและสถานีวนลูป (1.5 นาที):</a:t>
-            </a:r>
-          </a:p>
-          <a:p>
-            <a:r>
-              <a:t>การเดินรถจัดเป็น Loop วนรอบ 6 สถานีหลัก ครอบคลุมไฮไลต์ของสวนฯ ทั้งหมด:</a:t>
-            </a:r>
-          </a:p>
-          <a:p>
-            <a:r>
-              <a:t>- IoT GPS: ติดตั้งบนรถนำเที่ยวทั้ง 3 คัน ส่งพิกัดตำแหน่งเข้า Backend ทุกๆ 5 วินาทีผ่าน WebSocket</a:t>
-            </a:r>
-          </a:p>
-          <a:p>
-            <a:r>
-              <a:t>- Location Engine &amp; Geofencing: มีรั้วพิกัดเสมือนรอบสถานี ตรวจจับเมื่อรถเข้าจอดหรือออกจากสถานีอัตโนมัติ</a:t>
-            </a:r>
-          </a:p>
-          <a:p>
-            <a:r>
-              <a:t>- Dynamic ETA Calculator: คำนวณความเร็วและระยะทาง ประเมินเวลารถจะมาถึงแต่ละสถานีแบบเรียลไทม์ เช่น หน้าจอบอกว่าอีก 3 นาทีหรือ 8 นาทีรถจะมาถึง ทำให้นักท่องเที่ยววางแผนเวลาได้ ไม่ต้องยืนรออย่างไร้จุดหมายครับ</a:t>
+              <a:t>สคริปต์พูดหน้าที่ 6 : Payment Gateway Integration Flow (1.5 นาที):</a:t>
+            </a:r>
+          </a:p>
+          <a:p>
+            <a:r>
+              <a:t>สถาปัตยกรรมชำระเงินเชื่อมต่อ Gateway ชั้นนำ (Omise/2C2P) รองรับ PromptPay QR จุดสำคัญคือระบบ Webhook Callback ตรวจสอบ Digital Signature ป้องกัน Fake Order และมีกฎ 10-Minute Auto-Expiry หากไม่ชำระใน 10 นาที ระบบจะตัดคำสั่งซื้อและคืนที่นั่งให้ผู้อื่นทันทีครับ</a:t>
             </a:r>
           </a:p>
         </p:txBody>
@@ -1337,22 +1274,12 @@
           <a:lstStyle/>
           <a:p>
             <a:r>
-              <a:t>สคริปต์บทพูดหน้าที่ 7 : การบริหารจัดการคิวอัจฉริยะ (1.0 นาที):</a:t>
-            </a:r>
-          </a:p>
-          <a:p>
-            <a:r>
-              <a:t>ระบบบริหารคิวมี 2 กลไกสำคัญ:</a:t>
-            </a:r>
-          </a:p>
-          <a:p>
-            <a:r>
-              <a:t>1. Smart Queue Balancing &amp; Seat Capacity: คำนวณจำนวนที่นั่งว่างบนรถเทียบกับคิวรอในแต่ละสถานี หากพบจุดใดมีผู้โดยสารตกค้างสะสม ระบบจะแจ้งเตือนให้จัดรถเสริมไปรับทันที</a:t>
-            </a:r>
-          </a:p>
-          <a:p>
-            <a:r>
-              <a:t>2. Proactive Push Notification: นักท่องเที่ยวสามารถเดินชมธรรมชาติ ถ่ายรูป หรือจิบกาแฟได้อย่างสบายใจ เพราะระบบจะส่ง Push Notification ผ่าน Mobile App หรือ LINE เตือนล่วงหน้าเมื่อรถใกล้ถึงสถานีในระยะ 3 นาทีครับ</a:t>
+              <a:t>สคริปต์พูดหน้าที่ 7 : ระบบติดตามรถและสถานีวนลูป (1.5 นาที):</a:t>
+            </a:r>
+          </a:p>
+          <a:p>
+            <a:r>
+              <a:t>เราจัดเดินรถวนลูป 6 สถานีหลัก รถ EV ทั้ง 3 คันมีแท็บเล็ตติดตั้งในห้องโดยสาร (ดังภาพจริงขวามือ) ส่งพิกัด GPS ทุก 5 วินาที มีระบบ Geofencing รับรู้การเข้าออกสถานี และ Dynamic ETA คำนวณเวลาถึงสถานีแบบสดๆ นักท่องเที่ยวจึงวางแผนเวลาได้ ไม่ต้องยืนรออย่างไร้จุดหมายครับ</a:t>
             </a:r>
           </a:p>
         </p:txBody>
@@ -1422,22 +1349,12 @@
           <a:lstStyle/>
           <a:p>
             <a:r>
-              <a:t>สคริปต์บทพูดหน้าที่ 8 : ระบบแนะนำแหล่งท่องเที่ยวตามพิกัด (1.0 นาที):</a:t>
-            </a:r>
-          </a:p>
-          <a:p>
-            <a:r>
-              <a:t>เพื่อส่งเสริมการเป็นแหล่งเรียนรู้พฤกษศาสตร์ เราได้นำเทคโนโลยี Geofence Virtual Beacon มาประยุกต์ใช้:</a:t>
-            </a:r>
-          </a:p>
-          <a:p>
-            <a:r>
-              <a:t>- เมื่อรถหรือนักท่องเที่ยวเดินทางเข้าสู่รั้วพิกัดของจุดท่องเที่ยวสำคัญ เช่น Canopy Walkway หรือเรือนกระจก ระบบจะส่งข้อมูล แนะนำพันธุ์ไม้เด่น และประวัติความเป็นมาเด้งขึ้นบนมือถืออัตโนมัติ</a:t>
-            </a:r>
-          </a:p>
-          <a:p>
-            <a:r>
-              <a:t>- พร้อมระบบ Audio Guide เปิดเสียงบรรยายให้นักท่องเที่ยวรับฟัง เสมือนมีมัคคุเทศก์ส่วนตัวคอยนำทางตลอดเส้นทางครับ</a:t>
+              <a:t>สคริปต์พูดหน้าที่ 8 : การบริหารคิวอัจฉริยะและการแจ้งเตือน (1.0 นาที):</a:t>
+            </a:r>
+          </a:p>
+          <a:p>
+            <a:r>
+              <a:t>ระบบมี Smart Queue Balancing คำนวณที่นั่งว่างเทียบกับคิวรอ หากสถานีไหนคนแน่นจะแจ้งเตือนให้จัดรถเสริมทันที และมี Proactive Push Notification แจ้งเตือนเตือนล่วงหน้าเมื่อรถใกล้ถึงสถานีในระยะ 3 นาที นักท่องเที่ยวจึงเดินชมพรรณไม้ ถ่ายรูป หรือจิบกาแฟได้อย่างสบายใจครับ</a:t>
             </a:r>
           </a:p>
         </p:txBody>
@@ -1507,32 +1424,12 @@
           <a:lstStyle/>
           <a:p>
             <a:r>
-              <a:t>สคริปต์บทพูดหน้าที่ 9 : เทคโนโลยีที่เลือกใช้ (1.5 นาที):</a:t>
-            </a:r>
-          </a:p>
-          <a:p>
-            <a:r>
-              <a:t>เราเลือกใช้ Technology Stack ระดับ Enterprise:</a:t>
-            </a:r>
-          </a:p>
-          <a:p>
-            <a:r>
-              <a:t>- Frontend: Next.js สำหรับ Web &amp; Admin Dashboard และ React Native สำหรับ Mobile App และ Driver App</a:t>
-            </a:r>
-          </a:p>
-          <a:p>
-            <a:r>
-              <a:t>- Backend: Node.js + Fastify Throughput สูง กินทรัพยากรต่ำ, Socket.io Server สำหรับสตรีมพิกัด GPS, Bull Queue สำหรับงานเบื้องหลัง และ JWT สำหรับความปลอดภัย</a:t>
-            </a:r>
-          </a:p>
-          <a:p>
-            <a:r>
-              <a:t>- Database: PostgreSQL, Redis Cache และ TimescaleDB สำหรับ Big Data พิกัด GPS</a:t>
-            </a:r>
-          </a:p>
-          <a:p>
-            <a:r>
-              <a:t>- Infrastructure: Docker / Kubernetes ติดตั้งบน AWS / GCP Cloud การันตี Uptime 99.9% พร้อม CI/CD GitHub Actions ครับ</a:t>
+              <a:t>สคริปต์พูดหน้าที่ 9 : ระบบแนะนำแหล่งท่องเที่ยวตามพิกัด (1.0 นาที):</a:t>
+            </a:r>
+          </a:p>
+          <a:p>
+            <a:r>
+              <a:t>เราใช้ Geofencing สร้างรั้วพิกัดเสมือนรอบแลนด์มาร์ก เช่น Canopy Walkway หรือกลุ่มเรือนกระจก เมื่อรถหรือนักท่องเที่ยวเข้าสู่พื้นที่ ข้อมูลแนะนำพันธุ์ไม้เด่น ประวัติความเป็นมา และ Audio Guide จะเด้งขึ้นบนมือถืออัตโนมัติ เสมือนมีมัคคุเทศก์ส่วนตัวตลอดเส้นทางครับ</a:t>
             </a:r>
           </a:p>
         </p:txBody>
@@ -4540,7 +4437,7 @@
       <p:grpSpPr/>
       <p:pic>
         <p:nvPicPr>
-          <p:cNvPr id="2" name="Picture 1" descr="slide_01.jpg"/>
+          <p:cNvPr id="2" name="Picture 1" descr="dark_topographic_bg.jpg"/>
           <p:cNvPicPr>
             <a:picLocks noChangeAspect="1"/>
           </p:cNvPicPr>
@@ -4562,6 +4459,247 @@
           </a:prstGeom>
         </p:spPr>
       </p:pic>
+      <p:sp>
+        <p:nvSpPr>
+          <p:cNvPr id="3" name="Rounded Rectangle 2"/>
+          <p:cNvSpPr/>
+          <p:nvPr/>
+        </p:nvSpPr>
+        <p:spPr>
+          <a:xfrm>
+            <a:off x="731520" y="731520"/>
+            <a:ext cx="6217920" cy="5394960"/>
+          </a:xfrm>
+          <a:prstGeom prst="roundRect">
+            <a:avLst/>
+          </a:prstGeom>
+          <a:solidFill>
+            <a:srgbClr val="0E261C"/>
+          </a:solidFill>
+          <a:ln w="19050">
+            <a:solidFill>
+              <a:srgbClr val="52B788"/>
+            </a:solidFill>
+          </a:ln>
+        </p:spPr>
+        <p:style>
+          <a:lnRef idx="1">
+            <a:schemeClr val="accent1"/>
+          </a:lnRef>
+          <a:fillRef idx="3">
+            <a:schemeClr val="accent1"/>
+          </a:fillRef>
+          <a:effectRef idx="2">
+            <a:schemeClr val="accent1"/>
+          </a:effectRef>
+          <a:fontRef idx="minor">
+            <a:schemeClr val="lt1"/>
+          </a:fontRef>
+        </p:style>
+        <p:txBody>
+          <a:bodyPr rtlCol="0" anchor="ctr" wrap="square" lIns="365760" rIns="365760" tIns="365760"/>
+          <a:lstStyle/>
+          <a:p>
+            <a:pPr algn="ctr">
+              <a:spcAft>
+                <a:spcPts val="1600"/>
+              </a:spcAft>
+              <a:defRPr sz="1200" b="1">
+                <a:solidFill>
+                  <a:srgbClr val="6EE7B7"/>
+                </a:solidFill>
+                <a:latin typeface="Prompt"/>
+              </a:defRPr>
+            </a:pPr>
+            <a:r>
+              <a:t>SMART &amp; GREEN BOTANICAL GARDEN | QSBG INNOVATION</a:t>
+            </a:r>
+          </a:p>
+          <a:p>
+            <a:pPr>
+              <a:spcAft>
+                <a:spcPts val="1000"/>
+              </a:spcAft>
+              <a:defRPr sz="3200" b="1">
+                <a:solidFill>
+                  <a:srgbClr val="FFFFFF"/>
+                </a:solidFill>
+                <a:latin typeface="Prompt"/>
+              </a:defRPr>
+            </a:pPr>
+            <a:r>
+              <a:t>Smart Electric Tour Bus</a:t>
+            </a:r>
+            <a:br/>
+            <a:r>
+              <a:t>Management System Design</a:t>
+            </a:r>
+          </a:p>
+          <a:p>
+            <a:pPr>
+              <a:spcAft>
+                <a:spcPts val="1400"/>
+              </a:spcAft>
+              <a:defRPr sz="1600" b="1">
+                <a:solidFill>
+                  <a:srgbClr val="A7F3D0"/>
+                </a:solidFill>
+                <a:latin typeface="Prompt"/>
+              </a:defRPr>
+            </a:pPr>
+            <a:r>
+              <a:t>ยกระดับการท่องเที่ยวสีเขียวสู่อัจฉริยะ เพื่อสวนพฤกษศาสตร์ระดับโลก</a:t>
+            </a:r>
+          </a:p>
+          <a:p>
+            <a:pPr>
+              <a:spcAft>
+                <a:spcPts val="1800"/>
+              </a:spcAft>
+              <a:defRPr sz="1300">
+                <a:solidFill>
+                  <a:srgbClr val="E2E8F0"/>
+                </a:solidFill>
+                <a:latin typeface="Sarabun"/>
+              </a:defRPr>
+            </a:pPr>
+            <a:r>
+              <a:t>การผสานสองหัวใจสำคัญ: ยานยนต์ไฟฟ้า (EV 100%) พลังงานสะอาด ไร้ควัน ไร้เสียง ควบคู่กับ Smart Tourism Platform (e-Ticket, Live GPS Tracking, Smart Queue Balancing และ Real-time Analytics) สวนพฤกษศาสตร์สมเด็จพระนางเจ้าสิริกิติ์ จังหวัดเชียงใหม่</a:t>
+            </a:r>
+          </a:p>
+          <a:p>
+            <a:pPr>
+              <a:defRPr sz="1200" b="1">
+                <a:solidFill>
+                  <a:srgbClr val="F59E0B"/>
+                </a:solidFill>
+                <a:latin typeface="Prompt"/>
+              </a:defRPr>
+            </a:pPr>
+            <a:r>
+              <a:t>แผนพัฒนา 3 ระยะ (9 เดือน)  |  Zero Emission 100%  |  พื้นที่ 6,500 ไร่</a:t>
+            </a:r>
+          </a:p>
+        </p:txBody>
+      </p:sp>
+      <p:sp>
+        <p:nvSpPr>
+          <p:cNvPr id="4" name="Rounded Rectangle 3"/>
+          <p:cNvSpPr/>
+          <p:nvPr/>
+        </p:nvSpPr>
+        <p:spPr>
+          <a:xfrm>
+            <a:off x="7132320" y="731520"/>
+            <a:ext cx="4327855" cy="5394960"/>
+          </a:xfrm>
+          <a:prstGeom prst="roundRect">
+            <a:avLst/>
+          </a:prstGeom>
+          <a:solidFill>
+            <a:srgbClr val="0E261C"/>
+          </a:solidFill>
+          <a:ln w="19050">
+            <a:solidFill>
+              <a:srgbClr val="52B788"/>
+            </a:solidFill>
+          </a:ln>
+        </p:spPr>
+        <p:style>
+          <a:lnRef idx="1">
+            <a:schemeClr val="accent1"/>
+          </a:lnRef>
+          <a:fillRef idx="3">
+            <a:schemeClr val="accent1"/>
+          </a:fillRef>
+          <a:effectRef idx="2">
+            <a:schemeClr val="accent1"/>
+          </a:effectRef>
+          <a:fontRef idx="minor">
+            <a:schemeClr val="lt1"/>
+          </a:fontRef>
+        </p:style>
+        <p:txBody>
+          <a:bodyPr rtlCol="0" anchor="ctr"/>
+          <a:lstStyle/>
+          <a:p>
+            <a:pPr algn="ctr"/>
+          </a:p>
+        </p:txBody>
+      </p:sp>
+      <p:pic>
+        <p:nvPicPr>
+          <p:cNvPr id="5" name="Picture 4" descr="ev_fleet_3_carts.jpg"/>
+          <p:cNvPicPr>
+            <a:picLocks noChangeAspect="1"/>
+          </p:cNvPicPr>
+          <p:nvPr/>
+        </p:nvPicPr>
+        <p:blipFill>
+          <a:blip r:embed="rId3"/>
+          <a:stretch>
+            <a:fillRect/>
+          </a:stretch>
+        </p:blipFill>
+        <p:spPr>
+          <a:xfrm>
+            <a:off x="7315200" y="1005840"/>
+            <a:ext cx="3962095" cy="3840480"/>
+          </a:xfrm>
+          <a:prstGeom prst="rect">
+            <a:avLst/>
+          </a:prstGeom>
+        </p:spPr>
+      </p:pic>
+      <p:sp>
+        <p:nvSpPr>
+          <p:cNvPr id="6" name="TextBox 5"/>
+          <p:cNvSpPr txBox="1"/>
+          <p:nvPr/>
+        </p:nvSpPr>
+        <p:spPr>
+          <a:xfrm>
+            <a:off x="7315200" y="4937760"/>
+            <a:ext cx="3962095" cy="1005840"/>
+          </a:xfrm>
+          <a:prstGeom prst="rect">
+            <a:avLst/>
+          </a:prstGeom>
+          <a:noFill/>
+        </p:spPr>
+        <p:txBody>
+          <a:bodyPr wrap="square" lIns="0" rIns="0" tIns="0" bIns="0">
+            <a:spAutoFit/>
+          </a:bodyPr>
+          <a:lstStyle/>
+          <a:p>
+            <a:pPr>
+              <a:defRPr sz="1300" b="1">
+                <a:solidFill>
+                  <a:srgbClr val="6EE7B7"/>
+                </a:solidFill>
+                <a:latin typeface="Prompt"/>
+              </a:defRPr>
+            </a:pPr>
+            <a:r>
+              <a:t>ยานพาหนะจริงประจำโครงการ:</a:t>
+            </a:r>
+          </a:p>
+          <a:p>
+            <a:pPr>
+              <a:defRPr sz="1200">
+                <a:solidFill>
+                  <a:srgbClr val="E2E8F0"/>
+                </a:solidFill>
+                <a:latin typeface="Sarabun"/>
+              </a:defRPr>
+            </a:pPr>
+            <a:r>
+              <a:t>รถนำเที่ยวไฟฟ้า 3 คัน ให้บริการวนรอบ 6 สถานีหลัก ในพื้นที่สวนพฤกษศาสตร์ฯ 6,500 ไร่</a:t>
+            </a:r>
+          </a:p>
+        </p:txBody>
+      </p:sp>
     </p:spTree>
   </p:cSld>
   <p:clrMapOvr>
@@ -4582,7 +4720,7 @@
       <p:grpSpPr/>
       <p:pic>
         <p:nvPicPr>
-          <p:cNvPr id="2" name="Picture 1" descr="slide_10.jpg"/>
+          <p:cNvPr id="2" name="Picture 1" descr="dark_topographic_bg.jpg"/>
           <p:cNvPicPr>
             <a:picLocks noChangeAspect="1"/>
           </p:cNvPicPr>
@@ -4604,6 +4742,537 @@
           </a:prstGeom>
         </p:spPr>
       </p:pic>
+      <p:sp>
+        <p:nvSpPr>
+          <p:cNvPr id="3" name="Rounded Rectangle 2"/>
+          <p:cNvSpPr/>
+          <p:nvPr/>
+        </p:nvSpPr>
+        <p:spPr>
+          <a:xfrm>
+            <a:off x="731520" y="365760"/>
+            <a:ext cx="3200400" cy="320040"/>
+          </a:xfrm>
+          <a:prstGeom prst="roundRect">
+            <a:avLst/>
+          </a:prstGeom>
+          <a:solidFill>
+            <a:srgbClr val="123024"/>
+          </a:solidFill>
+          <a:ln w="12700">
+            <a:solidFill>
+              <a:srgbClr val="52B788"/>
+            </a:solidFill>
+          </a:ln>
+        </p:spPr>
+        <p:style>
+          <a:lnRef idx="1">
+            <a:schemeClr val="accent1"/>
+          </a:lnRef>
+          <a:fillRef idx="3">
+            <a:schemeClr val="accent1"/>
+          </a:fillRef>
+          <a:effectRef idx="2">
+            <a:schemeClr val="accent1"/>
+          </a:effectRef>
+          <a:fontRef idx="minor">
+            <a:schemeClr val="lt1"/>
+          </a:fontRef>
+        </p:style>
+        <p:txBody>
+          <a:bodyPr rtlCol="0" anchor="ctr" wrap="square" lIns="0" rIns="0" tIns="0" bIns="0"/>
+          <a:lstStyle/>
+          <a:p>
+            <a:pPr algn="ctr">
+              <a:defRPr sz="1100" b="1">
+                <a:solidFill>
+                  <a:srgbClr val="6EE7B7"/>
+                </a:solidFill>
+                <a:latin typeface="Prompt"/>
+              </a:defRPr>
+            </a:pPr>
+            <a:r>
+              <a:t>TECHNOLOGY</a:t>
+            </a:r>
+          </a:p>
+        </p:txBody>
+      </p:sp>
+      <p:sp>
+        <p:nvSpPr>
+          <p:cNvPr id="4" name="TextBox 3"/>
+          <p:cNvSpPr txBox="1"/>
+          <p:nvPr/>
+        </p:nvSpPr>
+        <p:spPr>
+          <a:xfrm>
+            <a:off x="731520" y="685800"/>
+            <a:ext cx="10728655" cy="868680"/>
+          </a:xfrm>
+          <a:prstGeom prst="rect">
+            <a:avLst/>
+          </a:prstGeom>
+          <a:noFill/>
+        </p:spPr>
+        <p:txBody>
+          <a:bodyPr wrap="square" lIns="0" rIns="0" tIns="0" bIns="0">
+            <a:spAutoFit/>
+          </a:bodyPr>
+          <a:lstStyle/>
+          <a:p>
+            <a:pPr>
+              <a:spcAft>
+                <a:spcPts val="300"/>
+              </a:spcAft>
+              <a:defRPr sz="2600" b="1">
+                <a:solidFill>
+                  <a:srgbClr val="FFFFFF"/>
+                </a:solidFill>
+                <a:latin typeface="Prompt"/>
+              </a:defRPr>
+            </a:pPr>
+            <a:r>
+              <a:t>เทคโนโลยีและโครงสร้างพื้นฐาน (Technology Stack)</a:t>
+            </a:r>
+          </a:p>
+          <a:p>
+            <a:pPr>
+              <a:defRPr sz="1400">
+                <a:solidFill>
+                  <a:srgbClr val="A7F3D0"/>
+                </a:solidFill>
+                <a:latin typeface="Sarabun"/>
+              </a:defRPr>
+            </a:pPr>
+            <a:r>
+              <a:t>คัดเลือกเทคโนโลยีระดับ Enterprise เพื่อความรวดเร็ว เสถียร และรองรับการขยายตัว</a:t>
+            </a:r>
+          </a:p>
+        </p:txBody>
+      </p:sp>
+      <p:sp>
+        <p:nvSpPr>
+          <p:cNvPr id="5" name="Rounded Rectangle 4"/>
+          <p:cNvSpPr/>
+          <p:nvPr/>
+        </p:nvSpPr>
+        <p:spPr>
+          <a:xfrm>
+            <a:off x="731520" y="1691640"/>
+            <a:ext cx="5257800" cy="2148840"/>
+          </a:xfrm>
+          <a:prstGeom prst="roundRect">
+            <a:avLst/>
+          </a:prstGeom>
+          <a:solidFill>
+            <a:srgbClr val="0E261C"/>
+          </a:solidFill>
+          <a:ln w="19050">
+            <a:solidFill>
+              <a:srgbClr val="52B788"/>
+            </a:solidFill>
+          </a:ln>
+        </p:spPr>
+        <p:style>
+          <a:lnRef idx="1">
+            <a:schemeClr val="accent1"/>
+          </a:lnRef>
+          <a:fillRef idx="3">
+            <a:schemeClr val="accent1"/>
+          </a:fillRef>
+          <a:effectRef idx="2">
+            <a:schemeClr val="accent1"/>
+          </a:effectRef>
+          <a:fontRef idx="minor">
+            <a:schemeClr val="lt1"/>
+          </a:fontRef>
+        </p:style>
+        <p:txBody>
+          <a:bodyPr rtlCol="0" anchor="ctr" wrap="square" lIns="256032" rIns="256032" tIns="182880"/>
+          <a:lstStyle/>
+          <a:p>
+            <a:pPr algn="ctr">
+              <a:spcAft>
+                <a:spcPts val="800"/>
+              </a:spcAft>
+              <a:defRPr sz="1700" b="1">
+                <a:solidFill>
+                  <a:srgbClr val="6EE7B7"/>
+                </a:solidFill>
+                <a:latin typeface="Prompt"/>
+              </a:defRPr>
+            </a:pPr>
+            <a:r>
+              <a:t>Frontend &amp; Mobile</a:t>
+            </a:r>
+          </a:p>
+          <a:p>
+            <a:pPr>
+              <a:spcAft>
+                <a:spcPts val="400"/>
+              </a:spcAft>
+              <a:defRPr sz="1200">
+                <a:solidFill>
+                  <a:srgbClr val="E2E8F0"/>
+                </a:solidFill>
+                <a:latin typeface="Sarabun"/>
+              </a:defRPr>
+            </a:pPr>
+            <a:r>
+              <a:t>• Next.js: เว็บแอปและ Admin Dashboard โหลดเร็ว รองรับ SEO และจัดการง่าย</a:t>
+            </a:r>
+          </a:p>
+          <a:p>
+            <a:pPr>
+              <a:spcAft>
+                <a:spcPts val="400"/>
+              </a:spcAft>
+              <a:defRPr sz="1200">
+                <a:solidFill>
+                  <a:srgbClr val="E2E8F0"/>
+                </a:solidFill>
+                <a:latin typeface="Sarabun"/>
+              </a:defRPr>
+            </a:pPr>
+            <a:r>
+              <a:t>• React Native: Mobile App (iOS / Android) และ Driver App ประสิทธิภาพสูง</a:t>
+            </a:r>
+          </a:p>
+          <a:p>
+            <a:pPr>
+              <a:spcAft>
+                <a:spcPts val="400"/>
+              </a:spcAft>
+              <a:defRPr sz="1200">
+                <a:solidFill>
+                  <a:srgbClr val="E2E8F0"/>
+                </a:solidFill>
+                <a:latin typeface="Sarabun"/>
+              </a:defRPr>
+            </a:pPr>
+            <a:r>
+              <a:t>• Tailwind CSS: UI โมเดิร์น Responsive รองรับทุกขนาดหน้าจออย่างสวยงาม</a:t>
+            </a:r>
+          </a:p>
+        </p:txBody>
+      </p:sp>
+      <p:sp>
+        <p:nvSpPr>
+          <p:cNvPr id="6" name="Rounded Rectangle 5"/>
+          <p:cNvSpPr/>
+          <p:nvPr/>
+        </p:nvSpPr>
+        <p:spPr>
+          <a:xfrm>
+            <a:off x="6199632" y="1691640"/>
+            <a:ext cx="5257800" cy="2148840"/>
+          </a:xfrm>
+          <a:prstGeom prst="roundRect">
+            <a:avLst/>
+          </a:prstGeom>
+          <a:solidFill>
+            <a:srgbClr val="0E261C"/>
+          </a:solidFill>
+          <a:ln w="19050">
+            <a:solidFill>
+              <a:srgbClr val="52B788"/>
+            </a:solidFill>
+          </a:ln>
+        </p:spPr>
+        <p:style>
+          <a:lnRef idx="1">
+            <a:schemeClr val="accent1"/>
+          </a:lnRef>
+          <a:fillRef idx="3">
+            <a:schemeClr val="accent1"/>
+          </a:fillRef>
+          <a:effectRef idx="2">
+            <a:schemeClr val="accent1"/>
+          </a:effectRef>
+          <a:fontRef idx="minor">
+            <a:schemeClr val="lt1"/>
+          </a:fontRef>
+        </p:style>
+        <p:txBody>
+          <a:bodyPr rtlCol="0" anchor="ctr" wrap="square" lIns="256032" rIns="256032" tIns="182880"/>
+          <a:lstStyle/>
+          <a:p>
+            <a:pPr algn="ctr">
+              <a:spcAft>
+                <a:spcPts val="800"/>
+              </a:spcAft>
+              <a:defRPr sz="1700" b="1">
+                <a:solidFill>
+                  <a:srgbClr val="6EE7B7"/>
+                </a:solidFill>
+                <a:latin typeface="Prompt"/>
+              </a:defRPr>
+            </a:pPr>
+            <a:r>
+              <a:t>Backend &amp; Streaming</a:t>
+            </a:r>
+          </a:p>
+          <a:p>
+            <a:pPr>
+              <a:spcAft>
+                <a:spcPts val="400"/>
+              </a:spcAft>
+              <a:defRPr sz="1200">
+                <a:solidFill>
+                  <a:srgbClr val="E2E8F0"/>
+                </a:solidFill>
+                <a:latin typeface="Sarabun"/>
+              </a:defRPr>
+            </a:pPr>
+            <a:r>
+              <a:t>• Node.js + Fastify: API Server ประสิทธิภาพสูง Throughput ระดับสูง กินทรัพยากรต่ำ</a:t>
+            </a:r>
+          </a:p>
+          <a:p>
+            <a:pPr>
+              <a:spcAft>
+                <a:spcPts val="400"/>
+              </a:spcAft>
+              <a:defRPr sz="1200">
+                <a:solidFill>
+                  <a:srgbClr val="E2E8F0"/>
+                </a:solidFill>
+                <a:latin typeface="Sarabun"/>
+              </a:defRPr>
+            </a:pPr>
+            <a:r>
+              <a:t>• Socket.io Server: Real-time Two-way Streaming สำหรับพิกัด GPS และคิวรถ</a:t>
+            </a:r>
+          </a:p>
+          <a:p>
+            <a:pPr>
+              <a:spcAft>
+                <a:spcPts val="400"/>
+              </a:spcAft>
+              <a:defRPr sz="1200">
+                <a:solidFill>
+                  <a:srgbClr val="E2E8F0"/>
+                </a:solidFill>
+                <a:latin typeface="Sarabun"/>
+              </a:defRPr>
+            </a:pPr>
+            <a:r>
+              <a:t>• Bull Queue &amp; JWT: จัดการคิวงานเบื้องหลังและการยืนยันสิทธิ์ความปลอดภัยสูงสุด</a:t>
+            </a:r>
+          </a:p>
+        </p:txBody>
+      </p:sp>
+      <p:sp>
+        <p:nvSpPr>
+          <p:cNvPr id="7" name="Rounded Rectangle 6"/>
+          <p:cNvSpPr/>
+          <p:nvPr/>
+        </p:nvSpPr>
+        <p:spPr>
+          <a:xfrm>
+            <a:off x="731520" y="4023360"/>
+            <a:ext cx="5257800" cy="2148840"/>
+          </a:xfrm>
+          <a:prstGeom prst="roundRect">
+            <a:avLst/>
+          </a:prstGeom>
+          <a:solidFill>
+            <a:srgbClr val="0E261C"/>
+          </a:solidFill>
+          <a:ln w="19050">
+            <a:solidFill>
+              <a:srgbClr val="52B788"/>
+            </a:solidFill>
+          </a:ln>
+        </p:spPr>
+        <p:style>
+          <a:lnRef idx="1">
+            <a:schemeClr val="accent1"/>
+          </a:lnRef>
+          <a:fillRef idx="3">
+            <a:schemeClr val="accent1"/>
+          </a:fillRef>
+          <a:effectRef idx="2">
+            <a:schemeClr val="accent1"/>
+          </a:effectRef>
+          <a:fontRef idx="minor">
+            <a:schemeClr val="lt1"/>
+          </a:fontRef>
+        </p:style>
+        <p:txBody>
+          <a:bodyPr rtlCol="0" anchor="ctr" wrap="square" lIns="256032" rIns="256032" tIns="182880"/>
+          <a:lstStyle/>
+          <a:p>
+            <a:pPr algn="ctr">
+              <a:spcAft>
+                <a:spcPts val="800"/>
+              </a:spcAft>
+              <a:defRPr sz="1700" b="1">
+                <a:solidFill>
+                  <a:srgbClr val="6EE7B7"/>
+                </a:solidFill>
+                <a:latin typeface="Prompt"/>
+              </a:defRPr>
+            </a:pPr>
+            <a:r>
+              <a:t>Database &amp; Time-series</a:t>
+            </a:r>
+          </a:p>
+          <a:p>
+            <a:pPr>
+              <a:spcAft>
+                <a:spcPts val="400"/>
+              </a:spcAft>
+              <a:defRPr sz="1200">
+                <a:solidFill>
+                  <a:srgbClr val="E2E8F0"/>
+                </a:solidFill>
+                <a:latin typeface="Sarabun"/>
+              </a:defRPr>
+            </a:pPr>
+            <a:r>
+              <a:t>• PostgreSQL: ฐานข้อมูลหลัก จัดเก็บข้อมูลผู้ใช้, สิทธิ์ตั๋ว และธุรกรรมทางการเงิน</a:t>
+            </a:r>
+          </a:p>
+          <a:p>
+            <a:pPr>
+              <a:spcAft>
+                <a:spcPts val="400"/>
+              </a:spcAft>
+              <a:defRPr sz="1200">
+                <a:solidFill>
+                  <a:srgbClr val="E2E8F0"/>
+                </a:solidFill>
+                <a:latin typeface="Sarabun"/>
+              </a:defRPr>
+            </a:pPr>
+            <a:r>
+              <a:t>• TimescaleDB: Time-series Extension จัดเก็บ Big Data พิกัด GPS ได้นับล้านเรคคอร์ด</a:t>
+            </a:r>
+          </a:p>
+          <a:p>
+            <a:pPr>
+              <a:spcAft>
+                <a:spcPts val="400"/>
+              </a:spcAft>
+              <a:defRPr sz="1200">
+                <a:solidFill>
+                  <a:srgbClr val="E2E8F0"/>
+                </a:solidFill>
+                <a:latin typeface="Sarabun"/>
+              </a:defRPr>
+            </a:pPr>
+            <a:r>
+              <a:t>• Redis: In-memory Cache และจัดการ Session ความเร็วระดับมิลลิวินาที</a:t>
+            </a:r>
+          </a:p>
+        </p:txBody>
+      </p:sp>
+      <p:sp>
+        <p:nvSpPr>
+          <p:cNvPr id="8" name="Rounded Rectangle 7"/>
+          <p:cNvSpPr/>
+          <p:nvPr/>
+        </p:nvSpPr>
+        <p:spPr>
+          <a:xfrm>
+            <a:off x="6199632" y="4023360"/>
+            <a:ext cx="5257800" cy="2148840"/>
+          </a:xfrm>
+          <a:prstGeom prst="roundRect">
+            <a:avLst/>
+          </a:prstGeom>
+          <a:solidFill>
+            <a:srgbClr val="0E261C"/>
+          </a:solidFill>
+          <a:ln w="19050">
+            <a:solidFill>
+              <a:srgbClr val="52B788"/>
+            </a:solidFill>
+          </a:ln>
+        </p:spPr>
+        <p:style>
+          <a:lnRef idx="1">
+            <a:schemeClr val="accent1"/>
+          </a:lnRef>
+          <a:fillRef idx="3">
+            <a:schemeClr val="accent1"/>
+          </a:fillRef>
+          <a:effectRef idx="2">
+            <a:schemeClr val="accent1"/>
+          </a:effectRef>
+          <a:fontRef idx="minor">
+            <a:schemeClr val="lt1"/>
+          </a:fontRef>
+        </p:style>
+        <p:txBody>
+          <a:bodyPr rtlCol="0" anchor="ctr" wrap="square" lIns="256032" rIns="256032" tIns="182880"/>
+          <a:lstStyle/>
+          <a:p>
+            <a:pPr algn="ctr">
+              <a:spcAft>
+                <a:spcPts val="800"/>
+              </a:spcAft>
+              <a:defRPr sz="1700" b="1">
+                <a:solidFill>
+                  <a:srgbClr val="6EE7B7"/>
+                </a:solidFill>
+                <a:latin typeface="Prompt"/>
+              </a:defRPr>
+            </a:pPr>
+            <a:r>
+              <a:t>Infrastructure &amp; DevOps</a:t>
+            </a:r>
+          </a:p>
+          <a:p>
+            <a:pPr>
+              <a:spcAft>
+                <a:spcPts val="400"/>
+              </a:spcAft>
+              <a:defRPr sz="1200">
+                <a:solidFill>
+                  <a:srgbClr val="E2E8F0"/>
+                </a:solidFill>
+                <a:latin typeface="Sarabun"/>
+              </a:defRPr>
+            </a:pPr>
+            <a:r>
+              <a:t>• Docker &amp; Kubernetes: Containerize ปรับสเกลรองรับนักท่องเที่ยวช่วงเทศกาล</a:t>
+            </a:r>
+          </a:p>
+          <a:p>
+            <a:pPr>
+              <a:spcAft>
+                <a:spcPts val="400"/>
+              </a:spcAft>
+              <a:defRPr sz="1200">
+                <a:solidFill>
+                  <a:srgbClr val="E2E8F0"/>
+                </a:solidFill>
+                <a:latin typeface="Sarabun"/>
+              </a:defRPr>
+            </a:pPr>
+            <a:r>
+              <a:t>• AWS / GCP Cloud: การันตี Uptime สูง 99.9% ปลอดภัยตามมาตรฐานสากล</a:t>
+            </a:r>
+          </a:p>
+          <a:p>
+            <a:pPr>
+              <a:spcAft>
+                <a:spcPts val="400"/>
+              </a:spcAft>
+              <a:defRPr sz="1200">
+                <a:solidFill>
+                  <a:srgbClr val="E2E8F0"/>
+                </a:solidFill>
+                <a:latin typeface="Sarabun"/>
+              </a:defRPr>
+            </a:pPr>
+            <a:r>
+              <a:t>• GitHub Actions: CI/CD Pipeline ทดสอบและอัปเดตระบบอัตโนมัติอย่างราบรื่น</a:t>
+            </a:r>
+          </a:p>
+        </p:txBody>
+      </p:sp>
     </p:spTree>
   </p:cSld>
   <p:clrMapOvr>
@@ -4624,7 +5293,7 @@
       <p:grpSpPr/>
       <p:pic>
         <p:nvPicPr>
-          <p:cNvPr id="2" name="Picture 1" descr="slide_11.jpg"/>
+          <p:cNvPr id="2" name="Picture 1" descr="dark_topographic_bg.jpg"/>
           <p:cNvPicPr>
             <a:picLocks noChangeAspect="1"/>
           </p:cNvPicPr>
@@ -4646,6 +5315,653 @@
           </a:prstGeom>
         </p:spPr>
       </p:pic>
+      <p:sp>
+        <p:nvSpPr>
+          <p:cNvPr id="3" name="Rounded Rectangle 2"/>
+          <p:cNvSpPr/>
+          <p:nvPr/>
+        </p:nvSpPr>
+        <p:spPr>
+          <a:xfrm>
+            <a:off x="731520" y="365760"/>
+            <a:ext cx="3200400" cy="320040"/>
+          </a:xfrm>
+          <a:prstGeom prst="roundRect">
+            <a:avLst/>
+          </a:prstGeom>
+          <a:solidFill>
+            <a:srgbClr val="123024"/>
+          </a:solidFill>
+          <a:ln w="12700">
+            <a:solidFill>
+              <a:srgbClr val="52B788"/>
+            </a:solidFill>
+          </a:ln>
+        </p:spPr>
+        <p:style>
+          <a:lnRef idx="1">
+            <a:schemeClr val="accent1"/>
+          </a:lnRef>
+          <a:fillRef idx="3">
+            <a:schemeClr val="accent1"/>
+          </a:fillRef>
+          <a:effectRef idx="2">
+            <a:schemeClr val="accent1"/>
+          </a:effectRef>
+          <a:fontRef idx="minor">
+            <a:schemeClr val="lt1"/>
+          </a:fontRef>
+        </p:style>
+        <p:txBody>
+          <a:bodyPr rtlCol="0" anchor="ctr" wrap="square" lIns="0" rIns="0" tIns="0" bIns="0"/>
+          <a:lstStyle/>
+          <a:p>
+            <a:pPr algn="ctr">
+              <a:defRPr sz="1100" b="1">
+                <a:solidFill>
+                  <a:srgbClr val="6EE7B7"/>
+                </a:solidFill>
+                <a:latin typeface="Prompt"/>
+              </a:defRPr>
+            </a:pPr>
+            <a:r>
+              <a:t>ROADMAP</a:t>
+            </a:r>
+          </a:p>
+        </p:txBody>
+      </p:sp>
+      <p:sp>
+        <p:nvSpPr>
+          <p:cNvPr id="4" name="TextBox 3"/>
+          <p:cNvSpPr txBox="1"/>
+          <p:nvPr/>
+        </p:nvSpPr>
+        <p:spPr>
+          <a:xfrm>
+            <a:off x="731520" y="685800"/>
+            <a:ext cx="10728655" cy="868680"/>
+          </a:xfrm>
+          <a:prstGeom prst="rect">
+            <a:avLst/>
+          </a:prstGeom>
+          <a:noFill/>
+        </p:spPr>
+        <p:txBody>
+          <a:bodyPr wrap="square" lIns="0" rIns="0" tIns="0" bIns="0">
+            <a:spAutoFit/>
+          </a:bodyPr>
+          <a:lstStyle/>
+          <a:p>
+            <a:pPr>
+              <a:spcAft>
+                <a:spcPts val="300"/>
+              </a:spcAft>
+              <a:defRPr sz="2600" b="1">
+                <a:solidFill>
+                  <a:srgbClr val="FFFFFF"/>
+                </a:solidFill>
+                <a:latin typeface="Prompt"/>
+              </a:defRPr>
+            </a:pPr>
+            <a:r>
+              <a:t>แผนการดำเนินงานโครงการ (Roadmap 9 เดือน)</a:t>
+            </a:r>
+          </a:p>
+          <a:p>
+            <a:pPr>
+              <a:defRPr sz="1400">
+                <a:solidFill>
+                  <a:srgbClr val="A7F3D0"/>
+                </a:solidFill>
+                <a:latin typeface="Sarabun"/>
+              </a:defRPr>
+            </a:pPr>
+            <a:r>
+              <a:t>แบ่งการพัฒนาเป็น 3 ระยะอย่างเป็นระบบ เพื่อส่งมอบผลงานที่สมบูรณ์ตรงเวลา</a:t>
+            </a:r>
+          </a:p>
+        </p:txBody>
+      </p:sp>
+      <p:sp>
+        <p:nvSpPr>
+          <p:cNvPr id="5" name="Rounded Rectangle 4"/>
+          <p:cNvSpPr/>
+          <p:nvPr/>
+        </p:nvSpPr>
+        <p:spPr>
+          <a:xfrm>
+            <a:off x="731520" y="1691640"/>
+            <a:ext cx="3429000" cy="4480560"/>
+          </a:xfrm>
+          <a:prstGeom prst="roundRect">
+            <a:avLst/>
+          </a:prstGeom>
+          <a:solidFill>
+            <a:srgbClr val="0E261C"/>
+          </a:solidFill>
+          <a:ln w="19050">
+            <a:solidFill>
+              <a:srgbClr val="38BDF8"/>
+            </a:solidFill>
+          </a:ln>
+        </p:spPr>
+        <p:style>
+          <a:lnRef idx="1">
+            <a:schemeClr val="accent1"/>
+          </a:lnRef>
+          <a:fillRef idx="3">
+            <a:schemeClr val="accent1"/>
+          </a:fillRef>
+          <a:effectRef idx="2">
+            <a:schemeClr val="accent1"/>
+          </a:effectRef>
+          <a:fontRef idx="minor">
+            <a:schemeClr val="lt1"/>
+          </a:fontRef>
+        </p:style>
+        <p:txBody>
+          <a:bodyPr rtlCol="0" anchor="ctr" wrap="square" lIns="256032" rIns="256032" tIns="256032"/>
+          <a:lstStyle/>
+          <a:p>
+            <a:pPr algn="ctr">
+              <a:defRPr sz="1700" b="1">
+                <a:solidFill>
+                  <a:srgbClr val="38BDF8"/>
+                </a:solidFill>
+                <a:latin typeface="Prompt"/>
+              </a:defRPr>
+            </a:pPr>
+            <a:r>
+              <a:t>PHASE 1 (เดือน 1-3)</a:t>
+            </a:r>
+          </a:p>
+          <a:p>
+            <a:pPr>
+              <a:defRPr sz="1800" b="1">
+                <a:solidFill>
+                  <a:srgbClr val="FFFFFF"/>
+                </a:solidFill>
+                <a:latin typeface="Prompt"/>
+              </a:defRPr>
+            </a:pPr>
+            <a:r>
+              <a:t>Core Foundation</a:t>
+            </a:r>
+          </a:p>
+          <a:p>
+            <a:pPr>
+              <a:spcAft>
+                <a:spcPts val="1400"/>
+              </a:spcAft>
+              <a:defRPr sz="1100">
+                <a:solidFill>
+                  <a:srgbClr val="A7F3D0"/>
+                </a:solidFill>
+                <a:latin typeface="Prompt"/>
+              </a:defRPr>
+            </a:pPr>
+            <a:r>
+              <a:t>รากฐานระบบ &amp; การเงิน</a:t>
+            </a:r>
+          </a:p>
+          <a:p>
+            <a:pPr>
+              <a:spcAft>
+                <a:spcPts val="700"/>
+              </a:spcAft>
+              <a:defRPr sz="1250">
+                <a:solidFill>
+                  <a:srgbClr val="E2E8F0"/>
+                </a:solidFill>
+                <a:latin typeface="Sarabun"/>
+              </a:defRPr>
+            </a:pPr>
+            <a:r>
+              <a:t>• ออกแบบ DB Schema &amp; สถาปัตยกรรมระบบ</a:t>
+            </a:r>
+          </a:p>
+          <a:p>
+            <a:pPr>
+              <a:spcAft>
+                <a:spcPts val="700"/>
+              </a:spcAft>
+              <a:defRPr sz="1250">
+                <a:solidFill>
+                  <a:srgbClr val="E2E8F0"/>
+                </a:solidFill>
+                <a:latin typeface="Sarabun"/>
+              </a:defRPr>
+            </a:pPr>
+            <a:r>
+              <a:t>• พัฒนา Backend API (Ticket, Station, Auth)</a:t>
+            </a:r>
+          </a:p>
+          <a:p>
+            <a:pPr>
+              <a:spcAft>
+                <a:spcPts val="700"/>
+              </a:spcAft>
+              <a:defRPr sz="1250">
+                <a:solidFill>
+                  <a:srgbClr val="E2E8F0"/>
+                </a:solidFill>
+                <a:latin typeface="Sarabun"/>
+              </a:defRPr>
+            </a:pPr>
+            <a:r>
+              <a:t>• พัฒนา Admin Dashboard จัดการสถานีและรถ</a:t>
+            </a:r>
+          </a:p>
+          <a:p>
+            <a:pPr>
+              <a:spcAft>
+                <a:spcPts val="700"/>
+              </a:spcAft>
+              <a:defRPr sz="1250">
+                <a:solidFill>
+                  <a:srgbClr val="E2E8F0"/>
+                </a:solidFill>
+                <a:latin typeface="Sarabun"/>
+              </a:defRPr>
+            </a:pPr>
+            <a:r>
+              <a:t>• พัฒนา Kiosk UI สำหรับซื้อตั๋วหน้าสถานี</a:t>
+            </a:r>
+          </a:p>
+          <a:p>
+            <a:pPr>
+              <a:spcAft>
+                <a:spcPts val="700"/>
+              </a:spcAft>
+              <a:defRPr sz="1250">
+                <a:solidFill>
+                  <a:srgbClr val="E2E8F0"/>
+                </a:solidFill>
+                <a:latin typeface="Sarabun"/>
+              </a:defRPr>
+            </a:pPr>
+            <a:r>
+              <a:t>• เชื่อมต่อ Payment Gateway (PromptPay QR/บัตร)</a:t>
+            </a:r>
+          </a:p>
+          <a:p>
+            <a:pPr>
+              <a:spcAft>
+                <a:spcPts val="700"/>
+              </a:spcAft>
+              <a:defRPr sz="1250">
+                <a:solidFill>
+                  <a:srgbClr val="E2E8F0"/>
+                </a:solidFill>
+                <a:latin typeface="Sarabun"/>
+              </a:defRPr>
+            </a:pPr>
+            <a:r>
+              <a:t>• พัฒนา Driver App (Tablet GPS) เบื้องต้น</a:t>
+            </a:r>
+          </a:p>
+        </p:txBody>
+      </p:sp>
+      <p:sp>
+        <p:nvSpPr>
+          <p:cNvPr id="6" name="Rounded Rectangle 5"/>
+          <p:cNvSpPr/>
+          <p:nvPr/>
+        </p:nvSpPr>
+        <p:spPr>
+          <a:xfrm>
+            <a:off x="4389120" y="1691640"/>
+            <a:ext cx="3429000" cy="4480560"/>
+          </a:xfrm>
+          <a:prstGeom prst="roundRect">
+            <a:avLst/>
+          </a:prstGeom>
+          <a:solidFill>
+            <a:srgbClr val="0E261C"/>
+          </a:solidFill>
+          <a:ln w="19050">
+            <a:solidFill>
+              <a:srgbClr val="52B788"/>
+            </a:solidFill>
+          </a:ln>
+        </p:spPr>
+        <p:style>
+          <a:lnRef idx="1">
+            <a:schemeClr val="accent1"/>
+          </a:lnRef>
+          <a:fillRef idx="3">
+            <a:schemeClr val="accent1"/>
+          </a:fillRef>
+          <a:effectRef idx="2">
+            <a:schemeClr val="accent1"/>
+          </a:effectRef>
+          <a:fontRef idx="minor">
+            <a:schemeClr val="lt1"/>
+          </a:fontRef>
+        </p:style>
+        <p:txBody>
+          <a:bodyPr rtlCol="0" anchor="ctr" wrap="square" lIns="256032" rIns="256032" tIns="256032"/>
+          <a:lstStyle/>
+          <a:p>
+            <a:pPr algn="ctr">
+              <a:defRPr sz="1700" b="1">
+                <a:solidFill>
+                  <a:srgbClr val="52B788"/>
+                </a:solidFill>
+                <a:latin typeface="Prompt"/>
+              </a:defRPr>
+            </a:pPr>
+            <a:r>
+              <a:t>PHASE 2 (เดือน 4-6)</a:t>
+            </a:r>
+          </a:p>
+          <a:p>
+            <a:pPr>
+              <a:defRPr sz="1800" b="1">
+                <a:solidFill>
+                  <a:srgbClr val="FFFFFF"/>
+                </a:solidFill>
+                <a:latin typeface="Prompt"/>
+              </a:defRPr>
+            </a:pPr>
+            <a:r>
+              <a:t>Realtime &amp; Mobile</a:t>
+            </a:r>
+          </a:p>
+          <a:p>
+            <a:pPr>
+              <a:spcAft>
+                <a:spcPts val="1400"/>
+              </a:spcAft>
+              <a:defRPr sz="1100">
+                <a:solidFill>
+                  <a:srgbClr val="A7F3D0"/>
+                </a:solidFill>
+                <a:latin typeface="Prompt"/>
+              </a:defRPr>
+            </a:pPr>
+            <a:r>
+              <a:t>ระบบเรียลไทม์ &amp; แอปพลิเคชัน</a:t>
+            </a:r>
+          </a:p>
+          <a:p>
+            <a:pPr>
+              <a:spcAft>
+                <a:spcPts val="700"/>
+              </a:spcAft>
+              <a:defRPr sz="1250">
+                <a:solidFill>
+                  <a:srgbClr val="E2E8F0"/>
+                </a:solidFill>
+                <a:latin typeface="Sarabun"/>
+              </a:defRPr>
+            </a:pPr>
+            <a:r>
+              <a:t>• ติดตั้ง WebSocket Server สำหรับ Live Tracking</a:t>
+            </a:r>
+          </a:p>
+          <a:p>
+            <a:pPr>
+              <a:spcAft>
+                <a:spcPts val="700"/>
+              </a:spcAft>
+              <a:defRPr sz="1250">
+                <a:solidFill>
+                  <a:srgbClr val="E2E8F0"/>
+                </a:solidFill>
+                <a:latin typeface="Sarabun"/>
+              </a:defRPr>
+            </a:pPr>
+            <a:r>
+              <a:t>• พัฒนา Mobile App (iOS + Android) เต็มรูปแบบ</a:t>
+            </a:r>
+          </a:p>
+          <a:p>
+            <a:pPr>
+              <a:spcAft>
+                <a:spcPts val="700"/>
+              </a:spcAft>
+              <a:defRPr sz="1250">
+                <a:solidFill>
+                  <a:srgbClr val="E2E8F0"/>
+                </a:solidFill>
+                <a:latin typeface="Sarabun"/>
+              </a:defRPr>
+            </a:pPr>
+            <a:r>
+              <a:t>• พัฒนาระบบ Queue Management &amp; Balancing</a:t>
+            </a:r>
+          </a:p>
+          <a:p>
+            <a:pPr>
+              <a:spcAft>
+                <a:spcPts val="700"/>
+              </a:spcAft>
+              <a:defRPr sz="1250">
+                <a:solidFill>
+                  <a:srgbClr val="E2E8F0"/>
+                </a:solidFill>
+                <a:latin typeface="Sarabun"/>
+              </a:defRPr>
+            </a:pPr>
+            <a:r>
+              <a:t>• เชื่อมต่อ Geofence ทดสอบ Loop 6 สถานี</a:t>
+            </a:r>
+          </a:p>
+          <a:p>
+            <a:pPr>
+              <a:spcAft>
+                <a:spcPts val="700"/>
+              </a:spcAft>
+              <a:defRPr sz="1250">
+                <a:solidFill>
+                  <a:srgbClr val="E2E8F0"/>
+                </a:solidFill>
+                <a:latin typeface="Sarabun"/>
+              </a:defRPr>
+            </a:pPr>
+            <a:r>
+              <a:t>• ทดสอบสแกน QR Check-in บนรถนำเที่ยวจริง</a:t>
+            </a:r>
+          </a:p>
+          <a:p>
+            <a:pPr>
+              <a:spcAft>
+                <a:spcPts val="700"/>
+              </a:spcAft>
+              <a:defRPr sz="1250">
+                <a:solidFill>
+                  <a:srgbClr val="E2E8F0"/>
+                </a:solidFill>
+                <a:latin typeface="Sarabun"/>
+              </a:defRPr>
+            </a:pPr>
+            <a:r>
+              <a:t>• ทดสอบความเสถียรของสัญญาณในสวน 6,500 ไร่</a:t>
+            </a:r>
+          </a:p>
+        </p:txBody>
+      </p:sp>
+      <p:sp>
+        <p:nvSpPr>
+          <p:cNvPr id="7" name="Rounded Rectangle 6"/>
+          <p:cNvSpPr/>
+          <p:nvPr/>
+        </p:nvSpPr>
+        <p:spPr>
+          <a:xfrm>
+            <a:off x="8046720" y="1691640"/>
+            <a:ext cx="3429000" cy="4480560"/>
+          </a:xfrm>
+          <a:prstGeom prst="roundRect">
+            <a:avLst/>
+          </a:prstGeom>
+          <a:solidFill>
+            <a:srgbClr val="0E261C"/>
+          </a:solidFill>
+          <a:ln w="19050">
+            <a:solidFill>
+              <a:srgbClr val="F59E0B"/>
+            </a:solidFill>
+          </a:ln>
+        </p:spPr>
+        <p:style>
+          <a:lnRef idx="1">
+            <a:schemeClr val="accent1"/>
+          </a:lnRef>
+          <a:fillRef idx="3">
+            <a:schemeClr val="accent1"/>
+          </a:fillRef>
+          <a:effectRef idx="2">
+            <a:schemeClr val="accent1"/>
+          </a:effectRef>
+          <a:fontRef idx="minor">
+            <a:schemeClr val="lt1"/>
+          </a:fontRef>
+        </p:style>
+        <p:txBody>
+          <a:bodyPr rtlCol="0" anchor="ctr" wrap="square" lIns="256032" rIns="256032" tIns="256032"/>
+          <a:lstStyle/>
+          <a:p>
+            <a:pPr algn="ctr">
+              <a:defRPr sz="1700" b="1">
+                <a:solidFill>
+                  <a:srgbClr val="F59E0B"/>
+                </a:solidFill>
+                <a:latin typeface="Prompt"/>
+              </a:defRPr>
+            </a:pPr>
+            <a:r>
+              <a:t>PHASE 3 (เดือน 7-9)</a:t>
+            </a:r>
+          </a:p>
+          <a:p>
+            <a:pPr>
+              <a:defRPr sz="1800" b="1">
+                <a:solidFill>
+                  <a:srgbClr val="FFFFFF"/>
+                </a:solidFill>
+                <a:latin typeface="Prompt"/>
+              </a:defRPr>
+            </a:pPr>
+            <a:r>
+              <a:t>Advanced &amp; Rollout</a:t>
+            </a:r>
+          </a:p>
+          <a:p>
+            <a:pPr>
+              <a:spcAft>
+                <a:spcPts val="1400"/>
+              </a:spcAft>
+              <a:defRPr sz="1100">
+                <a:solidFill>
+                  <a:srgbClr val="A7F3D0"/>
+                </a:solidFill>
+                <a:latin typeface="Prompt"/>
+              </a:defRPr>
+            </a:pPr>
+            <a:r>
+              <a:t>ฟังก์ชันขั้นสูง &amp; ส่งมอบงาน</a:t>
+            </a:r>
+          </a:p>
+          <a:p>
+            <a:pPr>
+              <a:spcAft>
+                <a:spcPts val="700"/>
+              </a:spcAft>
+              <a:defRPr sz="1250">
+                <a:solidFill>
+                  <a:srgbClr val="E2E8F0"/>
+                </a:solidFill>
+                <a:latin typeface="Sarabun"/>
+              </a:defRPr>
+            </a:pPr>
+            <a:r>
+              <a:t>• เปิดระบบ Push Notification (LINE / Push / SMS)</a:t>
+            </a:r>
+          </a:p>
+          <a:p>
+            <a:pPr>
+              <a:spcAft>
+                <a:spcPts val="700"/>
+              </a:spcAft>
+              <a:defRPr sz="1250">
+                <a:solidFill>
+                  <a:srgbClr val="E2E8F0"/>
+                </a:solidFill>
+                <a:latin typeface="Sarabun"/>
+              </a:defRPr>
+            </a:pPr>
+            <a:r>
+              <a:t>• พัฒนาระบบ Real-time Analytics Dashboard</a:t>
+            </a:r>
+          </a:p>
+          <a:p>
+            <a:pPr>
+              <a:spcAft>
+                <a:spcPts val="700"/>
+              </a:spcAft>
+              <a:defRPr sz="1250">
+                <a:solidFill>
+                  <a:srgbClr val="E2E8F0"/>
+                </a:solidFill>
+                <a:latin typeface="Sarabun"/>
+              </a:defRPr>
+            </a:pPr>
+            <a:r>
+              <a:t>• เปิดระบบจองออนไลน์ล่วงหน้า (Online Booking)</a:t>
+            </a:r>
+          </a:p>
+          <a:p>
+            <a:pPr>
+              <a:spcAft>
+                <a:spcPts val="700"/>
+              </a:spcAft>
+              <a:defRPr sz="1250">
+                <a:solidFill>
+                  <a:srgbClr val="E2E8F0"/>
+                </a:solidFill>
+                <a:latin typeface="Sarabun"/>
+              </a:defRPr>
+            </a:pPr>
+            <a:r>
+              <a:t>• จัดทำคู่มือการใช้งานระบบทุกกลุ่มผู้ใช้</a:t>
+            </a:r>
+          </a:p>
+          <a:p>
+            <a:pPr>
+              <a:spcAft>
+                <a:spcPts val="700"/>
+              </a:spcAft>
+              <a:defRPr sz="1250">
+                <a:solidFill>
+                  <a:srgbClr val="E2E8F0"/>
+                </a:solidFill>
+                <a:latin typeface="Sarabun"/>
+              </a:defRPr>
+            </a:pPr>
+            <a:r>
+              <a:t>• ฝึกอบรมเจ้าหน้าที่ประจำสถานีและคนขับรถ</a:t>
+            </a:r>
+          </a:p>
+          <a:p>
+            <a:pPr>
+              <a:spcAft>
+                <a:spcPts val="700"/>
+              </a:spcAft>
+              <a:defRPr sz="1250">
+                <a:solidFill>
+                  <a:srgbClr val="E2E8F0"/>
+                </a:solidFill>
+                <a:latin typeface="Sarabun"/>
+              </a:defRPr>
+            </a:pPr>
+            <a:r>
+              <a:t>• ทดสอบระบบสมบูรณ์ และส่งมอบงานโครงการ</a:t>
+            </a:r>
+          </a:p>
+        </p:txBody>
+      </p:sp>
     </p:spTree>
   </p:cSld>
   <p:clrMapOvr>
@@ -4666,7 +5982,7 @@
       <p:grpSpPr/>
       <p:pic>
         <p:nvPicPr>
-          <p:cNvPr id="2" name="Picture 1" descr="slide_12.jpg"/>
+          <p:cNvPr id="2" name="Picture 1" descr="dark_topographic_bg.jpg"/>
           <p:cNvPicPr>
             <a:picLocks noChangeAspect="1"/>
           </p:cNvPicPr>
@@ -4688,6 +6004,651 @@
           </a:prstGeom>
         </p:spPr>
       </p:pic>
+      <p:sp>
+        <p:nvSpPr>
+          <p:cNvPr id="3" name="Rounded Rectangle 2"/>
+          <p:cNvSpPr/>
+          <p:nvPr/>
+        </p:nvSpPr>
+        <p:spPr>
+          <a:xfrm>
+            <a:off x="731520" y="365760"/>
+            <a:ext cx="3200400" cy="320040"/>
+          </a:xfrm>
+          <a:prstGeom prst="roundRect">
+            <a:avLst/>
+          </a:prstGeom>
+          <a:solidFill>
+            <a:srgbClr val="123024"/>
+          </a:solidFill>
+          <a:ln w="12700">
+            <a:solidFill>
+              <a:srgbClr val="52B788"/>
+            </a:solidFill>
+          </a:ln>
+        </p:spPr>
+        <p:style>
+          <a:lnRef idx="1">
+            <a:schemeClr val="accent1"/>
+          </a:lnRef>
+          <a:fillRef idx="3">
+            <a:schemeClr val="accent1"/>
+          </a:fillRef>
+          <a:effectRef idx="2">
+            <a:schemeClr val="accent1"/>
+          </a:effectRef>
+          <a:fontRef idx="minor">
+            <a:schemeClr val="lt1"/>
+          </a:fontRef>
+        </p:style>
+        <p:txBody>
+          <a:bodyPr rtlCol="0" anchor="ctr" wrap="square" lIns="0" rIns="0" tIns="0" bIns="0"/>
+          <a:lstStyle/>
+          <a:p>
+            <a:pPr algn="ctr">
+              <a:defRPr sz="1100" b="1">
+                <a:solidFill>
+                  <a:srgbClr val="6EE7B7"/>
+                </a:solidFill>
+                <a:latin typeface="Prompt"/>
+              </a:defRPr>
+            </a:pPr>
+            <a:r>
+              <a:t>IMPACT &amp; VALUE</a:t>
+            </a:r>
+          </a:p>
+        </p:txBody>
+      </p:sp>
+      <p:sp>
+        <p:nvSpPr>
+          <p:cNvPr id="4" name="TextBox 3"/>
+          <p:cNvSpPr txBox="1"/>
+          <p:nvPr/>
+        </p:nvSpPr>
+        <p:spPr>
+          <a:xfrm>
+            <a:off x="731520" y="685800"/>
+            <a:ext cx="10728655" cy="868680"/>
+          </a:xfrm>
+          <a:prstGeom prst="rect">
+            <a:avLst/>
+          </a:prstGeom>
+          <a:noFill/>
+        </p:spPr>
+        <p:txBody>
+          <a:bodyPr wrap="square" lIns="0" rIns="0" tIns="0" bIns="0">
+            <a:spAutoFit/>
+          </a:bodyPr>
+          <a:lstStyle/>
+          <a:p>
+            <a:pPr>
+              <a:spcAft>
+                <a:spcPts val="300"/>
+              </a:spcAft>
+              <a:defRPr sz="2600" b="1">
+                <a:solidFill>
+                  <a:srgbClr val="FFFFFF"/>
+                </a:solidFill>
+                <a:latin typeface="Prompt"/>
+              </a:defRPr>
+            </a:pPr>
+            <a:r>
+              <a:t>คุณค่าและประโยชน์ที่คาดว่าจะได้รับ</a:t>
+            </a:r>
+          </a:p>
+          <a:p>
+            <a:pPr>
+              <a:defRPr sz="1400">
+                <a:solidFill>
+                  <a:srgbClr val="A7F3D0"/>
+                </a:solidFill>
+                <a:latin typeface="Sarabun"/>
+              </a:defRPr>
+            </a:pPr>
+            <a:r>
+              <a:t>การสร้างผลกระทบเชิงบวกอย่างครอบคลุมต่อทุกภาคส่วนที่เกี่ยวข้อง</a:t>
+            </a:r>
+          </a:p>
+        </p:txBody>
+      </p:sp>
+      <p:sp>
+        <p:nvSpPr>
+          <p:cNvPr id="5" name="Rounded Rectangle 4"/>
+          <p:cNvSpPr/>
+          <p:nvPr/>
+        </p:nvSpPr>
+        <p:spPr>
+          <a:xfrm>
+            <a:off x="731520" y="1691640"/>
+            <a:ext cx="5257800" cy="2148840"/>
+          </a:xfrm>
+          <a:prstGeom prst="roundRect">
+            <a:avLst/>
+          </a:prstGeom>
+          <a:solidFill>
+            <a:srgbClr val="0E261C"/>
+          </a:solidFill>
+          <a:ln w="19050">
+            <a:solidFill>
+              <a:srgbClr val="52B788"/>
+            </a:solidFill>
+          </a:ln>
+        </p:spPr>
+        <p:style>
+          <a:lnRef idx="1">
+            <a:schemeClr val="accent1"/>
+          </a:lnRef>
+          <a:fillRef idx="3">
+            <a:schemeClr val="accent1"/>
+          </a:fillRef>
+          <a:effectRef idx="2">
+            <a:schemeClr val="accent1"/>
+          </a:effectRef>
+          <a:fontRef idx="minor">
+            <a:schemeClr val="lt1"/>
+          </a:fontRef>
+        </p:style>
+        <p:txBody>
+          <a:bodyPr rtlCol="0" anchor="ctr" wrap="square" lIns="256032" rIns="256032" tIns="164592"/>
+          <a:lstStyle/>
+          <a:p>
+            <a:pPr algn="ctr">
+              <a:spcAft>
+                <a:spcPts val="600"/>
+              </a:spcAft>
+              <a:defRPr sz="1700" b="1">
+                <a:solidFill>
+                  <a:srgbClr val="52B788"/>
+                </a:solidFill>
+                <a:latin typeface="Prompt"/>
+              </a:defRPr>
+            </a:pPr>
+            <a:r>
+              <a:t>นักท่องเที่ยว (Tourists)</a:t>
+            </a:r>
+          </a:p>
+          <a:p>
+            <a:pPr>
+              <a:spcAft>
+                <a:spcPts val="300"/>
+              </a:spcAft>
+              <a:defRPr sz="1200">
+                <a:solidFill>
+                  <a:srgbClr val="E2E8F0"/>
+                </a:solidFill>
+                <a:latin typeface="Sarabun"/>
+              </a:defRPr>
+            </a:pPr>
+            <a:r>
+              <a:t>• ซื้อตั๋วสะดวกทุกช่องทาง ไม่ต้องต่อแถวยาว</a:t>
+            </a:r>
+          </a:p>
+          <a:p>
+            <a:pPr>
+              <a:spcAft>
+                <a:spcPts val="300"/>
+              </a:spcAft>
+              <a:defRPr sz="1200">
+                <a:solidFill>
+                  <a:srgbClr val="E2E8F0"/>
+                </a:solidFill>
+                <a:latin typeface="Sarabun"/>
+              </a:defRPr>
+            </a:pPr>
+            <a:r>
+              <a:t>• ทราบเวลารถมาถึงล่วงหน้า ลดความเครียดในการรอคอย</a:t>
+            </a:r>
+          </a:p>
+          <a:p>
+            <a:pPr>
+              <a:spcAft>
+                <a:spcPts val="300"/>
+              </a:spcAft>
+              <a:defRPr sz="1200">
+                <a:solidFill>
+                  <a:srgbClr val="E2E8F0"/>
+                </a:solidFill>
+                <a:latin typeface="Sarabun"/>
+              </a:defRPr>
+            </a:pPr>
+            <a:r>
+              <a:t>• ได้รับความรู้พันธุ์ไม้ตลอดเส้นทางผ่านระบบ Geofences</a:t>
+            </a:r>
+          </a:p>
+          <a:p>
+            <a:pPr>
+              <a:spcAft>
+                <a:spcPts val="300"/>
+              </a:spcAft>
+              <a:defRPr sz="1200">
+                <a:solidFill>
+                  <a:srgbClr val="E2E8F0"/>
+                </a:solidFill>
+                <a:latin typeface="Sarabun"/>
+              </a:defRPr>
+            </a:pPr>
+            <a:r>
+              <a:t>• สัมผัสธรรมชาติที่เงียบสงบ ปราศจากควันพิษ</a:t>
+            </a:r>
+          </a:p>
+        </p:txBody>
+      </p:sp>
+      <p:sp>
+        <p:nvSpPr>
+          <p:cNvPr id="6" name="Rounded Rectangle 5"/>
+          <p:cNvSpPr/>
+          <p:nvPr/>
+        </p:nvSpPr>
+        <p:spPr>
+          <a:xfrm>
+            <a:off x="6199632" y="1691640"/>
+            <a:ext cx="5257800" cy="2148840"/>
+          </a:xfrm>
+          <a:prstGeom prst="roundRect">
+            <a:avLst/>
+          </a:prstGeom>
+          <a:solidFill>
+            <a:srgbClr val="0E261C"/>
+          </a:solidFill>
+          <a:ln w="19050">
+            <a:solidFill>
+              <a:srgbClr val="38BDF8"/>
+            </a:solidFill>
+          </a:ln>
+        </p:spPr>
+        <p:style>
+          <a:lnRef idx="1">
+            <a:schemeClr val="accent1"/>
+          </a:lnRef>
+          <a:fillRef idx="3">
+            <a:schemeClr val="accent1"/>
+          </a:fillRef>
+          <a:effectRef idx="2">
+            <a:schemeClr val="accent1"/>
+          </a:effectRef>
+          <a:fontRef idx="minor">
+            <a:schemeClr val="lt1"/>
+          </a:fontRef>
+        </p:style>
+        <p:txBody>
+          <a:bodyPr rtlCol="0" anchor="ctr" wrap="square" lIns="256032" rIns="256032" tIns="164592"/>
+          <a:lstStyle/>
+          <a:p>
+            <a:pPr algn="ctr">
+              <a:spcAft>
+                <a:spcPts val="600"/>
+              </a:spcAft>
+              <a:defRPr sz="1700" b="1">
+                <a:solidFill>
+                  <a:srgbClr val="38BDF8"/>
+                </a:solidFill>
+                <a:latin typeface="Prompt"/>
+              </a:defRPr>
+            </a:pPr>
+            <a:r>
+              <a:t>เจ้าหน้าที่ &amp; คนขับรถ (Staff &amp; Drivers)</a:t>
+            </a:r>
+          </a:p>
+          <a:p>
+            <a:pPr>
+              <a:spcAft>
+                <a:spcPts val="300"/>
+              </a:spcAft>
+              <a:defRPr sz="1200">
+                <a:solidFill>
+                  <a:srgbClr val="E2E8F0"/>
+                </a:solidFill>
+                <a:latin typeface="Sarabun"/>
+              </a:defRPr>
+            </a:pPr>
+            <a:r>
+              <a:t>• ตรวจสอบตั๋วด้วย Tablet ภายใน 1 วินาที ป้องกันตั๋วซ้ำ</a:t>
+            </a:r>
+          </a:p>
+          <a:p>
+            <a:pPr>
+              <a:spcAft>
+                <a:spcPts val="300"/>
+              </a:spcAft>
+              <a:defRPr sz="1200">
+                <a:solidFill>
+                  <a:srgbClr val="E2E8F0"/>
+                </a:solidFill>
+                <a:latin typeface="Sarabun"/>
+              </a:defRPr>
+            </a:pPr>
+            <a:r>
+              <a:t>• ทราบจำนวนผู้โดยสารในสถานีถัดไปล่วงหน้า จัดการรถได้ง่าย</a:t>
+            </a:r>
+          </a:p>
+          <a:p>
+            <a:pPr>
+              <a:spcAft>
+                <a:spcPts val="300"/>
+              </a:spcAft>
+              <a:defRPr sz="1200">
+                <a:solidFill>
+                  <a:srgbClr val="E2E8F0"/>
+                </a:solidFill>
+                <a:latin typeface="Sarabun"/>
+              </a:defRPr>
+            </a:pPr>
+            <a:r>
+              <a:t>• ลดความแออัดและลดความขัดแย้งในการจัดคิวหน้างาน</a:t>
+            </a:r>
+          </a:p>
+          <a:p>
+            <a:pPr>
+              <a:spcAft>
+                <a:spcPts val="300"/>
+              </a:spcAft>
+              <a:defRPr sz="1200">
+                <a:solidFill>
+                  <a:srgbClr val="E2E8F0"/>
+                </a:solidFill>
+                <a:latin typeface="Sarabun"/>
+              </a:defRPr>
+            </a:pPr>
+            <a:r>
+              <a:t>• มีเครื่องมือดิจิทัลที่ทันสมัยช่วยให้การทำงานคล่องตัว</a:t>
+            </a:r>
+          </a:p>
+        </p:txBody>
+      </p:sp>
+      <p:sp>
+        <p:nvSpPr>
+          <p:cNvPr id="7" name="Rounded Rectangle 6"/>
+          <p:cNvSpPr/>
+          <p:nvPr/>
+        </p:nvSpPr>
+        <p:spPr>
+          <a:xfrm>
+            <a:off x="731520" y="4023360"/>
+            <a:ext cx="5257800" cy="2148840"/>
+          </a:xfrm>
+          <a:prstGeom prst="roundRect">
+            <a:avLst/>
+          </a:prstGeom>
+          <a:solidFill>
+            <a:srgbClr val="0E261C"/>
+          </a:solidFill>
+          <a:ln w="19050">
+            <a:solidFill>
+              <a:srgbClr val="6EE7B7"/>
+            </a:solidFill>
+          </a:ln>
+        </p:spPr>
+        <p:style>
+          <a:lnRef idx="1">
+            <a:schemeClr val="accent1"/>
+          </a:lnRef>
+          <a:fillRef idx="3">
+            <a:schemeClr val="accent1"/>
+          </a:fillRef>
+          <a:effectRef idx="2">
+            <a:schemeClr val="accent1"/>
+          </a:effectRef>
+          <a:fontRef idx="minor">
+            <a:schemeClr val="lt1"/>
+          </a:fontRef>
+        </p:style>
+        <p:txBody>
+          <a:bodyPr rtlCol="0" anchor="ctr" wrap="square" lIns="256032" rIns="256032" tIns="164592"/>
+          <a:lstStyle/>
+          <a:p>
+            <a:pPr algn="ctr">
+              <a:spcAft>
+                <a:spcPts val="600"/>
+              </a:spcAft>
+              <a:defRPr sz="1700" b="1">
+                <a:solidFill>
+                  <a:srgbClr val="6EE7B7"/>
+                </a:solidFill>
+                <a:latin typeface="Prompt"/>
+              </a:defRPr>
+            </a:pPr>
+            <a:r>
+              <a:t>ผู้บริหารและองค์กร (Management)</a:t>
+            </a:r>
+          </a:p>
+          <a:p>
+            <a:pPr>
+              <a:spcAft>
+                <a:spcPts val="300"/>
+              </a:spcAft>
+              <a:defRPr sz="1200">
+                <a:solidFill>
+                  <a:srgbClr val="E2E8F0"/>
+                </a:solidFill>
+                <a:latin typeface="Sarabun"/>
+              </a:defRPr>
+            </a:pPr>
+            <a:r>
+              <a:t>• Real-time Dashboard ติดตามสถานะการเดินรถและรายได้ทันที</a:t>
+            </a:r>
+          </a:p>
+          <a:p>
+            <a:pPr>
+              <a:spcAft>
+                <a:spcPts val="300"/>
+              </a:spcAft>
+              <a:defRPr sz="1200">
+                <a:solidFill>
+                  <a:srgbClr val="E2E8F0"/>
+                </a:solidFill>
+                <a:latin typeface="Sarabun"/>
+              </a:defRPr>
+            </a:pPr>
+            <a:r>
+              <a:t>• มีข้อมูลสถิติเชิงพื้นที่นำไปวางแผนพัฒนาสวนฯ ได้อย่างแม่นยำ</a:t>
+            </a:r>
+          </a:p>
+          <a:p>
+            <a:pPr>
+              <a:spcAft>
+                <a:spcPts val="300"/>
+              </a:spcAft>
+              <a:defRPr sz="1200">
+                <a:solidFill>
+                  <a:srgbClr val="E2E8F0"/>
+                </a:solidFill>
+                <a:latin typeface="Sarabun"/>
+              </a:defRPr>
+            </a:pPr>
+            <a:r>
+              <a:t>• ตรวจสอบยอดจำหน่ายตั๋วได้อย่างโปร่งใส 100%</a:t>
+            </a:r>
+          </a:p>
+          <a:p>
+            <a:pPr>
+              <a:spcAft>
+                <a:spcPts val="300"/>
+              </a:spcAft>
+              <a:defRPr sz="1200">
+                <a:solidFill>
+                  <a:srgbClr val="E2E8F0"/>
+                </a:solidFill>
+                <a:latin typeface="Sarabun"/>
+              </a:defRPr>
+            </a:pPr>
+            <a:r>
+              <a:t>• ยกระดับภาพลักษณ์สู่ Smart Botanical Garden สากล</a:t>
+            </a:r>
+          </a:p>
+        </p:txBody>
+      </p:sp>
+      <p:sp>
+        <p:nvSpPr>
+          <p:cNvPr id="8" name="Rounded Rectangle 7"/>
+          <p:cNvSpPr/>
+          <p:nvPr/>
+        </p:nvSpPr>
+        <p:spPr>
+          <a:xfrm>
+            <a:off x="6199632" y="4023360"/>
+            <a:ext cx="5257800" cy="2148840"/>
+          </a:xfrm>
+          <a:prstGeom prst="roundRect">
+            <a:avLst/>
+          </a:prstGeom>
+          <a:solidFill>
+            <a:srgbClr val="0E261C"/>
+          </a:solidFill>
+          <a:ln w="19050">
+            <a:solidFill>
+              <a:srgbClr val="F59E0B"/>
+            </a:solidFill>
+          </a:ln>
+        </p:spPr>
+        <p:style>
+          <a:lnRef idx="1">
+            <a:schemeClr val="accent1"/>
+          </a:lnRef>
+          <a:fillRef idx="3">
+            <a:schemeClr val="accent1"/>
+          </a:fillRef>
+          <a:effectRef idx="2">
+            <a:schemeClr val="accent1"/>
+          </a:effectRef>
+          <a:fontRef idx="minor">
+            <a:schemeClr val="lt1"/>
+          </a:fontRef>
+        </p:style>
+        <p:txBody>
+          <a:bodyPr rtlCol="0" anchor="ctr"/>
+          <a:lstStyle/>
+          <a:p>
+            <a:pPr algn="ctr"/>
+          </a:p>
+        </p:txBody>
+      </p:sp>
+      <p:pic>
+        <p:nvPicPr>
+          <p:cNvPr id="9" name="Picture 8" descr="ev_charger_station.jpg"/>
+          <p:cNvPicPr>
+            <a:picLocks noChangeAspect="1"/>
+          </p:cNvPicPr>
+          <p:nvPr/>
+        </p:nvPicPr>
+        <p:blipFill>
+          <a:blip r:embed="rId3"/>
+          <a:stretch>
+            <a:fillRect/>
+          </a:stretch>
+        </p:blipFill>
+        <p:spPr>
+          <a:xfrm>
+            <a:off x="9784080" y="4114800"/>
+            <a:ext cx="1508760" cy="1965960"/>
+          </a:xfrm>
+          <a:prstGeom prst="rect">
+            <a:avLst/>
+          </a:prstGeom>
+        </p:spPr>
+      </p:pic>
+      <p:sp>
+        <p:nvSpPr>
+          <p:cNvPr id="10" name="TextBox 9"/>
+          <p:cNvSpPr txBox="1"/>
+          <p:nvPr/>
+        </p:nvSpPr>
+        <p:spPr>
+          <a:xfrm>
+            <a:off x="6400800" y="4114800"/>
+            <a:ext cx="3291840" cy="1920240"/>
+          </a:xfrm>
+          <a:prstGeom prst="rect">
+            <a:avLst/>
+          </a:prstGeom>
+          <a:noFill/>
+        </p:spPr>
+        <p:txBody>
+          <a:bodyPr wrap="square" lIns="0" rIns="0" tIns="0" bIns="0">
+            <a:spAutoFit/>
+          </a:bodyPr>
+          <a:lstStyle/>
+          <a:p>
+            <a:pPr>
+              <a:spcAft>
+                <a:spcPts val="400"/>
+              </a:spcAft>
+              <a:defRPr sz="1550" b="1">
+                <a:solidFill>
+                  <a:srgbClr val="F59E0B"/>
+                </a:solidFill>
+                <a:latin typeface="Prompt"/>
+              </a:defRPr>
+            </a:pPr>
+            <a:r>
+              <a:t>สิ่งแวดล้อมและความยั่งยืน (Environment)</a:t>
+            </a:r>
+          </a:p>
+          <a:p>
+            <a:pPr>
+              <a:spcAft>
+                <a:spcPts val="200"/>
+              </a:spcAft>
+              <a:defRPr sz="1150">
+                <a:solidFill>
+                  <a:srgbClr val="E2E8F0"/>
+                </a:solidFill>
+                <a:latin typeface="Sarabun"/>
+              </a:defRPr>
+            </a:pPr>
+            <a:r>
+              <a:t>• ลดการปล่อยคาร์บอนด้วยรถ EV 100% ไร้เสียง ไร้ควัน</a:t>
+            </a:r>
+          </a:p>
+          <a:p>
+            <a:pPr>
+              <a:spcAft>
+                <a:spcPts val="200"/>
+              </a:spcAft>
+              <a:defRPr sz="1150">
+                <a:solidFill>
+                  <a:srgbClr val="E2E8F0"/>
+                </a:solidFill>
+                <a:latin typeface="Sarabun"/>
+              </a:defRPr>
+            </a:pPr>
+            <a:r>
+              <a:t>• ปกป้องระบบนิเวศพฤกษศาสตร์ในพื้นที่ 6,500 ไร่</a:t>
+            </a:r>
+          </a:p>
+          <a:p>
+            <a:pPr>
+              <a:spcAft>
+                <a:spcPts val="200"/>
+              </a:spcAft>
+              <a:defRPr sz="1150">
+                <a:solidFill>
+                  <a:srgbClr val="E2E8F0"/>
+                </a:solidFill>
+                <a:latin typeface="Sarabun"/>
+              </a:defRPr>
+            </a:pPr>
+            <a:r>
+              <a:t>• จุดชาร์จพลังงานสะอาด EV Tram Charger ในพื้นที่</a:t>
+            </a:r>
+          </a:p>
+          <a:p>
+            <a:pPr>
+              <a:spcAft>
+                <a:spcPts val="200"/>
+              </a:spcAft>
+              <a:defRPr sz="1150">
+                <a:solidFill>
+                  <a:srgbClr val="E2E8F0"/>
+                </a:solidFill>
+                <a:latin typeface="Sarabun"/>
+              </a:defRPr>
+            </a:pPr>
+            <a:r>
+              <a:t>• ยกระดับสู่มาตรฐานการท่องเที่ยวสีเขียวระดับสากล</a:t>
+            </a:r>
+          </a:p>
+        </p:txBody>
+      </p:sp>
     </p:spTree>
   </p:cSld>
   <p:clrMapOvr>
@@ -4696,7 +6657,7 @@
 </p:sld>
 </file>
 
-<file path=ppt/slides/slide2.xml><?xml version="1.0" encoding="utf-8"?>
+<file path=ppt/slides/slide13.xml><?xml version="1.0" encoding="utf-8"?>
 <p:sld xmlns:a="http://schemas.openxmlformats.org/drawingml/2006/main" xmlns:p="http://schemas.openxmlformats.org/presentationml/2006/main" xmlns:r="http://schemas.openxmlformats.org/officeDocument/2006/relationships">
   <p:cSld>
     <p:spTree>
@@ -4708,7 +6669,7 @@
       <p:grpSpPr/>
       <p:pic>
         <p:nvPicPr>
-          <p:cNvPr id="2" name="Picture 1" descr="slide_02.jpg"/>
+          <p:cNvPr id="2" name="Picture 1" descr="dark_topographic_bg.jpg"/>
           <p:cNvPicPr>
             <a:picLocks noChangeAspect="1"/>
           </p:cNvPicPr>
@@ -4730,6 +6691,113 @@
           </a:prstGeom>
         </p:spPr>
       </p:pic>
+      <p:sp>
+        <p:nvSpPr>
+          <p:cNvPr id="3" name="Rounded Rectangle 2"/>
+          <p:cNvSpPr/>
+          <p:nvPr/>
+        </p:nvSpPr>
+        <p:spPr>
+          <a:xfrm>
+            <a:off x="1097280" y="1097280"/>
+            <a:ext cx="9997135" cy="4663440"/>
+          </a:xfrm>
+          <a:prstGeom prst="roundRect">
+            <a:avLst/>
+          </a:prstGeom>
+          <a:solidFill>
+            <a:srgbClr val="0E261C"/>
+          </a:solidFill>
+          <a:ln w="19050">
+            <a:solidFill>
+              <a:srgbClr val="52B788"/>
+            </a:solidFill>
+          </a:ln>
+        </p:spPr>
+        <p:style>
+          <a:lnRef idx="1">
+            <a:schemeClr val="accent1"/>
+          </a:lnRef>
+          <a:fillRef idx="3">
+            <a:schemeClr val="accent1"/>
+          </a:fillRef>
+          <a:effectRef idx="2">
+            <a:schemeClr val="accent1"/>
+          </a:effectRef>
+          <a:fontRef idx="minor">
+            <a:schemeClr val="lt1"/>
+          </a:fontRef>
+        </p:style>
+        <p:txBody>
+          <a:bodyPr rtlCol="0" anchor="ctr" wrap="square" lIns="548640" rIns="548640" tIns="548640"/>
+          <a:lstStyle/>
+          <a:p>
+            <a:pPr algn="ctr">
+              <a:spcAft>
+                <a:spcPts val="2000"/>
+              </a:spcAft>
+              <a:defRPr sz="1400" b="1">
+                <a:solidFill>
+                  <a:srgbClr val="6EE7B7"/>
+                </a:solidFill>
+                <a:latin typeface="Prompt"/>
+              </a:defRPr>
+            </a:pPr>
+            <a:r>
+              <a:t>SMART &amp; GREEN BOTANICAL GARDEN | FUTURE OF QSBG</a:t>
+            </a:r>
+          </a:p>
+          <a:p>
+            <a:pPr algn="ctr">
+              <a:spcAft>
+                <a:spcPts val="1800"/>
+              </a:spcAft>
+              <a:defRPr sz="3200" b="1">
+                <a:solidFill>
+                  <a:srgbClr val="FFFFFF"/>
+                </a:solidFill>
+                <a:latin typeface="Prompt"/>
+              </a:defRPr>
+            </a:pPr>
+            <a:r>
+              <a:t>การผสานรวมรถนำเที่ยวไฟฟ้า (EV)</a:t>
+            </a:r>
+            <a:br/>
+            <a:r>
+              <a:t>และ Smart Tourism Platform เพื่ออนาคตสีเขียวที่ยั่งยืน</a:t>
+            </a:r>
+          </a:p>
+          <a:p>
+            <a:pPr algn="ctr">
+              <a:spcAft>
+                <a:spcPts val="2600"/>
+              </a:spcAft>
+              <a:defRPr sz="1500">
+                <a:solidFill>
+                  <a:srgbClr val="E2E8F0"/>
+                </a:solidFill>
+                <a:latin typeface="Sarabun"/>
+              </a:defRPr>
+            </a:pPr>
+            <a:r>
+              <a:t>โครงการพัฒนาระบบจัดการรถนำเที่ยวไฟฟ้า สวนพฤกษศาสตร์สมเด็จพระนางเจ้าสิริกิติ์ พร้อมเดินหน้าตามแผนงาน Phase 1 ทันที เพื่อส่งมอบระบบที่สมบูรณ์แบบ ทั้งการบริการ การบริหารจัดการ และการอนุรักษ์สิ่งแวดล้อมอย่างยั่งยืน</a:t>
+            </a:r>
+          </a:p>
+          <a:p>
+            <a:pPr algn="ctr">
+              <a:defRPr sz="2200" b="1">
+                <a:solidFill>
+                  <a:srgbClr val="F59E0B"/>
+                </a:solidFill>
+                <a:latin typeface="Prompt"/>
+              </a:defRPr>
+            </a:pPr>
+            <a:r>
+              <a:t>ขอขอบพระคุณคณะกรรมการทุกท่าน  |  ช่วงถาม - ตอบ (Q &amp; A)</a:t>
+            </a:r>
+          </a:p>
+        </p:txBody>
+      </p:sp>
     </p:spTree>
   </p:cSld>
   <p:clrMapOvr>
@@ -4738,7 +6806,7 @@
 </p:sld>
 </file>
 
-<file path=ppt/slides/slide3.xml><?xml version="1.0" encoding="utf-8"?>
+<file path=ppt/slides/slide2.xml><?xml version="1.0" encoding="utf-8"?>
 <p:sld xmlns:a="http://schemas.openxmlformats.org/drawingml/2006/main" xmlns:p="http://schemas.openxmlformats.org/presentationml/2006/main" xmlns:r="http://schemas.openxmlformats.org/officeDocument/2006/relationships">
   <p:cSld>
     <p:spTree>
@@ -4750,7 +6818,7 @@
       <p:grpSpPr/>
       <p:pic>
         <p:nvPicPr>
-          <p:cNvPr id="2" name="Picture 1" descr="slide_03.jpg"/>
+          <p:cNvPr id="2" name="Picture 1" descr="dark_topographic_bg.jpg"/>
           <p:cNvPicPr>
             <a:picLocks noChangeAspect="1"/>
           </p:cNvPicPr>
@@ -4772,6 +6840,566 @@
           </a:prstGeom>
         </p:spPr>
       </p:pic>
+      <p:sp>
+        <p:nvSpPr>
+          <p:cNvPr id="3" name="Rounded Rectangle 2"/>
+          <p:cNvSpPr/>
+          <p:nvPr/>
+        </p:nvSpPr>
+        <p:spPr>
+          <a:xfrm>
+            <a:off x="731520" y="365760"/>
+            <a:ext cx="3200400" cy="320040"/>
+          </a:xfrm>
+          <a:prstGeom prst="roundRect">
+            <a:avLst/>
+          </a:prstGeom>
+          <a:solidFill>
+            <a:srgbClr val="123024"/>
+          </a:solidFill>
+          <a:ln w="12700">
+            <a:solidFill>
+              <a:srgbClr val="52B788"/>
+            </a:solidFill>
+          </a:ln>
+        </p:spPr>
+        <p:style>
+          <a:lnRef idx="1">
+            <a:schemeClr val="accent1"/>
+          </a:lnRef>
+          <a:fillRef idx="3">
+            <a:schemeClr val="accent1"/>
+          </a:fillRef>
+          <a:effectRef idx="2">
+            <a:schemeClr val="accent1"/>
+          </a:effectRef>
+          <a:fontRef idx="minor">
+            <a:schemeClr val="lt1"/>
+          </a:fontRef>
+        </p:style>
+        <p:txBody>
+          <a:bodyPr rtlCol="0" anchor="ctr" wrap="square" lIns="0" rIns="0" tIns="0" bIns="0"/>
+          <a:lstStyle/>
+          <a:p>
+            <a:pPr algn="ctr">
+              <a:defRPr sz="1100" b="1">
+                <a:solidFill>
+                  <a:srgbClr val="6EE7B7"/>
+                </a:solidFill>
+                <a:latin typeface="Prompt"/>
+              </a:defRPr>
+            </a:pPr>
+            <a:r>
+              <a:t>CONTEXT &amp; CHALLENGES</a:t>
+            </a:r>
+          </a:p>
+        </p:txBody>
+      </p:sp>
+      <p:sp>
+        <p:nvSpPr>
+          <p:cNvPr id="4" name="TextBox 3"/>
+          <p:cNvSpPr txBox="1"/>
+          <p:nvPr/>
+        </p:nvSpPr>
+        <p:spPr>
+          <a:xfrm>
+            <a:off x="731520" y="685800"/>
+            <a:ext cx="10728655" cy="868680"/>
+          </a:xfrm>
+          <a:prstGeom prst="rect">
+            <a:avLst/>
+          </a:prstGeom>
+          <a:noFill/>
+        </p:spPr>
+        <p:txBody>
+          <a:bodyPr wrap="square" lIns="0" rIns="0" tIns="0" bIns="0">
+            <a:spAutoFit/>
+          </a:bodyPr>
+          <a:lstStyle/>
+          <a:p>
+            <a:pPr>
+              <a:spcAft>
+                <a:spcPts val="300"/>
+              </a:spcAft>
+              <a:defRPr sz="2600" b="1">
+                <a:solidFill>
+                  <a:srgbClr val="FFFFFF"/>
+                </a:solidFill>
+                <a:latin typeface="Prompt"/>
+              </a:defRPr>
+            </a:pPr>
+            <a:r>
+              <a:t>ที่มา ปัญหา และความจำเป็นของโครงการ</a:t>
+            </a:r>
+          </a:p>
+          <a:p>
+            <a:pPr>
+              <a:defRPr sz="1400">
+                <a:solidFill>
+                  <a:srgbClr val="A7F3D0"/>
+                </a:solidFill>
+                <a:latin typeface="Sarabun"/>
+              </a:defRPr>
+            </a:pPr>
+            <a:r>
+              <a:t>ความท้าทายในการบริหารจัดการและการให้บริการนักท่องเที่ยวในปัจจุบัน</a:t>
+            </a:r>
+          </a:p>
+        </p:txBody>
+      </p:sp>
+      <p:sp>
+        <p:nvSpPr>
+          <p:cNvPr id="5" name="Rounded Rectangle 4"/>
+          <p:cNvSpPr/>
+          <p:nvPr/>
+        </p:nvSpPr>
+        <p:spPr>
+          <a:xfrm>
+            <a:off x="731520" y="1691640"/>
+            <a:ext cx="3429000" cy="4480560"/>
+          </a:xfrm>
+          <a:prstGeom prst="roundRect">
+            <a:avLst/>
+          </a:prstGeom>
+          <a:solidFill>
+            <a:srgbClr val="0E261C"/>
+          </a:solidFill>
+          <a:ln w="19050">
+            <a:solidFill>
+              <a:srgbClr val="52B788"/>
+            </a:solidFill>
+          </a:ln>
+        </p:spPr>
+        <p:style>
+          <a:lnRef idx="1">
+            <a:schemeClr val="accent1"/>
+          </a:lnRef>
+          <a:fillRef idx="3">
+            <a:schemeClr val="accent1"/>
+          </a:fillRef>
+          <a:effectRef idx="2">
+            <a:schemeClr val="accent1"/>
+          </a:effectRef>
+          <a:fontRef idx="minor">
+            <a:schemeClr val="lt1"/>
+          </a:fontRef>
+        </p:style>
+        <p:txBody>
+          <a:bodyPr rtlCol="0" anchor="ctr" wrap="square" lIns="256032" rIns="256032" tIns="256032"/>
+          <a:lstStyle/>
+          <a:p>
+            <a:pPr algn="ctr">
+              <a:spcAft>
+                <a:spcPts val="400"/>
+              </a:spcAft>
+              <a:defRPr sz="2800" b="1">
+                <a:solidFill>
+                  <a:srgbClr val="52B788"/>
+                </a:solidFill>
+                <a:latin typeface="Prompt"/>
+              </a:defRPr>
+            </a:pPr>
+            <a:r>
+              <a:t>01</a:t>
+            </a:r>
+          </a:p>
+          <a:p>
+            <a:pPr>
+              <a:defRPr sz="1800" b="1">
+                <a:solidFill>
+                  <a:srgbClr val="FFFFFF"/>
+                </a:solidFill>
+                <a:latin typeface="Prompt"/>
+              </a:defRPr>
+            </a:pPr>
+            <a:r>
+              <a:t>พื้นที่กว้างใหญ่ &amp; รถจำกัด</a:t>
+            </a:r>
+          </a:p>
+          <a:p>
+            <a:pPr>
+              <a:spcAft>
+                <a:spcPts val="1200"/>
+              </a:spcAft>
+              <a:defRPr sz="1050">
+                <a:solidFill>
+                  <a:srgbClr val="6EE7B7"/>
+                </a:solidFill>
+                <a:latin typeface="Prompt"/>
+              </a:defRPr>
+            </a:pPr>
+            <a:r>
+              <a:t>PHYSICAL &amp; CAPACITY BOTTLENECK</a:t>
+            </a:r>
+          </a:p>
+          <a:p>
+            <a:pPr>
+              <a:spcAft>
+                <a:spcPts val="800"/>
+              </a:spcAft>
+              <a:defRPr sz="1300">
+                <a:solidFill>
+                  <a:srgbClr val="E2E8F0"/>
+                </a:solidFill>
+                <a:latin typeface="Sarabun"/>
+              </a:defRPr>
+            </a:pPr>
+            <a:r>
+              <a:t>• พื้นที่สวนกว้างขวางถึง 6,500 ไร่ มีความลาดชันสูง</a:t>
+            </a:r>
+          </a:p>
+          <a:p>
+            <a:pPr>
+              <a:spcAft>
+                <a:spcPts val="800"/>
+              </a:spcAft>
+              <a:defRPr sz="1300">
+                <a:solidFill>
+                  <a:srgbClr val="E2E8F0"/>
+                </a:solidFill>
+                <a:latin typeface="Sarabun"/>
+              </a:defRPr>
+            </a:pPr>
+            <a:r>
+              <a:t>• จุดท่องเที่ยวสำคัญกระจายตัว: Canopy Walkway, กลุ่มเรือนกระจก, พิพิธภัณฑ์ธรรมชาติวิทยา</a:t>
+            </a:r>
+          </a:p>
+          <a:p>
+            <a:pPr>
+              <a:spcAft>
+                <a:spcPts val="800"/>
+              </a:spcAft>
+              <a:defRPr sz="1300">
+                <a:solidFill>
+                  <a:srgbClr val="E2E8F0"/>
+                </a:solidFill>
+                <a:latin typeface="Sarabun"/>
+              </a:defRPr>
+            </a:pPr>
+            <a:r>
+              <a:t>• เดิมใช้รถเครื่องยนต์สันดาปเพียง 2 คัน ไม่เพียงพอต่อปริมาณนักท่องเที่ยวในฤดูกาลท่องเที่ยว</a:t>
+            </a:r>
+          </a:p>
+          <a:p>
+            <a:pPr>
+              <a:spcAft>
+                <a:spcPts val="800"/>
+              </a:spcAft>
+              <a:defRPr sz="1300">
+                <a:solidFill>
+                  <a:srgbClr val="E2E8F0"/>
+                </a:solidFill>
+                <a:latin typeface="Sarabun"/>
+              </a:defRPr>
+            </a:pPr>
+            <a:r>
+              <a:t>• มีเสียงดังและปล่อยควันไอเสียรบกวนบรรยากาศธรรมชาติ</a:t>
+            </a:r>
+          </a:p>
+        </p:txBody>
+      </p:sp>
+      <p:sp>
+        <p:nvSpPr>
+          <p:cNvPr id="6" name="Rounded Rectangle 5"/>
+          <p:cNvSpPr/>
+          <p:nvPr/>
+        </p:nvSpPr>
+        <p:spPr>
+          <a:xfrm>
+            <a:off x="4389120" y="1691640"/>
+            <a:ext cx="3429000" cy="4480560"/>
+          </a:xfrm>
+          <a:prstGeom prst="roundRect">
+            <a:avLst/>
+          </a:prstGeom>
+          <a:solidFill>
+            <a:srgbClr val="0E261C"/>
+          </a:solidFill>
+          <a:ln w="19050">
+            <a:solidFill>
+              <a:srgbClr val="38BDF8"/>
+            </a:solidFill>
+          </a:ln>
+        </p:spPr>
+        <p:style>
+          <a:lnRef idx="1">
+            <a:schemeClr val="accent1"/>
+          </a:lnRef>
+          <a:fillRef idx="3">
+            <a:schemeClr val="accent1"/>
+          </a:fillRef>
+          <a:effectRef idx="2">
+            <a:schemeClr val="accent1"/>
+          </a:effectRef>
+          <a:fontRef idx="minor">
+            <a:schemeClr val="lt1"/>
+          </a:fontRef>
+        </p:style>
+        <p:txBody>
+          <a:bodyPr rtlCol="0" anchor="ctr" wrap="square" lIns="256032" rIns="256032" tIns="256032"/>
+          <a:lstStyle/>
+          <a:p>
+            <a:pPr algn="ctr">
+              <a:spcAft>
+                <a:spcPts val="400"/>
+              </a:spcAft>
+              <a:defRPr sz="2800" b="1">
+                <a:solidFill>
+                  <a:srgbClr val="38BDF8"/>
+                </a:solidFill>
+                <a:latin typeface="Prompt"/>
+              </a:defRPr>
+            </a:pPr>
+            <a:r>
+              <a:t>02</a:t>
+            </a:r>
+          </a:p>
+          <a:p>
+            <a:pPr>
+              <a:defRPr sz="1800" b="1">
+                <a:solidFill>
+                  <a:srgbClr val="FFFFFF"/>
+                </a:solidFill>
+                <a:latin typeface="Prompt"/>
+              </a:defRPr>
+            </a:pPr>
+            <a:r>
+              <a:t>ไร้ระบบติดตามและคิวสะสม</a:t>
+            </a:r>
+          </a:p>
+          <a:p>
+            <a:pPr>
+              <a:spcAft>
+                <a:spcPts val="1200"/>
+              </a:spcAft>
+              <a:defRPr sz="1050">
+                <a:solidFill>
+                  <a:srgbClr val="6EE7B7"/>
+                </a:solidFill>
+                <a:latin typeface="Prompt"/>
+              </a:defRPr>
+            </a:pPr>
+            <a:r>
+              <a:t>LACK OF REAL-TIME VISIBILITY</a:t>
+            </a:r>
+          </a:p>
+          <a:p>
+            <a:pPr>
+              <a:spcAft>
+                <a:spcPts val="800"/>
+              </a:spcAft>
+              <a:defRPr sz="1300">
+                <a:solidFill>
+                  <a:srgbClr val="E2E8F0"/>
+                </a:solidFill>
+                <a:latin typeface="Sarabun"/>
+              </a:defRPr>
+            </a:pPr>
+            <a:r>
+              <a:t>• นักท่องเที่ยวไม่ทราบเวลาที่รถจะมาถึงสถานี (No ETA)</a:t>
+            </a:r>
+          </a:p>
+          <a:p>
+            <a:pPr>
+              <a:spcAft>
+                <a:spcPts val="800"/>
+              </a:spcAft>
+              <a:defRPr sz="1300">
+                <a:solidFill>
+                  <a:srgbClr val="E2E8F0"/>
+                </a:solidFill>
+                <a:latin typeface="Sarabun"/>
+              </a:defRPr>
+            </a:pPr>
+            <a:r>
+              <a:t>• เกิดการรอคอยอย่างไร้จุดหมาย และความแออัดสะสมหนาแน่นในบางสถานี</a:t>
+            </a:r>
+          </a:p>
+          <a:p>
+            <a:pPr>
+              <a:spcAft>
+                <a:spcPts val="800"/>
+              </a:spcAft>
+              <a:defRPr sz="1300">
+                <a:solidFill>
+                  <a:srgbClr val="E2E8F0"/>
+                </a:solidFill>
+                <a:latin typeface="Sarabun"/>
+              </a:defRPr>
+            </a:pPr>
+            <a:r>
+              <a:t>• คนขับและเจ้าหน้าที่ไม่ทราบจำนวนผู้โดยสารที่รอในสถานีถัดไป</a:t>
+            </a:r>
+          </a:p>
+          <a:p>
+            <a:pPr>
+              <a:spcAft>
+                <a:spcPts val="800"/>
+              </a:spcAft>
+              <a:defRPr sz="1300">
+                <a:solidFill>
+                  <a:srgbClr val="E2E8F0"/>
+                </a:solidFill>
+                <a:latin typeface="Sarabun"/>
+              </a:defRPr>
+            </a:pPr>
+            <a:r>
+              <a:t>• การจัดคิวขึ้นรถยังเป็นแบบดั้งเดิม ขาดความเป็นระเบียบและโปร่งใส</a:t>
+            </a:r>
+          </a:p>
+        </p:txBody>
+      </p:sp>
+      <p:sp>
+        <p:nvSpPr>
+          <p:cNvPr id="7" name="Rounded Rectangle 6"/>
+          <p:cNvSpPr/>
+          <p:nvPr/>
+        </p:nvSpPr>
+        <p:spPr>
+          <a:xfrm>
+            <a:off x="8046720" y="1691640"/>
+            <a:ext cx="3429000" cy="4480560"/>
+          </a:xfrm>
+          <a:prstGeom prst="roundRect">
+            <a:avLst/>
+          </a:prstGeom>
+          <a:solidFill>
+            <a:srgbClr val="0E261C"/>
+          </a:solidFill>
+          <a:ln w="19050">
+            <a:solidFill>
+              <a:srgbClr val="F59E0B"/>
+            </a:solidFill>
+          </a:ln>
+        </p:spPr>
+        <p:style>
+          <a:lnRef idx="1">
+            <a:schemeClr val="accent1"/>
+          </a:lnRef>
+          <a:fillRef idx="3">
+            <a:schemeClr val="accent1"/>
+          </a:fillRef>
+          <a:effectRef idx="2">
+            <a:schemeClr val="accent1"/>
+          </a:effectRef>
+          <a:fontRef idx="minor">
+            <a:schemeClr val="lt1"/>
+          </a:fontRef>
+        </p:style>
+        <p:txBody>
+          <a:bodyPr rtlCol="0" anchor="ctr" wrap="square" lIns="256032" rIns="256032" tIns="256032"/>
+          <a:lstStyle/>
+          <a:p>
+            <a:pPr algn="ctr">
+              <a:spcAft>
+                <a:spcPts val="400"/>
+              </a:spcAft>
+              <a:defRPr sz="2800" b="1">
+                <a:solidFill>
+                  <a:srgbClr val="F59E0B"/>
+                </a:solidFill>
+                <a:latin typeface="Prompt"/>
+              </a:defRPr>
+            </a:pPr>
+            <a:r>
+              <a:t>03</a:t>
+            </a:r>
+          </a:p>
+          <a:p>
+            <a:pPr>
+              <a:defRPr sz="1800" b="1">
+                <a:solidFill>
+                  <a:srgbClr val="FFFFFF"/>
+                </a:solidFill>
+                <a:latin typeface="Prompt"/>
+              </a:defRPr>
+            </a:pPr>
+            <a:r>
+              <a:t>ขาดข้อมูลสถิติเพื่อวางแผน</a:t>
+            </a:r>
+          </a:p>
+          <a:p>
+            <a:pPr>
+              <a:spcAft>
+                <a:spcPts val="1200"/>
+              </a:spcAft>
+              <a:defRPr sz="1050">
+                <a:solidFill>
+                  <a:srgbClr val="6EE7B7"/>
+                </a:solidFill>
+                <a:latin typeface="Prompt"/>
+              </a:defRPr>
+            </a:pPr>
+            <a:r>
+              <a:t>NO DATA-DRIVEN ANALYTICS</a:t>
+            </a:r>
+          </a:p>
+          <a:p>
+            <a:pPr>
+              <a:spcAft>
+                <a:spcPts val="800"/>
+              </a:spcAft>
+              <a:defRPr sz="1300">
+                <a:solidFill>
+                  <a:srgbClr val="E2E8F0"/>
+                </a:solidFill>
+                <a:latin typeface="Sarabun"/>
+              </a:defRPr>
+            </a:pPr>
+            <a:r>
+              <a:t>• ขาดระบบจัดเก็บข้อมูลการใช้บริการแบบดิจิทัล</a:t>
+            </a:r>
+          </a:p>
+          <a:p>
+            <a:pPr>
+              <a:spcAft>
+                <a:spcPts val="800"/>
+              </a:spcAft>
+              <a:defRPr sz="1300">
+                <a:solidFill>
+                  <a:srgbClr val="E2E8F0"/>
+                </a:solidFill>
+                <a:latin typeface="Sarabun"/>
+              </a:defRPr>
+            </a:pPr>
+            <a:r>
+              <a:t>• ไม่มีข้อมูลเชิงพื้นที่ (Spatial Data) ว่าจุดใดมีความหนาแน่นสูงสุดในแต่ละช่วงเวลา</a:t>
+            </a:r>
+          </a:p>
+          <a:p>
+            <a:pPr>
+              <a:spcAft>
+                <a:spcPts val="800"/>
+              </a:spcAft>
+              <a:defRPr sz="1300">
+                <a:solidFill>
+                  <a:srgbClr val="E2E8F0"/>
+                </a:solidFill>
+                <a:latin typeface="Sarabun"/>
+              </a:defRPr>
+            </a:pPr>
+            <a:r>
+              <a:t>• ผู้บริหารไม่สามารถนำข้อมูลมาวิเคราะห์เพื่อจัดสรรทรัพยากรได้อย่างตรงจุด</a:t>
+            </a:r>
+          </a:p>
+          <a:p>
+            <a:pPr>
+              <a:spcAft>
+                <a:spcPts val="800"/>
+              </a:spcAft>
+              <a:defRPr sz="1300">
+                <a:solidFill>
+                  <a:srgbClr val="E2E8F0"/>
+                </a:solidFill>
+                <a:latin typeface="Sarabun"/>
+              </a:defRPr>
+            </a:pPr>
+            <a:r>
+              <a:t>• ระบบตั๋วและการตรวจสอบยังไม่เชื่อมโยงกับระบบหลังบ้าน</a:t>
+            </a:r>
+          </a:p>
+        </p:txBody>
+      </p:sp>
     </p:spTree>
   </p:cSld>
   <p:clrMapOvr>
@@ -4780,7 +7408,7 @@
 </p:sld>
 </file>
 
-<file path=ppt/slides/slide4.xml><?xml version="1.0" encoding="utf-8"?>
+<file path=ppt/slides/slide3.xml><?xml version="1.0" encoding="utf-8"?>
 <p:sld xmlns:a="http://schemas.openxmlformats.org/drawingml/2006/main" xmlns:p="http://schemas.openxmlformats.org/presentationml/2006/main" xmlns:r="http://schemas.openxmlformats.org/officeDocument/2006/relationships">
   <p:cSld>
     <p:spTree>
@@ -4792,7 +7420,7 @@
       <p:grpSpPr/>
       <p:pic>
         <p:nvPicPr>
-          <p:cNvPr id="2" name="Picture 1" descr="slide_04.jpg"/>
+          <p:cNvPr id="2" name="Picture 1" descr="dark_topographic_bg.jpg"/>
           <p:cNvPicPr>
             <a:picLocks noChangeAspect="1"/>
           </p:cNvPicPr>
@@ -4814,6 +7442,491 @@
           </a:prstGeom>
         </p:spPr>
       </p:pic>
+      <p:sp>
+        <p:nvSpPr>
+          <p:cNvPr id="3" name="Rounded Rectangle 2"/>
+          <p:cNvSpPr/>
+          <p:nvPr/>
+        </p:nvSpPr>
+        <p:spPr>
+          <a:xfrm>
+            <a:off x="731520" y="365760"/>
+            <a:ext cx="3200400" cy="320040"/>
+          </a:xfrm>
+          <a:prstGeom prst="roundRect">
+            <a:avLst/>
+          </a:prstGeom>
+          <a:solidFill>
+            <a:srgbClr val="123024"/>
+          </a:solidFill>
+          <a:ln w="12700">
+            <a:solidFill>
+              <a:srgbClr val="52B788"/>
+            </a:solidFill>
+          </a:ln>
+        </p:spPr>
+        <p:style>
+          <a:lnRef idx="1">
+            <a:schemeClr val="accent1"/>
+          </a:lnRef>
+          <a:fillRef idx="3">
+            <a:schemeClr val="accent1"/>
+          </a:fillRef>
+          <a:effectRef idx="2">
+            <a:schemeClr val="accent1"/>
+          </a:effectRef>
+          <a:fontRef idx="minor">
+            <a:schemeClr val="lt1"/>
+          </a:fontRef>
+        </p:style>
+        <p:txBody>
+          <a:bodyPr rtlCol="0" anchor="ctr" wrap="square" lIns="0" rIns="0" tIns="0" bIns="0"/>
+          <a:lstStyle/>
+          <a:p>
+            <a:pPr algn="ctr">
+              <a:defRPr sz="1100" b="1">
+                <a:solidFill>
+                  <a:srgbClr val="6EE7B7"/>
+                </a:solidFill>
+                <a:latin typeface="Prompt"/>
+              </a:defRPr>
+            </a:pPr>
+            <a:r>
+              <a:t>STRATEGY &amp; VISION</a:t>
+            </a:r>
+          </a:p>
+        </p:txBody>
+      </p:sp>
+      <p:sp>
+        <p:nvSpPr>
+          <p:cNvPr id="4" name="TextBox 3"/>
+          <p:cNvSpPr txBox="1"/>
+          <p:nvPr/>
+        </p:nvSpPr>
+        <p:spPr>
+          <a:xfrm>
+            <a:off x="731520" y="685800"/>
+            <a:ext cx="10728655" cy="868680"/>
+          </a:xfrm>
+          <a:prstGeom prst="rect">
+            <a:avLst/>
+          </a:prstGeom>
+          <a:noFill/>
+        </p:spPr>
+        <p:txBody>
+          <a:bodyPr wrap="square" lIns="0" rIns="0" tIns="0" bIns="0">
+            <a:spAutoFit/>
+          </a:bodyPr>
+          <a:lstStyle/>
+          <a:p>
+            <a:pPr>
+              <a:spcAft>
+                <a:spcPts val="300"/>
+              </a:spcAft>
+              <a:defRPr sz="2600" b="1">
+                <a:solidFill>
+                  <a:srgbClr val="FFFFFF"/>
+                </a:solidFill>
+                <a:latin typeface="Prompt"/>
+              </a:defRPr>
+            </a:pPr>
+            <a:r>
+              <a:t>วิสัยทัศน์และวัตถุประสงค์โครงการ</a:t>
+            </a:r>
+          </a:p>
+          <a:p>
+            <a:pPr>
+              <a:defRPr sz="1400">
+                <a:solidFill>
+                  <a:srgbClr val="A7F3D0"/>
+                </a:solidFill>
+                <a:latin typeface="Sarabun"/>
+              </a:defRPr>
+            </a:pPr>
+            <a:r>
+              <a:t>มุ่งสู่สวนพฤกษศาสตร์อัจฉริยะ เป็นมิตรกับสิ่งแวดล้อม และยั่งยืน</a:t>
+            </a:r>
+          </a:p>
+        </p:txBody>
+      </p:sp>
+      <p:sp>
+        <p:nvSpPr>
+          <p:cNvPr id="5" name="Rounded Rectangle 4"/>
+          <p:cNvSpPr/>
+          <p:nvPr/>
+        </p:nvSpPr>
+        <p:spPr>
+          <a:xfrm>
+            <a:off x="731520" y="1691640"/>
+            <a:ext cx="5486400" cy="4480560"/>
+          </a:xfrm>
+          <a:prstGeom prst="roundRect">
+            <a:avLst/>
+          </a:prstGeom>
+          <a:solidFill>
+            <a:srgbClr val="0E261C"/>
+          </a:solidFill>
+          <a:ln w="19050">
+            <a:solidFill>
+              <a:srgbClr val="52B788"/>
+            </a:solidFill>
+          </a:ln>
+        </p:spPr>
+        <p:style>
+          <a:lnRef idx="1">
+            <a:schemeClr val="accent1"/>
+          </a:lnRef>
+          <a:fillRef idx="3">
+            <a:schemeClr val="accent1"/>
+          </a:fillRef>
+          <a:effectRef idx="2">
+            <a:schemeClr val="accent1"/>
+          </a:effectRef>
+          <a:fontRef idx="minor">
+            <a:schemeClr val="lt1"/>
+          </a:fontRef>
+        </p:style>
+        <p:txBody>
+          <a:bodyPr rtlCol="0" anchor="ctr" wrap="square" lIns="320040" rIns="320040" tIns="320040"/>
+          <a:lstStyle/>
+          <a:p>
+            <a:pPr algn="ctr">
+              <a:spcAft>
+                <a:spcPts val="1600"/>
+              </a:spcAft>
+              <a:defRPr sz="2000" b="1">
+                <a:solidFill>
+                  <a:srgbClr val="6EE7B7"/>
+                </a:solidFill>
+                <a:latin typeface="Prompt"/>
+              </a:defRPr>
+            </a:pPr>
+            <a:r>
+              <a:t>วัตถุประสงค์หลัก (Core Objectives)</a:t>
+            </a:r>
+          </a:p>
+          <a:p>
+            <a:pPr>
+              <a:spcAft>
+                <a:spcPts val="200"/>
+              </a:spcAft>
+              <a:defRPr sz="1600" b="1">
+                <a:solidFill>
+                  <a:srgbClr val="FFFFFF"/>
+                </a:solidFill>
+                <a:latin typeface="Prompt"/>
+              </a:defRPr>
+            </a:pPr>
+            <a:r>
+              <a:t>1. ศึกษาวิเคราะห์และออกแบบระบบสารสนเทศ</a:t>
+            </a:r>
+          </a:p>
+          <a:p>
+            <a:pPr>
+              <a:spcAft>
+                <a:spcPts val="1400"/>
+              </a:spcAft>
+              <a:defRPr sz="1300">
+                <a:solidFill>
+                  <a:srgbClr val="E2E8F0"/>
+                </a:solidFill>
+                <a:latin typeface="Sarabun"/>
+              </a:defRPr>
+            </a:pPr>
+            <a:r>
+              <a:t>วิเคราะห์ ออกแบบระบบฐานข้อมูล และสถาปัตยกรรมสารสนเทศรถนำเที่ยวไฟฟ้าเพื่อการบริหารจัดการที่มีประสิทธิภาพสูงสุด</a:t>
+            </a:r>
+          </a:p>
+          <a:p>
+            <a:pPr>
+              <a:spcAft>
+                <a:spcPts val="200"/>
+              </a:spcAft>
+              <a:defRPr sz="1600" b="1">
+                <a:solidFill>
+                  <a:srgbClr val="FFFFFF"/>
+                </a:solidFill>
+                <a:latin typeface="Prompt"/>
+              </a:defRPr>
+            </a:pPr>
+            <a:r>
+              <a:t>2. พัฒนาแอปพลิเคชันจัดการรถนำเที่ยวครบวงจร</a:t>
+            </a:r>
+          </a:p>
+          <a:p>
+            <a:pPr>
+              <a:spcAft>
+                <a:spcPts val="1400"/>
+              </a:spcAft>
+              <a:defRPr sz="1300">
+                <a:solidFill>
+                  <a:srgbClr val="E2E8F0"/>
+                </a:solidFill>
+                <a:latin typeface="Sarabun"/>
+              </a:defRPr>
+            </a:pPr>
+            <a:r>
+              <a:t>ครอบคลุมทั้งนักท่องเที่ยว (Web/Mobile App), คนขับรถ (Driver App), จุดบริการ (Kiosk) และผู้บริหาร (Dashboard)</a:t>
+            </a:r>
+          </a:p>
+          <a:p>
+            <a:pPr>
+              <a:spcAft>
+                <a:spcPts val="200"/>
+              </a:spcAft>
+              <a:defRPr sz="1600" b="1">
+                <a:solidFill>
+                  <a:srgbClr val="FFFFFF"/>
+                </a:solidFill>
+                <a:latin typeface="Prompt"/>
+              </a:defRPr>
+            </a:pPr>
+            <a:r>
+              <a:t>3. บูรณาการข้อมูลการท่องเที่ยวเชิงพื้นที่</a:t>
+            </a:r>
+          </a:p>
+          <a:p>
+            <a:pPr>
+              <a:spcAft>
+                <a:spcPts val="1400"/>
+              </a:spcAft>
+              <a:defRPr sz="1300">
+                <a:solidFill>
+                  <a:srgbClr val="E2E8F0"/>
+                </a:solidFill>
+                <a:latin typeface="Sarabun"/>
+              </a:defRPr>
+            </a:pPr>
+            <a:r>
+              <a:t>เชื่อมโยงเส้นทาง จุดท่องเที่ยว แนะนำพรรณไม้แบบ Geofences และจัดทำรายงานวิเคราะห์แบบเรียลไทม์</a:t>
+            </a:r>
+          </a:p>
+        </p:txBody>
+      </p:sp>
+      <p:sp>
+        <p:nvSpPr>
+          <p:cNvPr id="6" name="Rounded Rectangle 5"/>
+          <p:cNvSpPr/>
+          <p:nvPr/>
+        </p:nvSpPr>
+        <p:spPr>
+          <a:xfrm>
+            <a:off x="6400800" y="1691640"/>
+            <a:ext cx="5059375" cy="2057400"/>
+          </a:xfrm>
+          <a:prstGeom prst="roundRect">
+            <a:avLst/>
+          </a:prstGeom>
+          <a:solidFill>
+            <a:srgbClr val="0E261C"/>
+          </a:solidFill>
+          <a:ln w="19050">
+            <a:solidFill>
+              <a:srgbClr val="52B788"/>
+            </a:solidFill>
+          </a:ln>
+        </p:spPr>
+        <p:style>
+          <a:lnRef idx="1">
+            <a:schemeClr val="accent1"/>
+          </a:lnRef>
+          <a:fillRef idx="3">
+            <a:schemeClr val="accent1"/>
+          </a:fillRef>
+          <a:effectRef idx="2">
+            <a:schemeClr val="accent1"/>
+          </a:effectRef>
+          <a:fontRef idx="minor">
+            <a:schemeClr val="lt1"/>
+          </a:fontRef>
+        </p:style>
+        <p:txBody>
+          <a:bodyPr rtlCol="0" anchor="ctr"/>
+          <a:lstStyle/>
+          <a:p>
+            <a:pPr algn="ctr"/>
+          </a:p>
+        </p:txBody>
+      </p:sp>
+      <p:pic>
+        <p:nvPicPr>
+          <p:cNvPr id="7" name="Picture 6" descr="ev_cart_side.jpg"/>
+          <p:cNvPicPr>
+            <a:picLocks noChangeAspect="1"/>
+          </p:cNvPicPr>
+          <p:nvPr/>
+        </p:nvPicPr>
+        <p:blipFill>
+          <a:blip r:embed="rId3"/>
+          <a:stretch>
+            <a:fillRect/>
+          </a:stretch>
+        </p:blipFill>
+        <p:spPr>
+          <a:xfrm>
+            <a:off x="6537960" y="1783080"/>
+            <a:ext cx="2286000" cy="1874519"/>
+          </a:xfrm>
+          <a:prstGeom prst="rect">
+            <a:avLst/>
+          </a:prstGeom>
+        </p:spPr>
+      </p:pic>
+      <p:sp>
+        <p:nvSpPr>
+          <p:cNvPr id="8" name="TextBox 7"/>
+          <p:cNvSpPr txBox="1"/>
+          <p:nvPr/>
+        </p:nvSpPr>
+        <p:spPr>
+          <a:xfrm>
+            <a:off x="8961120" y="1783080"/>
+            <a:ext cx="2377440" cy="1828800"/>
+          </a:xfrm>
+          <a:prstGeom prst="rect">
+            <a:avLst/>
+          </a:prstGeom>
+          <a:noFill/>
+        </p:spPr>
+        <p:txBody>
+          <a:bodyPr wrap="square" lIns="0" rIns="0" tIns="0" bIns="0">
+            <a:spAutoFit/>
+          </a:bodyPr>
+          <a:lstStyle/>
+          <a:p>
+            <a:pPr>
+              <a:defRPr sz="1600" b="1">
+                <a:solidFill>
+                  <a:srgbClr val="FFFFFF"/>
+                </a:solidFill>
+                <a:latin typeface="Prompt"/>
+              </a:defRPr>
+            </a:pPr>
+            <a:r>
+              <a:t>รถนำเที่ยวไฟฟ้าจริง</a:t>
+            </a:r>
+          </a:p>
+          <a:p>
+            <a:pPr>
+              <a:defRPr sz="1200">
+                <a:solidFill>
+                  <a:srgbClr val="E2E8F0"/>
+                </a:solidFill>
+                <a:latin typeface="Sarabun"/>
+              </a:defRPr>
+            </a:pPr>
+            <a:r>
+              <a:t>ขับเคลื่อนด้วยพลังงานสะอาด 100% ไร้เสียง ไร้ควัน เป็นมิตรต่อพรรณไม้ พร้อมเชื่อมต่อแท็บเล็ตดิจิทัล</a:t>
+            </a:r>
+          </a:p>
+        </p:txBody>
+      </p:sp>
+      <p:sp>
+        <p:nvSpPr>
+          <p:cNvPr id="9" name="Rounded Rectangle 8"/>
+          <p:cNvSpPr/>
+          <p:nvPr/>
+        </p:nvSpPr>
+        <p:spPr>
+          <a:xfrm>
+            <a:off x="6400800" y="3931920"/>
+            <a:ext cx="5059375" cy="2240280"/>
+          </a:xfrm>
+          <a:prstGeom prst="roundRect">
+            <a:avLst/>
+          </a:prstGeom>
+          <a:solidFill>
+            <a:srgbClr val="0E261C"/>
+          </a:solidFill>
+          <a:ln w="19050">
+            <a:solidFill>
+              <a:srgbClr val="52B788"/>
+            </a:solidFill>
+          </a:ln>
+        </p:spPr>
+        <p:style>
+          <a:lnRef idx="1">
+            <a:schemeClr val="accent1"/>
+          </a:lnRef>
+          <a:fillRef idx="3">
+            <a:schemeClr val="accent1"/>
+          </a:fillRef>
+          <a:effectRef idx="2">
+            <a:schemeClr val="accent1"/>
+          </a:effectRef>
+          <a:fontRef idx="minor">
+            <a:schemeClr val="lt1"/>
+          </a:fontRef>
+        </p:style>
+        <p:txBody>
+          <a:bodyPr rtlCol="0" anchor="ctr" wrap="square" lIns="274320" rIns="274320" tIns="201168"/>
+          <a:lstStyle/>
+          <a:p>
+            <a:pPr algn="ctr">
+              <a:spcAft>
+                <a:spcPts val="800"/>
+              </a:spcAft>
+              <a:defRPr sz="1700" b="1">
+                <a:solidFill>
+                  <a:srgbClr val="6EE7B7"/>
+                </a:solidFill>
+                <a:latin typeface="Prompt"/>
+              </a:defRPr>
+            </a:pPr>
+            <a:r>
+              <a:t>เป้าหมายเชิงยุทธศาสตร์และความยั่งยืน</a:t>
+            </a:r>
+          </a:p>
+          <a:p>
+            <a:pPr>
+              <a:spcAft>
+                <a:spcPts val="600"/>
+              </a:spcAft>
+              <a:defRPr sz="1250">
+                <a:solidFill>
+                  <a:srgbClr val="E2E8F0"/>
+                </a:solidFill>
+                <a:latin typeface="Sarabun"/>
+              </a:defRPr>
+            </a:pPr>
+            <a:r>
+              <a:t>1. Green EV Transition (Zero Emission): ปรับเปลี่ยนสู่รถพลังงานไฟฟ้า 100% รักษาระบบนิเวศพฤกษศาสตร์</a:t>
+            </a:r>
+          </a:p>
+          <a:p>
+            <a:pPr>
+              <a:spcAft>
+                <a:spcPts val="600"/>
+              </a:spcAft>
+              <a:defRPr sz="1250">
+                <a:solidFill>
+                  <a:srgbClr val="E2E8F0"/>
+                </a:solidFill>
+                <a:latin typeface="Sarabun"/>
+              </a:defRPr>
+            </a:pPr>
+            <a:r>
+              <a:t>2. Smart Digital Tourism Experience: นักท่องเที่ยวเข้าถึงข้อมูลสะดวกรวดเร็วผ่าน e-Ticket, Live Tracking</a:t>
+            </a:r>
+          </a:p>
+          <a:p>
+            <a:pPr>
+              <a:spcAft>
+                <a:spcPts val="600"/>
+              </a:spcAft>
+              <a:defRPr sz="1250">
+                <a:solidFill>
+                  <a:srgbClr val="E2E8F0"/>
+                </a:solidFill>
+                <a:latin typeface="Sarabun"/>
+              </a:defRPr>
+            </a:pPr>
+            <a:r>
+              <a:t>3. Data-Driven Spatial Management: ผู้บริหารมี Real-time Dashboard วางแผนพัฒนาเชิงพื้นที่ได้อย่างแม่นยำ</a:t>
+            </a:r>
+          </a:p>
+        </p:txBody>
+      </p:sp>
     </p:spTree>
   </p:cSld>
   <p:clrMapOvr>
@@ -4822,7 +7935,7 @@
 </p:sld>
 </file>
 
-<file path=ppt/slides/slide5.xml><?xml version="1.0" encoding="utf-8"?>
+<file path=ppt/slides/slide4.xml><?xml version="1.0" encoding="utf-8"?>
 <p:sld xmlns:a="http://schemas.openxmlformats.org/drawingml/2006/main" xmlns:p="http://schemas.openxmlformats.org/presentationml/2006/main" xmlns:r="http://schemas.openxmlformats.org/officeDocument/2006/relationships">
   <p:cSld>
     <p:spTree>
@@ -4834,7 +7947,7 @@
       <p:grpSpPr/>
       <p:pic>
         <p:nvPicPr>
-          <p:cNvPr id="2" name="Picture 1" descr="slide_05.jpg"/>
+          <p:cNvPr id="2" name="Picture 1" descr="dark_topographic_bg.jpg"/>
           <p:cNvPicPr>
             <a:picLocks noChangeAspect="1"/>
           </p:cNvPicPr>
@@ -4856,6 +7969,397 @@
           </a:prstGeom>
         </p:spPr>
       </p:pic>
+      <p:sp>
+        <p:nvSpPr>
+          <p:cNvPr id="3" name="Rounded Rectangle 2"/>
+          <p:cNvSpPr/>
+          <p:nvPr/>
+        </p:nvSpPr>
+        <p:spPr>
+          <a:xfrm>
+            <a:off x="731520" y="365760"/>
+            <a:ext cx="3200400" cy="320040"/>
+          </a:xfrm>
+          <a:prstGeom prst="roundRect">
+            <a:avLst/>
+          </a:prstGeom>
+          <a:solidFill>
+            <a:srgbClr val="123024"/>
+          </a:solidFill>
+          <a:ln w="12700">
+            <a:solidFill>
+              <a:srgbClr val="52B788"/>
+            </a:solidFill>
+          </a:ln>
+        </p:spPr>
+        <p:style>
+          <a:lnRef idx="1">
+            <a:schemeClr val="accent1"/>
+          </a:lnRef>
+          <a:fillRef idx="3">
+            <a:schemeClr val="accent1"/>
+          </a:fillRef>
+          <a:effectRef idx="2">
+            <a:schemeClr val="accent1"/>
+          </a:effectRef>
+          <a:fontRef idx="minor">
+            <a:schemeClr val="lt1"/>
+          </a:fontRef>
+        </p:style>
+        <p:txBody>
+          <a:bodyPr rtlCol="0" anchor="ctr" wrap="square" lIns="0" rIns="0" tIns="0" bIns="0"/>
+          <a:lstStyle/>
+          <a:p>
+            <a:pPr algn="ctr">
+              <a:defRPr sz="1100" b="1">
+                <a:solidFill>
+                  <a:srgbClr val="6EE7B7"/>
+                </a:solidFill>
+                <a:latin typeface="Prompt"/>
+              </a:defRPr>
+            </a:pPr>
+            <a:r>
+              <a:t>ARCHITECTURE</a:t>
+            </a:r>
+          </a:p>
+        </p:txBody>
+      </p:sp>
+      <p:sp>
+        <p:nvSpPr>
+          <p:cNvPr id="4" name="TextBox 3"/>
+          <p:cNvSpPr txBox="1"/>
+          <p:nvPr/>
+        </p:nvSpPr>
+        <p:spPr>
+          <a:xfrm>
+            <a:off x="731520" y="685800"/>
+            <a:ext cx="10728655" cy="868680"/>
+          </a:xfrm>
+          <a:prstGeom prst="rect">
+            <a:avLst/>
+          </a:prstGeom>
+          <a:noFill/>
+        </p:spPr>
+        <p:txBody>
+          <a:bodyPr wrap="square" lIns="0" rIns="0" tIns="0" bIns="0">
+            <a:spAutoFit/>
+          </a:bodyPr>
+          <a:lstStyle/>
+          <a:p>
+            <a:pPr>
+              <a:spcAft>
+                <a:spcPts val="300"/>
+              </a:spcAft>
+              <a:defRPr sz="2600" b="1">
+                <a:solidFill>
+                  <a:srgbClr val="FFFFFF"/>
+                </a:solidFill>
+                <a:latin typeface="Prompt"/>
+              </a:defRPr>
+            </a:pPr>
+            <a:r>
+              <a:t>สถาปัตยกรรมระบบโดยรวม (4-Tier Architecture)</a:t>
+            </a:r>
+          </a:p>
+          <a:p>
+            <a:pPr>
+              <a:defRPr sz="1400">
+                <a:solidFill>
+                  <a:srgbClr val="A7F3D0"/>
+                </a:solidFill>
+                <a:latin typeface="Sarabun"/>
+              </a:defRPr>
+            </a:pPr>
+            <a:r>
+              <a:t>โครงสร้างระบบเชื่อมโยงระหว่างผู้ใช้ ระบบประมวลผล IoT และฐานข้อมูลอย่างมีเสถียรภาพ</a:t>
+            </a:r>
+          </a:p>
+        </p:txBody>
+      </p:sp>
+      <p:sp>
+        <p:nvSpPr>
+          <p:cNvPr id="5" name="Rounded Rectangle 4"/>
+          <p:cNvSpPr/>
+          <p:nvPr/>
+        </p:nvSpPr>
+        <p:spPr>
+          <a:xfrm>
+            <a:off x="731520" y="1691640"/>
+            <a:ext cx="10728655" cy="1051560"/>
+          </a:xfrm>
+          <a:prstGeom prst="roundRect">
+            <a:avLst/>
+          </a:prstGeom>
+          <a:solidFill>
+            <a:srgbClr val="0E261C"/>
+          </a:solidFill>
+          <a:ln w="19050">
+            <a:solidFill>
+              <a:srgbClr val="38BDF8"/>
+            </a:solidFill>
+          </a:ln>
+        </p:spPr>
+        <p:style>
+          <a:lnRef idx="1">
+            <a:schemeClr val="accent1"/>
+          </a:lnRef>
+          <a:fillRef idx="3">
+            <a:schemeClr val="accent1"/>
+          </a:fillRef>
+          <a:effectRef idx="2">
+            <a:schemeClr val="accent1"/>
+          </a:effectRef>
+          <a:fontRef idx="minor">
+            <a:schemeClr val="lt1"/>
+          </a:fontRef>
+        </p:style>
+        <p:txBody>
+          <a:bodyPr rtlCol="0" anchor="ctr" wrap="square" lIns="274320" rIns="274320" tIns="109728"/>
+          <a:lstStyle/>
+          <a:p>
+            <a:pPr algn="ctr">
+              <a:spcAft>
+                <a:spcPts val="300"/>
+              </a:spcAft>
+              <a:defRPr sz="1500" b="1">
+                <a:solidFill>
+                  <a:srgbClr val="38BDF8"/>
+                </a:solidFill>
+                <a:latin typeface="Prompt"/>
+              </a:defRPr>
+            </a:pPr>
+            <a:r>
+              <a:t>LAYER 1: Frontend Channels (Omnichannel)</a:t>
+            </a:r>
+          </a:p>
+          <a:p>
+            <a:pPr>
+              <a:defRPr sz="1250">
+                <a:solidFill>
+                  <a:srgbClr val="E2E8F0"/>
+                </a:solidFill>
+                <a:latin typeface="Sarabun"/>
+              </a:defRPr>
+            </a:pPr>
+            <a:r>
+              <a:t>Web App (จองตั๋วออนไลน์ล่วงหน้า)   •   Mobile App (iOS / Android สำหรับนักท่องเที่ยว)   •   Kiosk Touchscreen (ตู้ซื้อตั๋วหน้าสถานี)   •   Driver App (แอปคนขับบน Tablet ประจำรถ)</a:t>
+            </a:r>
+          </a:p>
+        </p:txBody>
+      </p:sp>
+      <p:sp>
+        <p:nvSpPr>
+          <p:cNvPr id="6" name="Rounded Rectangle 5"/>
+          <p:cNvSpPr/>
+          <p:nvPr/>
+        </p:nvSpPr>
+        <p:spPr>
+          <a:xfrm>
+            <a:off x="731520" y="2834640"/>
+            <a:ext cx="10728655" cy="1051560"/>
+          </a:xfrm>
+          <a:prstGeom prst="roundRect">
+            <a:avLst/>
+          </a:prstGeom>
+          <a:solidFill>
+            <a:srgbClr val="0E261C"/>
+          </a:solidFill>
+          <a:ln w="19050">
+            <a:solidFill>
+              <a:srgbClr val="52B788"/>
+            </a:solidFill>
+          </a:ln>
+        </p:spPr>
+        <p:style>
+          <a:lnRef idx="1">
+            <a:schemeClr val="accent1"/>
+          </a:lnRef>
+          <a:fillRef idx="3">
+            <a:schemeClr val="accent1"/>
+          </a:fillRef>
+          <a:effectRef idx="2">
+            <a:schemeClr val="accent1"/>
+          </a:effectRef>
+          <a:fontRef idx="minor">
+            <a:schemeClr val="lt1"/>
+          </a:fontRef>
+        </p:style>
+        <p:txBody>
+          <a:bodyPr rtlCol="0" anchor="ctr" wrap="square" lIns="274320" rIns="274320" tIns="109728"/>
+          <a:lstStyle/>
+          <a:p>
+            <a:pPr algn="ctr">
+              <a:spcAft>
+                <a:spcPts val="300"/>
+              </a:spcAft>
+              <a:defRPr sz="1500" b="1">
+                <a:solidFill>
+                  <a:srgbClr val="52B788"/>
+                </a:solidFill>
+                <a:latin typeface="Prompt"/>
+              </a:defRPr>
+            </a:pPr>
+            <a:r>
+              <a:t>LAYER 2: API Gateway &amp; Backend Services (Core Logic)</a:t>
+            </a:r>
+          </a:p>
+          <a:p>
+            <a:pPr>
+              <a:defRPr sz="1250">
+                <a:solidFill>
+                  <a:srgbClr val="E2E8F0"/>
+                </a:solidFill>
+                <a:latin typeface="Sarabun"/>
+              </a:defRPr>
+            </a:pPr>
+            <a:r>
+              <a:t>API Gateway: Authentication, Request Routing, Rate Limiting   •   Ticket Service (ระบบจำหน่ายตั๋วและ e-Ticket)   •   Bus Tracking Service (คำนวณตำแหน่งและ Dynamic ETA)   •   Station Service (จัดการ 6 สถานี)  |  Payment Service (เชื่อมต่อ Gateway)</a:t>
+            </a:r>
+          </a:p>
+        </p:txBody>
+      </p:sp>
+      <p:sp>
+        <p:nvSpPr>
+          <p:cNvPr id="7" name="Rounded Rectangle 6"/>
+          <p:cNvSpPr/>
+          <p:nvPr/>
+        </p:nvSpPr>
+        <p:spPr>
+          <a:xfrm>
+            <a:off x="731520" y="3977639"/>
+            <a:ext cx="10728655" cy="1051560"/>
+          </a:xfrm>
+          <a:prstGeom prst="roundRect">
+            <a:avLst/>
+          </a:prstGeom>
+          <a:solidFill>
+            <a:srgbClr val="0E261C"/>
+          </a:solidFill>
+          <a:ln w="19050">
+            <a:solidFill>
+              <a:srgbClr val="6EE7B7"/>
+            </a:solidFill>
+          </a:ln>
+        </p:spPr>
+        <p:style>
+          <a:lnRef idx="1">
+            <a:schemeClr val="accent1"/>
+          </a:lnRef>
+          <a:fillRef idx="3">
+            <a:schemeClr val="accent1"/>
+          </a:fillRef>
+          <a:effectRef idx="2">
+            <a:schemeClr val="accent1"/>
+          </a:effectRef>
+          <a:fontRef idx="minor">
+            <a:schemeClr val="lt1"/>
+          </a:fontRef>
+        </p:style>
+        <p:txBody>
+          <a:bodyPr rtlCol="0" anchor="ctr" wrap="square" lIns="274320" rIns="274320" tIns="109728"/>
+          <a:lstStyle/>
+          <a:p>
+            <a:pPr algn="ctr">
+              <a:spcAft>
+                <a:spcPts val="300"/>
+              </a:spcAft>
+              <a:defRPr sz="1500" b="1">
+                <a:solidFill>
+                  <a:srgbClr val="6EE7B7"/>
+                </a:solidFill>
+                <a:latin typeface="Prompt"/>
+              </a:defRPr>
+            </a:pPr>
+            <a:r>
+              <a:t>LAYER 3: Realtime &amp; IoT Layer (Live Streaming)</a:t>
+            </a:r>
+          </a:p>
+          <a:p>
+            <a:pPr>
+              <a:defRPr sz="1250">
+                <a:solidFill>
+                  <a:srgbClr val="E2E8F0"/>
+                </a:solidFill>
+                <a:latin typeface="Sarabun"/>
+              </a:defRPr>
+            </a:pPr>
+            <a:r>
+              <a:t>GPS Units บนรถ 3 คัน: สตรีมพิกัดตำแหน่ง Real-time ทุกๆ 5 วินาที ผ่าน 4G   •   QR / RFID Scanner: สแกนตรวจตั๋ว Check-in ขึ้นรถทันทีภายใน 1 วินาที   •   WebSocket Server: กระจายพิกัดและสถานะคิวแบบ Two-way Streaming สดๆ</a:t>
+            </a:r>
+          </a:p>
+        </p:txBody>
+      </p:sp>
+      <p:sp>
+        <p:nvSpPr>
+          <p:cNvPr id="8" name="Rounded Rectangle 7"/>
+          <p:cNvSpPr/>
+          <p:nvPr/>
+        </p:nvSpPr>
+        <p:spPr>
+          <a:xfrm>
+            <a:off x="731520" y="5120640"/>
+            <a:ext cx="10728655" cy="1051560"/>
+          </a:xfrm>
+          <a:prstGeom prst="roundRect">
+            <a:avLst/>
+          </a:prstGeom>
+          <a:solidFill>
+            <a:srgbClr val="0E261C"/>
+          </a:solidFill>
+          <a:ln w="19050">
+            <a:solidFill>
+              <a:srgbClr val="F59E0B"/>
+            </a:solidFill>
+          </a:ln>
+        </p:spPr>
+        <p:style>
+          <a:lnRef idx="1">
+            <a:schemeClr val="accent1"/>
+          </a:lnRef>
+          <a:fillRef idx="3">
+            <a:schemeClr val="accent1"/>
+          </a:fillRef>
+          <a:effectRef idx="2">
+            <a:schemeClr val="accent1"/>
+          </a:effectRef>
+          <a:fontRef idx="minor">
+            <a:schemeClr val="lt1"/>
+          </a:fontRef>
+        </p:style>
+        <p:txBody>
+          <a:bodyPr rtlCol="0" anchor="ctr" wrap="square" lIns="274320" rIns="274320" tIns="109728"/>
+          <a:lstStyle/>
+          <a:p>
+            <a:pPr algn="ctr">
+              <a:spcAft>
+                <a:spcPts val="300"/>
+              </a:spcAft>
+              <a:defRPr sz="1500" b="1">
+                <a:solidFill>
+                  <a:srgbClr val="F59E0B"/>
+                </a:solidFill>
+                <a:latin typeface="Prompt"/>
+              </a:defRPr>
+            </a:pPr>
+            <a:r>
+              <a:t>LAYER 4: Database &amp; Storage (High Reliability)</a:t>
+            </a:r>
+          </a:p>
+          <a:p>
+            <a:pPr>
+              <a:defRPr sz="1250">
+                <a:solidFill>
+                  <a:srgbClr val="E2E8F0"/>
+                </a:solidFill>
+                <a:latin typeface="Sarabun"/>
+              </a:defRPr>
+            </a:pPr>
+            <a:r>
+              <a:t>PostgreSQL: ฐานข้อมูลหลัก จัดเก็บข้อมูลผู้ใช้, สิทธิ์ตั๋ว, รายได้ และธุรกรรม   •   Redis: In-memory Cache สำหรับแคชคิวรถและสถานะตั๋วความเร็วสูง   •   TimescaleDB: Time-series DB บันทึกพิกัด GPS นับล้านเรคคอร์ดโดยไม่หน่วง   •   Cloud File Storage: จัดเก็บภาพนิ่ง เอกสาร และไฟล์สำรองระบบ</a:t>
+            </a:r>
+          </a:p>
+        </p:txBody>
+      </p:sp>
     </p:spTree>
   </p:cSld>
   <p:clrMapOvr>
@@ -4864,7 +8368,7 @@
 </p:sld>
 </file>
 
-<file path=ppt/slides/slide6.xml><?xml version="1.0" encoding="utf-8"?>
+<file path=ppt/slides/slide5.xml><?xml version="1.0" encoding="utf-8"?>
 <p:sld xmlns:a="http://schemas.openxmlformats.org/drawingml/2006/main" xmlns:p="http://schemas.openxmlformats.org/presentationml/2006/main" xmlns:r="http://schemas.openxmlformats.org/officeDocument/2006/relationships">
   <p:cSld>
     <p:spTree>
@@ -4876,7 +8380,7 @@
       <p:grpSpPr/>
       <p:pic>
         <p:nvPicPr>
-          <p:cNvPr id="2" name="Picture 1" descr="slide_06.jpg"/>
+          <p:cNvPr id="2" name="Picture 1" descr="dark_topographic_bg.jpg"/>
           <p:cNvPicPr>
             <a:picLocks noChangeAspect="1"/>
           </p:cNvPicPr>
@@ -4898,6 +8402,688 @@
           </a:prstGeom>
         </p:spPr>
       </p:pic>
+      <p:sp>
+        <p:nvSpPr>
+          <p:cNvPr id="3" name="Rounded Rectangle 2"/>
+          <p:cNvSpPr/>
+          <p:nvPr/>
+        </p:nvSpPr>
+        <p:spPr>
+          <a:xfrm>
+            <a:off x="731520" y="365760"/>
+            <a:ext cx="3200400" cy="320040"/>
+          </a:xfrm>
+          <a:prstGeom prst="roundRect">
+            <a:avLst/>
+          </a:prstGeom>
+          <a:solidFill>
+            <a:srgbClr val="123024"/>
+          </a:solidFill>
+          <a:ln w="12700">
+            <a:solidFill>
+              <a:srgbClr val="52B788"/>
+            </a:solidFill>
+          </a:ln>
+        </p:spPr>
+        <p:style>
+          <a:lnRef idx="1">
+            <a:schemeClr val="accent1"/>
+          </a:lnRef>
+          <a:fillRef idx="3">
+            <a:schemeClr val="accent1"/>
+          </a:fillRef>
+          <a:effectRef idx="2">
+            <a:schemeClr val="accent1"/>
+          </a:effectRef>
+          <a:fontRef idx="minor">
+            <a:schemeClr val="lt1"/>
+          </a:fontRef>
+        </p:style>
+        <p:txBody>
+          <a:bodyPr rtlCol="0" anchor="ctr" wrap="square" lIns="0" rIns="0" tIns="0" bIns="0"/>
+          <a:lstStyle/>
+          <a:p>
+            <a:pPr algn="ctr">
+              <a:defRPr sz="1100" b="1">
+                <a:solidFill>
+                  <a:srgbClr val="6EE7B7"/>
+                </a:solidFill>
+                <a:latin typeface="Prompt"/>
+              </a:defRPr>
+            </a:pPr>
+            <a:r>
+              <a:t>E-TICKET FLOW</a:t>
+            </a:r>
+          </a:p>
+        </p:txBody>
+      </p:sp>
+      <p:sp>
+        <p:nvSpPr>
+          <p:cNvPr id="4" name="TextBox 3"/>
+          <p:cNvSpPr txBox="1"/>
+          <p:nvPr/>
+        </p:nvSpPr>
+        <p:spPr>
+          <a:xfrm>
+            <a:off x="731520" y="685800"/>
+            <a:ext cx="10728655" cy="868680"/>
+          </a:xfrm>
+          <a:prstGeom prst="rect">
+            <a:avLst/>
+          </a:prstGeom>
+          <a:noFill/>
+        </p:spPr>
+        <p:txBody>
+          <a:bodyPr wrap="square" lIns="0" rIns="0" tIns="0" bIns="0">
+            <a:spAutoFit/>
+          </a:bodyPr>
+          <a:lstStyle/>
+          <a:p>
+            <a:pPr>
+              <a:spcAft>
+                <a:spcPts val="300"/>
+              </a:spcAft>
+              <a:defRPr sz="2600" b="1">
+                <a:solidFill>
+                  <a:srgbClr val="FFFFFF"/>
+                </a:solidFill>
+                <a:latin typeface="Prompt"/>
+              </a:defRPr>
+            </a:pPr>
+            <a:r>
+              <a:t>e-Ticket Flow — กระบวนการตั้งแต่เลือกซื้อจนขึ้นรถ</a:t>
+            </a:r>
+          </a:p>
+          <a:p>
+            <a:pPr>
+              <a:defRPr sz="1400">
+                <a:solidFill>
+                  <a:srgbClr val="A7F3D0"/>
+                </a:solidFill>
+                <a:latin typeface="Sarabun"/>
+              </a:defRPr>
+            </a:pPr>
+            <a:r>
+              <a:t>กระบวนการจำหน่ายตั๋ว ออกตั๋ว และการตรวจตั๋วขึ้นรถ 5 ขั้นตอนแบบไร้รอยต่อ</a:t>
+            </a:r>
+          </a:p>
+        </p:txBody>
+      </p:sp>
+      <p:sp>
+        <p:nvSpPr>
+          <p:cNvPr id="5" name="Rounded Rectangle 4"/>
+          <p:cNvSpPr/>
+          <p:nvPr/>
+        </p:nvSpPr>
+        <p:spPr>
+          <a:xfrm>
+            <a:off x="731520" y="1691640"/>
+            <a:ext cx="2057400" cy="3108960"/>
+          </a:xfrm>
+          <a:prstGeom prst="roundRect">
+            <a:avLst/>
+          </a:prstGeom>
+          <a:solidFill>
+            <a:srgbClr val="0E261C"/>
+          </a:solidFill>
+          <a:ln w="19050">
+            <a:solidFill>
+              <a:srgbClr val="52B788"/>
+            </a:solidFill>
+          </a:ln>
+        </p:spPr>
+        <p:style>
+          <a:lnRef idx="1">
+            <a:schemeClr val="accent1"/>
+          </a:lnRef>
+          <a:fillRef idx="3">
+            <a:schemeClr val="accent1"/>
+          </a:fillRef>
+          <a:effectRef idx="2">
+            <a:schemeClr val="accent1"/>
+          </a:effectRef>
+          <a:fontRef idx="minor">
+            <a:schemeClr val="lt1"/>
+          </a:fontRef>
+        </p:style>
+        <p:txBody>
+          <a:bodyPr rtlCol="0" anchor="ctr" wrap="square" lIns="164592" rIns="164592" tIns="182880"/>
+          <a:lstStyle/>
+          <a:p>
+            <a:pPr algn="ctr">
+              <a:spcAft>
+                <a:spcPts val="600"/>
+              </a:spcAft>
+              <a:defRPr sz="1300" b="1">
+                <a:solidFill>
+                  <a:srgbClr val="6EE7B7"/>
+                </a:solidFill>
+                <a:latin typeface="Prompt"/>
+              </a:defRPr>
+            </a:pPr>
+            <a:r>
+              <a:t>STEP 01</a:t>
+            </a:r>
+          </a:p>
+          <a:p>
+            <a:pPr>
+              <a:defRPr sz="1700" b="1">
+                <a:solidFill>
+                  <a:srgbClr val="FFFFFF"/>
+                </a:solidFill>
+                <a:latin typeface="Prompt"/>
+              </a:defRPr>
+            </a:pPr>
+            <a:r>
+              <a:t>เลือกซื้อตั๋ว</a:t>
+            </a:r>
+          </a:p>
+          <a:p>
+            <a:pPr>
+              <a:spcAft>
+                <a:spcPts val="1000"/>
+              </a:spcAft>
+              <a:defRPr sz="950">
+                <a:solidFill>
+                  <a:srgbClr val="A7F3D0"/>
+                </a:solidFill>
+                <a:latin typeface="Prompt"/>
+              </a:defRPr>
+            </a:pPr>
+            <a:r>
+              <a:t>OMNICHANNEL SELECTION</a:t>
+            </a:r>
+          </a:p>
+          <a:p>
+            <a:pPr>
+              <a:defRPr sz="1200">
+                <a:solidFill>
+                  <a:srgbClr val="E2E8F0"/>
+                </a:solidFill>
+                <a:latin typeface="Sarabun"/>
+              </a:defRPr>
+            </a:pPr>
+            <a:r>
+              <a:t>ซื้อผ่าน Mobile App, เว็บไซต์ล่วงหน้า หรือตู้ Kiosk หน้าสถานี</a:t>
+            </a:r>
+          </a:p>
+        </p:txBody>
+      </p:sp>
+      <p:sp>
+        <p:nvSpPr>
+          <p:cNvPr id="6" name="Rounded Rectangle 5"/>
+          <p:cNvSpPr/>
+          <p:nvPr/>
+        </p:nvSpPr>
+        <p:spPr>
+          <a:xfrm>
+            <a:off x="2926080" y="1691640"/>
+            <a:ext cx="2057400" cy="3108960"/>
+          </a:xfrm>
+          <a:prstGeom prst="roundRect">
+            <a:avLst/>
+          </a:prstGeom>
+          <a:solidFill>
+            <a:srgbClr val="0E261C"/>
+          </a:solidFill>
+          <a:ln w="19050">
+            <a:solidFill>
+              <a:srgbClr val="52B788"/>
+            </a:solidFill>
+          </a:ln>
+        </p:spPr>
+        <p:style>
+          <a:lnRef idx="1">
+            <a:schemeClr val="accent1"/>
+          </a:lnRef>
+          <a:fillRef idx="3">
+            <a:schemeClr val="accent1"/>
+          </a:fillRef>
+          <a:effectRef idx="2">
+            <a:schemeClr val="accent1"/>
+          </a:effectRef>
+          <a:fontRef idx="minor">
+            <a:schemeClr val="lt1"/>
+          </a:fontRef>
+        </p:style>
+        <p:txBody>
+          <a:bodyPr rtlCol="0" anchor="ctr" wrap="square" lIns="164592" rIns="164592" tIns="182880"/>
+          <a:lstStyle/>
+          <a:p>
+            <a:pPr algn="ctr">
+              <a:spcAft>
+                <a:spcPts val="600"/>
+              </a:spcAft>
+              <a:defRPr sz="1300" b="1">
+                <a:solidFill>
+                  <a:srgbClr val="6EE7B7"/>
+                </a:solidFill>
+                <a:latin typeface="Prompt"/>
+              </a:defRPr>
+            </a:pPr>
+            <a:r>
+              <a:t>STEP 02</a:t>
+            </a:r>
+          </a:p>
+          <a:p>
+            <a:pPr>
+              <a:defRPr sz="1700" b="1">
+                <a:solidFill>
+                  <a:srgbClr val="FFFFFF"/>
+                </a:solidFill>
+                <a:latin typeface="Prompt"/>
+              </a:defRPr>
+            </a:pPr>
+            <a:r>
+              <a:t>ชำระเงิน</a:t>
+            </a:r>
+          </a:p>
+          <a:p>
+            <a:pPr>
+              <a:spcAft>
+                <a:spcPts val="1000"/>
+              </a:spcAft>
+              <a:defRPr sz="950">
+                <a:solidFill>
+                  <a:srgbClr val="A7F3D0"/>
+                </a:solidFill>
+                <a:latin typeface="Prompt"/>
+              </a:defRPr>
+            </a:pPr>
+            <a:r>
+              <a:t>CONTACTLESS PAYMENT</a:t>
+            </a:r>
+          </a:p>
+          <a:p>
+            <a:pPr>
+              <a:defRPr sz="1200">
+                <a:solidFill>
+                  <a:srgbClr val="E2E8F0"/>
+                </a:solidFill>
+                <a:latin typeface="Sarabun"/>
+              </a:defRPr>
+            </a:pPr>
+            <a:r>
+              <a:t>สแกน PromptPay QR EMVCo ทุกธนาคาร, บัตร หรือเงินสดที่ Kiosk</a:t>
+            </a:r>
+          </a:p>
+        </p:txBody>
+      </p:sp>
+      <p:sp>
+        <p:nvSpPr>
+          <p:cNvPr id="7" name="Rounded Rectangle 6"/>
+          <p:cNvSpPr/>
+          <p:nvPr/>
+        </p:nvSpPr>
+        <p:spPr>
+          <a:xfrm>
+            <a:off x="5120640" y="1691640"/>
+            <a:ext cx="2057400" cy="3108960"/>
+          </a:xfrm>
+          <a:prstGeom prst="roundRect">
+            <a:avLst/>
+          </a:prstGeom>
+          <a:solidFill>
+            <a:srgbClr val="0E261C"/>
+          </a:solidFill>
+          <a:ln w="19050">
+            <a:solidFill>
+              <a:srgbClr val="52B788"/>
+            </a:solidFill>
+          </a:ln>
+        </p:spPr>
+        <p:style>
+          <a:lnRef idx="1">
+            <a:schemeClr val="accent1"/>
+          </a:lnRef>
+          <a:fillRef idx="3">
+            <a:schemeClr val="accent1"/>
+          </a:fillRef>
+          <a:effectRef idx="2">
+            <a:schemeClr val="accent1"/>
+          </a:effectRef>
+          <a:fontRef idx="minor">
+            <a:schemeClr val="lt1"/>
+          </a:fontRef>
+        </p:style>
+        <p:txBody>
+          <a:bodyPr rtlCol="0" anchor="ctr" wrap="square" lIns="164592" rIns="164592" tIns="182880"/>
+          <a:lstStyle/>
+          <a:p>
+            <a:pPr algn="ctr">
+              <a:spcAft>
+                <a:spcPts val="600"/>
+              </a:spcAft>
+              <a:defRPr sz="1300" b="1">
+                <a:solidFill>
+                  <a:srgbClr val="6EE7B7"/>
+                </a:solidFill>
+                <a:latin typeface="Prompt"/>
+              </a:defRPr>
+            </a:pPr>
+            <a:r>
+              <a:t>STEP 03</a:t>
+            </a:r>
+          </a:p>
+          <a:p>
+            <a:pPr>
+              <a:defRPr sz="1700" b="1">
+                <a:solidFill>
+                  <a:srgbClr val="FFFFFF"/>
+                </a:solidFill>
+                <a:latin typeface="Prompt"/>
+              </a:defRPr>
+            </a:pPr>
+            <a:r>
+              <a:t>สร้าง e-Ticket</a:t>
+            </a:r>
+          </a:p>
+          <a:p>
+            <a:pPr>
+              <a:spcAft>
+                <a:spcPts val="1000"/>
+              </a:spcAft>
+              <a:defRPr sz="950">
+                <a:solidFill>
+                  <a:srgbClr val="A7F3D0"/>
+                </a:solidFill>
+                <a:latin typeface="Prompt"/>
+              </a:defRPr>
+            </a:pPr>
+            <a:r>
+              <a:t>DYNAMIC QR GENERATOR</a:t>
+            </a:r>
+          </a:p>
+          <a:p>
+            <a:pPr>
+              <a:defRPr sz="1200">
+                <a:solidFill>
+                  <a:srgbClr val="E2E8F0"/>
+                </a:solidFill>
+                <a:latin typeface="Sarabun"/>
+              </a:defRPr>
+            </a:pPr>
+            <a:r>
+              <a:t>สร้าง Dynamic One-Time QR พร้อมบันทึกลง Database ทันที</a:t>
+            </a:r>
+          </a:p>
+        </p:txBody>
+      </p:sp>
+      <p:sp>
+        <p:nvSpPr>
+          <p:cNvPr id="8" name="Rounded Rectangle 7"/>
+          <p:cNvSpPr/>
+          <p:nvPr/>
+        </p:nvSpPr>
+        <p:spPr>
+          <a:xfrm>
+            <a:off x="7315199" y="1691640"/>
+            <a:ext cx="2057400" cy="3108960"/>
+          </a:xfrm>
+          <a:prstGeom prst="roundRect">
+            <a:avLst/>
+          </a:prstGeom>
+          <a:solidFill>
+            <a:srgbClr val="0E261C"/>
+          </a:solidFill>
+          <a:ln w="19050">
+            <a:solidFill>
+              <a:srgbClr val="52B788"/>
+            </a:solidFill>
+          </a:ln>
+        </p:spPr>
+        <p:style>
+          <a:lnRef idx="1">
+            <a:schemeClr val="accent1"/>
+          </a:lnRef>
+          <a:fillRef idx="3">
+            <a:schemeClr val="accent1"/>
+          </a:fillRef>
+          <a:effectRef idx="2">
+            <a:schemeClr val="accent1"/>
+          </a:effectRef>
+          <a:fontRef idx="minor">
+            <a:schemeClr val="lt1"/>
+          </a:fontRef>
+        </p:style>
+        <p:txBody>
+          <a:bodyPr rtlCol="0" anchor="ctr" wrap="square" lIns="164592" rIns="164592" tIns="182880"/>
+          <a:lstStyle/>
+          <a:p>
+            <a:pPr algn="ctr">
+              <a:spcAft>
+                <a:spcPts val="600"/>
+              </a:spcAft>
+              <a:defRPr sz="1300" b="1">
+                <a:solidFill>
+                  <a:srgbClr val="6EE7B7"/>
+                </a:solidFill>
+                <a:latin typeface="Prompt"/>
+              </a:defRPr>
+            </a:pPr>
+            <a:r>
+              <a:t>STEP 04</a:t>
+            </a:r>
+          </a:p>
+          <a:p>
+            <a:pPr>
+              <a:defRPr sz="1700" b="1">
+                <a:solidFill>
+                  <a:srgbClr val="FFFFFF"/>
+                </a:solidFill>
+                <a:latin typeface="Prompt"/>
+              </a:defRPr>
+            </a:pPr>
+            <a:r>
+              <a:t>แสดงตั๋ว</a:t>
+            </a:r>
+          </a:p>
+          <a:p>
+            <a:pPr>
+              <a:spcAft>
+                <a:spcPts val="1000"/>
+              </a:spcAft>
+              <a:defRPr sz="950">
+                <a:solidFill>
+                  <a:srgbClr val="A7F3D0"/>
+                </a:solidFill>
+                <a:latin typeface="Prompt"/>
+              </a:defRPr>
+            </a:pPr>
+            <a:r>
+              <a:t>PASSENGER DISPLAY</a:t>
+            </a:r>
+          </a:p>
+          <a:p>
+            <a:pPr>
+              <a:defRPr sz="1200">
+                <a:solidFill>
+                  <a:srgbClr val="E2E8F0"/>
+                </a:solidFill>
+                <a:latin typeface="Sarabun"/>
+              </a:defRPr>
+            </a:pPr>
+            <a:r>
+              <a:t>แสดง QR บนมือถือ, Wallet หรือพิมพ์สลิปจากตู้ Kiosk</a:t>
+            </a:r>
+          </a:p>
+        </p:txBody>
+      </p:sp>
+      <p:sp>
+        <p:nvSpPr>
+          <p:cNvPr id="9" name="Rounded Rectangle 8"/>
+          <p:cNvSpPr/>
+          <p:nvPr/>
+        </p:nvSpPr>
+        <p:spPr>
+          <a:xfrm>
+            <a:off x="9509760" y="1691640"/>
+            <a:ext cx="2057400" cy="3108960"/>
+          </a:xfrm>
+          <a:prstGeom prst="roundRect">
+            <a:avLst/>
+          </a:prstGeom>
+          <a:solidFill>
+            <a:srgbClr val="0E261C"/>
+          </a:solidFill>
+          <a:ln w="19050">
+            <a:solidFill>
+              <a:srgbClr val="52B788"/>
+            </a:solidFill>
+          </a:ln>
+        </p:spPr>
+        <p:style>
+          <a:lnRef idx="1">
+            <a:schemeClr val="accent1"/>
+          </a:lnRef>
+          <a:fillRef idx="3">
+            <a:schemeClr val="accent1"/>
+          </a:fillRef>
+          <a:effectRef idx="2">
+            <a:schemeClr val="accent1"/>
+          </a:effectRef>
+          <a:fontRef idx="minor">
+            <a:schemeClr val="lt1"/>
+          </a:fontRef>
+        </p:style>
+        <p:txBody>
+          <a:bodyPr rtlCol="0" anchor="ctr" wrap="square" lIns="164592" rIns="164592" tIns="182880"/>
+          <a:lstStyle/>
+          <a:p>
+            <a:pPr algn="ctr">
+              <a:spcAft>
+                <a:spcPts val="600"/>
+              </a:spcAft>
+              <a:defRPr sz="1300" b="1">
+                <a:solidFill>
+                  <a:srgbClr val="6EE7B7"/>
+                </a:solidFill>
+                <a:latin typeface="Prompt"/>
+              </a:defRPr>
+            </a:pPr>
+            <a:r>
+              <a:t>STEP 05</a:t>
+            </a:r>
+          </a:p>
+          <a:p>
+            <a:pPr>
+              <a:defRPr sz="1700" b="1">
+                <a:solidFill>
+                  <a:srgbClr val="FFFFFF"/>
+                </a:solidFill>
+                <a:latin typeface="Prompt"/>
+              </a:defRPr>
+            </a:pPr>
+            <a:r>
+              <a:t>สแกน Check-in</a:t>
+            </a:r>
+          </a:p>
+          <a:p>
+            <a:pPr>
+              <a:spcAft>
+                <a:spcPts val="1000"/>
+              </a:spcAft>
+              <a:defRPr sz="950">
+                <a:solidFill>
+                  <a:srgbClr val="A7F3D0"/>
+                </a:solidFill>
+                <a:latin typeface="Prompt"/>
+              </a:defRPr>
+            </a:pPr>
+            <a:r>
+              <a:t>DRIVER TABLET SCAN</a:t>
+            </a:r>
+          </a:p>
+          <a:p>
+            <a:pPr>
+              <a:defRPr sz="1200">
+                <a:solidFill>
+                  <a:srgbClr val="E2E8F0"/>
+                </a:solidFill>
+                <a:latin typeface="Sarabun"/>
+              </a:defRPr>
+            </a:pPr>
+            <a:r>
+              <a:t>คนขับสแกนตรวจตั๋ว ตัดสิทธิ์ทันที ป้องกันใช้ซ้ำ อัปเดตคิว Real-time</a:t>
+            </a:r>
+          </a:p>
+        </p:txBody>
+      </p:sp>
+      <p:sp>
+        <p:nvSpPr>
+          <p:cNvPr id="10" name="Rounded Rectangle 9"/>
+          <p:cNvSpPr/>
+          <p:nvPr/>
+        </p:nvSpPr>
+        <p:spPr>
+          <a:xfrm>
+            <a:off x="731520" y="5029200"/>
+            <a:ext cx="10728655" cy="1188720"/>
+          </a:xfrm>
+          <a:prstGeom prst="roundRect">
+            <a:avLst/>
+          </a:prstGeom>
+          <a:solidFill>
+            <a:srgbClr val="0E261C"/>
+          </a:solidFill>
+          <a:ln w="19050">
+            <a:solidFill>
+              <a:srgbClr val="F59E0B"/>
+            </a:solidFill>
+          </a:ln>
+        </p:spPr>
+        <p:style>
+          <a:lnRef idx="1">
+            <a:schemeClr val="accent1"/>
+          </a:lnRef>
+          <a:fillRef idx="3">
+            <a:schemeClr val="accent1"/>
+          </a:fillRef>
+          <a:effectRef idx="2">
+            <a:schemeClr val="accent1"/>
+          </a:effectRef>
+          <a:fontRef idx="minor">
+            <a:schemeClr val="lt1"/>
+          </a:fontRef>
+        </p:style>
+        <p:txBody>
+          <a:bodyPr rtlCol="0" anchor="ctr" wrap="square" lIns="274320" rIns="274320" tIns="164592"/>
+          <a:lstStyle/>
+          <a:p>
+            <a:pPr algn="ctr">
+              <a:spcAft>
+                <a:spcPts val="300"/>
+              </a:spcAft>
+              <a:defRPr sz="1400" b="1">
+                <a:solidFill>
+                  <a:srgbClr val="F59E0B"/>
+                </a:solidFill>
+                <a:latin typeface="Prompt"/>
+              </a:defRPr>
+            </a:pPr>
+            <a:r>
+              <a:t>กฎการใช้งาน One-Time QR Code และการรักษาความปลอดภัย:</a:t>
+            </a:r>
+          </a:p>
+          <a:p>
+            <a:pPr>
+              <a:defRPr sz="1250">
+                <a:solidFill>
+                  <a:srgbClr val="E2E8F0"/>
+                </a:solidFill>
+                <a:latin typeface="Sarabun"/>
+              </a:defRPr>
+            </a:pPr>
+            <a:r>
+              <a:t>• ตั๋ว 1 ใบ = สิทธิ์เดินทาง 1 ครั้ง เมื่อสแกนแล้วสถานะจะปรับเป็น 'USED' ในฐานข้อมูลทันที ป้องกันการถ่ายภาพส่งต่อหรือนำกลับมาใช้ซ้ำ 100%</a:t>
+            </a:r>
+            <a:br/>
+            <a:r>
+              <a:t>• อัปเดตข้อมูลผู้โดยสารขึ้นรถแบบสดๆ เข้าสู่ Smart Queue Balancing เพื่อตัดโควตาที่นั่งว่างของรถคันนั้นแบบ Real-time</a:t>
+            </a:r>
+          </a:p>
+        </p:txBody>
+      </p:sp>
     </p:spTree>
   </p:cSld>
   <p:clrMapOvr>
@@ -4906,7 +9092,7 @@
 </p:sld>
 </file>
 
-<file path=ppt/slides/slide7.xml><?xml version="1.0" encoding="utf-8"?>
+<file path=ppt/slides/slide6.xml><?xml version="1.0" encoding="utf-8"?>
 <p:sld xmlns:a="http://schemas.openxmlformats.org/drawingml/2006/main" xmlns:p="http://schemas.openxmlformats.org/presentationml/2006/main" xmlns:r="http://schemas.openxmlformats.org/officeDocument/2006/relationships">
   <p:cSld>
     <p:spTree>
@@ -4918,7 +9104,7 @@
       <p:grpSpPr/>
       <p:pic>
         <p:nvPicPr>
-          <p:cNvPr id="2" name="Picture 1" descr="slide_07.jpg"/>
+          <p:cNvPr id="2" name="Picture 1" descr="dark_topographic_bg.jpg"/>
           <p:cNvPicPr>
             <a:picLocks noChangeAspect="1"/>
           </p:cNvPicPr>
@@ -4940,6 +9126,688 @@
           </a:prstGeom>
         </p:spPr>
       </p:pic>
+      <p:sp>
+        <p:nvSpPr>
+          <p:cNvPr id="3" name="Rounded Rectangle 2"/>
+          <p:cNvSpPr/>
+          <p:nvPr/>
+        </p:nvSpPr>
+        <p:spPr>
+          <a:xfrm>
+            <a:off x="731520" y="365760"/>
+            <a:ext cx="3200400" cy="320040"/>
+          </a:xfrm>
+          <a:prstGeom prst="roundRect">
+            <a:avLst/>
+          </a:prstGeom>
+          <a:solidFill>
+            <a:srgbClr val="123024"/>
+          </a:solidFill>
+          <a:ln w="12700">
+            <a:solidFill>
+              <a:srgbClr val="52B788"/>
+            </a:solidFill>
+          </a:ln>
+        </p:spPr>
+        <p:style>
+          <a:lnRef idx="1">
+            <a:schemeClr val="accent1"/>
+          </a:lnRef>
+          <a:fillRef idx="3">
+            <a:schemeClr val="accent1"/>
+          </a:fillRef>
+          <a:effectRef idx="2">
+            <a:schemeClr val="accent1"/>
+          </a:effectRef>
+          <a:fontRef idx="minor">
+            <a:schemeClr val="lt1"/>
+          </a:fontRef>
+        </p:style>
+        <p:txBody>
+          <a:bodyPr rtlCol="0" anchor="ctr" wrap="square" lIns="0" rIns="0" tIns="0" bIns="0"/>
+          <a:lstStyle/>
+          <a:p>
+            <a:pPr algn="ctr">
+              <a:defRPr sz="1100" b="1">
+                <a:solidFill>
+                  <a:srgbClr val="6EE7B7"/>
+                </a:solidFill>
+                <a:latin typeface="Prompt"/>
+              </a:defRPr>
+            </a:pPr>
+            <a:r>
+              <a:t>PAYMENT ARCHITECTURE</a:t>
+            </a:r>
+          </a:p>
+        </p:txBody>
+      </p:sp>
+      <p:sp>
+        <p:nvSpPr>
+          <p:cNvPr id="4" name="TextBox 3"/>
+          <p:cNvSpPr txBox="1"/>
+          <p:nvPr/>
+        </p:nvSpPr>
+        <p:spPr>
+          <a:xfrm>
+            <a:off x="731520" y="685800"/>
+            <a:ext cx="10728655" cy="868680"/>
+          </a:xfrm>
+          <a:prstGeom prst="rect">
+            <a:avLst/>
+          </a:prstGeom>
+          <a:noFill/>
+        </p:spPr>
+        <p:txBody>
+          <a:bodyPr wrap="square" lIns="0" rIns="0" tIns="0" bIns="0">
+            <a:spAutoFit/>
+          </a:bodyPr>
+          <a:lstStyle/>
+          <a:p>
+            <a:pPr>
+              <a:spcAft>
+                <a:spcPts val="300"/>
+              </a:spcAft>
+              <a:defRPr sz="2600" b="1">
+                <a:solidFill>
+                  <a:srgbClr val="FFFFFF"/>
+                </a:solidFill>
+                <a:latin typeface="Prompt"/>
+              </a:defRPr>
+            </a:pPr>
+            <a:r>
+              <a:t>Payment Gateway Integration Flow — สถาปัตยกรรมระบบชำระเงิน</a:t>
+            </a:r>
+          </a:p>
+          <a:p>
+            <a:pPr>
+              <a:defRPr sz="1400">
+                <a:solidFill>
+                  <a:srgbClr val="A7F3D0"/>
+                </a:solidFill>
+                <a:latin typeface="Sarabun"/>
+              </a:defRPr>
+            </a:pPr>
+            <a:r>
+              <a:t>การเชื่อมต่อระบบการเงิน ตรวจสอบความถูกต้องผ่าน Webhook Callback และความปลอดภัย</a:t>
+            </a:r>
+          </a:p>
+        </p:txBody>
+      </p:sp>
+      <p:sp>
+        <p:nvSpPr>
+          <p:cNvPr id="5" name="Rounded Rectangle 4"/>
+          <p:cNvSpPr/>
+          <p:nvPr/>
+        </p:nvSpPr>
+        <p:spPr>
+          <a:xfrm>
+            <a:off x="731520" y="1691640"/>
+            <a:ext cx="2057400" cy="3108960"/>
+          </a:xfrm>
+          <a:prstGeom prst="roundRect">
+            <a:avLst/>
+          </a:prstGeom>
+          <a:solidFill>
+            <a:srgbClr val="0E261C"/>
+          </a:solidFill>
+          <a:ln w="19050">
+            <a:solidFill>
+              <a:srgbClr val="38BDF8"/>
+            </a:solidFill>
+          </a:ln>
+        </p:spPr>
+        <p:style>
+          <a:lnRef idx="1">
+            <a:schemeClr val="accent1"/>
+          </a:lnRef>
+          <a:fillRef idx="3">
+            <a:schemeClr val="accent1"/>
+          </a:fillRef>
+          <a:effectRef idx="2">
+            <a:schemeClr val="accent1"/>
+          </a:effectRef>
+          <a:fontRef idx="minor">
+            <a:schemeClr val="lt1"/>
+          </a:fontRef>
+        </p:style>
+        <p:txBody>
+          <a:bodyPr rtlCol="0" anchor="ctr" wrap="square" lIns="164592" rIns="164592" tIns="182880"/>
+          <a:lstStyle/>
+          <a:p>
+            <a:pPr algn="ctr">
+              <a:spcAft>
+                <a:spcPts val="600"/>
+              </a:spcAft>
+              <a:defRPr sz="1300" b="1">
+                <a:solidFill>
+                  <a:srgbClr val="38BDF8"/>
+                </a:solidFill>
+                <a:latin typeface="Prompt"/>
+              </a:defRPr>
+            </a:pPr>
+            <a:r>
+              <a:t>STEP 1</a:t>
+            </a:r>
+          </a:p>
+          <a:p>
+            <a:pPr>
+              <a:defRPr sz="1700" b="1">
+                <a:solidFill>
+                  <a:srgbClr val="FFFFFF"/>
+                </a:solidFill>
+                <a:latin typeface="Prompt"/>
+              </a:defRPr>
+            </a:pPr>
+            <a:r>
+              <a:t>สั่งซื้อตั๋ว</a:t>
+            </a:r>
+          </a:p>
+          <a:p>
+            <a:pPr>
+              <a:spcAft>
+                <a:spcPts val="1000"/>
+              </a:spcAft>
+              <a:defRPr sz="950">
+                <a:solidFill>
+                  <a:srgbClr val="A7F3D0"/>
+                </a:solidFill>
+                <a:latin typeface="Prompt"/>
+              </a:defRPr>
+            </a:pPr>
+            <a:r>
+              <a:t>MOBILE / KIOSK</a:t>
+            </a:r>
+          </a:p>
+          <a:p>
+            <a:pPr>
+              <a:defRPr sz="1200">
+                <a:solidFill>
+                  <a:srgbClr val="E2E8F0"/>
+                </a:solidFill>
+                <a:latin typeface="Sarabun"/>
+              </a:defRPr>
+            </a:pPr>
+            <a:r>
+              <a:t>ผู้ใช้เลือกตั๋ว -&gt; ส่งคำขอผ่าน API Gateway เข้าสู่ Payment Service</a:t>
+            </a:r>
+          </a:p>
+        </p:txBody>
+      </p:sp>
+      <p:sp>
+        <p:nvSpPr>
+          <p:cNvPr id="6" name="Rounded Rectangle 5"/>
+          <p:cNvSpPr/>
+          <p:nvPr/>
+        </p:nvSpPr>
+        <p:spPr>
+          <a:xfrm>
+            <a:off x="2926080" y="1691640"/>
+            <a:ext cx="2057400" cy="3108960"/>
+          </a:xfrm>
+          <a:prstGeom prst="roundRect">
+            <a:avLst/>
+          </a:prstGeom>
+          <a:solidFill>
+            <a:srgbClr val="0E261C"/>
+          </a:solidFill>
+          <a:ln w="19050">
+            <a:solidFill>
+              <a:srgbClr val="38BDF8"/>
+            </a:solidFill>
+          </a:ln>
+        </p:spPr>
+        <p:style>
+          <a:lnRef idx="1">
+            <a:schemeClr val="accent1"/>
+          </a:lnRef>
+          <a:fillRef idx="3">
+            <a:schemeClr val="accent1"/>
+          </a:fillRef>
+          <a:effectRef idx="2">
+            <a:schemeClr val="accent1"/>
+          </a:effectRef>
+          <a:fontRef idx="minor">
+            <a:schemeClr val="lt1"/>
+          </a:fontRef>
+        </p:style>
+        <p:txBody>
+          <a:bodyPr rtlCol="0" anchor="ctr" wrap="square" lIns="164592" rIns="164592" tIns="182880"/>
+          <a:lstStyle/>
+          <a:p>
+            <a:pPr algn="ctr">
+              <a:spcAft>
+                <a:spcPts val="600"/>
+              </a:spcAft>
+              <a:defRPr sz="1300" b="1">
+                <a:solidFill>
+                  <a:srgbClr val="38BDF8"/>
+                </a:solidFill>
+                <a:latin typeface="Prompt"/>
+              </a:defRPr>
+            </a:pPr>
+            <a:r>
+              <a:t>STEP 2</a:t>
+            </a:r>
+          </a:p>
+          <a:p>
+            <a:pPr>
+              <a:defRPr sz="1700" b="1">
+                <a:solidFill>
+                  <a:srgbClr val="FFFFFF"/>
+                </a:solidFill>
+                <a:latin typeface="Prompt"/>
+              </a:defRPr>
+            </a:pPr>
+            <a:r>
+              <a:t>สร้าง QR Code</a:t>
+            </a:r>
+          </a:p>
+          <a:p>
+            <a:pPr>
+              <a:spcAft>
+                <a:spcPts val="1000"/>
+              </a:spcAft>
+              <a:defRPr sz="950">
+                <a:solidFill>
+                  <a:srgbClr val="A7F3D0"/>
+                </a:solidFill>
+                <a:latin typeface="Prompt"/>
+              </a:defRPr>
+            </a:pPr>
+            <a:r>
+              <a:t>GATEWAY API</a:t>
+            </a:r>
+          </a:p>
+          <a:p>
+            <a:pPr>
+              <a:defRPr sz="1200">
+                <a:solidFill>
+                  <a:srgbClr val="E2E8F0"/>
+                </a:solidFill>
+                <a:latin typeface="Sarabun"/>
+              </a:defRPr>
+            </a:pPr>
+            <a:r>
+              <a:t>เชื่อมต่อ Omise / 2C2P เพื่อสร้าง QR PromptPay ตามมาตรฐาน EMVCo</a:t>
+            </a:r>
+          </a:p>
+        </p:txBody>
+      </p:sp>
+      <p:sp>
+        <p:nvSpPr>
+          <p:cNvPr id="7" name="Rounded Rectangle 6"/>
+          <p:cNvSpPr/>
+          <p:nvPr/>
+        </p:nvSpPr>
+        <p:spPr>
+          <a:xfrm>
+            <a:off x="5120640" y="1691640"/>
+            <a:ext cx="2057400" cy="3108960"/>
+          </a:xfrm>
+          <a:prstGeom prst="roundRect">
+            <a:avLst/>
+          </a:prstGeom>
+          <a:solidFill>
+            <a:srgbClr val="0E261C"/>
+          </a:solidFill>
+          <a:ln w="19050">
+            <a:solidFill>
+              <a:srgbClr val="38BDF8"/>
+            </a:solidFill>
+          </a:ln>
+        </p:spPr>
+        <p:style>
+          <a:lnRef idx="1">
+            <a:schemeClr val="accent1"/>
+          </a:lnRef>
+          <a:fillRef idx="3">
+            <a:schemeClr val="accent1"/>
+          </a:fillRef>
+          <a:effectRef idx="2">
+            <a:schemeClr val="accent1"/>
+          </a:effectRef>
+          <a:fontRef idx="minor">
+            <a:schemeClr val="lt1"/>
+          </a:fontRef>
+        </p:style>
+        <p:txBody>
+          <a:bodyPr rtlCol="0" anchor="ctr" wrap="square" lIns="164592" rIns="164592" tIns="182880"/>
+          <a:lstStyle/>
+          <a:p>
+            <a:pPr algn="ctr">
+              <a:spcAft>
+                <a:spcPts val="600"/>
+              </a:spcAft>
+              <a:defRPr sz="1300" b="1">
+                <a:solidFill>
+                  <a:srgbClr val="38BDF8"/>
+                </a:solidFill>
+                <a:latin typeface="Prompt"/>
+              </a:defRPr>
+            </a:pPr>
+            <a:r>
+              <a:t>STEP 3</a:t>
+            </a:r>
+          </a:p>
+          <a:p>
+            <a:pPr>
+              <a:defRPr sz="1700" b="1">
+                <a:solidFill>
+                  <a:srgbClr val="FFFFFF"/>
+                </a:solidFill>
+                <a:latin typeface="Prompt"/>
+              </a:defRPr>
+            </a:pPr>
+            <a:r>
+              <a:t>ชำระเงิน</a:t>
+            </a:r>
+          </a:p>
+          <a:p>
+            <a:pPr>
+              <a:spcAft>
+                <a:spcPts val="1000"/>
+              </a:spcAft>
+              <a:defRPr sz="950">
+                <a:solidFill>
+                  <a:srgbClr val="A7F3D0"/>
+                </a:solidFill>
+                <a:latin typeface="Prompt"/>
+              </a:defRPr>
+            </a:pPr>
+            <a:r>
+              <a:t>MOBILE BANKING</a:t>
+            </a:r>
+          </a:p>
+          <a:p>
+            <a:pPr>
+              <a:defRPr sz="1200">
+                <a:solidFill>
+                  <a:srgbClr val="E2E8F0"/>
+                </a:solidFill>
+                <a:latin typeface="Sarabun"/>
+              </a:defRPr>
+            </a:pPr>
+            <a:r>
+              <a:t>นักท่องเที่ยวสแกนจ่าย -&gt; ธนาคารตัดยอดและยืนยันสถานะการโอนเงินสำเร็จ</a:t>
+            </a:r>
+          </a:p>
+        </p:txBody>
+      </p:sp>
+      <p:sp>
+        <p:nvSpPr>
+          <p:cNvPr id="8" name="Rounded Rectangle 7"/>
+          <p:cNvSpPr/>
+          <p:nvPr/>
+        </p:nvSpPr>
+        <p:spPr>
+          <a:xfrm>
+            <a:off x="7315199" y="1691640"/>
+            <a:ext cx="2057400" cy="3108960"/>
+          </a:xfrm>
+          <a:prstGeom prst="roundRect">
+            <a:avLst/>
+          </a:prstGeom>
+          <a:solidFill>
+            <a:srgbClr val="0E261C"/>
+          </a:solidFill>
+          <a:ln w="19050">
+            <a:solidFill>
+              <a:srgbClr val="38BDF8"/>
+            </a:solidFill>
+          </a:ln>
+        </p:spPr>
+        <p:style>
+          <a:lnRef idx="1">
+            <a:schemeClr val="accent1"/>
+          </a:lnRef>
+          <a:fillRef idx="3">
+            <a:schemeClr val="accent1"/>
+          </a:fillRef>
+          <a:effectRef idx="2">
+            <a:schemeClr val="accent1"/>
+          </a:effectRef>
+          <a:fontRef idx="minor">
+            <a:schemeClr val="lt1"/>
+          </a:fontRef>
+        </p:style>
+        <p:txBody>
+          <a:bodyPr rtlCol="0" anchor="ctr" wrap="square" lIns="164592" rIns="164592" tIns="182880"/>
+          <a:lstStyle/>
+          <a:p>
+            <a:pPr algn="ctr">
+              <a:spcAft>
+                <a:spcPts val="600"/>
+              </a:spcAft>
+              <a:defRPr sz="1300" b="1">
+                <a:solidFill>
+                  <a:srgbClr val="38BDF8"/>
+                </a:solidFill>
+                <a:latin typeface="Prompt"/>
+              </a:defRPr>
+            </a:pPr>
+            <a:r>
+              <a:t>STEP 4</a:t>
+            </a:r>
+          </a:p>
+          <a:p>
+            <a:pPr>
+              <a:defRPr sz="1700" b="1">
+                <a:solidFill>
+                  <a:srgbClr val="FFFFFF"/>
+                </a:solidFill>
+                <a:latin typeface="Prompt"/>
+              </a:defRPr>
+            </a:pPr>
+            <a:r>
+              <a:t>Webhook</a:t>
+            </a:r>
+          </a:p>
+          <a:p>
+            <a:pPr>
+              <a:spcAft>
+                <a:spcPts val="1000"/>
+              </a:spcAft>
+              <a:defRPr sz="950">
+                <a:solidFill>
+                  <a:srgbClr val="A7F3D0"/>
+                </a:solidFill>
+                <a:latin typeface="Prompt"/>
+              </a:defRPr>
+            </a:pPr>
+            <a:r>
+              <a:t>SIGNATURE VERIFY</a:t>
+            </a:r>
+          </a:p>
+          <a:p>
+            <a:pPr>
+              <a:defRPr sz="1200">
+                <a:solidFill>
+                  <a:srgbClr val="E2E8F0"/>
+                </a:solidFill>
+                <a:latin typeface="Sarabun"/>
+              </a:defRPr>
+            </a:pPr>
+            <a:r>
+              <a:t>Gateway ส่งผลกลับมา -&gt; ตรวจสอบ Digital Signature ป้องกัน Fake Order</a:t>
+            </a:r>
+          </a:p>
+        </p:txBody>
+      </p:sp>
+      <p:sp>
+        <p:nvSpPr>
+          <p:cNvPr id="9" name="Rounded Rectangle 8"/>
+          <p:cNvSpPr/>
+          <p:nvPr/>
+        </p:nvSpPr>
+        <p:spPr>
+          <a:xfrm>
+            <a:off x="9509760" y="1691640"/>
+            <a:ext cx="2057400" cy="3108960"/>
+          </a:xfrm>
+          <a:prstGeom prst="roundRect">
+            <a:avLst/>
+          </a:prstGeom>
+          <a:solidFill>
+            <a:srgbClr val="0E261C"/>
+          </a:solidFill>
+          <a:ln w="19050">
+            <a:solidFill>
+              <a:srgbClr val="38BDF8"/>
+            </a:solidFill>
+          </a:ln>
+        </p:spPr>
+        <p:style>
+          <a:lnRef idx="1">
+            <a:schemeClr val="accent1"/>
+          </a:lnRef>
+          <a:fillRef idx="3">
+            <a:schemeClr val="accent1"/>
+          </a:fillRef>
+          <a:effectRef idx="2">
+            <a:schemeClr val="accent1"/>
+          </a:effectRef>
+          <a:fontRef idx="minor">
+            <a:schemeClr val="lt1"/>
+          </a:fontRef>
+        </p:style>
+        <p:txBody>
+          <a:bodyPr rtlCol="0" anchor="ctr" wrap="square" lIns="164592" rIns="164592" tIns="182880"/>
+          <a:lstStyle/>
+          <a:p>
+            <a:pPr algn="ctr">
+              <a:spcAft>
+                <a:spcPts val="600"/>
+              </a:spcAft>
+              <a:defRPr sz="1300" b="1">
+                <a:solidFill>
+                  <a:srgbClr val="38BDF8"/>
+                </a:solidFill>
+                <a:latin typeface="Prompt"/>
+              </a:defRPr>
+            </a:pPr>
+            <a:r>
+              <a:t>STEP 5</a:t>
+            </a:r>
+          </a:p>
+          <a:p>
+            <a:pPr>
+              <a:defRPr sz="1700" b="1">
+                <a:solidFill>
+                  <a:srgbClr val="FFFFFF"/>
+                </a:solidFill>
+                <a:latin typeface="Prompt"/>
+              </a:defRPr>
+            </a:pPr>
+            <a:r>
+              <a:t>ออกตั๋วทันที</a:t>
+            </a:r>
+          </a:p>
+          <a:p>
+            <a:pPr>
+              <a:spcAft>
+                <a:spcPts val="1000"/>
+              </a:spcAft>
+              <a:defRPr sz="950">
+                <a:solidFill>
+                  <a:srgbClr val="A7F3D0"/>
+                </a:solidFill>
+                <a:latin typeface="Prompt"/>
+              </a:defRPr>
+            </a:pPr>
+            <a:r>
+              <a:t>DATABASE &amp; NOTIFY</a:t>
+            </a:r>
+          </a:p>
+          <a:p>
+            <a:pPr>
+              <a:defRPr sz="1200">
+                <a:solidFill>
+                  <a:srgbClr val="E2E8F0"/>
+                </a:solidFill>
+                <a:latin typeface="Sarabun"/>
+              </a:defRPr>
+            </a:pPr>
+            <a:r>
+              <a:t>บันทึกสถานะ PAID ออก Dynamic One-Time QR และส่ง Push Notification</a:t>
+            </a:r>
+          </a:p>
+        </p:txBody>
+      </p:sp>
+      <p:sp>
+        <p:nvSpPr>
+          <p:cNvPr id="10" name="Rounded Rectangle 9"/>
+          <p:cNvSpPr/>
+          <p:nvPr/>
+        </p:nvSpPr>
+        <p:spPr>
+          <a:xfrm>
+            <a:off x="731520" y="5029200"/>
+            <a:ext cx="10728655" cy="1188720"/>
+          </a:xfrm>
+          <a:prstGeom prst="roundRect">
+            <a:avLst/>
+          </a:prstGeom>
+          <a:solidFill>
+            <a:srgbClr val="0E261C"/>
+          </a:solidFill>
+          <a:ln w="19050">
+            <a:solidFill>
+              <a:srgbClr val="F59E0B"/>
+            </a:solidFill>
+          </a:ln>
+        </p:spPr>
+        <p:style>
+          <a:lnRef idx="1">
+            <a:schemeClr val="accent1"/>
+          </a:lnRef>
+          <a:fillRef idx="3">
+            <a:schemeClr val="accent1"/>
+          </a:fillRef>
+          <a:effectRef idx="2">
+            <a:schemeClr val="accent1"/>
+          </a:effectRef>
+          <a:fontRef idx="minor">
+            <a:schemeClr val="lt1"/>
+          </a:fontRef>
+        </p:style>
+        <p:txBody>
+          <a:bodyPr rtlCol="0" anchor="ctr" wrap="square" lIns="274320" rIns="274320" tIns="164592"/>
+          <a:lstStyle/>
+          <a:p>
+            <a:pPr algn="ctr">
+              <a:spcAft>
+                <a:spcPts val="300"/>
+              </a:spcAft>
+              <a:defRPr sz="1400" b="1">
+                <a:solidFill>
+                  <a:srgbClr val="F59E0B"/>
+                </a:solidFill>
+                <a:latin typeface="Prompt"/>
+              </a:defRPr>
+            </a:pPr>
+            <a:r>
+              <a:t>นโยบายการยกเลิกอัตโนมัติ (10-Minute Auto-Expiry Rule):</a:t>
+            </a:r>
+          </a:p>
+          <a:p>
+            <a:pPr>
+              <a:defRPr sz="1250">
+                <a:solidFill>
+                  <a:srgbClr val="E2E8F0"/>
+                </a:solidFill>
+                <a:latin typeface="Sarabun"/>
+              </a:defRPr>
+            </a:pPr>
+            <a:r>
+              <a:t>• หากไม่มีการชำระเงินภายใน 10 นาที นับตั้งแต่สร้างรายการ ระบบจะทำการ Auto-Expire ยกเลิกคำสั่งซื้อและ QR Code ทันที</a:t>
+            </a:r>
+            <a:br/>
+            <a:r>
+              <a:t>• ปลดล็อกและคืนโควตาที่นั่งกลับเข้าสู่ระบบส่วนกลาง เพื่อป้องกันการกักตั๋ว และเปิดโอกาสให้นักท่องเที่ยวท่านอื่นสามารถจองได้</a:t>
+            </a:r>
+          </a:p>
+        </p:txBody>
+      </p:sp>
     </p:spTree>
   </p:cSld>
   <p:clrMapOvr>
@@ -4948,7 +9816,7 @@
 </p:sld>
 </file>
 
-<file path=ppt/slides/slide8.xml><?xml version="1.0" encoding="utf-8"?>
+<file path=ppt/slides/slide7.xml><?xml version="1.0" encoding="utf-8"?>
 <p:sld xmlns:a="http://schemas.openxmlformats.org/drawingml/2006/main" xmlns:p="http://schemas.openxmlformats.org/presentationml/2006/main" xmlns:r="http://schemas.openxmlformats.org/officeDocument/2006/relationships">
   <p:cSld>
     <p:spTree>
@@ -4960,7 +9828,7 @@
       <p:grpSpPr/>
       <p:pic>
         <p:nvPicPr>
-          <p:cNvPr id="2" name="Picture 1" descr="slide_08.jpg"/>
+          <p:cNvPr id="2" name="Picture 1" descr="dark_topographic_bg.jpg"/>
           <p:cNvPicPr>
             <a:picLocks noChangeAspect="1"/>
           </p:cNvPicPr>
@@ -4982,6 +9850,650 @@
           </a:prstGeom>
         </p:spPr>
       </p:pic>
+      <p:sp>
+        <p:nvSpPr>
+          <p:cNvPr id="3" name="Rounded Rectangle 2"/>
+          <p:cNvSpPr/>
+          <p:nvPr/>
+        </p:nvSpPr>
+        <p:spPr>
+          <a:xfrm>
+            <a:off x="731520" y="365760"/>
+            <a:ext cx="3200400" cy="320040"/>
+          </a:xfrm>
+          <a:prstGeom prst="roundRect">
+            <a:avLst/>
+          </a:prstGeom>
+          <a:solidFill>
+            <a:srgbClr val="123024"/>
+          </a:solidFill>
+          <a:ln w="12700">
+            <a:solidFill>
+              <a:srgbClr val="52B788"/>
+            </a:solidFill>
+          </a:ln>
+        </p:spPr>
+        <p:style>
+          <a:lnRef idx="1">
+            <a:schemeClr val="accent1"/>
+          </a:lnRef>
+          <a:fillRef idx="3">
+            <a:schemeClr val="accent1"/>
+          </a:fillRef>
+          <a:effectRef idx="2">
+            <a:schemeClr val="accent1"/>
+          </a:effectRef>
+          <a:fontRef idx="minor">
+            <a:schemeClr val="lt1"/>
+          </a:fontRef>
+        </p:style>
+        <p:txBody>
+          <a:bodyPr rtlCol="0" anchor="ctr" wrap="square" lIns="0" rIns="0" tIns="0" bIns="0"/>
+          <a:lstStyle/>
+          <a:p>
+            <a:pPr algn="ctr">
+              <a:defRPr sz="1100" b="1">
+                <a:solidFill>
+                  <a:srgbClr val="6EE7B7"/>
+                </a:solidFill>
+                <a:latin typeface="Prompt"/>
+              </a:defRPr>
+            </a:pPr>
+            <a:r>
+              <a:t>FLEET TRACKING &amp; OPERATIONS</a:t>
+            </a:r>
+          </a:p>
+        </p:txBody>
+      </p:sp>
+      <p:sp>
+        <p:nvSpPr>
+          <p:cNvPr id="4" name="TextBox 3"/>
+          <p:cNvSpPr txBox="1"/>
+          <p:nvPr/>
+        </p:nvSpPr>
+        <p:spPr>
+          <a:xfrm>
+            <a:off x="731520" y="685800"/>
+            <a:ext cx="10728655" cy="868680"/>
+          </a:xfrm>
+          <a:prstGeom prst="rect">
+            <a:avLst/>
+          </a:prstGeom>
+          <a:noFill/>
+        </p:spPr>
+        <p:txBody>
+          <a:bodyPr wrap="square" lIns="0" rIns="0" tIns="0" bIns="0">
+            <a:spAutoFit/>
+          </a:bodyPr>
+          <a:lstStyle/>
+          <a:p>
+            <a:pPr>
+              <a:spcAft>
+                <a:spcPts val="300"/>
+              </a:spcAft>
+              <a:defRPr sz="2600" b="1">
+                <a:solidFill>
+                  <a:srgbClr val="FFFFFF"/>
+                </a:solidFill>
+                <a:latin typeface="Prompt"/>
+              </a:defRPr>
+            </a:pPr>
+            <a:r>
+              <a:t>ระบบติดตามรถและสถานีวนลูป (Loop 6 สถานี)</a:t>
+            </a:r>
+          </a:p>
+          <a:p>
+            <a:pPr>
+              <a:defRPr sz="1400">
+                <a:solidFill>
+                  <a:srgbClr val="A7F3D0"/>
+                </a:solidFill>
+                <a:latin typeface="Sarabun"/>
+              </a:defRPr>
+            </a:pPr>
+            <a:r>
+              <a:t>การติดตามพิกัด GPS อัตโนมัติ พร้อมการคำนวณเวลาถึงสถานีแบบ Dynamic ETA</a:t>
+            </a:r>
+          </a:p>
+        </p:txBody>
+      </p:sp>
+      <p:sp>
+        <p:nvSpPr>
+          <p:cNvPr id="5" name="Rounded Rectangle 4"/>
+          <p:cNvSpPr/>
+          <p:nvPr/>
+        </p:nvSpPr>
+        <p:spPr>
+          <a:xfrm>
+            <a:off x="731520" y="1691640"/>
+            <a:ext cx="3474720" cy="4480560"/>
+          </a:xfrm>
+          <a:prstGeom prst="roundRect">
+            <a:avLst/>
+          </a:prstGeom>
+          <a:solidFill>
+            <a:srgbClr val="0E261C"/>
+          </a:solidFill>
+          <a:ln w="19050">
+            <a:solidFill>
+              <a:srgbClr val="52B788"/>
+            </a:solidFill>
+          </a:ln>
+        </p:spPr>
+        <p:style>
+          <a:lnRef idx="1">
+            <a:schemeClr val="accent1"/>
+          </a:lnRef>
+          <a:fillRef idx="3">
+            <a:schemeClr val="accent1"/>
+          </a:fillRef>
+          <a:effectRef idx="2">
+            <a:schemeClr val="accent1"/>
+          </a:effectRef>
+          <a:fontRef idx="minor">
+            <a:schemeClr val="lt1"/>
+          </a:fontRef>
+        </p:style>
+        <p:txBody>
+          <a:bodyPr rtlCol="0" anchor="ctr" wrap="square" lIns="256032" rIns="256032" tIns="256032"/>
+          <a:lstStyle/>
+          <a:p>
+            <a:pPr algn="ctr">
+              <a:spcAft>
+                <a:spcPts val="1400"/>
+              </a:spcAft>
+              <a:defRPr sz="1800" b="1">
+                <a:solidFill>
+                  <a:srgbClr val="6EE7B7"/>
+                </a:solidFill>
+                <a:latin typeface="Prompt"/>
+              </a:defRPr>
+            </a:pPr>
+            <a:r>
+              <a:t>กลไกการทำงานของระบบติดตาม</a:t>
+            </a:r>
+          </a:p>
+          <a:p>
+            <a:pPr>
+              <a:defRPr sz="1400" b="1">
+                <a:solidFill>
+                  <a:srgbClr val="FFFFFF"/>
+                </a:solidFill>
+                <a:latin typeface="Prompt"/>
+              </a:defRPr>
+            </a:pPr>
+            <a:r>
+              <a:t>• Tablet ประจำรถ 3 คัน:</a:t>
+            </a:r>
+          </a:p>
+          <a:p>
+            <a:pPr>
+              <a:spcAft>
+                <a:spcPts val="800"/>
+              </a:spcAft>
+              <a:defRPr sz="1200">
+                <a:solidFill>
+                  <a:srgbClr val="E2E8F0"/>
+                </a:solidFill>
+                <a:latin typeface="Sarabun"/>
+              </a:defRPr>
+            </a:pPr>
+            <a:r>
+              <a:t>  ส่งพิกัด GPS แม่นยำทุกๆ 5 วินาที ผ่านเครือข่าย 4G/Cellular เข้าสู่เซิร์ฟเวอร์</a:t>
+            </a:r>
+          </a:p>
+          <a:p>
+            <a:pPr>
+              <a:defRPr sz="1400" b="1">
+                <a:solidFill>
+                  <a:srgbClr val="FFFFFF"/>
+                </a:solidFill>
+                <a:latin typeface="Prompt"/>
+              </a:defRPr>
+            </a:pPr>
+            <a:r>
+              <a:t>• Geofencing Engine:</a:t>
+            </a:r>
+          </a:p>
+          <a:p>
+            <a:pPr>
+              <a:spcAft>
+                <a:spcPts val="800"/>
+              </a:spcAft>
+              <a:defRPr sz="1200">
+                <a:solidFill>
+                  <a:srgbClr val="E2E8F0"/>
+                </a:solidFill>
+                <a:latin typeface="Sarabun"/>
+              </a:defRPr>
+            </a:pPr>
+            <a:r>
+              <a:t>  ตรวจจับการเข้า-ออกจากแต่ละสถานีอัตโนมัติด้วยรั้วพิกัดเสมือน</a:t>
+            </a:r>
+          </a:p>
+          <a:p>
+            <a:pPr>
+              <a:defRPr sz="1400" b="1">
+                <a:solidFill>
+                  <a:srgbClr val="FFFFFF"/>
+                </a:solidFill>
+                <a:latin typeface="Prompt"/>
+              </a:defRPr>
+            </a:pPr>
+            <a:r>
+              <a:t>• Dynamic ETA Calculator:</a:t>
+            </a:r>
+          </a:p>
+          <a:p>
+            <a:pPr>
+              <a:spcAft>
+                <a:spcPts val="800"/>
+              </a:spcAft>
+              <a:defRPr sz="1200">
+                <a:solidFill>
+                  <a:srgbClr val="E2E8F0"/>
+                </a:solidFill>
+                <a:latin typeface="Sarabun"/>
+              </a:defRPr>
+            </a:pPr>
+            <a:r>
+              <a:t>  คำนวณความเร็วและระยะทาง ประเมินเวลารถจะมาถึงแต่ละสถานีแบบเรียลไทม์</a:t>
+            </a:r>
+          </a:p>
+          <a:p>
+            <a:pPr>
+              <a:defRPr sz="1400" b="1">
+                <a:solidFill>
+                  <a:srgbClr val="FFFFFF"/>
+                </a:solidFill>
+                <a:latin typeface="Prompt"/>
+              </a:defRPr>
+            </a:pPr>
+            <a:r>
+              <a:t>• Driver App:</a:t>
+            </a:r>
+          </a:p>
+          <a:p>
+            <a:pPr>
+              <a:spcAft>
+                <a:spcPts val="800"/>
+              </a:spcAft>
+              <a:defRPr sz="1200">
+                <a:solidFill>
+                  <a:srgbClr val="E2E8F0"/>
+                </a:solidFill>
+                <a:latin typeface="Sarabun"/>
+              </a:defRPr>
+            </a:pPr>
+            <a:r>
+              <a:t>  คนขับดูจำนวนผู้โดยสารและคิวรอในสถานีถัดไปได้ทันทีผ่านหน้าจอแท็บเล็ต</a:t>
+            </a:r>
+          </a:p>
+        </p:txBody>
+      </p:sp>
+      <p:sp>
+        <p:nvSpPr>
+          <p:cNvPr id="6" name="Rounded Rectangle 5"/>
+          <p:cNvSpPr/>
+          <p:nvPr/>
+        </p:nvSpPr>
+        <p:spPr>
+          <a:xfrm>
+            <a:off x="4389120" y="1691640"/>
+            <a:ext cx="3474720" cy="4480560"/>
+          </a:xfrm>
+          <a:prstGeom prst="roundRect">
+            <a:avLst/>
+          </a:prstGeom>
+          <a:solidFill>
+            <a:srgbClr val="0E261C"/>
+          </a:solidFill>
+          <a:ln w="19050">
+            <a:solidFill>
+              <a:srgbClr val="52B788"/>
+            </a:solidFill>
+          </a:ln>
+        </p:spPr>
+        <p:style>
+          <a:lnRef idx="1">
+            <a:schemeClr val="accent1"/>
+          </a:lnRef>
+          <a:fillRef idx="3">
+            <a:schemeClr val="accent1"/>
+          </a:fillRef>
+          <a:effectRef idx="2">
+            <a:schemeClr val="accent1"/>
+          </a:effectRef>
+          <a:fontRef idx="minor">
+            <a:schemeClr val="lt1"/>
+          </a:fontRef>
+        </p:style>
+        <p:txBody>
+          <a:bodyPr rtlCol="0" anchor="ctr" wrap="square" lIns="256032" rIns="256032" tIns="256032"/>
+          <a:lstStyle/>
+          <a:p>
+            <a:pPr algn="ctr">
+              <a:spcAft>
+                <a:spcPts val="1400"/>
+              </a:spcAft>
+              <a:defRPr sz="1800" b="1">
+                <a:solidFill>
+                  <a:srgbClr val="6EE7B7"/>
+                </a:solidFill>
+                <a:latin typeface="Prompt"/>
+              </a:defRPr>
+            </a:pPr>
+            <a:r>
+              <a:t>การเดินรถวนลูป 6 สถานี</a:t>
+            </a:r>
+          </a:p>
+          <a:p>
+            <a:pPr>
+              <a:defRPr sz="1300" b="1">
+                <a:solidFill>
+                  <a:srgbClr val="FFFFFF"/>
+                </a:solidFill>
+                <a:latin typeface="Prompt"/>
+              </a:defRPr>
+            </a:pPr>
+            <a:r>
+              <a:t>สถานี 1: จุดบริการต้อนรับ</a:t>
+            </a:r>
+          </a:p>
+          <a:p>
+            <a:pPr>
+              <a:spcAft>
+                <a:spcPts val="600"/>
+              </a:spcAft>
+              <a:defRPr sz="1200">
+                <a:solidFill>
+                  <a:srgbClr val="A7F3D0"/>
+                </a:solidFill>
+                <a:latin typeface="Sarabun"/>
+              </a:defRPr>
+            </a:pPr>
+            <a:r>
+              <a:t>  -&gt; กำหนดเวลาโดยประมาณ: ETA 3 นาที</a:t>
+            </a:r>
+          </a:p>
+          <a:p>
+            <a:pPr>
+              <a:defRPr sz="1300" b="1">
+                <a:solidFill>
+                  <a:srgbClr val="FFFFFF"/>
+                </a:solidFill>
+                <a:latin typeface="Prompt"/>
+              </a:defRPr>
+            </a:pPr>
+            <a:r>
+              <a:t>สถานี 2: พิพิธภัณฑ์ธรรมชาติวิทยา</a:t>
+            </a:r>
+          </a:p>
+          <a:p>
+            <a:pPr>
+              <a:spcAft>
+                <a:spcPts val="600"/>
+              </a:spcAft>
+              <a:defRPr sz="1200">
+                <a:solidFill>
+                  <a:srgbClr val="A7F3D0"/>
+                </a:solidFill>
+                <a:latin typeface="Sarabun"/>
+              </a:defRPr>
+            </a:pPr>
+            <a:r>
+              <a:t>  -&gt; กำหนดเวลาโดยประมาณ: ETA 8 นาที</a:t>
+            </a:r>
+          </a:p>
+          <a:p>
+            <a:pPr>
+              <a:defRPr sz="1300" b="1">
+                <a:solidFill>
+                  <a:srgbClr val="FFFFFF"/>
+                </a:solidFill>
+                <a:latin typeface="Prompt"/>
+              </a:defRPr>
+            </a:pPr>
+            <a:r>
+              <a:t>สถานี 3: ทางเดินเรือนยอดไม้ (Canopy)</a:t>
+            </a:r>
+          </a:p>
+          <a:p>
+            <a:pPr>
+              <a:spcAft>
+                <a:spcPts val="600"/>
+              </a:spcAft>
+              <a:defRPr sz="1200">
+                <a:solidFill>
+                  <a:srgbClr val="A7F3D0"/>
+                </a:solidFill>
+                <a:latin typeface="Sarabun"/>
+              </a:defRPr>
+            </a:pPr>
+            <a:r>
+              <a:t>  -&gt; กำหนดเวลาโดยประมาณ: ETA 14 นาที</a:t>
+            </a:r>
+          </a:p>
+          <a:p>
+            <a:pPr>
+              <a:defRPr sz="1300" b="1">
+                <a:solidFill>
+                  <a:srgbClr val="FFFFFF"/>
+                </a:solidFill>
+                <a:latin typeface="Prompt"/>
+              </a:defRPr>
+            </a:pPr>
+            <a:r>
+              <a:t>สถานี 4: กลุ่มเรือนกระจกเฉลิมพระเกียรติ</a:t>
+            </a:r>
+          </a:p>
+          <a:p>
+            <a:pPr>
+              <a:spcAft>
+                <a:spcPts val="600"/>
+              </a:spcAft>
+              <a:defRPr sz="1200">
+                <a:solidFill>
+                  <a:srgbClr val="A7F3D0"/>
+                </a:solidFill>
+                <a:latin typeface="Sarabun"/>
+              </a:defRPr>
+            </a:pPr>
+            <a:r>
+              <a:t>  -&gt; กำหนดเวลาโดยประมาณ: ETA 19 นาที</a:t>
+            </a:r>
+          </a:p>
+          <a:p>
+            <a:pPr>
+              <a:defRPr sz="1300" b="1">
+                <a:solidFill>
+                  <a:srgbClr val="FFFFFF"/>
+                </a:solidFill>
+                <a:latin typeface="Prompt"/>
+              </a:defRPr>
+            </a:pPr>
+            <a:r>
+              <a:t>สถานี 5: สวนกล้วยไม้และพืชเขตร้อน</a:t>
+            </a:r>
+          </a:p>
+          <a:p>
+            <a:pPr>
+              <a:spcAft>
+                <a:spcPts val="600"/>
+              </a:spcAft>
+              <a:defRPr sz="1200">
+                <a:solidFill>
+                  <a:srgbClr val="A7F3D0"/>
+                </a:solidFill>
+                <a:latin typeface="Sarabun"/>
+              </a:defRPr>
+            </a:pPr>
+            <a:r>
+              <a:t>  -&gt; กำหนดเวลาโดยประมาณ: ETA 24 นาที</a:t>
+            </a:r>
+          </a:p>
+          <a:p>
+            <a:pPr>
+              <a:defRPr sz="1300" b="1">
+                <a:solidFill>
+                  <a:srgbClr val="FFFFFF"/>
+                </a:solidFill>
+                <a:latin typeface="Prompt"/>
+              </a:defRPr>
+            </a:pPr>
+            <a:r>
+              <a:t>สถานี 6: จุดชมวิวธรรมชาติ ดอยแม่ริม</a:t>
+            </a:r>
+          </a:p>
+          <a:p>
+            <a:pPr>
+              <a:spcAft>
+                <a:spcPts val="600"/>
+              </a:spcAft>
+              <a:defRPr sz="1200">
+                <a:solidFill>
+                  <a:srgbClr val="A7F3D0"/>
+                </a:solidFill>
+                <a:latin typeface="Sarabun"/>
+              </a:defRPr>
+            </a:pPr>
+            <a:r>
+              <a:t>  -&gt; กำหนดเวลาโดยประมาณ: ETA 30 นาที</a:t>
+            </a:r>
+          </a:p>
+          <a:p>
+            <a:pPr>
+              <a:defRPr sz="1200" b="1">
+                <a:solidFill>
+                  <a:srgbClr val="F59E0B"/>
+                </a:solidFill>
+                <a:latin typeface="Prompt"/>
+              </a:defRPr>
+            </a:pPr>
+            <a:r>
+              <a:t>รถวิ่งวนลูปต่อเนื่อง ปรับความถี่อัตโนมัติตามปริมาณคิวรอ</a:t>
+            </a:r>
+          </a:p>
+        </p:txBody>
+      </p:sp>
+      <p:sp>
+        <p:nvSpPr>
+          <p:cNvPr id="7" name="Rounded Rectangle 6"/>
+          <p:cNvSpPr/>
+          <p:nvPr/>
+        </p:nvSpPr>
+        <p:spPr>
+          <a:xfrm>
+            <a:off x="8046720" y="1691640"/>
+            <a:ext cx="3413455" cy="4480560"/>
+          </a:xfrm>
+          <a:prstGeom prst="roundRect">
+            <a:avLst/>
+          </a:prstGeom>
+          <a:solidFill>
+            <a:srgbClr val="0E261C"/>
+          </a:solidFill>
+          <a:ln w="19050">
+            <a:solidFill>
+              <a:srgbClr val="52B788"/>
+            </a:solidFill>
+          </a:ln>
+        </p:spPr>
+        <p:style>
+          <a:lnRef idx="1">
+            <a:schemeClr val="accent1"/>
+          </a:lnRef>
+          <a:fillRef idx="3">
+            <a:schemeClr val="accent1"/>
+          </a:fillRef>
+          <a:effectRef idx="2">
+            <a:schemeClr val="accent1"/>
+          </a:effectRef>
+          <a:fontRef idx="minor">
+            <a:schemeClr val="lt1"/>
+          </a:fontRef>
+        </p:style>
+        <p:txBody>
+          <a:bodyPr rtlCol="0" anchor="ctr"/>
+          <a:lstStyle/>
+          <a:p>
+            <a:pPr algn="ctr"/>
+          </a:p>
+        </p:txBody>
+      </p:sp>
+      <p:pic>
+        <p:nvPicPr>
+          <p:cNvPr id="8" name="Picture 7" descr="ev_cart_cockpit_tablet.jpg"/>
+          <p:cNvPicPr>
+            <a:picLocks noChangeAspect="1"/>
+          </p:cNvPicPr>
+          <p:nvPr/>
+        </p:nvPicPr>
+        <p:blipFill>
+          <a:blip r:embed="rId3"/>
+          <a:stretch>
+            <a:fillRect/>
+          </a:stretch>
+        </p:blipFill>
+        <p:spPr>
+          <a:xfrm>
+            <a:off x="8229600" y="1874519"/>
+            <a:ext cx="3047695" cy="3383280"/>
+          </a:xfrm>
+          <a:prstGeom prst="rect">
+            <a:avLst/>
+          </a:prstGeom>
+        </p:spPr>
+      </p:pic>
+      <p:sp>
+        <p:nvSpPr>
+          <p:cNvPr id="9" name="TextBox 8"/>
+          <p:cNvSpPr txBox="1"/>
+          <p:nvPr/>
+        </p:nvSpPr>
+        <p:spPr>
+          <a:xfrm>
+            <a:off x="8229600" y="5394960"/>
+            <a:ext cx="3047695" cy="685800"/>
+          </a:xfrm>
+          <a:prstGeom prst="rect">
+            <a:avLst/>
+          </a:prstGeom>
+          <a:noFill/>
+        </p:spPr>
+        <p:txBody>
+          <a:bodyPr wrap="square" lIns="0" rIns="0" tIns="0" bIns="0">
+            <a:spAutoFit/>
+          </a:bodyPr>
+          <a:lstStyle/>
+          <a:p>
+            <a:pPr>
+              <a:defRPr sz="1300" b="1">
+                <a:solidFill>
+                  <a:srgbClr val="6EE7B7"/>
+                </a:solidFill>
+                <a:latin typeface="Prompt"/>
+              </a:defRPr>
+            </a:pPr>
+            <a:r>
+              <a:t>ภาพจริง: แท็บเล็ตประจำรถ EV</a:t>
+            </a:r>
+          </a:p>
+          <a:p>
+            <a:pPr>
+              <a:defRPr sz="1150">
+                <a:solidFill>
+                  <a:srgbClr val="E2E8F0"/>
+                </a:solidFill>
+                <a:latin typeface="Sarabun"/>
+              </a:defRPr>
+            </a:pPr>
+            <a:r>
+              <a:t>ติดตั้งในห้องโดยสารคนขับ ส่งพิกัด GPS ทุก 5 วิ และใช้สแกนตรวจตั๋ว Check-in</a:t>
+            </a:r>
+          </a:p>
+        </p:txBody>
+      </p:sp>
     </p:spTree>
   </p:cSld>
   <p:clrMapOvr>
@@ -4990,7 +10502,7 @@
 </p:sld>
 </file>
 
-<file path=ppt/slides/slide9.xml><?xml version="1.0" encoding="utf-8"?>
+<file path=ppt/slides/slide8.xml><?xml version="1.0" encoding="utf-8"?>
 <p:sld xmlns:a="http://schemas.openxmlformats.org/drawingml/2006/main" xmlns:p="http://schemas.openxmlformats.org/presentationml/2006/main" xmlns:r="http://schemas.openxmlformats.org/officeDocument/2006/relationships">
   <p:cSld>
     <p:spTree>
@@ -5002,7 +10514,7 @@
       <p:grpSpPr/>
       <p:pic>
         <p:nvPicPr>
-          <p:cNvPr id="2" name="Picture 1" descr="slide_09.jpg"/>
+          <p:cNvPr id="2" name="Picture 1" descr="dark_topographic_bg.jpg"/>
           <p:cNvPicPr>
             <a:picLocks noChangeAspect="1"/>
           </p:cNvPicPr>
@@ -5024,6 +10536,1015 @@
           </a:prstGeom>
         </p:spPr>
       </p:pic>
+      <p:sp>
+        <p:nvSpPr>
+          <p:cNvPr id="3" name="Rounded Rectangle 2"/>
+          <p:cNvSpPr/>
+          <p:nvPr/>
+        </p:nvSpPr>
+        <p:spPr>
+          <a:xfrm>
+            <a:off x="731520" y="365760"/>
+            <a:ext cx="3200400" cy="320040"/>
+          </a:xfrm>
+          <a:prstGeom prst="roundRect">
+            <a:avLst/>
+          </a:prstGeom>
+          <a:solidFill>
+            <a:srgbClr val="123024"/>
+          </a:solidFill>
+          <a:ln w="12700">
+            <a:solidFill>
+              <a:srgbClr val="52B788"/>
+            </a:solidFill>
+          </a:ln>
+        </p:spPr>
+        <p:style>
+          <a:lnRef idx="1">
+            <a:schemeClr val="accent1"/>
+          </a:lnRef>
+          <a:fillRef idx="3">
+            <a:schemeClr val="accent1"/>
+          </a:fillRef>
+          <a:effectRef idx="2">
+            <a:schemeClr val="accent1"/>
+          </a:effectRef>
+          <a:fontRef idx="minor">
+            <a:schemeClr val="lt1"/>
+          </a:fontRef>
+        </p:style>
+        <p:txBody>
+          <a:bodyPr rtlCol="0" anchor="ctr" wrap="square" lIns="0" rIns="0" tIns="0" bIns="0"/>
+          <a:lstStyle/>
+          <a:p>
+            <a:pPr algn="ctr">
+              <a:defRPr sz="1100" b="1">
+                <a:solidFill>
+                  <a:srgbClr val="6EE7B7"/>
+                </a:solidFill>
+                <a:latin typeface="Prompt"/>
+              </a:defRPr>
+            </a:pPr>
+            <a:r>
+              <a:t>QUEUE &amp; NOTIFICATIONS</a:t>
+            </a:r>
+          </a:p>
+        </p:txBody>
+      </p:sp>
+      <p:sp>
+        <p:nvSpPr>
+          <p:cNvPr id="4" name="TextBox 3"/>
+          <p:cNvSpPr txBox="1"/>
+          <p:nvPr/>
+        </p:nvSpPr>
+        <p:spPr>
+          <a:xfrm>
+            <a:off x="731520" y="685800"/>
+            <a:ext cx="10728655" cy="868680"/>
+          </a:xfrm>
+          <a:prstGeom prst="rect">
+            <a:avLst/>
+          </a:prstGeom>
+          <a:noFill/>
+        </p:spPr>
+        <p:txBody>
+          <a:bodyPr wrap="square" lIns="0" rIns="0" tIns="0" bIns="0">
+            <a:spAutoFit/>
+          </a:bodyPr>
+          <a:lstStyle/>
+          <a:p>
+            <a:pPr>
+              <a:spcAft>
+                <a:spcPts val="300"/>
+              </a:spcAft>
+              <a:defRPr sz="2600" b="1">
+                <a:solidFill>
+                  <a:srgbClr val="FFFFFF"/>
+                </a:solidFill>
+                <a:latin typeface="Prompt"/>
+              </a:defRPr>
+            </a:pPr>
+            <a:r>
+              <a:t>การบริหารคิวอัจฉริยะและการแจ้งเตือน</a:t>
+            </a:r>
+          </a:p>
+          <a:p>
+            <a:pPr>
+              <a:defRPr sz="1400">
+                <a:solidFill>
+                  <a:srgbClr val="A7F3D0"/>
+                </a:solidFill>
+                <a:latin typeface="Sarabun"/>
+              </a:defRPr>
+            </a:pPr>
+            <a:r>
+              <a:t>Smart Queue Balancing ลดความแออัด พร้อมระบบแจ้งเตือนแบบเรียลไทม์</a:t>
+            </a:r>
+          </a:p>
+        </p:txBody>
+      </p:sp>
+      <p:sp>
+        <p:nvSpPr>
+          <p:cNvPr id="5" name="Rounded Rectangle 4"/>
+          <p:cNvSpPr/>
+          <p:nvPr/>
+        </p:nvSpPr>
+        <p:spPr>
+          <a:xfrm>
+            <a:off x="731520" y="1691640"/>
+            <a:ext cx="3429000" cy="4480560"/>
+          </a:xfrm>
+          <a:prstGeom prst="roundRect">
+            <a:avLst/>
+          </a:prstGeom>
+          <a:solidFill>
+            <a:srgbClr val="0E261C"/>
+          </a:solidFill>
+          <a:ln w="19050">
+            <a:solidFill>
+              <a:srgbClr val="52B788"/>
+            </a:solidFill>
+          </a:ln>
+        </p:spPr>
+        <p:style>
+          <a:lnRef idx="1">
+            <a:schemeClr val="accent1"/>
+          </a:lnRef>
+          <a:fillRef idx="3">
+            <a:schemeClr val="accent1"/>
+          </a:fillRef>
+          <a:effectRef idx="2">
+            <a:schemeClr val="accent1"/>
+          </a:effectRef>
+          <a:fontRef idx="minor">
+            <a:schemeClr val="lt1"/>
+          </a:fontRef>
+        </p:style>
+        <p:txBody>
+          <a:bodyPr rtlCol="0" anchor="ctr" wrap="square" lIns="256032" rIns="256032" tIns="256032"/>
+          <a:lstStyle/>
+          <a:p>
+            <a:pPr algn="ctr">
+              <a:defRPr sz="1900" b="1">
+                <a:solidFill>
+                  <a:srgbClr val="FFFFFF"/>
+                </a:solidFill>
+                <a:latin typeface="Prompt"/>
+              </a:defRPr>
+            </a:pPr>
+            <a:r>
+              <a:t>Smart Queue Balancing</a:t>
+            </a:r>
+          </a:p>
+          <a:p>
+            <a:pPr>
+              <a:spcAft>
+                <a:spcPts val="1400"/>
+              </a:spcAft>
+              <a:defRPr sz="1100">
+                <a:solidFill>
+                  <a:srgbClr val="52B788"/>
+                </a:solidFill>
+                <a:latin typeface="Prompt"/>
+              </a:defRPr>
+            </a:pPr>
+            <a:r>
+              <a:t>การกระจายผู้โดยสารอัจฉริยะ</a:t>
+            </a:r>
+          </a:p>
+          <a:p>
+            <a:pPr>
+              <a:spcAft>
+                <a:spcPts val="800"/>
+              </a:spcAft>
+              <a:defRPr sz="1300">
+                <a:solidFill>
+                  <a:srgbClr val="E2E8F0"/>
+                </a:solidFill>
+                <a:latin typeface="Sarabun"/>
+              </a:defRPr>
+            </a:pPr>
+            <a:r>
+              <a:t>• คำนวณความจุที่นั่งว่างจริง (Seat Capacity) บนรถเทียบกับคิวรอแต่ละสถานี</a:t>
+            </a:r>
+          </a:p>
+          <a:p>
+            <a:pPr>
+              <a:spcAft>
+                <a:spcPts val="800"/>
+              </a:spcAft>
+              <a:defRPr sz="1300">
+                <a:solidFill>
+                  <a:srgbClr val="E2E8F0"/>
+                </a:solidFill>
+                <a:latin typeface="Sarabun"/>
+              </a:defRPr>
+            </a:pPr>
+            <a:r>
+              <a:t>• หากสถานีใดมีผู้โดยสารสะสมหนาแน่น ระบบจะแจ้งเตือนให้จัดรถเสริมไปรับทันที</a:t>
+            </a:r>
+          </a:p>
+          <a:p>
+            <a:pPr>
+              <a:spcAft>
+                <a:spcPts val="800"/>
+              </a:spcAft>
+              <a:defRPr sz="1300">
+                <a:solidFill>
+                  <a:srgbClr val="E2E8F0"/>
+                </a:solidFill>
+                <a:latin typeface="Sarabun"/>
+              </a:defRPr>
+            </a:pPr>
+            <a:r>
+              <a:t>• ลดปัญหาคอขวดที่สถานียอดนิยม เช่น Canopy Walkway หรือกลุ่มเรือนกระจก</a:t>
+            </a:r>
+          </a:p>
+          <a:p>
+            <a:pPr>
+              <a:spcAft>
+                <a:spcPts val="800"/>
+              </a:spcAft>
+              <a:defRPr sz="1300">
+                <a:solidFill>
+                  <a:srgbClr val="E2E8F0"/>
+                </a:solidFill>
+                <a:latin typeface="Sarabun"/>
+              </a:defRPr>
+            </a:pPr>
+            <a:r>
+              <a:t>• กระจายโหลดการเดินรถให้เกิดประสิทธิภาพสูงสุด</a:t>
+            </a:r>
+          </a:p>
+        </p:txBody>
+      </p:sp>
+      <p:sp>
+        <p:nvSpPr>
+          <p:cNvPr id="6" name="Rounded Rectangle 5"/>
+          <p:cNvSpPr/>
+          <p:nvPr/>
+        </p:nvSpPr>
+        <p:spPr>
+          <a:xfrm>
+            <a:off x="4389120" y="1691640"/>
+            <a:ext cx="3429000" cy="4480560"/>
+          </a:xfrm>
+          <a:prstGeom prst="roundRect">
+            <a:avLst/>
+          </a:prstGeom>
+          <a:solidFill>
+            <a:srgbClr val="0E261C"/>
+          </a:solidFill>
+          <a:ln w="19050">
+            <a:solidFill>
+              <a:srgbClr val="38BDF8"/>
+            </a:solidFill>
+          </a:ln>
+        </p:spPr>
+        <p:style>
+          <a:lnRef idx="1">
+            <a:schemeClr val="accent1"/>
+          </a:lnRef>
+          <a:fillRef idx="3">
+            <a:schemeClr val="accent1"/>
+          </a:fillRef>
+          <a:effectRef idx="2">
+            <a:schemeClr val="accent1"/>
+          </a:effectRef>
+          <a:fontRef idx="minor">
+            <a:schemeClr val="lt1"/>
+          </a:fontRef>
+        </p:style>
+        <p:txBody>
+          <a:bodyPr rtlCol="0" anchor="ctr" wrap="square" lIns="256032" rIns="256032" tIns="256032"/>
+          <a:lstStyle/>
+          <a:p>
+            <a:pPr algn="ctr">
+              <a:defRPr sz="1900" b="1">
+                <a:solidFill>
+                  <a:srgbClr val="FFFFFF"/>
+                </a:solidFill>
+                <a:latin typeface="Prompt"/>
+              </a:defRPr>
+            </a:pPr>
+            <a:r>
+              <a:t>Omnichannel Display</a:t>
+            </a:r>
+          </a:p>
+          <a:p>
+            <a:pPr>
+              <a:spcAft>
+                <a:spcPts val="1400"/>
+              </a:spcAft>
+              <a:defRPr sz="1100">
+                <a:solidFill>
+                  <a:srgbClr val="38BDF8"/>
+                </a:solidFill>
+                <a:latin typeface="Prompt"/>
+              </a:defRPr>
+            </a:pPr>
+            <a:r>
+              <a:t>การแสดงผลสดรอบด้าน</a:t>
+            </a:r>
+          </a:p>
+          <a:p>
+            <a:pPr>
+              <a:spcAft>
+                <a:spcPts val="800"/>
+              </a:spcAft>
+              <a:defRPr sz="1300">
+                <a:solidFill>
+                  <a:srgbClr val="E2E8F0"/>
+                </a:solidFill>
+                <a:latin typeface="Sarabun"/>
+              </a:defRPr>
+            </a:pPr>
+            <a:r>
+              <a:t>• Live Map: เห็นตำแหน่งรถเคลื่อนที่สดๆ บนแผนที่ในแอปพลิเคชัน</a:t>
+            </a:r>
+          </a:p>
+          <a:p>
+            <a:pPr>
+              <a:spcAft>
+                <a:spcPts val="800"/>
+              </a:spcAft>
+              <a:defRPr sz="1300">
+                <a:solidFill>
+                  <a:srgbClr val="E2E8F0"/>
+                </a:solidFill>
+                <a:latin typeface="Sarabun"/>
+              </a:defRPr>
+            </a:pPr>
+            <a:r>
+              <a:t>• Station Display: หน้าจอมอนิเตอร์ประจำสถานีบอกเวลารถมาถึงและจำนวนคิวรอ</a:t>
+            </a:r>
+          </a:p>
+          <a:p>
+            <a:pPr>
+              <a:spcAft>
+                <a:spcPts val="800"/>
+              </a:spcAft>
+              <a:defRPr sz="1300">
+                <a:solidFill>
+                  <a:srgbClr val="E2E8F0"/>
+                </a:solidFill>
+                <a:latin typeface="Sarabun"/>
+              </a:defRPr>
+            </a:pPr>
+            <a:r>
+              <a:t>• Kiosk: ตรวจสอบคิวและสิทธิ์ตั๋วได้ตลอดเวลา</a:t>
+            </a:r>
+          </a:p>
+          <a:p>
+            <a:pPr>
+              <a:spcAft>
+                <a:spcPts val="800"/>
+              </a:spcAft>
+              <a:defRPr sz="1300">
+                <a:solidFill>
+                  <a:srgbClr val="E2E8F0"/>
+                </a:solidFill>
+                <a:latin typeface="Sarabun"/>
+              </a:defRPr>
+            </a:pPr>
+            <a:r>
+              <a:t>• ข้อมูลโปร่งใส เข้าถึงง่ายสำหรับนักท่องเที่ยวทุกคน</a:t>
+            </a:r>
+          </a:p>
+        </p:txBody>
+      </p:sp>
+      <p:sp>
+        <p:nvSpPr>
+          <p:cNvPr id="7" name="Rounded Rectangle 6"/>
+          <p:cNvSpPr/>
+          <p:nvPr/>
+        </p:nvSpPr>
+        <p:spPr>
+          <a:xfrm>
+            <a:off x="8046720" y="1691640"/>
+            <a:ext cx="3429000" cy="4480560"/>
+          </a:xfrm>
+          <a:prstGeom prst="roundRect">
+            <a:avLst/>
+          </a:prstGeom>
+          <a:solidFill>
+            <a:srgbClr val="0E261C"/>
+          </a:solidFill>
+          <a:ln w="19050">
+            <a:solidFill>
+              <a:srgbClr val="F59E0B"/>
+            </a:solidFill>
+          </a:ln>
+        </p:spPr>
+        <p:style>
+          <a:lnRef idx="1">
+            <a:schemeClr val="accent1"/>
+          </a:lnRef>
+          <a:fillRef idx="3">
+            <a:schemeClr val="accent1"/>
+          </a:fillRef>
+          <a:effectRef idx="2">
+            <a:schemeClr val="accent1"/>
+          </a:effectRef>
+          <a:fontRef idx="minor">
+            <a:schemeClr val="lt1"/>
+          </a:fontRef>
+        </p:style>
+        <p:txBody>
+          <a:bodyPr rtlCol="0" anchor="ctr" wrap="square" lIns="256032" rIns="256032" tIns="256032"/>
+          <a:lstStyle/>
+          <a:p>
+            <a:pPr algn="ctr">
+              <a:defRPr sz="1900" b="1">
+                <a:solidFill>
+                  <a:srgbClr val="FFFFFF"/>
+                </a:solidFill>
+                <a:latin typeface="Prompt"/>
+              </a:defRPr>
+            </a:pPr>
+            <a:r>
+              <a:t>Proactive Push Notification</a:t>
+            </a:r>
+          </a:p>
+          <a:p>
+            <a:pPr>
+              <a:spcAft>
+                <a:spcPts val="1400"/>
+              </a:spcAft>
+              <a:defRPr sz="1100">
+                <a:solidFill>
+                  <a:srgbClr val="F59E0B"/>
+                </a:solidFill>
+                <a:latin typeface="Prompt"/>
+              </a:defRPr>
+            </a:pPr>
+            <a:r>
+              <a:t>การแจ้งเตือนล่วงหน้า</a:t>
+            </a:r>
+          </a:p>
+          <a:p>
+            <a:pPr>
+              <a:spcAft>
+                <a:spcPts val="800"/>
+              </a:spcAft>
+              <a:defRPr sz="1300">
+                <a:solidFill>
+                  <a:srgbClr val="E2E8F0"/>
+                </a:solidFill>
+                <a:latin typeface="Sarabun"/>
+              </a:defRPr>
+            </a:pPr>
+            <a:r>
+              <a:t>• ส่ง Push Notification ผ่าน Mobile App หรือ LINE เมื่อรถใกล้ถึงในระยะ 3 นาที หรือ 500 เมตร</a:t>
+            </a:r>
+          </a:p>
+          <a:p>
+            <a:pPr>
+              <a:spcAft>
+                <a:spcPts val="800"/>
+              </a:spcAft>
+              <a:defRPr sz="1300">
+                <a:solidFill>
+                  <a:srgbClr val="E2E8F0"/>
+                </a:solidFill>
+                <a:latin typeface="Sarabun"/>
+              </a:defRPr>
+            </a:pPr>
+            <a:r>
+              <a:t>• นักท่องเที่ยวไม่ต้องยืนตากแดดรอที่สถานี สามารถเดินถ่ายรูปหรือจิบกาแฟได้อย่างสบายใจ</a:t>
+            </a:r>
+          </a:p>
+          <a:p>
+            <a:pPr>
+              <a:spcAft>
+                <a:spcPts val="800"/>
+              </a:spcAft>
+              <a:defRPr sz="1300">
+                <a:solidFill>
+                  <a:srgbClr val="E2E8F0"/>
+                </a:solidFill>
+                <a:latin typeface="Sarabun"/>
+              </a:defRPr>
+            </a:pPr>
+            <a:r>
+              <a:t>• แจ้งเตือนเปลี่ยนสถานะคิวเมื่อถึงคิวขึ้นรถ</a:t>
+            </a:r>
+          </a:p>
+          <a:p>
+            <a:pPr>
+              <a:spcAft>
+                <a:spcPts val="800"/>
+              </a:spcAft>
+              <a:defRPr sz="1300">
+                <a:solidFill>
+                  <a:srgbClr val="E2E8F0"/>
+                </a:solidFill>
+                <a:latin typeface="Sarabun"/>
+              </a:defRPr>
+            </a:pPr>
+            <a:r>
+              <a:t>• ระบบแจ้งเตือนฉุกเฉินกรณีสภาพอากาศหรือการปรับรอบรถ</a:t>
+            </a:r>
+          </a:p>
+        </p:txBody>
+      </p:sp>
+    </p:spTree>
+  </p:cSld>
+  <p:clrMapOvr>
+    <a:masterClrMapping/>
+  </p:clrMapOvr>
+</p:sld>
+</file>
+
+<file path=ppt/slides/slide9.xml><?xml version="1.0" encoding="utf-8"?>
+<p:sld xmlns:a="http://schemas.openxmlformats.org/drawingml/2006/main" xmlns:p="http://schemas.openxmlformats.org/presentationml/2006/main" xmlns:r="http://schemas.openxmlformats.org/officeDocument/2006/relationships">
+  <p:cSld>
+    <p:spTree>
+      <p:nvGrpSpPr>
+        <p:cNvPr id="1" name=""/>
+        <p:cNvGrpSpPr/>
+        <p:nvPr/>
+      </p:nvGrpSpPr>
+      <p:grpSpPr/>
+      <p:pic>
+        <p:nvPicPr>
+          <p:cNvPr id="2" name="Picture 1" descr="dark_topographic_bg.jpg"/>
+          <p:cNvPicPr>
+            <a:picLocks noChangeAspect="1"/>
+          </p:cNvPicPr>
+          <p:nvPr/>
+        </p:nvPicPr>
+        <p:blipFill>
+          <a:blip r:embed="rId2"/>
+          <a:stretch>
+            <a:fillRect/>
+          </a:stretch>
+        </p:blipFill>
+        <p:spPr>
+          <a:xfrm>
+            <a:off x="0" y="0"/>
+            <a:ext cx="12191695" cy="6858000"/>
+          </a:xfrm>
+          <a:prstGeom prst="rect">
+            <a:avLst/>
+          </a:prstGeom>
+        </p:spPr>
+      </p:pic>
+      <p:sp>
+        <p:nvSpPr>
+          <p:cNvPr id="3" name="Rounded Rectangle 2"/>
+          <p:cNvSpPr/>
+          <p:nvPr/>
+        </p:nvSpPr>
+        <p:spPr>
+          <a:xfrm>
+            <a:off x="731520" y="365760"/>
+            <a:ext cx="3200400" cy="320040"/>
+          </a:xfrm>
+          <a:prstGeom prst="roundRect">
+            <a:avLst/>
+          </a:prstGeom>
+          <a:solidFill>
+            <a:srgbClr val="123024"/>
+          </a:solidFill>
+          <a:ln w="12700">
+            <a:solidFill>
+              <a:srgbClr val="52B788"/>
+            </a:solidFill>
+          </a:ln>
+        </p:spPr>
+        <p:style>
+          <a:lnRef idx="1">
+            <a:schemeClr val="accent1"/>
+          </a:lnRef>
+          <a:fillRef idx="3">
+            <a:schemeClr val="accent1"/>
+          </a:fillRef>
+          <a:effectRef idx="2">
+            <a:schemeClr val="accent1"/>
+          </a:effectRef>
+          <a:fontRef idx="minor">
+            <a:schemeClr val="lt1"/>
+          </a:fontRef>
+        </p:style>
+        <p:txBody>
+          <a:bodyPr rtlCol="0" anchor="ctr" wrap="square" lIns="0" rIns="0" tIns="0" bIns="0"/>
+          <a:lstStyle/>
+          <a:p>
+            <a:pPr algn="ctr">
+              <a:defRPr sz="1100" b="1">
+                <a:solidFill>
+                  <a:srgbClr val="6EE7B7"/>
+                </a:solidFill>
+                <a:latin typeface="Prompt"/>
+              </a:defRPr>
+            </a:pPr>
+            <a:r>
+              <a:t>SMART GUIDE</a:t>
+            </a:r>
+          </a:p>
+        </p:txBody>
+      </p:sp>
+      <p:sp>
+        <p:nvSpPr>
+          <p:cNvPr id="4" name="TextBox 3"/>
+          <p:cNvSpPr txBox="1"/>
+          <p:nvPr/>
+        </p:nvSpPr>
+        <p:spPr>
+          <a:xfrm>
+            <a:off x="731520" y="685800"/>
+            <a:ext cx="10728655" cy="868680"/>
+          </a:xfrm>
+          <a:prstGeom prst="rect">
+            <a:avLst/>
+          </a:prstGeom>
+          <a:noFill/>
+        </p:spPr>
+        <p:txBody>
+          <a:bodyPr wrap="square" lIns="0" rIns="0" tIns="0" bIns="0">
+            <a:spAutoFit/>
+          </a:bodyPr>
+          <a:lstStyle/>
+          <a:p>
+            <a:pPr>
+              <a:spcAft>
+                <a:spcPts val="300"/>
+              </a:spcAft>
+              <a:defRPr sz="2600" b="1">
+                <a:solidFill>
+                  <a:srgbClr val="FFFFFF"/>
+                </a:solidFill>
+                <a:latin typeface="Prompt"/>
+              </a:defRPr>
+            </a:pPr>
+            <a:r>
+              <a:t>ระบบแนะนำแหล่งท่องเที่ยวตามพิกัดภูมิศาสตร์</a:t>
+            </a:r>
+          </a:p>
+          <a:p>
+            <a:pPr>
+              <a:defRPr sz="1400">
+                <a:solidFill>
+                  <a:srgbClr val="A7F3D0"/>
+                </a:solidFill>
+                <a:latin typeface="Sarabun"/>
+              </a:defRPr>
+            </a:pPr>
+            <a:r>
+              <a:t>ยกระดับการท่องเที่ยวเชิงเรียนรู้ด้วย Geofence Virtual Beacon Technology</a:t>
+            </a:r>
+          </a:p>
+        </p:txBody>
+      </p:sp>
+      <p:sp>
+        <p:nvSpPr>
+          <p:cNvPr id="5" name="Rounded Rectangle 4"/>
+          <p:cNvSpPr/>
+          <p:nvPr/>
+        </p:nvSpPr>
+        <p:spPr>
+          <a:xfrm>
+            <a:off x="731520" y="1691640"/>
+            <a:ext cx="5257800" cy="4480560"/>
+          </a:xfrm>
+          <a:prstGeom prst="roundRect">
+            <a:avLst/>
+          </a:prstGeom>
+          <a:solidFill>
+            <a:srgbClr val="0E261C"/>
+          </a:solidFill>
+          <a:ln w="19050">
+            <a:solidFill>
+              <a:srgbClr val="52B788"/>
+            </a:solidFill>
+          </a:ln>
+        </p:spPr>
+        <p:style>
+          <a:lnRef idx="1">
+            <a:schemeClr val="accent1"/>
+          </a:lnRef>
+          <a:fillRef idx="3">
+            <a:schemeClr val="accent1"/>
+          </a:fillRef>
+          <a:effectRef idx="2">
+            <a:schemeClr val="accent1"/>
+          </a:effectRef>
+          <a:fontRef idx="minor">
+            <a:schemeClr val="lt1"/>
+          </a:fontRef>
+        </p:style>
+        <p:txBody>
+          <a:bodyPr rtlCol="0" anchor="ctr" wrap="square" lIns="320040" rIns="320040" tIns="320040"/>
+          <a:lstStyle/>
+          <a:p>
+            <a:pPr algn="ctr">
+              <a:spcAft>
+                <a:spcPts val="1600"/>
+              </a:spcAft>
+              <a:defRPr sz="2000" b="1">
+                <a:solidFill>
+                  <a:srgbClr val="6EE7B7"/>
+                </a:solidFill>
+                <a:latin typeface="Prompt"/>
+              </a:defRPr>
+            </a:pPr>
+            <a:r>
+              <a:t>เทคโนโลยี Geofences ในพื้นที่ 6,500 ไร่</a:t>
+            </a:r>
+          </a:p>
+          <a:p>
+            <a:pPr>
+              <a:defRPr sz="1450" b="1">
+                <a:solidFill>
+                  <a:srgbClr val="FFFFFF"/>
+                </a:solidFill>
+                <a:latin typeface="Prompt"/>
+              </a:defRPr>
+            </a:pPr>
+            <a:r>
+              <a:t>• รั้วพิกัดเสมือน (Virtual Geofence Zones):</a:t>
+            </a:r>
+          </a:p>
+          <a:p>
+            <a:pPr>
+              <a:spcAft>
+                <a:spcPts val="1000"/>
+              </a:spcAft>
+              <a:defRPr sz="1300">
+                <a:solidFill>
+                  <a:srgbClr val="E2E8F0"/>
+                </a:solidFill>
+                <a:latin typeface="Sarabun"/>
+              </a:defRPr>
+            </a:pPr>
+            <a:r>
+              <a:t>  กำหนดพื้นที่จำลองรอบจุดแลนด์มาร์ก ตรวจจับเมื่อรถหรือนักท่องเที่ยวเข้าสู่พื้นที่โดยอัตโนมัติ</a:t>
+            </a:r>
+          </a:p>
+          <a:p>
+            <a:pPr>
+              <a:defRPr sz="1450" b="1">
+                <a:solidFill>
+                  <a:srgbClr val="FFFFFF"/>
+                </a:solidFill>
+                <a:latin typeface="Prompt"/>
+              </a:defRPr>
+            </a:pPr>
+            <a:r>
+              <a:t>• Context-Aware Multimedia Guide:</a:t>
+            </a:r>
+          </a:p>
+          <a:p>
+            <a:pPr>
+              <a:spcAft>
+                <a:spcPts val="1000"/>
+              </a:spcAft>
+              <a:defRPr sz="1300">
+                <a:solidFill>
+                  <a:srgbClr val="E2E8F0"/>
+                </a:solidFill>
+                <a:latin typeface="Sarabun"/>
+              </a:defRPr>
+            </a:pPr>
+            <a:r>
+              <a:t>  เด้งข้อมูลความรู้ แนะนำพันธุ์ไม้เด่น ประวัติความเป็นมา และคลิปวิดีโอสั้นบนจอมือถือตามจุดที่ยืนอยู่</a:t>
+            </a:r>
+          </a:p>
+          <a:p>
+            <a:pPr>
+              <a:defRPr sz="1450" b="1">
+                <a:solidFill>
+                  <a:srgbClr val="FFFFFF"/>
+                </a:solidFill>
+                <a:latin typeface="Prompt"/>
+              </a:defRPr>
+            </a:pPr>
+            <a:r>
+              <a:t>• Immersive Audio Guide:</a:t>
+            </a:r>
+          </a:p>
+          <a:p>
+            <a:pPr>
+              <a:spcAft>
+                <a:spcPts val="1000"/>
+              </a:spcAft>
+              <a:defRPr sz="1300">
+                <a:solidFill>
+                  <a:srgbClr val="E2E8F0"/>
+                </a:solidFill>
+                <a:latin typeface="Sarabun"/>
+              </a:defRPr>
+            </a:pPr>
+            <a:r>
+              <a:t>  เปิดเสียงบรรยายแนะนำให้นักท่องเที่ยวรับฟังอย่างกลมกลืนกับธรรมชาติรอบตัว เสมือนมีมัคคุเทศก์ส่วนตัว</a:t>
+            </a:r>
+          </a:p>
+          <a:p>
+            <a:pPr>
+              <a:defRPr sz="1450" b="1">
+                <a:solidFill>
+                  <a:srgbClr val="FFFFFF"/>
+                </a:solidFill>
+                <a:latin typeface="Prompt"/>
+              </a:defRPr>
+            </a:pPr>
+            <a:r>
+              <a:t>• Smart Route Suggestions:</a:t>
+            </a:r>
+          </a:p>
+          <a:p>
+            <a:pPr>
+              <a:spcAft>
+                <a:spcPts val="1000"/>
+              </a:spcAft>
+              <a:defRPr sz="1300">
+                <a:solidFill>
+                  <a:srgbClr val="E2E8F0"/>
+                </a:solidFill>
+                <a:latin typeface="Sarabun"/>
+              </a:defRPr>
+            </a:pPr>
+            <a:r>
+              <a:t>  แนะนำเส้นทางตามเวลา เช่น ทริปสั้น 1 ชม. หรือทริปเจาะลึก 3 ชม. สำหรับผู้รักธรรมชาติ</a:t>
+            </a:r>
+          </a:p>
+        </p:txBody>
+      </p:sp>
+      <p:sp>
+        <p:nvSpPr>
+          <p:cNvPr id="6" name="Rounded Rectangle 5"/>
+          <p:cNvSpPr/>
+          <p:nvPr/>
+        </p:nvSpPr>
+        <p:spPr>
+          <a:xfrm>
+            <a:off x="6199632" y="1691640"/>
+            <a:ext cx="5257800" cy="4480560"/>
+          </a:xfrm>
+          <a:prstGeom prst="roundRect">
+            <a:avLst/>
+          </a:prstGeom>
+          <a:solidFill>
+            <a:srgbClr val="0E261C"/>
+          </a:solidFill>
+          <a:ln w="19050">
+            <a:solidFill>
+              <a:srgbClr val="52B788"/>
+            </a:solidFill>
+          </a:ln>
+        </p:spPr>
+        <p:style>
+          <a:lnRef idx="1">
+            <a:schemeClr val="accent1"/>
+          </a:lnRef>
+          <a:fillRef idx="3">
+            <a:schemeClr val="accent1"/>
+          </a:fillRef>
+          <a:effectRef idx="2">
+            <a:schemeClr val="accent1"/>
+          </a:effectRef>
+          <a:fontRef idx="minor">
+            <a:schemeClr val="lt1"/>
+          </a:fontRef>
+        </p:style>
+        <p:txBody>
+          <a:bodyPr rtlCol="0" anchor="ctr" wrap="square" lIns="320040" rIns="320040" tIns="320040"/>
+          <a:lstStyle/>
+          <a:p>
+            <a:pPr algn="ctr">
+              <a:spcAft>
+                <a:spcPts val="1600"/>
+              </a:spcAft>
+              <a:defRPr sz="2000" b="1">
+                <a:solidFill>
+                  <a:srgbClr val="6EE7B7"/>
+                </a:solidFill>
+                <a:latin typeface="Prompt"/>
+              </a:defRPr>
+            </a:pPr>
+            <a:r>
+              <a:t>ไฮไลต์แลนด์มาร์กสำคัญที่เชื่อมต่อในระบบ</a:t>
+            </a:r>
+          </a:p>
+          <a:p>
+            <a:pPr>
+              <a:defRPr sz="1450" b="1">
+                <a:solidFill>
+                  <a:srgbClr val="FFFFFF"/>
+                </a:solidFill>
+                <a:latin typeface="Prompt"/>
+              </a:defRPr>
+            </a:pPr>
+            <a:r>
+              <a:t>1. Canopy Walkway (ทางเดินเรือนยอดไม้):</a:t>
+            </a:r>
+          </a:p>
+          <a:p>
+            <a:pPr>
+              <a:spcAft>
+                <a:spcPts val="1000"/>
+              </a:spcAft>
+              <a:defRPr sz="1300">
+                <a:solidFill>
+                  <a:srgbClr val="E2E8F0"/>
+                </a:solidFill>
+                <a:latin typeface="Sarabun"/>
+              </a:defRPr>
+            </a:pPr>
+            <a:r>
+              <a:t>ทางเดินลอยฟ้าเหนือเรือนยอดไม้ที่ยาวที่สุดในประเทศไทย แนะนำพันธุ์ไม้เรือนยอด พืชอิงอาศัย และทิวทัศน์ยอดดอย</a:t>
+            </a:r>
+          </a:p>
+          <a:p>
+            <a:pPr>
+              <a:defRPr sz="1450" b="1">
+                <a:solidFill>
+                  <a:srgbClr val="FFFFFF"/>
+                </a:solidFill>
+                <a:latin typeface="Prompt"/>
+              </a:defRPr>
+            </a:pPr>
+            <a:r>
+              <a:t>2. กลุ่มเรือนกระจกเฉลิมพระเกียรติ (Glasshouses):</a:t>
+            </a:r>
+          </a:p>
+          <a:p>
+            <a:pPr>
+              <a:spcAft>
+                <a:spcPts val="1000"/>
+              </a:spcAft>
+              <a:defRPr sz="1300">
+                <a:solidFill>
+                  <a:srgbClr val="E2E8F0"/>
+                </a:solidFill>
+                <a:latin typeface="Sarabun"/>
+              </a:defRPr>
+            </a:pPr>
+            <a:r>
+              <a:t>รวบรวมพืชทนแล้ง พืชป่าดงดิบ พืชกินแมลง และบัวนานาพันธุ์ จัดแสดงพืชหายากระดับโลก</a:t>
+            </a:r>
+          </a:p>
+          <a:p>
+            <a:pPr>
+              <a:defRPr sz="1450" b="1">
+                <a:solidFill>
+                  <a:srgbClr val="FFFFFF"/>
+                </a:solidFill>
+                <a:latin typeface="Prompt"/>
+              </a:defRPr>
+            </a:pPr>
+            <a:r>
+              <a:t>3. พิพิธภัณฑ์ธรรมชาติวิทยา (Natural History):</a:t>
+            </a:r>
+          </a:p>
+          <a:p>
+            <a:pPr>
+              <a:spcAft>
+                <a:spcPts val="1000"/>
+              </a:spcAft>
+              <a:defRPr sz="1300">
+                <a:solidFill>
+                  <a:srgbClr val="E2E8F0"/>
+                </a:solidFill>
+                <a:latin typeface="Sarabun"/>
+              </a:defRPr>
+            </a:pPr>
+            <a:r>
+              <a:t>นิทรรศการถาวรความหลากหลายทางชีวภาพ ธรณีวิทยา และการอนุรักษ์พันธุกรรมพืช</a:t>
+            </a:r>
+          </a:p>
+          <a:p>
+            <a:pPr>
+              <a:defRPr sz="1450" b="1">
+                <a:solidFill>
+                  <a:srgbClr val="FFFFFF"/>
+                </a:solidFill>
+                <a:latin typeface="Prompt"/>
+              </a:defRPr>
+            </a:pPr>
+            <a:r>
+              <a:t>4. สวนกล้วยไม้และลานธรรมชาติ:</a:t>
+            </a:r>
+          </a:p>
+          <a:p>
+            <a:pPr>
+              <a:spcAft>
+                <a:spcPts val="1000"/>
+              </a:spcAft>
+              <a:defRPr sz="1300">
+                <a:solidFill>
+                  <a:srgbClr val="E2E8F0"/>
+                </a:solidFill>
+                <a:latin typeface="Sarabun"/>
+              </a:defRPr>
+            </a:pPr>
+            <a:r>
+              <a:t>ศูนย์อนุรักษ์กล้วยไม้ไทยและสายพันธุ์ผสม สัมผัสอากาศบริสุทธิ์ของดอยแม่ริม</a:t>
+            </a:r>
+          </a:p>
+        </p:txBody>
+      </p:sp>
     </p:spTree>
   </p:cSld>
   <p:clrMapOvr>

--- a/qsbg_smart_tour_presentation_large_font.pptx
+++ b/qsbg_smart_tour_presentation_large_font.pptx
@@ -994,7 +994,17 @@
           </a:p>
           <a:p>
             <a:r>
-              <a:t>วัตถุประสงค์หลักของโครงการจึงแบ่งออกเป็น 2 มิติสำคัญ: มิติแรกคือการสร้าง Digital Foundation วางระบบข้อมูลสารสนเทศที่สมบูรณ์แบบ มิติที่สองคือการพัฒนา Application Suite เชื่อมโยงทุกคนเข้าด้วยกัน ทั้งนักท่องเที่ยว พนักงานขับรถ เจ้าหน้าที่ และผู้บริหารครับ</a:t>
+              <a:t>สำหรับวัตถุประสงค์หลักของโครงการ มี 2 ประการตามกรอบการดำเนินงานครับ:</a:t>
+            </a:r>
+          </a:p>
+          <a:p>
+            <a:r>
+              <a:t>ข้อที่ 1 คือ เพื่อวิเคราะห์และออกแบบระบบการจัดการข้อมูลสารสนเทศรถนำเที่ยวไฟฟ้าเพื่อการบริหารงานของสวนพฤกษศาสตร์สมเด็จพระนางเจ้าสิริกิติ์ จังหวัดเชียงใหม่ เพื่อวางรากฐานระบบสารสนเทศที่มีประสิทธิภาพสูงสุด</a:t>
+            </a:r>
+          </a:p>
+          <a:p>
+            <a:r>
+              <a:t>และข้อที่ 2 คือ เพื่อพัฒนาแอปพลิเคชันระบบการจัดการรถนำเที่ยวไฟฟ้าของสวนพฤกษศาสตร์สมเด็จพระนางเจ้าสิริกิติ์ จังหวัดเชียงใหม่ ให้ครอบคลุมทั้งระบบจำหน่ายตั๋ว e-Ticket, การติดตามตำแหน่งรถ, การจัดคิว และแดชบอร์ดบริหารจัดการอย่างครบวงจรครับ</a:t>
             </a:r>
           </a:p>
         </p:txBody>
@@ -8033,9 +8043,9 @@
           <a:p>
             <a:pPr>
               <a:spcAft>
-                <a:spcPts val="1600"/>
-              </a:spcAft>
-              <a:defRPr sz="1800" b="1">
+                <a:spcPts val="2000"/>
+              </a:spcAft>
+              <a:defRPr sz="1900" b="1">
                 <a:solidFill>
                   <a:srgbClr val="1B4332"/>
                 </a:solidFill>
@@ -8043,12 +8053,15 @@
               </a:defRPr>
             </a:pPr>
             <a:r>
-              <a:t>วัตถุประสงค์หลักของโครงการ</a:t>
-            </a:r>
-          </a:p>
-          <a:p>
-            <a:pPr>
-              <a:defRPr sz="1450" b="1">
+              <a:t>วัตถุประสงค์โครงการ (Project Objectives)</a:t>
+            </a:r>
+          </a:p>
+          <a:p>
+            <a:pPr>
+              <a:spcAft>
+                <a:spcPts val="400"/>
+              </a:spcAft>
+              <a:defRPr sz="1550" b="1">
                 <a:solidFill>
                   <a:srgbClr val="134074"/>
                 </a:solidFill>
@@ -8056,15 +8069,15 @@
               </a:defRPr>
             </a:pPr>
             <a:r>
-              <a:t>1. ศึกษาวิเคราะห์และออกแบบสถาปัตยกรรมข้อมูล</a:t>
-            </a:r>
-          </a:p>
-          <a:p>
-            <a:pPr>
-              <a:spcAft>
-                <a:spcPts val="1400"/>
-              </a:spcAft>
-              <a:defRPr sz="1300">
+              <a:t>1. เพื่อวิเคราะห์และออกแบบระบบการจัดการข้อมูลสารสนเทศ</a:t>
+            </a:r>
+          </a:p>
+          <a:p>
+            <a:pPr>
+              <a:spcAft>
+                <a:spcPts val="2400"/>
+              </a:spcAft>
+              <a:defRPr sz="1350">
                 <a:solidFill>
                   <a:srgbClr val="14181B"/>
                 </a:solidFill>
@@ -8072,12 +8085,15 @@
               </a:defRPr>
             </a:pPr>
             <a:r>
-              <a:t>วิเคราะห์และออกแบบระบบฐานข้อมูลและโครงสร้างสารสนเทศรถนำเที่ยวไฟฟ้า เพื่อการบริหารงานที่มีประสิทธิภาพ</a:t>
-            </a:r>
-          </a:p>
-          <a:p>
-            <a:pPr>
-              <a:defRPr sz="1450" b="1">
+              <a:t>เพื่อวิเคราะห์และออกแบบระบบการจัดการข้อมูลสารสนเทศรถนำเที่ยวไฟฟ้า เพื่อการบริหารงานของสวนพฤกษศาสตร์สมเด็จพระนางเจ้าสิริกิติ์ จังหวัดเชียงใหม่</a:t>
+            </a:r>
+          </a:p>
+          <a:p>
+            <a:pPr>
+              <a:spcAft>
+                <a:spcPts val="400"/>
+              </a:spcAft>
+              <a:defRPr sz="1550" b="1">
                 <a:solidFill>
                   <a:srgbClr val="134074"/>
                 </a:solidFill>
@@ -8085,15 +8101,15 @@
               </a:defRPr>
             </a:pPr>
             <a:r>
-              <a:t>2. พัฒนาระบบแอปพลิเคชันจัดการรถนำเที่ยวครบวงจร</a:t>
-            </a:r>
-          </a:p>
-          <a:p>
-            <a:pPr>
-              <a:spcAft>
-                <a:spcPts val="1400"/>
-              </a:spcAft>
-              <a:defRPr sz="1300">
+              <a:t>2. เพื่อพัฒนาแอปพลิเคชันระบบการจัดการรถนำเที่ยวไฟฟ้า</a:t>
+            </a:r>
+          </a:p>
+          <a:p>
+            <a:pPr>
+              <a:spcAft>
+                <a:spcPts val="2400"/>
+              </a:spcAft>
+              <a:defRPr sz="1350">
                 <a:solidFill>
                   <a:srgbClr val="14181B"/>
                 </a:solidFill>
@@ -8101,36 +8117,7 @@
               </a:defRPr>
             </a:pPr>
             <a:r>
-              <a:t>พัฒนาแอปพลิเคชันระบบจัดการรถนำเที่ยวไฟฟ้า ที่รองรับทั้งนักท่องเที่ยว คนขับรถ จุดบริการสถานี และผู้บริหาร</a:t>
-            </a:r>
-          </a:p>
-          <a:p>
-            <a:pPr>
-              <a:defRPr sz="1450" b="1">
-                <a:solidFill>
-                  <a:srgbClr val="134074"/>
-                </a:solidFill>
-                <a:latin typeface="Segoe UI"/>
-              </a:defRPr>
-            </a:pPr>
-            <a:r>
-              <a:t>3. บูรณาการข้อมูลการท่องเที่ยวเชิงพื้นที่</a:t>
-            </a:r>
-          </a:p>
-          <a:p>
-            <a:pPr>
-              <a:spcAft>
-                <a:spcPts val="1400"/>
-              </a:spcAft>
-              <a:defRPr sz="1300">
-                <a:solidFill>
-                  <a:srgbClr val="14181B"/>
-                </a:solidFill>
-                <a:latin typeface="Segoe UI"/>
-              </a:defRPr>
-            </a:pPr>
-            <a:r>
-              <a:t>พัฒนารูปแบบการเชื่อมโยงข้อมูลการท่องเที่ยวภายในสวนฯ และจัดทำระบบรายงานสถิติเชิงลึกแบบเวลาจริง (Real-time)</a:t>
+              <a:t>เพื่อพัฒนาแอปพลิเคชันระบบการจัดการรถนำเที่ยวไฟฟ้า ของสวนพฤกษศาสตร์สมเด็จพระนางเจ้าสิริกิติ์ จังหวัดเชียงใหม่</a:t>
             </a:r>
           </a:p>
         </p:txBody>

--- a/qsbg_smart_tour_presentation_large_font.pptx
+++ b/qsbg_smart_tour_presentation_large_font.pptx
@@ -17,7 +17,6 @@
     <p:sldId id="265" r:id="rId17"/>
     <p:sldId id="266" r:id="rId18"/>
     <p:sldId id="267" r:id="rId19"/>
-    <p:sldId id="268" r:id="rId20"/>
   </p:sldIdLst>
   <p:sldSz cx="12191695" cy="6858000" type="screen4x3"/>
   <p:notesSz cx="6858000" cy="9144000"/>
@@ -599,7 +598,7 @@
           </a:p>
           <a:p>
             <a:r>
-              <a:t>Tech Stack ที่เราเลือกใช้เป็นเกรด Enterprise: Frontend ใช้ Next.js และ React Native, Backend ใช้ Node.js + Fastify และ Socket.io, ฐานข้อมูลแยก PostgreSQL กับ TimescaleDB และรันบน K8s Cloud ปลอดภัยและรองรับการขยายตัวช่วงเทศกาลได้สบายครับ</a:t>
+              <a:t>แผนงาน 9 เดือน แบ่งเป็น 3 ระยะชัดเจน: Phase 1 สร้างฐานราก Core Foundation, Phase 2 ระบบ Realtime &amp; Mobile App, และ Phase 3 ฟังก์ชันขั้นสูงและการส่งมอบงานสมบูรณ์ มั่นใจได้ว่าส่งมอบตรงเวลาแน่นอนครับ</a:t>
             </a:r>
           </a:p>
         </p:txBody>
@@ -674,7 +673,7 @@
           </a:p>
           <a:p>
             <a:r>
-              <a:t>แผนงาน 9 เดือน แบ่งเป็น 3 ระยะชัดเจน: Phase 1 สร้างฐานราก Core Foundation, Phase 2 ระบบ Realtime &amp; Mobile App, และ Phase 3 ฟังก์ชันขั้นสูงและการส่งมอบงานสมบูรณ์ มั่นใจได้ว่าส่งมอบตรงเวลาแน่นอนครับ</a:t>
+              <a:t>ความคุ้มค่าเกิดขึ้น 4 มิติ: นักท่องเที่ยวสะดวกสบาย, เจ้าหน้าที่ทำงานง่ายขึ้น, ผู้บริหารได้ข้อมูลสถิติตัดสินใจแม่นยำ และด้านสิ่งแวดล้อม การเปลี่ยนมาใช้รถ EV 100% พร้อมจุดชาร์จพลังงานสะอาดช่วยปกป้องธรรมชาติอย่างยั่งยืนครับ</a:t>
             </a:r>
           </a:p>
         </p:txBody>
@@ -744,82 +743,7 @@
           <a:lstStyle/>
           <a:p>
             <a:r>
-              <a:t>สคริปต์พูดหน้าที่ 12 (1.5 นาที):</a:t>
-            </a:r>
-          </a:p>
-          <a:p>
-            <a:r>
-              <a:t>ความคุ้มค่าเกิดขึ้น 4 มิติ: นักท่องเที่ยวสะดวกสบาย, เจ้าหน้าที่ทำงานง่ายขึ้น, ผู้บริหารได้ข้อมูลสถิติตัดสินใจแม่นยำ และด้านสิ่งแวดล้อม การเปลี่ยนมาใช้รถ EV 100% พร้อมจุดชาร์จพลังงานสะอาดช่วยปกป้องธรรมชาติอย่างยั่งยืนครับ</a:t>
-            </a:r>
-          </a:p>
-        </p:txBody>
-      </p:sp>
-      <p:sp>
-        <p:nvSpPr>
-          <p:cNvPr id="4" name="Slide Number Placeholder 3"/>
-          <p:cNvSpPr>
-            <a:spLocks noGrp="1"/>
-          </p:cNvSpPr>
-          <p:nvPr>
-            <p:ph type="sldNum" idx="5" sz="quarter"/>
-          </p:nvPr>
-        </p:nvSpPr>
-        <p:spPr/>
-      </p:sp>
-    </p:spTree>
-  </p:cSld>
-  <p:clrMapOvr>
-    <a:masterClrMapping/>
-  </p:clrMapOvr>
-</p:notes>
-</file>
-
-<file path=ppt/notesSlides/notesSlide13.xml><?xml version="1.0" encoding="utf-8"?>
-<p:notes xmlns:a="http://schemas.openxmlformats.org/drawingml/2006/main" xmlns:p="http://schemas.openxmlformats.org/presentationml/2006/main" xmlns:r="http://schemas.openxmlformats.org/officeDocument/2006/relationships">
-  <p:cSld>
-    <p:spTree>
-      <p:nvGrpSpPr>
-        <p:cNvPr id="1" name=""/>
-        <p:cNvGrpSpPr/>
-        <p:nvPr/>
-      </p:nvGrpSpPr>
-      <p:grpSpPr>
-        <a:xfrm>
-          <a:off x="0" y="0"/>
-          <a:ext cx="0" cy="0"/>
-          <a:chOff x="0" y="0"/>
-          <a:chExt cx="0" cy="0"/>
-        </a:xfrm>
-      </p:grpSpPr>
-      <p:sp>
-        <p:nvSpPr>
-          <p:cNvPr id="2" name="Slide Image Placeholder 1"/>
-          <p:cNvSpPr>
-            <a:spLocks noGrp="1"/>
-          </p:cNvSpPr>
-          <p:nvPr>
-            <p:ph type="sldImg" idx="2"/>
-          </p:nvPr>
-        </p:nvSpPr>
-        <p:spPr/>
-      </p:sp>
-      <p:sp>
-        <p:nvSpPr>
-          <p:cNvPr id="3" name="Notes Placeholder 2"/>
-          <p:cNvSpPr>
-            <a:spLocks noGrp="1"/>
-          </p:cNvSpPr>
-          <p:nvPr>
-            <p:ph type="body" idx="3" sz="quarter"/>
-          </p:nvPr>
-        </p:nvSpPr>
-        <p:spPr/>
-        <p:txBody>
-          <a:bodyPr/>
-          <a:lstStyle/>
-          <a:p>
-            <a:r>
-              <a:t>สคริปต์พูดหน้าที่ 13 (1 นาที):</a:t>
+              <a:t>สคริปต์พูดหน้าที่ 12 (1 นาที):</a:t>
             </a:r>
           </a:p>
           <a:p>
@@ -4877,7 +4801,7 @@
               </a:defRPr>
             </a:pPr>
             <a:r>
-              <a:t>TECHNOLOGY &amp; INFRASTRUCTURE</a:t>
+              <a:t>IMPLEMENTATION ROADMAP</a:t>
             </a:r>
           </a:p>
         </p:txBody>
@@ -4913,7 +4837,7 @@
               </a:defRPr>
             </a:pPr>
             <a:r>
-              <a:t>เทคโนโลยีและโครงสร้างพื้นฐานของระบบ (Tech Stack)</a:t>
+              <a:t>แผนการดำเนินงานและส่งมอบโครงการ (กรอบเวลา 9 เดือน)</a:t>
             </a:r>
           </a:p>
         </p:txBody>
@@ -4949,7 +4873,7 @@
               </a:defRPr>
             </a:pPr>
             <a:r>
-              <a:t>การคัดเลือกสถาปัตยกรรมทางเทคโนโลยีระดับสากลเพื่อความมั่นคงและเสถียรภาพ</a:t>
+              <a:t>การแบ่งระยะการดำเนินงานอย่างเป็นระบบเพื่อการส่งมอบที่ตรงเวลาและมีคุณภาพ</a:t>
             </a:r>
           </a:p>
         </p:txBody>
@@ -4963,7 +4887,7 @@
         <p:spPr>
           <a:xfrm>
             <a:off x="731520" y="1691640"/>
-            <a:ext cx="5120640" cy="2148840"/>
+            <a:ext cx="3328416" cy="4480560"/>
           </a:xfrm>
           <a:prstGeom prst="roundRect">
             <a:avLst/>
@@ -5001,14 +4925,57 @@
       </p:sp>
       <p:sp>
         <p:nvSpPr>
-          <p:cNvPr id="6" name="TextBox 5"/>
+          <p:cNvPr id="6" name="Rectangle 5"/>
+          <p:cNvSpPr/>
+          <p:nvPr/>
+        </p:nvSpPr>
+        <p:spPr>
+          <a:xfrm>
+            <a:off x="731520" y="1691640"/>
+            <a:ext cx="3328416" cy="128016"/>
+          </a:xfrm>
+          <a:prstGeom prst="rect">
+            <a:avLst/>
+          </a:prstGeom>
+          <a:solidFill>
+            <a:srgbClr val="0B2545"/>
+          </a:solidFill>
+          <a:ln>
+            <a:noFill/>
+          </a:ln>
+        </p:spPr>
+        <p:style>
+          <a:lnRef idx="1">
+            <a:schemeClr val="accent1"/>
+          </a:lnRef>
+          <a:fillRef idx="3">
+            <a:schemeClr val="accent1"/>
+          </a:fillRef>
+          <a:effectRef idx="2">
+            <a:schemeClr val="accent1"/>
+          </a:effectRef>
+          <a:fontRef idx="minor">
+            <a:schemeClr val="lt1"/>
+          </a:fontRef>
+        </p:style>
+        <p:txBody>
+          <a:bodyPr rtlCol="0" anchor="ctr"/>
+          <a:lstStyle/>
+          <a:p>
+            <a:pPr algn="ctr"/>
+          </a:p>
+        </p:txBody>
+      </p:sp>
+      <p:sp>
+        <p:nvSpPr>
+          <p:cNvPr id="7" name="TextBox 6"/>
           <p:cNvSpPr txBox="1"/>
           <p:nvPr/>
         </p:nvSpPr>
         <p:spPr>
           <a:xfrm>
-            <a:off x="960120" y="1856232"/>
-            <a:ext cx="4663440" cy="1819656"/>
+            <a:off x="960120" y="1920240"/>
+            <a:ext cx="2871216" cy="4023360"/>
           </a:xfrm>
           <a:prstGeom prst="rect">
             <a:avLst/>
@@ -5023,9 +4990,22 @@
           <a:p>
             <a:pPr>
               <a:spcAft>
-                <a:spcPts val="600"/>
-              </a:spcAft>
-              <a:defRPr sz="1400" b="1">
+                <a:spcPts val="200"/>
+              </a:spcAft>
+              <a:defRPr sz="1200" b="1">
+                <a:solidFill>
+                  <a:srgbClr val="0B2545"/>
+                </a:solidFill>
+                <a:latin typeface="Segoe UI"/>
+              </a:defRPr>
+            </a:pPr>
+            <a:r>
+              <a:t>ระยะที่ 1 (เดือนที่ 1 - 3)</a:t>
+            </a:r>
+          </a:p>
+          <a:p>
+            <a:pPr>
+              <a:defRPr sz="1700" b="1">
                 <a:solidFill>
                   <a:srgbClr val="1B4332"/>
                 </a:solidFill>
@@ -5033,11 +5013,30 @@
               </a:defRPr>
             </a:pPr>
             <a:r>
-              <a:t>FRONTEND &amp; MOBILE PLATFORMS</a:t>
-            </a:r>
-          </a:p>
-          <a:p>
-            <a:pPr>
+              <a:t>Core Foundation</a:t>
+            </a:r>
+          </a:p>
+          <a:p>
+            <a:pPr>
+              <a:spcAft>
+                <a:spcPts val="1200"/>
+              </a:spcAft>
+              <a:defRPr sz="1050">
+                <a:solidFill>
+                  <a:srgbClr val="5A646E"/>
+                </a:solidFill>
+                <a:latin typeface="Segoe UI"/>
+              </a:defRPr>
+            </a:pPr>
+            <a:r>
+              <a:t>รากฐานระบบและการชำระเงิน</a:t>
+            </a:r>
+          </a:p>
+          <a:p>
+            <a:pPr>
+              <a:spcAft>
+                <a:spcPts val="500"/>
+              </a:spcAft>
               <a:defRPr sz="1200">
                 <a:solidFill>
                   <a:srgbClr val="14181B"/>
@@ -5046,29 +5045,101 @@
               </a:defRPr>
             </a:pPr>
             <a:r>
-              <a:t>• Next.js Framework : พัฒนา Web Application และ Admin Dashboard มีประสิทธิภาพสูง รองรับ SEO</a:t>
-            </a:r>
-            <a:br/>
-            <a:r>
-              <a:t>• React Native : พัฒนา Mobile App (iOS / Android) และ Driver App ด้วยโค้ดชุดเดียวกัน</a:t>
-            </a:r>
-            <a:br/>
-            <a:r>
-              <a:t>• Tailwind CSS : ออกแบบหน้าจอให้ทันสมัย รองรับทุกขนาดอุปกรณ์ (Responsive UI)</a:t>
-            </a:r>
-          </a:p>
-        </p:txBody>
-      </p:sp>
-      <p:sp>
-        <p:nvSpPr>
-          <p:cNvPr id="7" name="Rounded Rectangle 6"/>
+              <a:t>• วิเคราะห์และออกแบบ DB Schema และ Architecture</a:t>
+            </a:r>
+          </a:p>
+          <a:p>
+            <a:pPr>
+              <a:spcAft>
+                <a:spcPts val="500"/>
+              </a:spcAft>
+              <a:defRPr sz="1200">
+                <a:solidFill>
+                  <a:srgbClr val="14181B"/>
+                </a:solidFill>
+                <a:latin typeface="Segoe UI"/>
+              </a:defRPr>
+            </a:pPr>
+            <a:r>
+              <a:t>• พัฒนาระบบ Backend API (Ticket, Station, Auth)</a:t>
+            </a:r>
+          </a:p>
+          <a:p>
+            <a:pPr>
+              <a:spcAft>
+                <a:spcPts val="500"/>
+              </a:spcAft>
+              <a:defRPr sz="1200">
+                <a:solidFill>
+                  <a:srgbClr val="14181B"/>
+                </a:solidFill>
+                <a:latin typeface="Segoe UI"/>
+              </a:defRPr>
+            </a:pPr>
+            <a:r>
+              <a:t>• พัฒนา Admin Dashboard จัดการข้อมูลสถานี/รถ</a:t>
+            </a:r>
+          </a:p>
+          <a:p>
+            <a:pPr>
+              <a:spcAft>
+                <a:spcPts val="500"/>
+              </a:spcAft>
+              <a:defRPr sz="1200">
+                <a:solidFill>
+                  <a:srgbClr val="14181B"/>
+                </a:solidFill>
+                <a:latin typeface="Segoe UI"/>
+              </a:defRPr>
+            </a:pPr>
+            <a:r>
+              <a:t>• พัฒนาระบบ Kiosk UI จำหน่ายตั๋วหน้าสถานี</a:t>
+            </a:r>
+          </a:p>
+          <a:p>
+            <a:pPr>
+              <a:spcAft>
+                <a:spcPts val="500"/>
+              </a:spcAft>
+              <a:defRPr sz="1200">
+                <a:solidFill>
+                  <a:srgbClr val="14181B"/>
+                </a:solidFill>
+                <a:latin typeface="Segoe UI"/>
+              </a:defRPr>
+            </a:pPr>
+            <a:r>
+              <a:t>• เชื่อมต่อ Payment Gateway (PromptPay/บัตร/เงินสด)</a:t>
+            </a:r>
+          </a:p>
+          <a:p>
+            <a:pPr>
+              <a:spcAft>
+                <a:spcPts val="500"/>
+              </a:spcAft>
+              <a:defRPr sz="1200">
+                <a:solidFill>
+                  <a:srgbClr val="14181B"/>
+                </a:solidFill>
+                <a:latin typeface="Segoe UI"/>
+              </a:defRPr>
+            </a:pPr>
+            <a:r>
+              <a:t>• พัฒนา Driver App บน Tablet สำหรับคนขับรถ</a:t>
+            </a:r>
+          </a:p>
+        </p:txBody>
+      </p:sp>
+      <p:sp>
+        <p:nvSpPr>
+          <p:cNvPr id="8" name="Rounded Rectangle 7"/>
           <p:cNvSpPr/>
           <p:nvPr/>
         </p:nvSpPr>
         <p:spPr>
           <a:xfrm>
-            <a:off x="6217920" y="1691640"/>
-            <a:ext cx="5120640" cy="2148840"/>
+            <a:off x="4389120" y="1691640"/>
+            <a:ext cx="3328416" cy="4480560"/>
           </a:xfrm>
           <a:prstGeom prst="roundRect">
             <a:avLst/>
@@ -5106,14 +5177,57 @@
       </p:sp>
       <p:sp>
         <p:nvSpPr>
-          <p:cNvPr id="8" name="TextBox 7"/>
+          <p:cNvPr id="9" name="Rectangle 8"/>
+          <p:cNvSpPr/>
+          <p:nvPr/>
+        </p:nvSpPr>
+        <p:spPr>
+          <a:xfrm>
+            <a:off x="4389120" y="1691640"/>
+            <a:ext cx="3328416" cy="128016"/>
+          </a:xfrm>
+          <a:prstGeom prst="rect">
+            <a:avLst/>
+          </a:prstGeom>
+          <a:solidFill>
+            <a:srgbClr val="2D6A4F"/>
+          </a:solidFill>
+          <a:ln>
+            <a:noFill/>
+          </a:ln>
+        </p:spPr>
+        <p:style>
+          <a:lnRef idx="1">
+            <a:schemeClr val="accent1"/>
+          </a:lnRef>
+          <a:fillRef idx="3">
+            <a:schemeClr val="accent1"/>
+          </a:fillRef>
+          <a:effectRef idx="2">
+            <a:schemeClr val="accent1"/>
+          </a:effectRef>
+          <a:fontRef idx="minor">
+            <a:schemeClr val="lt1"/>
+          </a:fontRef>
+        </p:style>
+        <p:txBody>
+          <a:bodyPr rtlCol="0" anchor="ctr"/>
+          <a:lstStyle/>
+          <a:p>
+            <a:pPr algn="ctr"/>
+          </a:p>
+        </p:txBody>
+      </p:sp>
+      <p:sp>
+        <p:nvSpPr>
+          <p:cNvPr id="10" name="TextBox 9"/>
           <p:cNvSpPr txBox="1"/>
           <p:nvPr/>
         </p:nvSpPr>
         <p:spPr>
           <a:xfrm>
-            <a:off x="6446520" y="1856232"/>
-            <a:ext cx="4663440" cy="1819656"/>
+            <a:off x="4617720" y="1920240"/>
+            <a:ext cx="2871216" cy="4023360"/>
           </a:xfrm>
           <a:prstGeom prst="rect">
             <a:avLst/>
@@ -5128,9 +5242,22 @@
           <a:p>
             <a:pPr>
               <a:spcAft>
-                <a:spcPts val="600"/>
-              </a:spcAft>
-              <a:defRPr sz="1400" b="1">
+                <a:spcPts val="200"/>
+              </a:spcAft>
+              <a:defRPr sz="1200" b="1">
+                <a:solidFill>
+                  <a:srgbClr val="2D6A4F"/>
+                </a:solidFill>
+                <a:latin typeface="Segoe UI"/>
+              </a:defRPr>
+            </a:pPr>
+            <a:r>
+              <a:t>ระยะที่ 2 (เดือนที่ 4 - 6)</a:t>
+            </a:r>
+          </a:p>
+          <a:p>
+            <a:pPr>
+              <a:defRPr sz="1700" b="1">
                 <a:solidFill>
                   <a:srgbClr val="1B4332"/>
                 </a:solidFill>
@@ -5138,11 +5265,30 @@
               </a:defRPr>
             </a:pPr>
             <a:r>
-              <a:t>BACKEND &amp; DATA STREAMING</a:t>
-            </a:r>
-          </a:p>
-          <a:p>
-            <a:pPr>
+              <a:t>Realtime &amp; Mobile</a:t>
+            </a:r>
+          </a:p>
+          <a:p>
+            <a:pPr>
+              <a:spcAft>
+                <a:spcPts val="1200"/>
+              </a:spcAft>
+              <a:defRPr sz="1050">
+                <a:solidFill>
+                  <a:srgbClr val="5A646E"/>
+                </a:solidFill>
+                <a:latin typeface="Segoe UI"/>
+              </a:defRPr>
+            </a:pPr>
+            <a:r>
+              <a:t>ระบบเวลาจริงและแอปพลิเคชัน</a:t>
+            </a:r>
+          </a:p>
+          <a:p>
+            <a:pPr>
+              <a:spcAft>
+                <a:spcPts val="500"/>
+              </a:spcAft>
               <a:defRPr sz="1200">
                 <a:solidFill>
                   <a:srgbClr val="14181B"/>
@@ -5151,33 +5297,101 @@
               </a:defRPr>
             </a:pPr>
             <a:r>
-              <a:t>• Node.js &amp; Fastify : เฟรมเวิร์กเซิร์ฟเวอร์ประสิทธิภาพสูง รองรับ Throughput มหาศาล</a:t>
-            </a:r>
-            <a:br/>
-            <a:r>
-              <a:t>• Socket.io Server : รับส่งข้อมูลพิกัด GPS แบบสองทิศทางตามเวลาจริง (Real-time Streaming)</a:t>
-            </a:r>
-            <a:br/>
-            <a:r>
-              <a:t>• Bull Queue &amp; Worker : บริหารคิวงานเบื้องหลัง เช่น การประมวลผลคำสั่งซื้อและการส่งแจ้งเตือน</a:t>
-            </a:r>
-            <a:br/>
-            <a:r>
-              <a:t>• JWT Authentication : ควบคุมการเข้าถึงและรักษาความปลอดภัยของระบบผู้ใช้งาน</a:t>
-            </a:r>
-          </a:p>
-        </p:txBody>
-      </p:sp>
-      <p:sp>
-        <p:nvSpPr>
-          <p:cNvPr id="9" name="Rounded Rectangle 8"/>
+              <a:t>• ติดตั้ง WebSocket Server รองรับ Live Tracking</a:t>
+            </a:r>
+          </a:p>
+          <a:p>
+            <a:pPr>
+              <a:spcAft>
+                <a:spcPts val="500"/>
+              </a:spcAft>
+              <a:defRPr sz="1200">
+                <a:solidFill>
+                  <a:srgbClr val="14181B"/>
+                </a:solidFill>
+                <a:latin typeface="Segoe UI"/>
+              </a:defRPr>
+            </a:pPr>
+            <a:r>
+              <a:t>• พัฒนา Mobile App (iOS / Android) สำหรับนักท่องเที่ยว</a:t>
+            </a:r>
+          </a:p>
+          <a:p>
+            <a:pPr>
+              <a:spcAft>
+                <a:spcPts val="500"/>
+              </a:spcAft>
+              <a:defRPr sz="1200">
+                <a:solidFill>
+                  <a:srgbClr val="14181B"/>
+                </a:solidFill>
+                <a:latin typeface="Segoe UI"/>
+              </a:defRPr>
+            </a:pPr>
+            <a:r>
+              <a:t>• พัฒนาระบบ Queue Management &amp; Smart Balancing</a:t>
+            </a:r>
+          </a:p>
+          <a:p>
+            <a:pPr>
+              <a:spcAft>
+                <a:spcPts val="500"/>
+              </a:spcAft>
+              <a:defRPr sz="1200">
+                <a:solidFill>
+                  <a:srgbClr val="14181B"/>
+                </a:solidFill>
+                <a:latin typeface="Segoe UI"/>
+              </a:defRPr>
+            </a:pPr>
+            <a:r>
+              <a:t>• เชื่อมโยง Geofencing และทดสอบเดินรถ Loop 6 สถานี</a:t>
+            </a:r>
+          </a:p>
+          <a:p>
+            <a:pPr>
+              <a:spcAft>
+                <a:spcPts val="500"/>
+              </a:spcAft>
+              <a:defRPr sz="1200">
+                <a:solidFill>
+                  <a:srgbClr val="14181B"/>
+                </a:solidFill>
+                <a:latin typeface="Segoe UI"/>
+              </a:defRPr>
+            </a:pPr>
+            <a:r>
+              <a:t>• ทดสอบระบบ Check-in สแกน QR Code บนรถจริง</a:t>
+            </a:r>
+          </a:p>
+          <a:p>
+            <a:pPr>
+              <a:spcAft>
+                <a:spcPts val="500"/>
+              </a:spcAft>
+              <a:defRPr sz="1200">
+                <a:solidFill>
+                  <a:srgbClr val="14181B"/>
+                </a:solidFill>
+                <a:latin typeface="Segoe UI"/>
+              </a:defRPr>
+            </a:pPr>
+            <a:r>
+              <a:t>• ทดสอบความเสถียรของสัญญาณสื่อสารในพื้นที่สวนฯ</a:t>
+            </a:r>
+          </a:p>
+        </p:txBody>
+      </p:sp>
+      <p:sp>
+        <p:nvSpPr>
+          <p:cNvPr id="11" name="Rounded Rectangle 10"/>
           <p:cNvSpPr/>
           <p:nvPr/>
         </p:nvSpPr>
         <p:spPr>
           <a:xfrm>
-            <a:off x="731520" y="4023360"/>
-            <a:ext cx="5120640" cy="2148840"/>
+            <a:off x="8046720" y="1691640"/>
+            <a:ext cx="3328416" cy="4480560"/>
           </a:xfrm>
           <a:prstGeom prst="roundRect">
             <a:avLst/>
@@ -5215,85 +5429,23 @@
       </p:sp>
       <p:sp>
         <p:nvSpPr>
-          <p:cNvPr id="10" name="TextBox 9"/>
-          <p:cNvSpPr txBox="1"/>
-          <p:nvPr/>
-        </p:nvSpPr>
-        <p:spPr>
-          <a:xfrm>
-            <a:off x="960120" y="4187952"/>
-            <a:ext cx="4663440" cy="1819656"/>
-          </a:xfrm>
-          <a:prstGeom prst="rect">
-            <a:avLst/>
-          </a:prstGeom>
-          <a:noFill/>
-        </p:spPr>
-        <p:txBody>
-          <a:bodyPr wrap="square">
-            <a:spAutoFit/>
-          </a:bodyPr>
-          <a:lstStyle/>
-          <a:p>
-            <a:pPr>
-              <a:spcAft>
-                <a:spcPts val="600"/>
-              </a:spcAft>
-              <a:defRPr sz="1400" b="1">
-                <a:solidFill>
-                  <a:srgbClr val="1B4332"/>
-                </a:solidFill>
-                <a:latin typeface="Segoe UI"/>
-              </a:defRPr>
-            </a:pPr>
-            <a:r>
-              <a:t>DATABASE &amp; TIME-SERIES MANAGEMENT</a:t>
-            </a:r>
-          </a:p>
-          <a:p>
-            <a:pPr>
-              <a:defRPr sz="1200">
-                <a:solidFill>
-                  <a:srgbClr val="14181B"/>
-                </a:solidFill>
-                <a:latin typeface="Segoe UI"/>
-              </a:defRPr>
-            </a:pPr>
-            <a:r>
-              <a:t>• PostgreSQL : ระบบจัดการฐานข้อมูลหลักสำหรับข้อมูลผู้ใช้ ตั๋ว และการเงิน</a:t>
-            </a:r>
-            <a:br/>
-            <a:r>
-              <a:t>• Redis : In-memory Data Store ทำหน้าที่ Caching และจัดการเซสชันด้วยความเร็วสูง</a:t>
-            </a:r>
-            <a:br/>
-            <a:r>
-              <a:t>• TimescaleDB : ขยายขีดความสามารถสำหรับจัดเก็บพิกัด GPS Time-series นับล้านเรคคอร์ดโดยเฉพาะ</a:t>
-            </a:r>
-          </a:p>
-        </p:txBody>
-      </p:sp>
-      <p:sp>
-        <p:nvSpPr>
-          <p:cNvPr id="11" name="Rounded Rectangle 10"/>
+          <p:cNvPr id="12" name="Rectangle 11"/>
           <p:cNvSpPr/>
           <p:nvPr/>
         </p:nvSpPr>
         <p:spPr>
           <a:xfrm>
-            <a:off x="6217920" y="4023360"/>
-            <a:ext cx="5120640" cy="2148840"/>
-          </a:xfrm>
-          <a:prstGeom prst="roundRect">
+            <a:off x="8046720" y="1691640"/>
+            <a:ext cx="3328416" cy="128016"/>
+          </a:xfrm>
+          <a:prstGeom prst="rect">
             <a:avLst/>
           </a:prstGeom>
           <a:solidFill>
-            <a:srgbClr val="FFFFFF"/>
+            <a:srgbClr val="1B4332"/>
           </a:solidFill>
-          <a:ln w="15240">
-            <a:solidFill>
-              <a:srgbClr val="D2E1DA"/>
-            </a:solidFill>
+          <a:ln>
+            <a:noFill/>
           </a:ln>
         </p:spPr>
         <p:style>
@@ -5320,14 +5472,14 @@
       </p:sp>
       <p:sp>
         <p:nvSpPr>
-          <p:cNvPr id="12" name="TextBox 11"/>
+          <p:cNvPr id="13" name="TextBox 12"/>
           <p:cNvSpPr txBox="1"/>
           <p:nvPr/>
         </p:nvSpPr>
         <p:spPr>
           <a:xfrm>
-            <a:off x="6446520" y="4187952"/>
-            <a:ext cx="4663440" cy="1819656"/>
+            <a:off x="8275320" y="1920240"/>
+            <a:ext cx="2871216" cy="4023360"/>
           </a:xfrm>
           <a:prstGeom prst="rect">
             <a:avLst/>
@@ -5342,9 +5494,9 @@
           <a:p>
             <a:pPr>
               <a:spcAft>
-                <a:spcPts val="600"/>
-              </a:spcAft>
-              <a:defRPr sz="1400" b="1">
+                <a:spcPts val="200"/>
+              </a:spcAft>
+              <a:defRPr sz="1200" b="1">
                 <a:solidFill>
                   <a:srgbClr val="1B4332"/>
                 </a:solidFill>
@@ -5352,11 +5504,43 @@
               </a:defRPr>
             </a:pPr>
             <a:r>
-              <a:t>INFRASTRUCTURE &amp; DEVOPS PIPELINE</a:t>
-            </a:r>
-          </a:p>
-          <a:p>
-            <a:pPr>
+              <a:t>ระยะที่ 3 (เดือนที่ 7 - 9)</a:t>
+            </a:r>
+          </a:p>
+          <a:p>
+            <a:pPr>
+              <a:defRPr sz="1700" b="1">
+                <a:solidFill>
+                  <a:srgbClr val="1B4332"/>
+                </a:solidFill>
+                <a:latin typeface="Segoe UI"/>
+              </a:defRPr>
+            </a:pPr>
+            <a:r>
+              <a:t>Advanced Features &amp; Rollout</a:t>
+            </a:r>
+          </a:p>
+          <a:p>
+            <a:pPr>
+              <a:spcAft>
+                <a:spcPts val="1200"/>
+              </a:spcAft>
+              <a:defRPr sz="1050">
+                <a:solidFill>
+                  <a:srgbClr val="5A646E"/>
+                </a:solidFill>
+                <a:latin typeface="Segoe UI"/>
+              </a:defRPr>
+            </a:pPr>
+            <a:r>
+              <a:t>ฟังก์ชันขั้นสูงและการส่งมอบ</a:t>
+            </a:r>
+          </a:p>
+          <a:p>
+            <a:pPr>
+              <a:spcAft>
+                <a:spcPts val="500"/>
+              </a:spcAft>
               <a:defRPr sz="1200">
                 <a:solidFill>
                   <a:srgbClr val="14181B"/>
@@ -5365,15 +5549,87 @@
               </a:defRPr>
             </a:pPr>
             <a:r>
-              <a:t>• Docker &amp; Kubernetes (K8s) : เทคโนโลยี Containerization รองรับการขยายตัวอัตโนมัติ</a:t>
-            </a:r>
-            <a:br/>
-            <a:r>
-              <a:t>• Enterprise Cloud Hosting : ติดตั้งบนคลาวด์มาตรฐานความปลอดภัยสูง การันตี Uptime 99.9%</a:t>
-            </a:r>
-            <a:br/>
-            <a:r>
-              <a:t>• GitHub Actions CI/CD : ระบบทดสอบความปลอดภัยและการปรับปรุงโปรแกรมแบบอัตโนมัติ</a:t>
+              <a:t>• พัฒนาระบบ Push Notification (App / LINE / SMS)</a:t>
+            </a:r>
+          </a:p>
+          <a:p>
+            <a:pPr>
+              <a:spcAft>
+                <a:spcPts val="500"/>
+              </a:spcAft>
+              <a:defRPr sz="1200">
+                <a:solidFill>
+                  <a:srgbClr val="14181B"/>
+                </a:solidFill>
+                <a:latin typeface="Segoe UI"/>
+              </a:defRPr>
+            </a:pPr>
+            <a:r>
+              <a:t>• พัฒนาระบบ Real-time Analytics Dashboard เชิงพื้นที่</a:t>
+            </a:r>
+          </a:p>
+          <a:p>
+            <a:pPr>
+              <a:spcAft>
+                <a:spcPts val="500"/>
+              </a:spcAft>
+              <a:defRPr sz="1200">
+                <a:solidFill>
+                  <a:srgbClr val="14181B"/>
+                </a:solidFill>
+                <a:latin typeface="Segoe UI"/>
+              </a:defRPr>
+            </a:pPr>
+            <a:r>
+              <a:t>• เปิดใช้งานระบบจองตั๋วออนไลน์ล่วงหน้า (Online Booking)</a:t>
+            </a:r>
+          </a:p>
+          <a:p>
+            <a:pPr>
+              <a:spcAft>
+                <a:spcPts val="500"/>
+              </a:spcAft>
+              <a:defRPr sz="1200">
+                <a:solidFill>
+                  <a:srgbClr val="14181B"/>
+                </a:solidFill>
+                <a:latin typeface="Segoe UI"/>
+              </a:defRPr>
+            </a:pPr>
+            <a:r>
+              <a:t>• จัดทำคู่มือการใช้งานระบบสำหรับผู้ใช้ทุกระดับ</a:t>
+            </a:r>
+          </a:p>
+          <a:p>
+            <a:pPr>
+              <a:spcAft>
+                <a:spcPts val="500"/>
+              </a:spcAft>
+              <a:defRPr sz="1200">
+                <a:solidFill>
+                  <a:srgbClr val="14181B"/>
+                </a:solidFill>
+                <a:latin typeface="Segoe UI"/>
+              </a:defRPr>
+            </a:pPr>
+            <a:r>
+              <a:t>• จัดฝึกอบรมเชิงปฏิบัติการแก่เจ้าหน้าที่และพนักงานขับรถ</a:t>
+            </a:r>
+          </a:p>
+          <a:p>
+            <a:pPr>
+              <a:spcAft>
+                <a:spcPts val="500"/>
+              </a:spcAft>
+              <a:defRPr sz="1200">
+                <a:solidFill>
+                  <a:srgbClr val="14181B"/>
+                </a:solidFill>
+                <a:latin typeface="Segoe UI"/>
+              </a:defRPr>
+            </a:pPr>
+            <a:r>
+              <a:t>• ทดสอบระบบเสร็จสมบูรณ์ และส่งมอบงานสมบูรณ์</a:t>
             </a:r>
           </a:p>
         </p:txBody>
@@ -5435,896 +5691,6 @@
               </a:defRPr>
             </a:pPr>
             <a:r>
-              <a:t>IMPLEMENTATION ROADMAP</a:t>
-            </a:r>
-          </a:p>
-        </p:txBody>
-      </p:sp>
-      <p:sp>
-        <p:nvSpPr>
-          <p:cNvPr id="3" name="TextBox 2"/>
-          <p:cNvSpPr txBox="1"/>
-          <p:nvPr/>
-        </p:nvSpPr>
-        <p:spPr>
-          <a:xfrm>
-            <a:off x="731520" y="658368"/>
-            <a:ext cx="10698480" cy="594360"/>
-          </a:xfrm>
-          <a:prstGeom prst="rect">
-            <a:avLst/>
-          </a:prstGeom>
-          <a:noFill/>
-        </p:spPr>
-        <p:txBody>
-          <a:bodyPr wrap="square" lIns="0" tIns="0" rIns="0" bIns="0">
-            <a:spAutoFit/>
-          </a:bodyPr>
-          <a:lstStyle/>
-          <a:p>
-            <a:pPr>
-              <a:defRPr sz="2600" b="1">
-                <a:solidFill>
-                  <a:srgbClr val="1B4332"/>
-                </a:solidFill>
-                <a:latin typeface="Segoe UI"/>
-              </a:defRPr>
-            </a:pPr>
-            <a:r>
-              <a:t>แผนการดำเนินงานและส่งมอบโครงการ (กรอบเวลา 9 เดือน)</a:t>
-            </a:r>
-          </a:p>
-        </p:txBody>
-      </p:sp>
-      <p:sp>
-        <p:nvSpPr>
-          <p:cNvPr id="4" name="TextBox 3"/>
-          <p:cNvSpPr txBox="1"/>
-          <p:nvPr/>
-        </p:nvSpPr>
-        <p:spPr>
-          <a:xfrm>
-            <a:off x="731520" y="1234440"/>
-            <a:ext cx="10698480" cy="365760"/>
-          </a:xfrm>
-          <a:prstGeom prst="rect">
-            <a:avLst/>
-          </a:prstGeom>
-          <a:noFill/>
-        </p:spPr>
-        <p:txBody>
-          <a:bodyPr wrap="square" lIns="0" tIns="0" rIns="0" bIns="0">
-            <a:spAutoFit/>
-          </a:bodyPr>
-          <a:lstStyle/>
-          <a:p>
-            <a:pPr>
-              <a:defRPr sz="1350">
-                <a:solidFill>
-                  <a:srgbClr val="5A646E"/>
-                </a:solidFill>
-                <a:latin typeface="Segoe UI"/>
-              </a:defRPr>
-            </a:pPr>
-            <a:r>
-              <a:t>การแบ่งระยะการดำเนินงานอย่างเป็นระบบเพื่อการส่งมอบที่ตรงเวลาและมีคุณภาพ</a:t>
-            </a:r>
-          </a:p>
-        </p:txBody>
-      </p:sp>
-      <p:sp>
-        <p:nvSpPr>
-          <p:cNvPr id="5" name="Rounded Rectangle 4"/>
-          <p:cNvSpPr/>
-          <p:nvPr/>
-        </p:nvSpPr>
-        <p:spPr>
-          <a:xfrm>
-            <a:off x="731520" y="1691640"/>
-            <a:ext cx="3328416" cy="4480560"/>
-          </a:xfrm>
-          <a:prstGeom prst="roundRect">
-            <a:avLst/>
-          </a:prstGeom>
-          <a:solidFill>
-            <a:srgbClr val="FFFFFF"/>
-          </a:solidFill>
-          <a:ln w="15240">
-            <a:solidFill>
-              <a:srgbClr val="D2E1DA"/>
-            </a:solidFill>
-          </a:ln>
-        </p:spPr>
-        <p:style>
-          <a:lnRef idx="1">
-            <a:schemeClr val="accent1"/>
-          </a:lnRef>
-          <a:fillRef idx="3">
-            <a:schemeClr val="accent1"/>
-          </a:fillRef>
-          <a:effectRef idx="2">
-            <a:schemeClr val="accent1"/>
-          </a:effectRef>
-          <a:fontRef idx="minor">
-            <a:schemeClr val="lt1"/>
-          </a:fontRef>
-        </p:style>
-        <p:txBody>
-          <a:bodyPr rtlCol="0" anchor="ctr"/>
-          <a:lstStyle/>
-          <a:p>
-            <a:pPr algn="ctr"/>
-          </a:p>
-        </p:txBody>
-      </p:sp>
-      <p:sp>
-        <p:nvSpPr>
-          <p:cNvPr id="6" name="Rectangle 5"/>
-          <p:cNvSpPr/>
-          <p:nvPr/>
-        </p:nvSpPr>
-        <p:spPr>
-          <a:xfrm>
-            <a:off x="731520" y="1691640"/>
-            <a:ext cx="3328416" cy="128016"/>
-          </a:xfrm>
-          <a:prstGeom prst="rect">
-            <a:avLst/>
-          </a:prstGeom>
-          <a:solidFill>
-            <a:srgbClr val="0B2545"/>
-          </a:solidFill>
-          <a:ln>
-            <a:noFill/>
-          </a:ln>
-        </p:spPr>
-        <p:style>
-          <a:lnRef idx="1">
-            <a:schemeClr val="accent1"/>
-          </a:lnRef>
-          <a:fillRef idx="3">
-            <a:schemeClr val="accent1"/>
-          </a:fillRef>
-          <a:effectRef idx="2">
-            <a:schemeClr val="accent1"/>
-          </a:effectRef>
-          <a:fontRef idx="minor">
-            <a:schemeClr val="lt1"/>
-          </a:fontRef>
-        </p:style>
-        <p:txBody>
-          <a:bodyPr rtlCol="0" anchor="ctr"/>
-          <a:lstStyle/>
-          <a:p>
-            <a:pPr algn="ctr"/>
-          </a:p>
-        </p:txBody>
-      </p:sp>
-      <p:sp>
-        <p:nvSpPr>
-          <p:cNvPr id="7" name="TextBox 6"/>
-          <p:cNvSpPr txBox="1"/>
-          <p:nvPr/>
-        </p:nvSpPr>
-        <p:spPr>
-          <a:xfrm>
-            <a:off x="960120" y="1920240"/>
-            <a:ext cx="2871216" cy="4023360"/>
-          </a:xfrm>
-          <a:prstGeom prst="rect">
-            <a:avLst/>
-          </a:prstGeom>
-          <a:noFill/>
-        </p:spPr>
-        <p:txBody>
-          <a:bodyPr wrap="square">
-            <a:spAutoFit/>
-          </a:bodyPr>
-          <a:lstStyle/>
-          <a:p>
-            <a:pPr>
-              <a:spcAft>
-                <a:spcPts val="200"/>
-              </a:spcAft>
-              <a:defRPr sz="1200" b="1">
-                <a:solidFill>
-                  <a:srgbClr val="0B2545"/>
-                </a:solidFill>
-                <a:latin typeface="Segoe UI"/>
-              </a:defRPr>
-            </a:pPr>
-            <a:r>
-              <a:t>ระยะที่ 1 (เดือนที่ 1 - 3)</a:t>
-            </a:r>
-          </a:p>
-          <a:p>
-            <a:pPr>
-              <a:defRPr sz="1700" b="1">
-                <a:solidFill>
-                  <a:srgbClr val="1B4332"/>
-                </a:solidFill>
-                <a:latin typeface="Segoe UI"/>
-              </a:defRPr>
-            </a:pPr>
-            <a:r>
-              <a:t>Core Foundation</a:t>
-            </a:r>
-          </a:p>
-          <a:p>
-            <a:pPr>
-              <a:spcAft>
-                <a:spcPts val="1200"/>
-              </a:spcAft>
-              <a:defRPr sz="1050">
-                <a:solidFill>
-                  <a:srgbClr val="5A646E"/>
-                </a:solidFill>
-                <a:latin typeface="Segoe UI"/>
-              </a:defRPr>
-            </a:pPr>
-            <a:r>
-              <a:t>รากฐานระบบและการชำระเงิน</a:t>
-            </a:r>
-          </a:p>
-          <a:p>
-            <a:pPr>
-              <a:spcAft>
-                <a:spcPts val="500"/>
-              </a:spcAft>
-              <a:defRPr sz="1200">
-                <a:solidFill>
-                  <a:srgbClr val="14181B"/>
-                </a:solidFill>
-                <a:latin typeface="Segoe UI"/>
-              </a:defRPr>
-            </a:pPr>
-            <a:r>
-              <a:t>• วิเคราะห์และออกแบบ DB Schema และ Architecture</a:t>
-            </a:r>
-          </a:p>
-          <a:p>
-            <a:pPr>
-              <a:spcAft>
-                <a:spcPts val="500"/>
-              </a:spcAft>
-              <a:defRPr sz="1200">
-                <a:solidFill>
-                  <a:srgbClr val="14181B"/>
-                </a:solidFill>
-                <a:latin typeface="Segoe UI"/>
-              </a:defRPr>
-            </a:pPr>
-            <a:r>
-              <a:t>• พัฒนาระบบ Backend API (Ticket, Station, Auth)</a:t>
-            </a:r>
-          </a:p>
-          <a:p>
-            <a:pPr>
-              <a:spcAft>
-                <a:spcPts val="500"/>
-              </a:spcAft>
-              <a:defRPr sz="1200">
-                <a:solidFill>
-                  <a:srgbClr val="14181B"/>
-                </a:solidFill>
-                <a:latin typeface="Segoe UI"/>
-              </a:defRPr>
-            </a:pPr>
-            <a:r>
-              <a:t>• พัฒนา Admin Dashboard จัดการข้อมูลสถานี/รถ</a:t>
-            </a:r>
-          </a:p>
-          <a:p>
-            <a:pPr>
-              <a:spcAft>
-                <a:spcPts val="500"/>
-              </a:spcAft>
-              <a:defRPr sz="1200">
-                <a:solidFill>
-                  <a:srgbClr val="14181B"/>
-                </a:solidFill>
-                <a:latin typeface="Segoe UI"/>
-              </a:defRPr>
-            </a:pPr>
-            <a:r>
-              <a:t>• พัฒนาระบบ Kiosk UI จำหน่ายตั๋วหน้าสถานี</a:t>
-            </a:r>
-          </a:p>
-          <a:p>
-            <a:pPr>
-              <a:spcAft>
-                <a:spcPts val="500"/>
-              </a:spcAft>
-              <a:defRPr sz="1200">
-                <a:solidFill>
-                  <a:srgbClr val="14181B"/>
-                </a:solidFill>
-                <a:latin typeface="Segoe UI"/>
-              </a:defRPr>
-            </a:pPr>
-            <a:r>
-              <a:t>• เชื่อมต่อ Payment Gateway (PromptPay/บัตร/เงินสด)</a:t>
-            </a:r>
-          </a:p>
-          <a:p>
-            <a:pPr>
-              <a:spcAft>
-                <a:spcPts val="500"/>
-              </a:spcAft>
-              <a:defRPr sz="1200">
-                <a:solidFill>
-                  <a:srgbClr val="14181B"/>
-                </a:solidFill>
-                <a:latin typeface="Segoe UI"/>
-              </a:defRPr>
-            </a:pPr>
-            <a:r>
-              <a:t>• พัฒนา Driver App บน Tablet สำหรับคนขับรถ</a:t>
-            </a:r>
-          </a:p>
-        </p:txBody>
-      </p:sp>
-      <p:sp>
-        <p:nvSpPr>
-          <p:cNvPr id="8" name="Rounded Rectangle 7"/>
-          <p:cNvSpPr/>
-          <p:nvPr/>
-        </p:nvSpPr>
-        <p:spPr>
-          <a:xfrm>
-            <a:off x="4389120" y="1691640"/>
-            <a:ext cx="3328416" cy="4480560"/>
-          </a:xfrm>
-          <a:prstGeom prst="roundRect">
-            <a:avLst/>
-          </a:prstGeom>
-          <a:solidFill>
-            <a:srgbClr val="FFFFFF"/>
-          </a:solidFill>
-          <a:ln w="15240">
-            <a:solidFill>
-              <a:srgbClr val="D2E1DA"/>
-            </a:solidFill>
-          </a:ln>
-        </p:spPr>
-        <p:style>
-          <a:lnRef idx="1">
-            <a:schemeClr val="accent1"/>
-          </a:lnRef>
-          <a:fillRef idx="3">
-            <a:schemeClr val="accent1"/>
-          </a:fillRef>
-          <a:effectRef idx="2">
-            <a:schemeClr val="accent1"/>
-          </a:effectRef>
-          <a:fontRef idx="minor">
-            <a:schemeClr val="lt1"/>
-          </a:fontRef>
-        </p:style>
-        <p:txBody>
-          <a:bodyPr rtlCol="0" anchor="ctr"/>
-          <a:lstStyle/>
-          <a:p>
-            <a:pPr algn="ctr"/>
-          </a:p>
-        </p:txBody>
-      </p:sp>
-      <p:sp>
-        <p:nvSpPr>
-          <p:cNvPr id="9" name="Rectangle 8"/>
-          <p:cNvSpPr/>
-          <p:nvPr/>
-        </p:nvSpPr>
-        <p:spPr>
-          <a:xfrm>
-            <a:off x="4389120" y="1691640"/>
-            <a:ext cx="3328416" cy="128016"/>
-          </a:xfrm>
-          <a:prstGeom prst="rect">
-            <a:avLst/>
-          </a:prstGeom>
-          <a:solidFill>
-            <a:srgbClr val="2D6A4F"/>
-          </a:solidFill>
-          <a:ln>
-            <a:noFill/>
-          </a:ln>
-        </p:spPr>
-        <p:style>
-          <a:lnRef idx="1">
-            <a:schemeClr val="accent1"/>
-          </a:lnRef>
-          <a:fillRef idx="3">
-            <a:schemeClr val="accent1"/>
-          </a:fillRef>
-          <a:effectRef idx="2">
-            <a:schemeClr val="accent1"/>
-          </a:effectRef>
-          <a:fontRef idx="minor">
-            <a:schemeClr val="lt1"/>
-          </a:fontRef>
-        </p:style>
-        <p:txBody>
-          <a:bodyPr rtlCol="0" anchor="ctr"/>
-          <a:lstStyle/>
-          <a:p>
-            <a:pPr algn="ctr"/>
-          </a:p>
-        </p:txBody>
-      </p:sp>
-      <p:sp>
-        <p:nvSpPr>
-          <p:cNvPr id="10" name="TextBox 9"/>
-          <p:cNvSpPr txBox="1"/>
-          <p:nvPr/>
-        </p:nvSpPr>
-        <p:spPr>
-          <a:xfrm>
-            <a:off x="4617720" y="1920240"/>
-            <a:ext cx="2871216" cy="4023360"/>
-          </a:xfrm>
-          <a:prstGeom prst="rect">
-            <a:avLst/>
-          </a:prstGeom>
-          <a:noFill/>
-        </p:spPr>
-        <p:txBody>
-          <a:bodyPr wrap="square">
-            <a:spAutoFit/>
-          </a:bodyPr>
-          <a:lstStyle/>
-          <a:p>
-            <a:pPr>
-              <a:spcAft>
-                <a:spcPts val="200"/>
-              </a:spcAft>
-              <a:defRPr sz="1200" b="1">
-                <a:solidFill>
-                  <a:srgbClr val="2D6A4F"/>
-                </a:solidFill>
-                <a:latin typeface="Segoe UI"/>
-              </a:defRPr>
-            </a:pPr>
-            <a:r>
-              <a:t>ระยะที่ 2 (เดือนที่ 4 - 6)</a:t>
-            </a:r>
-          </a:p>
-          <a:p>
-            <a:pPr>
-              <a:defRPr sz="1700" b="1">
-                <a:solidFill>
-                  <a:srgbClr val="1B4332"/>
-                </a:solidFill>
-                <a:latin typeface="Segoe UI"/>
-              </a:defRPr>
-            </a:pPr>
-            <a:r>
-              <a:t>Realtime &amp; Mobile</a:t>
-            </a:r>
-          </a:p>
-          <a:p>
-            <a:pPr>
-              <a:spcAft>
-                <a:spcPts val="1200"/>
-              </a:spcAft>
-              <a:defRPr sz="1050">
-                <a:solidFill>
-                  <a:srgbClr val="5A646E"/>
-                </a:solidFill>
-                <a:latin typeface="Segoe UI"/>
-              </a:defRPr>
-            </a:pPr>
-            <a:r>
-              <a:t>ระบบเวลาจริงและแอปพลิเคชัน</a:t>
-            </a:r>
-          </a:p>
-          <a:p>
-            <a:pPr>
-              <a:spcAft>
-                <a:spcPts val="500"/>
-              </a:spcAft>
-              <a:defRPr sz="1200">
-                <a:solidFill>
-                  <a:srgbClr val="14181B"/>
-                </a:solidFill>
-                <a:latin typeface="Segoe UI"/>
-              </a:defRPr>
-            </a:pPr>
-            <a:r>
-              <a:t>• ติดตั้ง WebSocket Server รองรับ Live Tracking</a:t>
-            </a:r>
-          </a:p>
-          <a:p>
-            <a:pPr>
-              <a:spcAft>
-                <a:spcPts val="500"/>
-              </a:spcAft>
-              <a:defRPr sz="1200">
-                <a:solidFill>
-                  <a:srgbClr val="14181B"/>
-                </a:solidFill>
-                <a:latin typeface="Segoe UI"/>
-              </a:defRPr>
-            </a:pPr>
-            <a:r>
-              <a:t>• พัฒนา Mobile App (iOS / Android) สำหรับนักท่องเที่ยว</a:t>
-            </a:r>
-          </a:p>
-          <a:p>
-            <a:pPr>
-              <a:spcAft>
-                <a:spcPts val="500"/>
-              </a:spcAft>
-              <a:defRPr sz="1200">
-                <a:solidFill>
-                  <a:srgbClr val="14181B"/>
-                </a:solidFill>
-                <a:latin typeface="Segoe UI"/>
-              </a:defRPr>
-            </a:pPr>
-            <a:r>
-              <a:t>• พัฒนาระบบ Queue Management &amp; Smart Balancing</a:t>
-            </a:r>
-          </a:p>
-          <a:p>
-            <a:pPr>
-              <a:spcAft>
-                <a:spcPts val="500"/>
-              </a:spcAft>
-              <a:defRPr sz="1200">
-                <a:solidFill>
-                  <a:srgbClr val="14181B"/>
-                </a:solidFill>
-                <a:latin typeface="Segoe UI"/>
-              </a:defRPr>
-            </a:pPr>
-            <a:r>
-              <a:t>• เชื่อมโยง Geofencing และทดสอบเดินรถ Loop 6 สถานี</a:t>
-            </a:r>
-          </a:p>
-          <a:p>
-            <a:pPr>
-              <a:spcAft>
-                <a:spcPts val="500"/>
-              </a:spcAft>
-              <a:defRPr sz="1200">
-                <a:solidFill>
-                  <a:srgbClr val="14181B"/>
-                </a:solidFill>
-                <a:latin typeface="Segoe UI"/>
-              </a:defRPr>
-            </a:pPr>
-            <a:r>
-              <a:t>• ทดสอบระบบ Check-in สแกน QR Code บนรถจริง</a:t>
-            </a:r>
-          </a:p>
-          <a:p>
-            <a:pPr>
-              <a:spcAft>
-                <a:spcPts val="500"/>
-              </a:spcAft>
-              <a:defRPr sz="1200">
-                <a:solidFill>
-                  <a:srgbClr val="14181B"/>
-                </a:solidFill>
-                <a:latin typeface="Segoe UI"/>
-              </a:defRPr>
-            </a:pPr>
-            <a:r>
-              <a:t>• ทดสอบความเสถียรของสัญญาณสื่อสารในพื้นที่สวนฯ</a:t>
-            </a:r>
-          </a:p>
-        </p:txBody>
-      </p:sp>
-      <p:sp>
-        <p:nvSpPr>
-          <p:cNvPr id="11" name="Rounded Rectangle 10"/>
-          <p:cNvSpPr/>
-          <p:nvPr/>
-        </p:nvSpPr>
-        <p:spPr>
-          <a:xfrm>
-            <a:off x="8046720" y="1691640"/>
-            <a:ext cx="3328416" cy="4480560"/>
-          </a:xfrm>
-          <a:prstGeom prst="roundRect">
-            <a:avLst/>
-          </a:prstGeom>
-          <a:solidFill>
-            <a:srgbClr val="FFFFFF"/>
-          </a:solidFill>
-          <a:ln w="15240">
-            <a:solidFill>
-              <a:srgbClr val="D2E1DA"/>
-            </a:solidFill>
-          </a:ln>
-        </p:spPr>
-        <p:style>
-          <a:lnRef idx="1">
-            <a:schemeClr val="accent1"/>
-          </a:lnRef>
-          <a:fillRef idx="3">
-            <a:schemeClr val="accent1"/>
-          </a:fillRef>
-          <a:effectRef idx="2">
-            <a:schemeClr val="accent1"/>
-          </a:effectRef>
-          <a:fontRef idx="minor">
-            <a:schemeClr val="lt1"/>
-          </a:fontRef>
-        </p:style>
-        <p:txBody>
-          <a:bodyPr rtlCol="0" anchor="ctr"/>
-          <a:lstStyle/>
-          <a:p>
-            <a:pPr algn="ctr"/>
-          </a:p>
-        </p:txBody>
-      </p:sp>
-      <p:sp>
-        <p:nvSpPr>
-          <p:cNvPr id="12" name="Rectangle 11"/>
-          <p:cNvSpPr/>
-          <p:nvPr/>
-        </p:nvSpPr>
-        <p:spPr>
-          <a:xfrm>
-            <a:off x="8046720" y="1691640"/>
-            <a:ext cx="3328416" cy="128016"/>
-          </a:xfrm>
-          <a:prstGeom prst="rect">
-            <a:avLst/>
-          </a:prstGeom>
-          <a:solidFill>
-            <a:srgbClr val="1B4332"/>
-          </a:solidFill>
-          <a:ln>
-            <a:noFill/>
-          </a:ln>
-        </p:spPr>
-        <p:style>
-          <a:lnRef idx="1">
-            <a:schemeClr val="accent1"/>
-          </a:lnRef>
-          <a:fillRef idx="3">
-            <a:schemeClr val="accent1"/>
-          </a:fillRef>
-          <a:effectRef idx="2">
-            <a:schemeClr val="accent1"/>
-          </a:effectRef>
-          <a:fontRef idx="minor">
-            <a:schemeClr val="lt1"/>
-          </a:fontRef>
-        </p:style>
-        <p:txBody>
-          <a:bodyPr rtlCol="0" anchor="ctr"/>
-          <a:lstStyle/>
-          <a:p>
-            <a:pPr algn="ctr"/>
-          </a:p>
-        </p:txBody>
-      </p:sp>
-      <p:sp>
-        <p:nvSpPr>
-          <p:cNvPr id="13" name="TextBox 12"/>
-          <p:cNvSpPr txBox="1"/>
-          <p:nvPr/>
-        </p:nvSpPr>
-        <p:spPr>
-          <a:xfrm>
-            <a:off x="8275320" y="1920240"/>
-            <a:ext cx="2871216" cy="4023360"/>
-          </a:xfrm>
-          <a:prstGeom prst="rect">
-            <a:avLst/>
-          </a:prstGeom>
-          <a:noFill/>
-        </p:spPr>
-        <p:txBody>
-          <a:bodyPr wrap="square">
-            <a:spAutoFit/>
-          </a:bodyPr>
-          <a:lstStyle/>
-          <a:p>
-            <a:pPr>
-              <a:spcAft>
-                <a:spcPts val="200"/>
-              </a:spcAft>
-              <a:defRPr sz="1200" b="1">
-                <a:solidFill>
-                  <a:srgbClr val="1B4332"/>
-                </a:solidFill>
-                <a:latin typeface="Segoe UI"/>
-              </a:defRPr>
-            </a:pPr>
-            <a:r>
-              <a:t>ระยะที่ 3 (เดือนที่ 7 - 9)</a:t>
-            </a:r>
-          </a:p>
-          <a:p>
-            <a:pPr>
-              <a:defRPr sz="1700" b="1">
-                <a:solidFill>
-                  <a:srgbClr val="1B4332"/>
-                </a:solidFill>
-                <a:latin typeface="Segoe UI"/>
-              </a:defRPr>
-            </a:pPr>
-            <a:r>
-              <a:t>Advanced Features &amp; Rollout</a:t>
-            </a:r>
-          </a:p>
-          <a:p>
-            <a:pPr>
-              <a:spcAft>
-                <a:spcPts val="1200"/>
-              </a:spcAft>
-              <a:defRPr sz="1050">
-                <a:solidFill>
-                  <a:srgbClr val="5A646E"/>
-                </a:solidFill>
-                <a:latin typeface="Segoe UI"/>
-              </a:defRPr>
-            </a:pPr>
-            <a:r>
-              <a:t>ฟังก์ชันขั้นสูงและการส่งมอบ</a:t>
-            </a:r>
-          </a:p>
-          <a:p>
-            <a:pPr>
-              <a:spcAft>
-                <a:spcPts val="500"/>
-              </a:spcAft>
-              <a:defRPr sz="1200">
-                <a:solidFill>
-                  <a:srgbClr val="14181B"/>
-                </a:solidFill>
-                <a:latin typeface="Segoe UI"/>
-              </a:defRPr>
-            </a:pPr>
-            <a:r>
-              <a:t>• พัฒนาระบบ Push Notification (App / LINE / SMS)</a:t>
-            </a:r>
-          </a:p>
-          <a:p>
-            <a:pPr>
-              <a:spcAft>
-                <a:spcPts val="500"/>
-              </a:spcAft>
-              <a:defRPr sz="1200">
-                <a:solidFill>
-                  <a:srgbClr val="14181B"/>
-                </a:solidFill>
-                <a:latin typeface="Segoe UI"/>
-              </a:defRPr>
-            </a:pPr>
-            <a:r>
-              <a:t>• พัฒนาระบบ Real-time Analytics Dashboard เชิงพื้นที่</a:t>
-            </a:r>
-          </a:p>
-          <a:p>
-            <a:pPr>
-              <a:spcAft>
-                <a:spcPts val="500"/>
-              </a:spcAft>
-              <a:defRPr sz="1200">
-                <a:solidFill>
-                  <a:srgbClr val="14181B"/>
-                </a:solidFill>
-                <a:latin typeface="Segoe UI"/>
-              </a:defRPr>
-            </a:pPr>
-            <a:r>
-              <a:t>• เปิดใช้งานระบบจองตั๋วออนไลน์ล่วงหน้า (Online Booking)</a:t>
-            </a:r>
-          </a:p>
-          <a:p>
-            <a:pPr>
-              <a:spcAft>
-                <a:spcPts val="500"/>
-              </a:spcAft>
-              <a:defRPr sz="1200">
-                <a:solidFill>
-                  <a:srgbClr val="14181B"/>
-                </a:solidFill>
-                <a:latin typeface="Segoe UI"/>
-              </a:defRPr>
-            </a:pPr>
-            <a:r>
-              <a:t>• จัดทำคู่มือการใช้งานระบบสำหรับผู้ใช้ทุกระดับ</a:t>
-            </a:r>
-          </a:p>
-          <a:p>
-            <a:pPr>
-              <a:spcAft>
-                <a:spcPts val="500"/>
-              </a:spcAft>
-              <a:defRPr sz="1200">
-                <a:solidFill>
-                  <a:srgbClr val="14181B"/>
-                </a:solidFill>
-                <a:latin typeface="Segoe UI"/>
-              </a:defRPr>
-            </a:pPr>
-            <a:r>
-              <a:t>• จัดฝึกอบรมเชิงปฏิบัติการแก่เจ้าหน้าที่และพนักงานขับรถ</a:t>
-            </a:r>
-          </a:p>
-          <a:p>
-            <a:pPr>
-              <a:spcAft>
-                <a:spcPts val="500"/>
-              </a:spcAft>
-              <a:defRPr sz="1200">
-                <a:solidFill>
-                  <a:srgbClr val="14181B"/>
-                </a:solidFill>
-                <a:latin typeface="Segoe UI"/>
-              </a:defRPr>
-            </a:pPr>
-            <a:r>
-              <a:t>• ทดสอบระบบเสร็จสมบูรณ์ และส่งมอบงานสมบูรณ์</a:t>
-            </a:r>
-          </a:p>
-        </p:txBody>
-      </p:sp>
-    </p:spTree>
-  </p:cSld>
-  <p:clrMapOvr>
-    <a:masterClrMapping/>
-  </p:clrMapOvr>
-</p:sld>
-</file>
-
-<file path=ppt/slides/slide12.xml><?xml version="1.0" encoding="utf-8"?>
-<p:sld xmlns:a="http://schemas.openxmlformats.org/drawingml/2006/main" xmlns:p="http://schemas.openxmlformats.org/presentationml/2006/main" xmlns:r="http://schemas.openxmlformats.org/officeDocument/2006/relationships">
-  <p:cSld>
-    <p:bg>
-      <p:bgPr>
-        <a:solidFill>
-          <a:srgbClr val="EEF7F2"/>
-        </a:solidFill>
-        <a:effectLst/>
-      </p:bgPr>
-    </p:bg>
-    <p:spTree>
-      <p:nvGrpSpPr>
-        <p:cNvPr id="1" name=""/>
-        <p:cNvGrpSpPr/>
-        <p:nvPr/>
-      </p:nvGrpSpPr>
-      <p:grpSpPr/>
-      <p:sp>
-        <p:nvSpPr>
-          <p:cNvPr id="2" name="TextBox 1"/>
-          <p:cNvSpPr txBox="1"/>
-          <p:nvPr/>
-        </p:nvSpPr>
-        <p:spPr>
-          <a:xfrm>
-            <a:off x="731520" y="365760"/>
-            <a:ext cx="10698480" cy="320040"/>
-          </a:xfrm>
-          <a:prstGeom prst="rect">
-            <a:avLst/>
-          </a:prstGeom>
-          <a:noFill/>
-        </p:spPr>
-        <p:txBody>
-          <a:bodyPr wrap="square" lIns="0" tIns="0" rIns="0" bIns="0">
-            <a:spAutoFit/>
-          </a:bodyPr>
-          <a:lstStyle/>
-          <a:p>
-            <a:pPr>
-              <a:defRPr sz="1200" b="1">
-                <a:solidFill>
-                  <a:srgbClr val="52B788"/>
-                </a:solidFill>
-                <a:latin typeface="Segoe UI"/>
-              </a:defRPr>
-            </a:pPr>
-            <a:r>
               <a:t>EXPECTED IMPACT &amp; VALUE</a:t>
             </a:r>
           </a:p>
@@ -7026,7 +6392,7 @@
 </p:sld>
 </file>
 
-<file path=ppt/slides/slide13.xml><?xml version="1.0" encoding="utf-8"?>
+<file path=ppt/slides/slide12.xml><?xml version="1.0" encoding="utf-8"?>
 <p:sld xmlns:a="http://schemas.openxmlformats.org/drawingml/2006/main" xmlns:p="http://schemas.openxmlformats.org/presentationml/2006/main" xmlns:r="http://schemas.openxmlformats.org/officeDocument/2006/relationships">
   <p:cSld>
     <p:bg>

--- a/qsbg_smart_tour_presentation_large_font.pptx
+++ b/qsbg_smart_tour_presentation_large_font.pptx
@@ -17,6 +17,7 @@
     <p:sldId id="265" r:id="rId17"/>
     <p:sldId id="266" r:id="rId18"/>
     <p:sldId id="267" r:id="rId19"/>
+    <p:sldId id="268" r:id="rId20"/>
   </p:sldIdLst>
   <p:sldSz cx="12191695" cy="6858000" type="screen4x3"/>
   <p:notesSz cx="6858000" cy="9144000"/>
@@ -593,12 +594,12 @@
           <a:lstStyle/>
           <a:p>
             <a:r>
-              <a:t>สคริปต์พูดหน้าที่ 10 (1.5 นาที):</a:t>
-            </a:r>
-          </a:p>
-          <a:p>
-            <a:r>
-              <a:t>แผนงาน 9 เดือน แบ่งเป็น 3 ระยะชัดเจน: Phase 1 สร้างฐานราก Core Foundation, Phase 2 ระบบ Realtime &amp; Mobile App, และ Phase 3 ฟังก์ชันขั้นสูงและการส่งมอบงานสมบูรณ์ มั่นใจได้ว่าส่งมอบตรงเวลาแน่นอนครับ</a:t>
+              <a:t>สคริปต์พูดหน้าที่ 10 (1.0 นาที):</a:t>
+            </a:r>
+          </a:p>
+          <a:p>
+            <a:r>
+              <a:t>เทคโนโลยี Geofences ตอบโจทย์การเป็นสวนพฤกษศาสตร์เพื่อการเรียนรู้อย่างแท้จริงครับ เมื่อรถเข้าสู่พิกัดสำคัญ ระบบจะส่งข้อมูลความรู้และมัลติมีเดียขึ้นมาให้ชม เสมือนมีมัคคุเทศก์ส่วนตัวตลอดเส้นทางครับ</a:t>
             </a:r>
           </a:p>
         </p:txBody>
@@ -673,7 +674,7 @@
           </a:p>
           <a:p>
             <a:r>
-              <a:t>ความคุ้มค่าเกิดขึ้น 4 มิติ: นักท่องเที่ยวสะดวกสบาย, เจ้าหน้าที่ทำงานง่ายขึ้น, ผู้บริหารได้ข้อมูลสถิติตัดสินใจแม่นยำ และด้านสิ่งแวดล้อม การเปลี่ยนมาใช้รถ EV 100% พร้อมจุดชาร์จพลังงานสะอาดช่วยปกป้องธรรมชาติอย่างยั่งยืนครับ</a:t>
+              <a:t>แผนงาน 9 เดือน แบ่งเป็น 3 ระยะชัดเจน: Phase 1 สร้างฐานราก Core Foundation, Phase 2 ระบบ Realtime &amp; Mobile App, และ Phase 3 ฟังก์ชันขั้นสูงและการส่งมอบงานสมบูรณ์ มั่นใจได้ว่าส่งมอบตรงเวลาแน่นอนครับ</a:t>
             </a:r>
           </a:p>
         </p:txBody>
@@ -743,7 +744,82 @@
           <a:lstStyle/>
           <a:p>
             <a:r>
-              <a:t>สคริปต์พูดหน้าที่ 12 (1 นาที):</a:t>
+              <a:t>สคริปต์พูดหน้าที่ 12 (1.5 นาที):</a:t>
+            </a:r>
+          </a:p>
+          <a:p>
+            <a:r>
+              <a:t>ความคุ้มค่าเกิดขึ้น 4 มิติ: นักท่องเที่ยวสะดวกสบาย, เจ้าหน้าที่ทำงานง่ายขึ้น, ผู้บริหารได้ข้อมูลสถิติตัดสินใจแม่นยำ และด้านสิ่งแวดล้อม การเปลี่ยนมาใช้รถ EV 100% พร้อมจุดชาร์จพลังงานสะอาดช่วยปกป้องธรรมชาติอย่างยั่งยืนครับ</a:t>
+            </a:r>
+          </a:p>
+        </p:txBody>
+      </p:sp>
+      <p:sp>
+        <p:nvSpPr>
+          <p:cNvPr id="4" name="Slide Number Placeholder 3"/>
+          <p:cNvSpPr>
+            <a:spLocks noGrp="1"/>
+          </p:cNvSpPr>
+          <p:nvPr>
+            <p:ph type="sldNum" idx="5" sz="quarter"/>
+          </p:nvPr>
+        </p:nvSpPr>
+        <p:spPr/>
+      </p:sp>
+    </p:spTree>
+  </p:cSld>
+  <p:clrMapOvr>
+    <a:masterClrMapping/>
+  </p:clrMapOvr>
+</p:notes>
+</file>
+
+<file path=ppt/notesSlides/notesSlide13.xml><?xml version="1.0" encoding="utf-8"?>
+<p:notes xmlns:a="http://schemas.openxmlformats.org/drawingml/2006/main" xmlns:p="http://schemas.openxmlformats.org/presentationml/2006/main" xmlns:r="http://schemas.openxmlformats.org/officeDocument/2006/relationships">
+  <p:cSld>
+    <p:spTree>
+      <p:nvGrpSpPr>
+        <p:cNvPr id="1" name=""/>
+        <p:cNvGrpSpPr/>
+        <p:nvPr/>
+      </p:nvGrpSpPr>
+      <p:grpSpPr>
+        <a:xfrm>
+          <a:off x="0" y="0"/>
+          <a:ext cx="0" cy="0"/>
+          <a:chOff x="0" y="0"/>
+          <a:chExt cx="0" cy="0"/>
+        </a:xfrm>
+      </p:grpSpPr>
+      <p:sp>
+        <p:nvSpPr>
+          <p:cNvPr id="2" name="Slide Image Placeholder 1"/>
+          <p:cNvSpPr>
+            <a:spLocks noGrp="1"/>
+          </p:cNvSpPr>
+          <p:nvPr>
+            <p:ph type="sldImg" idx="2"/>
+          </p:nvPr>
+        </p:nvSpPr>
+        <p:spPr/>
+      </p:sp>
+      <p:sp>
+        <p:nvSpPr>
+          <p:cNvPr id="3" name="Notes Placeholder 2"/>
+          <p:cNvSpPr>
+            <a:spLocks noGrp="1"/>
+          </p:cNvSpPr>
+          <p:nvPr>
+            <p:ph type="body" idx="3" sz="quarter"/>
+          </p:nvPr>
+        </p:nvSpPr>
+        <p:spPr/>
+        <p:txBody>
+          <a:bodyPr/>
+          <a:lstStyle/>
+          <a:p>
+            <a:r>
+              <a:t>สคริปต์พูดหน้าที่ 13 (1 นาที):</a:t>
             </a:r>
           </a:p>
           <a:p>
@@ -1003,7 +1079,27 @@
           </a:p>
           <a:p>
             <a:r>
-              <a:t>สถาปัตยกรรมระบบ 4 ชั้น ออกแบบตามมาตรฐานสากล: ชั้นที่ 1 ฝั่ง Client ครอบคลุม Web, Mobile, Kiosk และ Tablet ชั้นที่ 2 Microservices แยกตามฟังก์ชันงาน ชั้นที่ 3 IoT สตรีมพิกัดทุก 5 วินาที และชั้นที่ 4 Data Layer แยก PostgreSQL กับ TimescaleDB ทำให้ระบบมีความเสถียรสูงสุดครับ</a:t>
+              <a:t>สำหรับขอบเขตโครงการ มีกรอบการดำเนินงาน 5 ด้านหลักครับ:</a:t>
+            </a:r>
+          </a:p>
+          <a:p>
+            <a:r>
+              <a:t>ข้อที่ 1 คือ การวิเคราะห์และออกแบบฐานข้อมูลระบบจัดการรถนำเที่ยว</a:t>
+            </a:r>
+          </a:p>
+          <a:p>
+            <a:r>
+              <a:t>ข้อที่ 2 คือ การศึกษาและพัฒนารูปแบบการเชื่อมโยงบูรณาการข้อมูลการท่องเที่ยวภายในสวนพฤกษศาสตร์ฯ และหน่วยงานอื่นที่เกี่ยวข้อง</a:t>
+            </a:r>
+          </a:p>
+          <a:p>
+            <a:r>
+              <a:t>ข้อที่ 3 ซึ่งเป็นหัวใจสำคัญ คือ การพัฒนาแอพพลิเคชันระบบการจัดการรถนำเที่ยว ประกอบด้วย 6 โมดูลหลัก ได้แก่ ระบบจำหน่ายตั๋ว Smart e-Ticket, ระบบติดตามรถ Tour Cart Tracking, ระบบบริหารคิว Queue Management, ระบบแจ้งเตือน Push Notification, ระบบแนะนำพิกัด Geofences Technology และระบบรายงาน Real-time Dashboard</a:t>
+            </a:r>
+          </a:p>
+          <a:p>
+            <a:r>
+              <a:t>และข้อที่ 4 และ 5 คือ การจัดทำคู่มือการใช้งานระบบ ฝึกอบรมเจ้าหน้าที่ และส่งมอบรายงานฉบับสมบูรณ์ครับ</a:t>
             </a:r>
           </a:p>
         </p:txBody>
@@ -1078,32 +1174,7 @@
           </a:p>
           <a:p>
             <a:r>
-              <a:t>ในสไลด์นี้คือ e-Ticket Flow ตั้งแต่เริ่มซื้อจนขึ้นรถอย่างละเอียดครับ:</a:t>
-            </a:r>
-          </a:p>
-          <a:p>
-            <a:r>
-              <a:t>1. นักท่องเที่ยวเลือกซื้อผ่าน Mobile App, Web หรือ Kiosk</a:t>
-            </a:r>
-          </a:p>
-          <a:p>
-            <a:r>
-              <a:t>2. ชำระเงินได้ทั้ง PromptPay, บัตร หรือเงินสดที่ Kiosk</a:t>
-            </a:r>
-          </a:p>
-          <a:p>
-            <a:r>
-              <a:t>3. ระบบสร้าง One-time QR Code บันทึกลงฐานข้อมูลสถานะ 'ยังไม่ใช้' ทันที</a:t>
-            </a:r>
-          </a:p>
-          <a:p>
-            <a:r>
-              <a:t>4. ผู้โดยสารแสดง QR บนมือถือ หรือกระดาษจาก Kiosk</a:t>
-            </a:r>
-          </a:p>
-          <a:p>
-            <a:r>
-              <a:t>5. เมื่อขึ้นรถ คนขับใช้กล้อง Tablet บนรถสแกนตรวจตั๋ว ระบบ Check-in ปรับสถานะเป็น 'ใช้แล้ว' ทันที ป้องกันการเวียนตั๋วซ้ำ 100% ครับ</a:t>
+              <a:t>สถาปัตยกรรมระบบ 4 ชั้น ออกแบบตามมาตรฐานสากล: ชั้นที่ 1 ฝั่ง Client ครอบคลุม Web, Mobile, Kiosk และ Tablet ชั้นที่ 2 Microservices แยกตามฟังก์ชันงาน ชั้นที่ 3 IoT สตรีมพิกัดทุก 5 วินาที และชั้นที่ 4 Data Layer แยก PostgreSQL กับ TimescaleDB ทำให้ระบบมีความเสถียรสูงสุดครับ</a:t>
             </a:r>
           </a:p>
         </p:txBody>
@@ -1178,22 +1249,32 @@
           </a:p>
           <a:p>
             <a:r>
-              <a:t>สไลด์นี้คือ Payment Gateway Integration Flow ที่แสดงสถาปัตยกรรมการเงินและความปลอดภัยครับ:</a:t>
-            </a:r>
-          </a:p>
-          <a:p>
-            <a:r>
-              <a:t>เมื่อผู้โดยสารกดชำระเงิน Backend จะต่อ API ไปยัง Gateway เพื่อสร้าง QR PromptPay EMVCo ส่งกลับมาแสดงบนจอ ผู้โดยสารสแกนจ่ายผ่านธนาคารใดก็ได้</a:t>
-            </a:r>
-          </a:p>
-          <a:p>
-            <a:r>
-              <a:t>เมื่อธนาคารรับเงิน Gateway จะยิง Webhook Callback กลับมาที่ Backend ซึ่งระบบจะตรวจสอบ Digital Signature เพื่อป้องกัน Webhook ปลอม เมื่อยืนยันแล้วจะออก e-Ticket และส่ง Push Notification ทันที</a:t>
-            </a:r>
-          </a:p>
-          <a:p>
-            <a:r>
-              <a:t>หากผู้โดยสารไม่ชำระเงินภายใน 10 นาที ระบบจะ Auto-Expire ยกเลิกออร์เดอร์และคืนที่นั่งทันทีครับ</a:t>
+              <a:t>ในสไลด์นี้คือ e-Ticket Flow ตั้งแต่เริ่มซื้อจนขึ้นรถอย่างละเอียดครับ:</a:t>
+            </a:r>
+          </a:p>
+          <a:p>
+            <a:r>
+              <a:t>1. นักท่องเที่ยวเลือกซื้อผ่าน Mobile App, Web หรือ Kiosk</a:t>
+            </a:r>
+          </a:p>
+          <a:p>
+            <a:r>
+              <a:t>2. ชำระเงินได้ทั้ง PromptPay, บัตร หรือเงินสดที่ Kiosk</a:t>
+            </a:r>
+          </a:p>
+          <a:p>
+            <a:r>
+              <a:t>3. ระบบสร้าง One-time QR Code บันทึกลงฐานข้อมูลสถานะ 'ยังไม่ใช้' ทันที</a:t>
+            </a:r>
+          </a:p>
+          <a:p>
+            <a:r>
+              <a:t>4. ผู้โดยสารแสดง QR บนมือถือ หรือกระดาษจาก Kiosk</a:t>
+            </a:r>
+          </a:p>
+          <a:p>
+            <a:r>
+              <a:t>5. เมื่อขึ้นรถ คนขับใช้กล้อง Tablet บนรถสแกนตรวจตั๋ว ระบบ Check-in ปรับสถานะเป็น 'ใช้แล้ว' ทันที ป้องกันการเวียนตั๋วซ้ำ 100% ครับ</a:t>
             </a:r>
           </a:p>
         </p:txBody>
@@ -1268,12 +1349,22 @@
           </a:p>
           <a:p>
             <a:r>
-              <a:t>มาดูหัวใจของระบบปฏิบัติการเดินรถครับ เราจัดเส้นทางเดินรถเป็น Loop วนรอบ 6 สถานีหลักที่ครอบคลุมไฮไลต์ของสวนฯ ทั้งหมด</a:t>
-            </a:r>
-          </a:p>
-          <a:p>
-            <a:r>
-              <a:t>ภาพถ่ายทางขวามือคือภายในห้องโดยสารจริง ซึ่งมีอุปกรณ์ Tablet ติดตั้งไว้ประจำรถ ส่งพิกัด GPS เข้าเซิร์ฟเวอร์ทุกๆ 5 วินาที ทำให้ระบบ Location Engine และ Geofencing ทราบได้ทันทีว่ารถอยู่ที่จุดไหน และคำนวณเวลา ETA ถึงแต่ละสถานีได้อย่างแม่นยำครับ</a:t>
+              <a:t>สไลด์นี้คือ Payment Gateway Integration Flow ที่แสดงสถาปัตยกรรมการเงินและความปลอดภัยครับ:</a:t>
+            </a:r>
+          </a:p>
+          <a:p>
+            <a:r>
+              <a:t>เมื่อผู้โดยสารกดชำระเงิน Backend จะต่อ API ไปยัง Gateway เพื่อสร้าง QR PromptPay EMVCo ส่งกลับมาแสดงบนจอ ผู้โดยสารสแกนจ่ายผ่านธนาคารใดก็ได้</a:t>
+            </a:r>
+          </a:p>
+          <a:p>
+            <a:r>
+              <a:t>เมื่อธนาคารรับเงิน Gateway จะยิง Webhook Callback กลับมาที่ Backend ซึ่งระบบจะตรวจสอบ Digital Signature เพื่อป้องกัน Webhook ปลอม เมื่อยืนยันแล้วจะออก e-Ticket และส่ง Push Notification ทันที</a:t>
+            </a:r>
+          </a:p>
+          <a:p>
+            <a:r>
+              <a:t>หากผู้โดยสารไม่ชำระเงินภายใน 10 นาที ระบบจะ Auto-Expire ยกเลิกออร์เดอร์และคืนที่นั่งทันทีครับ</a:t>
             </a:r>
           </a:p>
         </p:txBody>
@@ -1343,12 +1434,17 @@
           <a:lstStyle/>
           <a:p>
             <a:r>
-              <a:t>สคริปต์พูดหน้าที่ 8 (1.0 นาที):</a:t>
-            </a:r>
-          </a:p>
-          <a:p>
-            <a:r>
-              <a:t>Smart Queue Balancing ช่วยกระจายผู้โดยสารอย่างสมดุล ไม่ให้คนยืนรอแออัดที่สถานียอดนิยม ขณะที่ Push Notification จะแจ้งเตือนเข้ามือถือก่อนรถถึงสถานี 3 นาที ทำให้นักท่องเที่ยวเดินชมสวนได้อย่างสบายใจครับ</a:t>
+              <a:t>สคริปต์พูดหน้าที่ 8 (1.5 นาที):</a:t>
+            </a:r>
+          </a:p>
+          <a:p>
+            <a:r>
+              <a:t>มาดูหัวใจของระบบปฏิบัติการเดินรถครับ เราจัดเส้นทางเดินรถเป็น Loop วนรอบ 6 สถานีหลักที่ครอบคลุมไฮไลต์ของสวนฯ ทั้งหมด</a:t>
+            </a:r>
+          </a:p>
+          <a:p>
+            <a:r>
+              <a:t>ภาพถ่ายทางขวามือคือภายในห้องโดยสารจริง ซึ่งมีอุปกรณ์ Tablet ติดตั้งไว้ประจำรถ ส่งพิกัด GPS เข้าเซิร์ฟเวอร์ทุกๆ 5 วินาที ทำให้ระบบ Location Engine และ Geofencing ทราบได้ทันทีว่ารถอยู่ที่จุดไหน และคำนวณเวลา ETA ถึงแต่ละสถานีได้อย่างแม่นยำครับ</a:t>
             </a:r>
           </a:p>
         </p:txBody>
@@ -1423,7 +1519,7 @@
           </a:p>
           <a:p>
             <a:r>
-              <a:t>เทคโนโลยี Geofences ตอบโจทย์การเป็นสวนพฤกษศาสตร์เพื่อการเรียนรู้อย่างแท้จริงครับ เมื่อรถเข้าสู่พิกัดสำคัญ ระบบจะส่งข้อมูลความรู้และมัลติมีเดียขึ้นมาให้ชม เสมือนมีมัคคุเทศก์ส่วนตัวตลอดเส้นทางครับ</a:t>
+              <a:t>Smart Queue Balancing ช่วยกระจายผู้โดยสารอย่างสมดุล ไม่ให้คนยืนรอแออัดที่สถานียอดนิยม ขณะที่ Push Notification จะแจ้งเตือนเข้ามือถือก่อนรถถึงสถานี 3 นาที ทำให้นักท่องเที่ยวเดินชมสวนได้อย่างสบายใจครับ</a:t>
             </a:r>
           </a:p>
         </p:txBody>
@@ -4801,7 +4897,7 @@
               </a:defRPr>
             </a:pPr>
             <a:r>
-              <a:t>IMPLEMENTATION ROADMAP</a:t>
+              <a:t>GEOFENCE &amp; SMART GUIDE</a:t>
             </a:r>
           </a:p>
         </p:txBody>
@@ -4837,7 +4933,7 @@
               </a:defRPr>
             </a:pPr>
             <a:r>
-              <a:t>แผนการดำเนินงานและส่งมอบโครงการ (กรอบเวลา 9 เดือน)</a:t>
+              <a:t>ระบบแนะนำแหล่งท่องเที่ยวตามพิกัดภูมิศาสตร์</a:t>
             </a:r>
           </a:p>
         </p:txBody>
@@ -4873,7 +4969,7 @@
               </a:defRPr>
             </a:pPr>
             <a:r>
-              <a:t>การแบ่งระยะการดำเนินงานอย่างเป็นระบบเพื่อการส่งมอบที่ตรงเวลาและมีคุณภาพ</a:t>
+              <a:t>การประยุกต์ใช้เทคโนโลยี Geofences เพื่อสนับสนุนการท่องเที่ยวเชิงเรียนรู้</a:t>
             </a:r>
           </a:p>
         </p:txBody>
@@ -4887,7 +4983,7 @@
         <p:spPr>
           <a:xfrm>
             <a:off x="731520" y="1691640"/>
-            <a:ext cx="3328416" cy="4480560"/>
+            <a:ext cx="5120640" cy="4480560"/>
           </a:xfrm>
           <a:prstGeom prst="roundRect">
             <a:avLst/>
@@ -4925,57 +5021,14 @@
       </p:sp>
       <p:sp>
         <p:nvSpPr>
-          <p:cNvPr id="6" name="Rectangle 5"/>
-          <p:cNvSpPr/>
-          <p:nvPr/>
-        </p:nvSpPr>
-        <p:spPr>
-          <a:xfrm>
-            <a:off x="731520" y="1691640"/>
-            <a:ext cx="3328416" cy="128016"/>
-          </a:xfrm>
-          <a:prstGeom prst="rect">
-            <a:avLst/>
-          </a:prstGeom>
-          <a:solidFill>
-            <a:srgbClr val="0B2545"/>
-          </a:solidFill>
-          <a:ln>
-            <a:noFill/>
-          </a:ln>
-        </p:spPr>
-        <p:style>
-          <a:lnRef idx="1">
-            <a:schemeClr val="accent1"/>
-          </a:lnRef>
-          <a:fillRef idx="3">
-            <a:schemeClr val="accent1"/>
-          </a:fillRef>
-          <a:effectRef idx="2">
-            <a:schemeClr val="accent1"/>
-          </a:effectRef>
-          <a:fontRef idx="minor">
-            <a:schemeClr val="lt1"/>
-          </a:fontRef>
-        </p:style>
-        <p:txBody>
-          <a:bodyPr rtlCol="0" anchor="ctr"/>
-          <a:lstStyle/>
-          <a:p>
-            <a:pPr algn="ctr"/>
-          </a:p>
-        </p:txBody>
-      </p:sp>
-      <p:sp>
-        <p:nvSpPr>
-          <p:cNvPr id="7" name="TextBox 6"/>
+          <p:cNvPr id="6" name="TextBox 5"/>
           <p:cNvSpPr txBox="1"/>
           <p:nvPr/>
         </p:nvSpPr>
         <p:spPr>
           <a:xfrm>
-            <a:off x="960120" y="1920240"/>
-            <a:ext cx="2871216" cy="4023360"/>
+            <a:off x="1005840" y="1920240"/>
+            <a:ext cx="4572000" cy="4023360"/>
           </a:xfrm>
           <a:prstGeom prst="rect">
             <a:avLst/>
@@ -4990,21 +5043,8 @@
           <a:p>
             <a:pPr>
               <a:spcAft>
-                <a:spcPts val="200"/>
-              </a:spcAft>
-              <a:defRPr sz="1200" b="1">
-                <a:solidFill>
-                  <a:srgbClr val="0B2545"/>
-                </a:solidFill>
-                <a:latin typeface="Segoe UI"/>
-              </a:defRPr>
-            </a:pPr>
-            <a:r>
-              <a:t>ระยะที่ 1 (เดือนที่ 1 - 3)</a:t>
-            </a:r>
-          </a:p>
-          <a:p>
-            <a:pPr>
+                <a:spcPts val="1400"/>
+              </a:spcAft>
               <a:defRPr sz="1700" b="1">
                 <a:solidFill>
                   <a:srgbClr val="1B4332"/>
@@ -5013,29 +5053,26 @@
               </a:defRPr>
             </a:pPr>
             <a:r>
-              <a:t>Core Foundation</a:t>
-            </a:r>
-          </a:p>
-          <a:p>
-            <a:pPr>
-              <a:spcAft>
-                <a:spcPts val="1200"/>
-              </a:spcAft>
-              <a:defRPr sz="1050">
-                <a:solidFill>
-                  <a:srgbClr val="5A646E"/>
-                </a:solidFill>
-                <a:latin typeface="Segoe UI"/>
-              </a:defRPr>
-            </a:pPr>
-            <a:r>
-              <a:t>รากฐานระบบและการชำระเงิน</a:t>
-            </a:r>
-          </a:p>
-          <a:p>
-            <a:pPr>
-              <a:spcAft>
-                <a:spcPts val="500"/>
+              <a:t>หลักการทำงานของเทคโนโลยี Geofences</a:t>
+            </a:r>
+          </a:p>
+          <a:p>
+            <a:pPr>
+              <a:defRPr sz="1400" b="1">
+                <a:solidFill>
+                  <a:srgbClr val="134074"/>
+                </a:solidFill>
+                <a:latin typeface="Segoe UI"/>
+              </a:defRPr>
+            </a:pPr>
+            <a:r>
+              <a:t>• การกำหนดรั้วพิกัดเสมือน (Virtual Geofences)</a:t>
+            </a:r>
+          </a:p>
+          <a:p>
+            <a:pPr>
+              <a:spcAft>
+                <a:spcPts val="1000"/>
               </a:spcAft>
               <a:defRPr sz="1200">
                 <a:solidFill>
@@ -5045,13 +5082,26 @@
               </a:defRPr>
             </a:pPr>
             <a:r>
-              <a:t>• วิเคราะห์และออกแบบ DB Schema และ Architecture</a:t>
-            </a:r>
-          </a:p>
-          <a:p>
-            <a:pPr>
-              <a:spcAft>
-                <a:spcPts val="500"/>
+              <a:t>กำหนดพื้นที่พิกัดจำลองล้อมรอบจุดท่องเที่ยวสำคัญ เมื่อยานพาหนะเข้าสู่พื้นที่ ระบบจะระบุตำแหน่งโดยอัตโนมัติ</a:t>
+            </a:r>
+          </a:p>
+          <a:p>
+            <a:pPr>
+              <a:defRPr sz="1400" b="1">
+                <a:solidFill>
+                  <a:srgbClr val="134074"/>
+                </a:solidFill>
+                <a:latin typeface="Segoe UI"/>
+              </a:defRPr>
+            </a:pPr>
+            <a:r>
+              <a:t>• ระบบมัลติมีเดียและข้อมูลพรรณไม้อัตโนมัติ</a:t>
+            </a:r>
+          </a:p>
+          <a:p>
+            <a:pPr>
+              <a:spcAft>
+                <a:spcPts val="1000"/>
               </a:spcAft>
               <a:defRPr sz="1200">
                 <a:solidFill>
@@ -5061,13 +5111,26 @@
               </a:defRPr>
             </a:pPr>
             <a:r>
-              <a:t>• พัฒนาระบบ Backend API (Ticket, Station, Auth)</a:t>
-            </a:r>
-          </a:p>
-          <a:p>
-            <a:pPr>
-              <a:spcAft>
-                <a:spcPts val="500"/>
+              <a:t>ส่งมอบข้อมูลความรู้ พันธุ์ไม้เด่นประจำโซน และประวัติความเป็นมา แสดงผลขึ้นบนหน้าจอตามจุดที่ยืนอยู่จริง</a:t>
+            </a:r>
+          </a:p>
+          <a:p>
+            <a:pPr>
+              <a:defRPr sz="1400" b="1">
+                <a:solidFill>
+                  <a:srgbClr val="134074"/>
+                </a:solidFill>
+                <a:latin typeface="Segoe UI"/>
+              </a:defRPr>
+            </a:pPr>
+            <a:r>
+              <a:t>• การแนะนำเส้นทางที่เหมาะสม (Smart Route)</a:t>
+            </a:r>
+          </a:p>
+          <a:p>
+            <a:pPr>
+              <a:spcAft>
+                <a:spcPts val="1000"/>
               </a:spcAft>
               <a:defRPr sz="1200">
                 <a:solidFill>
@@ -5077,69 +5140,21 @@
               </a:defRPr>
             </a:pPr>
             <a:r>
-              <a:t>• พัฒนา Admin Dashboard จัดการข้อมูลสถานี/รถ</a:t>
-            </a:r>
-          </a:p>
-          <a:p>
-            <a:pPr>
-              <a:spcAft>
-                <a:spcPts val="500"/>
-              </a:spcAft>
-              <a:defRPr sz="1200">
-                <a:solidFill>
-                  <a:srgbClr val="14181B"/>
-                </a:solidFill>
-                <a:latin typeface="Segoe UI"/>
-              </a:defRPr>
-            </a:pPr>
-            <a:r>
-              <a:t>• พัฒนาระบบ Kiosk UI จำหน่ายตั๋วหน้าสถานี</a:t>
-            </a:r>
-          </a:p>
-          <a:p>
-            <a:pPr>
-              <a:spcAft>
-                <a:spcPts val="500"/>
-              </a:spcAft>
-              <a:defRPr sz="1200">
-                <a:solidFill>
-                  <a:srgbClr val="14181B"/>
-                </a:solidFill>
-                <a:latin typeface="Segoe UI"/>
-              </a:defRPr>
-            </a:pPr>
-            <a:r>
-              <a:t>• เชื่อมต่อ Payment Gateway (PromptPay/บัตร/เงินสด)</a:t>
-            </a:r>
-          </a:p>
-          <a:p>
-            <a:pPr>
-              <a:spcAft>
-                <a:spcPts val="500"/>
-              </a:spcAft>
-              <a:defRPr sz="1200">
-                <a:solidFill>
-                  <a:srgbClr val="14181B"/>
-                </a:solidFill>
-                <a:latin typeface="Segoe UI"/>
-              </a:defRPr>
-            </a:pPr>
-            <a:r>
-              <a:t>• พัฒนา Driver App บน Tablet สำหรับคนขับรถ</a:t>
-            </a:r>
-          </a:p>
-        </p:txBody>
-      </p:sp>
-      <p:sp>
-        <p:nvSpPr>
-          <p:cNvPr id="8" name="Rounded Rectangle 7"/>
+              <a:t>แนะนำเส้นทางท่องเที่ยวที่เหมาะสมตามเวลาที่มี เช่น เส้นทาง 1 ชั่วโมง หรือเส้นทางเจาะลึก 3 ชั่วโมง</a:t>
+            </a:r>
+          </a:p>
+        </p:txBody>
+      </p:sp>
+      <p:sp>
+        <p:nvSpPr>
+          <p:cNvPr id="7" name="Rounded Rectangle 6"/>
           <p:cNvSpPr/>
           <p:nvPr/>
         </p:nvSpPr>
         <p:spPr>
           <a:xfrm>
-            <a:off x="4389120" y="1691640"/>
-            <a:ext cx="3328416" cy="4480560"/>
+            <a:off x="6217920" y="1691640"/>
+            <a:ext cx="5120640" cy="4480560"/>
           </a:xfrm>
           <a:prstGeom prst="roundRect">
             <a:avLst/>
@@ -5177,57 +5192,14 @@
       </p:sp>
       <p:sp>
         <p:nvSpPr>
-          <p:cNvPr id="9" name="Rectangle 8"/>
-          <p:cNvSpPr/>
-          <p:nvPr/>
-        </p:nvSpPr>
-        <p:spPr>
-          <a:xfrm>
-            <a:off x="4389120" y="1691640"/>
-            <a:ext cx="3328416" cy="128016"/>
-          </a:xfrm>
-          <a:prstGeom prst="rect">
-            <a:avLst/>
-          </a:prstGeom>
-          <a:solidFill>
-            <a:srgbClr val="2D6A4F"/>
-          </a:solidFill>
-          <a:ln>
-            <a:noFill/>
-          </a:ln>
-        </p:spPr>
-        <p:style>
-          <a:lnRef idx="1">
-            <a:schemeClr val="accent1"/>
-          </a:lnRef>
-          <a:fillRef idx="3">
-            <a:schemeClr val="accent1"/>
-          </a:fillRef>
-          <a:effectRef idx="2">
-            <a:schemeClr val="accent1"/>
-          </a:effectRef>
-          <a:fontRef idx="minor">
-            <a:schemeClr val="lt1"/>
-          </a:fontRef>
-        </p:style>
-        <p:txBody>
-          <a:bodyPr rtlCol="0" anchor="ctr"/>
-          <a:lstStyle/>
-          <a:p>
-            <a:pPr algn="ctr"/>
-          </a:p>
-        </p:txBody>
-      </p:sp>
-      <p:sp>
-        <p:nvSpPr>
-          <p:cNvPr id="10" name="TextBox 9"/>
+          <p:cNvPr id="8" name="TextBox 7"/>
           <p:cNvSpPr txBox="1"/>
           <p:nvPr/>
         </p:nvSpPr>
         <p:spPr>
           <a:xfrm>
-            <a:off x="4617720" y="1920240"/>
-            <a:ext cx="2871216" cy="4023360"/>
+            <a:off x="6492240" y="1920240"/>
+            <a:ext cx="4572000" cy="4023360"/>
           </a:xfrm>
           <a:prstGeom prst="rect">
             <a:avLst/>
@@ -5242,9 +5214,22 @@
           <a:p>
             <a:pPr>
               <a:spcAft>
-                <a:spcPts val="200"/>
-              </a:spcAft>
-              <a:defRPr sz="1200" b="1">
+                <a:spcPts val="1400"/>
+              </a:spcAft>
+              <a:defRPr sz="1700" b="1">
+                <a:solidFill>
+                  <a:srgbClr val="1B4332"/>
+                </a:solidFill>
+                <a:latin typeface="Segoe UI"/>
+              </a:defRPr>
+            </a:pPr>
+            <a:r>
+              <a:t>จุดแลนด์มาร์กสำคัญที่เชื่อมโยงในระบบ</a:t>
+            </a:r>
+          </a:p>
+          <a:p>
+            <a:pPr>
+              <a:defRPr sz="1350" b="1">
                 <a:solidFill>
                   <a:srgbClr val="2D6A4F"/>
                 </a:solidFill>
@@ -5252,44 +5237,15 @@
               </a:defRPr>
             </a:pPr>
             <a:r>
-              <a:t>ระยะที่ 2 (เดือนที่ 4 - 6)</a:t>
-            </a:r>
-          </a:p>
-          <a:p>
-            <a:pPr>
-              <a:defRPr sz="1700" b="1">
-                <a:solidFill>
-                  <a:srgbClr val="1B4332"/>
-                </a:solidFill>
-                <a:latin typeface="Segoe UI"/>
-              </a:defRPr>
-            </a:pPr>
-            <a:r>
-              <a:t>Realtime &amp; Mobile</a:t>
-            </a:r>
-          </a:p>
-          <a:p>
-            <a:pPr>
-              <a:spcAft>
-                <a:spcPts val="1200"/>
-              </a:spcAft>
-              <a:defRPr sz="1050">
-                <a:solidFill>
-                  <a:srgbClr val="5A646E"/>
-                </a:solidFill>
-                <a:latin typeface="Segoe UI"/>
-              </a:defRPr>
-            </a:pPr>
-            <a:r>
-              <a:t>ระบบเวลาจริงและแอปพลิเคชัน</a:t>
-            </a:r>
-          </a:p>
-          <a:p>
-            <a:pPr>
-              <a:spcAft>
-                <a:spcPts val="500"/>
-              </a:spcAft>
-              <a:defRPr sz="1200">
+              <a:t>1. ทางเดินเหนือเรือนยอดไม้ (Canopy Walkway)</a:t>
+            </a:r>
+          </a:p>
+          <a:p>
+            <a:pPr>
+              <a:spcAft>
+                <a:spcPts val="800"/>
+              </a:spcAft>
+              <a:defRPr sz="1150">
                 <a:solidFill>
                   <a:srgbClr val="14181B"/>
                 </a:solidFill>
@@ -5297,15 +5253,28 @@
               </a:defRPr>
             </a:pPr>
             <a:r>
-              <a:t>• ติดตั้ง WebSocket Server รองรับ Live Tracking</a:t>
-            </a:r>
-          </a:p>
-          <a:p>
-            <a:pPr>
-              <a:spcAft>
-                <a:spcPts val="500"/>
-              </a:spcAft>
-              <a:defRPr sz="1200">
+              <a:t>ทางเดินลอยฟ้าศึกษาธรรมชาติเรือนยอดไม้ที่ยาวที่สุด นำเสนอข้อมูลพรรณไม้ระดับเรือนยอดและทัศนียภาพป่าดอยแม่ริม</a:t>
+            </a:r>
+          </a:p>
+          <a:p>
+            <a:pPr>
+              <a:defRPr sz="1350" b="1">
+                <a:solidFill>
+                  <a:srgbClr val="2D6A4F"/>
+                </a:solidFill>
+                <a:latin typeface="Segoe UI"/>
+              </a:defRPr>
+            </a:pPr>
+            <a:r>
+              <a:t>2. กลุ่มอาคารเรือนกระจกเฉลิมพระเกียรติ</a:t>
+            </a:r>
+          </a:p>
+          <a:p>
+            <a:pPr>
+              <a:spcAft>
+                <a:spcPts val="800"/>
+              </a:spcAft>
+              <a:defRPr sz="1150">
                 <a:solidFill>
                   <a:srgbClr val="14181B"/>
                 </a:solidFill>
@@ -5313,15 +5282,28 @@
               </a:defRPr>
             </a:pPr>
             <a:r>
-              <a:t>• พัฒนา Mobile App (iOS / Android) สำหรับนักท่องเที่ยว</a:t>
-            </a:r>
-          </a:p>
-          <a:p>
-            <a:pPr>
-              <a:spcAft>
-                <a:spcPts val="500"/>
-              </a:spcAft>
-              <a:defRPr sz="1200">
+              <a:t>รวบรวมพืชทนแล้ง พืชป่าดงดิบ พืชกินแมลง และบัวนานาชนิด นำเสนอข้อมูลความรู้ทางพฤกษศาสตร์เชิงลึก</a:t>
+            </a:r>
+          </a:p>
+          <a:p>
+            <a:pPr>
+              <a:defRPr sz="1350" b="1">
+                <a:solidFill>
+                  <a:srgbClr val="2D6A4F"/>
+                </a:solidFill>
+                <a:latin typeface="Segoe UI"/>
+              </a:defRPr>
+            </a:pPr>
+            <a:r>
+              <a:t>3. พิพิธภัณฑ์ธรรมชาติวิทยา</a:t>
+            </a:r>
+          </a:p>
+          <a:p>
+            <a:pPr>
+              <a:spcAft>
+                <a:spcPts val="800"/>
+              </a:spcAft>
+              <a:defRPr sz="1150">
                 <a:solidFill>
                   <a:srgbClr val="14181B"/>
                 </a:solidFill>
@@ -5329,15 +5311,28 @@
               </a:defRPr>
             </a:pPr>
             <a:r>
-              <a:t>• พัฒนาระบบ Queue Management &amp; Smart Balancing</a:t>
-            </a:r>
-          </a:p>
-          <a:p>
-            <a:pPr>
-              <a:spcAft>
-                <a:spcPts val="500"/>
-              </a:spcAft>
-              <a:defRPr sz="1200">
+              <a:t>แหล่งเรียนรู้และนิทรรศการถาวรด้านความหลากหลายทางชีวภาพ เหมาะสำหรับการเรียนรู้ของนักเรียนและครอบครัว</a:t>
+            </a:r>
+          </a:p>
+          <a:p>
+            <a:pPr>
+              <a:defRPr sz="1350" b="1">
+                <a:solidFill>
+                  <a:srgbClr val="2D6A4F"/>
+                </a:solidFill>
+                <a:latin typeface="Segoe UI"/>
+              </a:defRPr>
+            </a:pPr>
+            <a:r>
+              <a:t>4. ลานกิจกรรมและจุดพักผ่อนธรรมชาติ</a:t>
+            </a:r>
+          </a:p>
+          <a:p>
+            <a:pPr>
+              <a:spcAft>
+                <a:spcPts val="800"/>
+              </a:spcAft>
+              <a:defRPr sz="1150">
                 <a:solidFill>
                   <a:srgbClr val="14181B"/>
                 </a:solidFill>
@@ -5345,291 +5340,7 @@
               </a:defRPr>
             </a:pPr>
             <a:r>
-              <a:t>• เชื่อมโยง Geofencing และทดสอบเดินรถ Loop 6 สถานี</a:t>
-            </a:r>
-          </a:p>
-          <a:p>
-            <a:pPr>
-              <a:spcAft>
-                <a:spcPts val="500"/>
-              </a:spcAft>
-              <a:defRPr sz="1200">
-                <a:solidFill>
-                  <a:srgbClr val="14181B"/>
-                </a:solidFill>
-                <a:latin typeface="Segoe UI"/>
-              </a:defRPr>
-            </a:pPr>
-            <a:r>
-              <a:t>• ทดสอบระบบ Check-in สแกน QR Code บนรถจริง</a:t>
-            </a:r>
-          </a:p>
-          <a:p>
-            <a:pPr>
-              <a:spcAft>
-                <a:spcPts val="500"/>
-              </a:spcAft>
-              <a:defRPr sz="1200">
-                <a:solidFill>
-                  <a:srgbClr val="14181B"/>
-                </a:solidFill>
-                <a:latin typeface="Segoe UI"/>
-              </a:defRPr>
-            </a:pPr>
-            <a:r>
-              <a:t>• ทดสอบความเสถียรของสัญญาณสื่อสารในพื้นที่สวนฯ</a:t>
-            </a:r>
-          </a:p>
-        </p:txBody>
-      </p:sp>
-      <p:sp>
-        <p:nvSpPr>
-          <p:cNvPr id="11" name="Rounded Rectangle 10"/>
-          <p:cNvSpPr/>
-          <p:nvPr/>
-        </p:nvSpPr>
-        <p:spPr>
-          <a:xfrm>
-            <a:off x="8046720" y="1691640"/>
-            <a:ext cx="3328416" cy="4480560"/>
-          </a:xfrm>
-          <a:prstGeom prst="roundRect">
-            <a:avLst/>
-          </a:prstGeom>
-          <a:solidFill>
-            <a:srgbClr val="FFFFFF"/>
-          </a:solidFill>
-          <a:ln w="15240">
-            <a:solidFill>
-              <a:srgbClr val="D2E1DA"/>
-            </a:solidFill>
-          </a:ln>
-        </p:spPr>
-        <p:style>
-          <a:lnRef idx="1">
-            <a:schemeClr val="accent1"/>
-          </a:lnRef>
-          <a:fillRef idx="3">
-            <a:schemeClr val="accent1"/>
-          </a:fillRef>
-          <a:effectRef idx="2">
-            <a:schemeClr val="accent1"/>
-          </a:effectRef>
-          <a:fontRef idx="minor">
-            <a:schemeClr val="lt1"/>
-          </a:fontRef>
-        </p:style>
-        <p:txBody>
-          <a:bodyPr rtlCol="0" anchor="ctr"/>
-          <a:lstStyle/>
-          <a:p>
-            <a:pPr algn="ctr"/>
-          </a:p>
-        </p:txBody>
-      </p:sp>
-      <p:sp>
-        <p:nvSpPr>
-          <p:cNvPr id="12" name="Rectangle 11"/>
-          <p:cNvSpPr/>
-          <p:nvPr/>
-        </p:nvSpPr>
-        <p:spPr>
-          <a:xfrm>
-            <a:off x="8046720" y="1691640"/>
-            <a:ext cx="3328416" cy="128016"/>
-          </a:xfrm>
-          <a:prstGeom prst="rect">
-            <a:avLst/>
-          </a:prstGeom>
-          <a:solidFill>
-            <a:srgbClr val="1B4332"/>
-          </a:solidFill>
-          <a:ln>
-            <a:noFill/>
-          </a:ln>
-        </p:spPr>
-        <p:style>
-          <a:lnRef idx="1">
-            <a:schemeClr val="accent1"/>
-          </a:lnRef>
-          <a:fillRef idx="3">
-            <a:schemeClr val="accent1"/>
-          </a:fillRef>
-          <a:effectRef idx="2">
-            <a:schemeClr val="accent1"/>
-          </a:effectRef>
-          <a:fontRef idx="minor">
-            <a:schemeClr val="lt1"/>
-          </a:fontRef>
-        </p:style>
-        <p:txBody>
-          <a:bodyPr rtlCol="0" anchor="ctr"/>
-          <a:lstStyle/>
-          <a:p>
-            <a:pPr algn="ctr"/>
-          </a:p>
-        </p:txBody>
-      </p:sp>
-      <p:sp>
-        <p:nvSpPr>
-          <p:cNvPr id="13" name="TextBox 12"/>
-          <p:cNvSpPr txBox="1"/>
-          <p:nvPr/>
-        </p:nvSpPr>
-        <p:spPr>
-          <a:xfrm>
-            <a:off x="8275320" y="1920240"/>
-            <a:ext cx="2871216" cy="4023360"/>
-          </a:xfrm>
-          <a:prstGeom prst="rect">
-            <a:avLst/>
-          </a:prstGeom>
-          <a:noFill/>
-        </p:spPr>
-        <p:txBody>
-          <a:bodyPr wrap="square">
-            <a:spAutoFit/>
-          </a:bodyPr>
-          <a:lstStyle/>
-          <a:p>
-            <a:pPr>
-              <a:spcAft>
-                <a:spcPts val="200"/>
-              </a:spcAft>
-              <a:defRPr sz="1200" b="1">
-                <a:solidFill>
-                  <a:srgbClr val="1B4332"/>
-                </a:solidFill>
-                <a:latin typeface="Segoe UI"/>
-              </a:defRPr>
-            </a:pPr>
-            <a:r>
-              <a:t>ระยะที่ 3 (เดือนที่ 7 - 9)</a:t>
-            </a:r>
-          </a:p>
-          <a:p>
-            <a:pPr>
-              <a:defRPr sz="1700" b="1">
-                <a:solidFill>
-                  <a:srgbClr val="1B4332"/>
-                </a:solidFill>
-                <a:latin typeface="Segoe UI"/>
-              </a:defRPr>
-            </a:pPr>
-            <a:r>
-              <a:t>Advanced Features &amp; Rollout</a:t>
-            </a:r>
-          </a:p>
-          <a:p>
-            <a:pPr>
-              <a:spcAft>
-                <a:spcPts val="1200"/>
-              </a:spcAft>
-              <a:defRPr sz="1050">
-                <a:solidFill>
-                  <a:srgbClr val="5A646E"/>
-                </a:solidFill>
-                <a:latin typeface="Segoe UI"/>
-              </a:defRPr>
-            </a:pPr>
-            <a:r>
-              <a:t>ฟังก์ชันขั้นสูงและการส่งมอบ</a:t>
-            </a:r>
-          </a:p>
-          <a:p>
-            <a:pPr>
-              <a:spcAft>
-                <a:spcPts val="500"/>
-              </a:spcAft>
-              <a:defRPr sz="1200">
-                <a:solidFill>
-                  <a:srgbClr val="14181B"/>
-                </a:solidFill>
-                <a:latin typeface="Segoe UI"/>
-              </a:defRPr>
-            </a:pPr>
-            <a:r>
-              <a:t>• พัฒนาระบบ Push Notification (App / LINE / SMS)</a:t>
-            </a:r>
-          </a:p>
-          <a:p>
-            <a:pPr>
-              <a:spcAft>
-                <a:spcPts val="500"/>
-              </a:spcAft>
-              <a:defRPr sz="1200">
-                <a:solidFill>
-                  <a:srgbClr val="14181B"/>
-                </a:solidFill>
-                <a:latin typeface="Segoe UI"/>
-              </a:defRPr>
-            </a:pPr>
-            <a:r>
-              <a:t>• พัฒนาระบบ Real-time Analytics Dashboard เชิงพื้นที่</a:t>
-            </a:r>
-          </a:p>
-          <a:p>
-            <a:pPr>
-              <a:spcAft>
-                <a:spcPts val="500"/>
-              </a:spcAft>
-              <a:defRPr sz="1200">
-                <a:solidFill>
-                  <a:srgbClr val="14181B"/>
-                </a:solidFill>
-                <a:latin typeface="Segoe UI"/>
-              </a:defRPr>
-            </a:pPr>
-            <a:r>
-              <a:t>• เปิดใช้งานระบบจองตั๋วออนไลน์ล่วงหน้า (Online Booking)</a:t>
-            </a:r>
-          </a:p>
-          <a:p>
-            <a:pPr>
-              <a:spcAft>
-                <a:spcPts val="500"/>
-              </a:spcAft>
-              <a:defRPr sz="1200">
-                <a:solidFill>
-                  <a:srgbClr val="14181B"/>
-                </a:solidFill>
-                <a:latin typeface="Segoe UI"/>
-              </a:defRPr>
-            </a:pPr>
-            <a:r>
-              <a:t>• จัดทำคู่มือการใช้งานระบบสำหรับผู้ใช้ทุกระดับ</a:t>
-            </a:r>
-          </a:p>
-          <a:p>
-            <a:pPr>
-              <a:spcAft>
-                <a:spcPts val="500"/>
-              </a:spcAft>
-              <a:defRPr sz="1200">
-                <a:solidFill>
-                  <a:srgbClr val="14181B"/>
-                </a:solidFill>
-                <a:latin typeface="Segoe UI"/>
-              </a:defRPr>
-            </a:pPr>
-            <a:r>
-              <a:t>• จัดฝึกอบรมเชิงปฏิบัติการแก่เจ้าหน้าที่และพนักงานขับรถ</a:t>
-            </a:r>
-          </a:p>
-          <a:p>
-            <a:pPr>
-              <a:spcAft>
-                <a:spcPts val="500"/>
-              </a:spcAft>
-              <a:defRPr sz="1200">
-                <a:solidFill>
-                  <a:srgbClr val="14181B"/>
-                </a:solidFill>
-                <a:latin typeface="Segoe UI"/>
-              </a:defRPr>
-            </a:pPr>
-            <a:r>
-              <a:t>• ทดสอบระบบเสร็จสมบูรณ์ และส่งมอบงานสมบูรณ์</a:t>
+              <a:t>พื้นที่ศึกษาธรรมชาติเชิงอนุรักษ์ จุดชมทัศนียภาพ และพื้นที่จัดกิจกรรมสิ่งแวดล้อมศึกษา</a:t>
             </a:r>
           </a:p>
         </p:txBody>
@@ -5691,6 +5402,896 @@
               </a:defRPr>
             </a:pPr>
             <a:r>
+              <a:t>IMPLEMENTATION ROADMAP</a:t>
+            </a:r>
+          </a:p>
+        </p:txBody>
+      </p:sp>
+      <p:sp>
+        <p:nvSpPr>
+          <p:cNvPr id="3" name="TextBox 2"/>
+          <p:cNvSpPr txBox="1"/>
+          <p:nvPr/>
+        </p:nvSpPr>
+        <p:spPr>
+          <a:xfrm>
+            <a:off x="731520" y="658368"/>
+            <a:ext cx="10698480" cy="594360"/>
+          </a:xfrm>
+          <a:prstGeom prst="rect">
+            <a:avLst/>
+          </a:prstGeom>
+          <a:noFill/>
+        </p:spPr>
+        <p:txBody>
+          <a:bodyPr wrap="square" lIns="0" tIns="0" rIns="0" bIns="0">
+            <a:spAutoFit/>
+          </a:bodyPr>
+          <a:lstStyle/>
+          <a:p>
+            <a:pPr>
+              <a:defRPr sz="2600" b="1">
+                <a:solidFill>
+                  <a:srgbClr val="1B4332"/>
+                </a:solidFill>
+                <a:latin typeface="Segoe UI"/>
+              </a:defRPr>
+            </a:pPr>
+            <a:r>
+              <a:t>แผนการดำเนินงานและส่งมอบโครงการ (กรอบเวลา 9 เดือน)</a:t>
+            </a:r>
+          </a:p>
+        </p:txBody>
+      </p:sp>
+      <p:sp>
+        <p:nvSpPr>
+          <p:cNvPr id="4" name="TextBox 3"/>
+          <p:cNvSpPr txBox="1"/>
+          <p:nvPr/>
+        </p:nvSpPr>
+        <p:spPr>
+          <a:xfrm>
+            <a:off x="731520" y="1234440"/>
+            <a:ext cx="10698480" cy="365760"/>
+          </a:xfrm>
+          <a:prstGeom prst="rect">
+            <a:avLst/>
+          </a:prstGeom>
+          <a:noFill/>
+        </p:spPr>
+        <p:txBody>
+          <a:bodyPr wrap="square" lIns="0" tIns="0" rIns="0" bIns="0">
+            <a:spAutoFit/>
+          </a:bodyPr>
+          <a:lstStyle/>
+          <a:p>
+            <a:pPr>
+              <a:defRPr sz="1350">
+                <a:solidFill>
+                  <a:srgbClr val="5A646E"/>
+                </a:solidFill>
+                <a:latin typeface="Segoe UI"/>
+              </a:defRPr>
+            </a:pPr>
+            <a:r>
+              <a:t>การแบ่งระยะการดำเนินงานอย่างเป็นระบบเพื่อการส่งมอบที่ตรงเวลาและมีคุณภาพ</a:t>
+            </a:r>
+          </a:p>
+        </p:txBody>
+      </p:sp>
+      <p:sp>
+        <p:nvSpPr>
+          <p:cNvPr id="5" name="Rounded Rectangle 4"/>
+          <p:cNvSpPr/>
+          <p:nvPr/>
+        </p:nvSpPr>
+        <p:spPr>
+          <a:xfrm>
+            <a:off x="731520" y="1691640"/>
+            <a:ext cx="3328416" cy="4480560"/>
+          </a:xfrm>
+          <a:prstGeom prst="roundRect">
+            <a:avLst/>
+          </a:prstGeom>
+          <a:solidFill>
+            <a:srgbClr val="FFFFFF"/>
+          </a:solidFill>
+          <a:ln w="15240">
+            <a:solidFill>
+              <a:srgbClr val="D2E1DA"/>
+            </a:solidFill>
+          </a:ln>
+        </p:spPr>
+        <p:style>
+          <a:lnRef idx="1">
+            <a:schemeClr val="accent1"/>
+          </a:lnRef>
+          <a:fillRef idx="3">
+            <a:schemeClr val="accent1"/>
+          </a:fillRef>
+          <a:effectRef idx="2">
+            <a:schemeClr val="accent1"/>
+          </a:effectRef>
+          <a:fontRef idx="minor">
+            <a:schemeClr val="lt1"/>
+          </a:fontRef>
+        </p:style>
+        <p:txBody>
+          <a:bodyPr rtlCol="0" anchor="ctr"/>
+          <a:lstStyle/>
+          <a:p>
+            <a:pPr algn="ctr"/>
+          </a:p>
+        </p:txBody>
+      </p:sp>
+      <p:sp>
+        <p:nvSpPr>
+          <p:cNvPr id="6" name="Rectangle 5"/>
+          <p:cNvSpPr/>
+          <p:nvPr/>
+        </p:nvSpPr>
+        <p:spPr>
+          <a:xfrm>
+            <a:off x="731520" y="1691640"/>
+            <a:ext cx="3328416" cy="128016"/>
+          </a:xfrm>
+          <a:prstGeom prst="rect">
+            <a:avLst/>
+          </a:prstGeom>
+          <a:solidFill>
+            <a:srgbClr val="0B2545"/>
+          </a:solidFill>
+          <a:ln>
+            <a:noFill/>
+          </a:ln>
+        </p:spPr>
+        <p:style>
+          <a:lnRef idx="1">
+            <a:schemeClr val="accent1"/>
+          </a:lnRef>
+          <a:fillRef idx="3">
+            <a:schemeClr val="accent1"/>
+          </a:fillRef>
+          <a:effectRef idx="2">
+            <a:schemeClr val="accent1"/>
+          </a:effectRef>
+          <a:fontRef idx="minor">
+            <a:schemeClr val="lt1"/>
+          </a:fontRef>
+        </p:style>
+        <p:txBody>
+          <a:bodyPr rtlCol="0" anchor="ctr"/>
+          <a:lstStyle/>
+          <a:p>
+            <a:pPr algn="ctr"/>
+          </a:p>
+        </p:txBody>
+      </p:sp>
+      <p:sp>
+        <p:nvSpPr>
+          <p:cNvPr id="7" name="TextBox 6"/>
+          <p:cNvSpPr txBox="1"/>
+          <p:nvPr/>
+        </p:nvSpPr>
+        <p:spPr>
+          <a:xfrm>
+            <a:off x="960120" y="1920240"/>
+            <a:ext cx="2871216" cy="4023360"/>
+          </a:xfrm>
+          <a:prstGeom prst="rect">
+            <a:avLst/>
+          </a:prstGeom>
+          <a:noFill/>
+        </p:spPr>
+        <p:txBody>
+          <a:bodyPr wrap="square">
+            <a:spAutoFit/>
+          </a:bodyPr>
+          <a:lstStyle/>
+          <a:p>
+            <a:pPr>
+              <a:spcAft>
+                <a:spcPts val="200"/>
+              </a:spcAft>
+              <a:defRPr sz="1200" b="1">
+                <a:solidFill>
+                  <a:srgbClr val="0B2545"/>
+                </a:solidFill>
+                <a:latin typeface="Segoe UI"/>
+              </a:defRPr>
+            </a:pPr>
+            <a:r>
+              <a:t>ระยะที่ 1 (เดือนที่ 1 - 3)</a:t>
+            </a:r>
+          </a:p>
+          <a:p>
+            <a:pPr>
+              <a:defRPr sz="1700" b="1">
+                <a:solidFill>
+                  <a:srgbClr val="1B4332"/>
+                </a:solidFill>
+                <a:latin typeface="Segoe UI"/>
+              </a:defRPr>
+            </a:pPr>
+            <a:r>
+              <a:t>Core Foundation</a:t>
+            </a:r>
+          </a:p>
+          <a:p>
+            <a:pPr>
+              <a:spcAft>
+                <a:spcPts val="1200"/>
+              </a:spcAft>
+              <a:defRPr sz="1050">
+                <a:solidFill>
+                  <a:srgbClr val="5A646E"/>
+                </a:solidFill>
+                <a:latin typeface="Segoe UI"/>
+              </a:defRPr>
+            </a:pPr>
+            <a:r>
+              <a:t>รากฐานระบบและการชำระเงิน</a:t>
+            </a:r>
+          </a:p>
+          <a:p>
+            <a:pPr>
+              <a:spcAft>
+                <a:spcPts val="500"/>
+              </a:spcAft>
+              <a:defRPr sz="1200">
+                <a:solidFill>
+                  <a:srgbClr val="14181B"/>
+                </a:solidFill>
+                <a:latin typeface="Segoe UI"/>
+              </a:defRPr>
+            </a:pPr>
+            <a:r>
+              <a:t>• วิเคราะห์และออกแบบ DB Schema และ Architecture</a:t>
+            </a:r>
+          </a:p>
+          <a:p>
+            <a:pPr>
+              <a:spcAft>
+                <a:spcPts val="500"/>
+              </a:spcAft>
+              <a:defRPr sz="1200">
+                <a:solidFill>
+                  <a:srgbClr val="14181B"/>
+                </a:solidFill>
+                <a:latin typeface="Segoe UI"/>
+              </a:defRPr>
+            </a:pPr>
+            <a:r>
+              <a:t>• พัฒนาระบบ Backend API (Ticket, Station, Auth)</a:t>
+            </a:r>
+          </a:p>
+          <a:p>
+            <a:pPr>
+              <a:spcAft>
+                <a:spcPts val="500"/>
+              </a:spcAft>
+              <a:defRPr sz="1200">
+                <a:solidFill>
+                  <a:srgbClr val="14181B"/>
+                </a:solidFill>
+                <a:latin typeface="Segoe UI"/>
+              </a:defRPr>
+            </a:pPr>
+            <a:r>
+              <a:t>• พัฒนา Admin Dashboard จัดการข้อมูลสถานี/รถ</a:t>
+            </a:r>
+          </a:p>
+          <a:p>
+            <a:pPr>
+              <a:spcAft>
+                <a:spcPts val="500"/>
+              </a:spcAft>
+              <a:defRPr sz="1200">
+                <a:solidFill>
+                  <a:srgbClr val="14181B"/>
+                </a:solidFill>
+                <a:latin typeface="Segoe UI"/>
+              </a:defRPr>
+            </a:pPr>
+            <a:r>
+              <a:t>• พัฒนาระบบ Kiosk UI จำหน่ายตั๋วหน้าสถานี</a:t>
+            </a:r>
+          </a:p>
+          <a:p>
+            <a:pPr>
+              <a:spcAft>
+                <a:spcPts val="500"/>
+              </a:spcAft>
+              <a:defRPr sz="1200">
+                <a:solidFill>
+                  <a:srgbClr val="14181B"/>
+                </a:solidFill>
+                <a:latin typeface="Segoe UI"/>
+              </a:defRPr>
+            </a:pPr>
+            <a:r>
+              <a:t>• เชื่อมต่อ Payment Gateway (PromptPay/บัตร/เงินสด)</a:t>
+            </a:r>
+          </a:p>
+          <a:p>
+            <a:pPr>
+              <a:spcAft>
+                <a:spcPts val="500"/>
+              </a:spcAft>
+              <a:defRPr sz="1200">
+                <a:solidFill>
+                  <a:srgbClr val="14181B"/>
+                </a:solidFill>
+                <a:latin typeface="Segoe UI"/>
+              </a:defRPr>
+            </a:pPr>
+            <a:r>
+              <a:t>• พัฒนา Driver App บน Tablet สำหรับคนขับรถ</a:t>
+            </a:r>
+          </a:p>
+        </p:txBody>
+      </p:sp>
+      <p:sp>
+        <p:nvSpPr>
+          <p:cNvPr id="8" name="Rounded Rectangle 7"/>
+          <p:cNvSpPr/>
+          <p:nvPr/>
+        </p:nvSpPr>
+        <p:spPr>
+          <a:xfrm>
+            <a:off x="4389120" y="1691640"/>
+            <a:ext cx="3328416" cy="4480560"/>
+          </a:xfrm>
+          <a:prstGeom prst="roundRect">
+            <a:avLst/>
+          </a:prstGeom>
+          <a:solidFill>
+            <a:srgbClr val="FFFFFF"/>
+          </a:solidFill>
+          <a:ln w="15240">
+            <a:solidFill>
+              <a:srgbClr val="D2E1DA"/>
+            </a:solidFill>
+          </a:ln>
+        </p:spPr>
+        <p:style>
+          <a:lnRef idx="1">
+            <a:schemeClr val="accent1"/>
+          </a:lnRef>
+          <a:fillRef idx="3">
+            <a:schemeClr val="accent1"/>
+          </a:fillRef>
+          <a:effectRef idx="2">
+            <a:schemeClr val="accent1"/>
+          </a:effectRef>
+          <a:fontRef idx="minor">
+            <a:schemeClr val="lt1"/>
+          </a:fontRef>
+        </p:style>
+        <p:txBody>
+          <a:bodyPr rtlCol="0" anchor="ctr"/>
+          <a:lstStyle/>
+          <a:p>
+            <a:pPr algn="ctr"/>
+          </a:p>
+        </p:txBody>
+      </p:sp>
+      <p:sp>
+        <p:nvSpPr>
+          <p:cNvPr id="9" name="Rectangle 8"/>
+          <p:cNvSpPr/>
+          <p:nvPr/>
+        </p:nvSpPr>
+        <p:spPr>
+          <a:xfrm>
+            <a:off x="4389120" y="1691640"/>
+            <a:ext cx="3328416" cy="128016"/>
+          </a:xfrm>
+          <a:prstGeom prst="rect">
+            <a:avLst/>
+          </a:prstGeom>
+          <a:solidFill>
+            <a:srgbClr val="2D6A4F"/>
+          </a:solidFill>
+          <a:ln>
+            <a:noFill/>
+          </a:ln>
+        </p:spPr>
+        <p:style>
+          <a:lnRef idx="1">
+            <a:schemeClr val="accent1"/>
+          </a:lnRef>
+          <a:fillRef idx="3">
+            <a:schemeClr val="accent1"/>
+          </a:fillRef>
+          <a:effectRef idx="2">
+            <a:schemeClr val="accent1"/>
+          </a:effectRef>
+          <a:fontRef idx="minor">
+            <a:schemeClr val="lt1"/>
+          </a:fontRef>
+        </p:style>
+        <p:txBody>
+          <a:bodyPr rtlCol="0" anchor="ctr"/>
+          <a:lstStyle/>
+          <a:p>
+            <a:pPr algn="ctr"/>
+          </a:p>
+        </p:txBody>
+      </p:sp>
+      <p:sp>
+        <p:nvSpPr>
+          <p:cNvPr id="10" name="TextBox 9"/>
+          <p:cNvSpPr txBox="1"/>
+          <p:nvPr/>
+        </p:nvSpPr>
+        <p:spPr>
+          <a:xfrm>
+            <a:off x="4617720" y="1920240"/>
+            <a:ext cx="2871216" cy="4023360"/>
+          </a:xfrm>
+          <a:prstGeom prst="rect">
+            <a:avLst/>
+          </a:prstGeom>
+          <a:noFill/>
+        </p:spPr>
+        <p:txBody>
+          <a:bodyPr wrap="square">
+            <a:spAutoFit/>
+          </a:bodyPr>
+          <a:lstStyle/>
+          <a:p>
+            <a:pPr>
+              <a:spcAft>
+                <a:spcPts val="200"/>
+              </a:spcAft>
+              <a:defRPr sz="1200" b="1">
+                <a:solidFill>
+                  <a:srgbClr val="2D6A4F"/>
+                </a:solidFill>
+                <a:latin typeface="Segoe UI"/>
+              </a:defRPr>
+            </a:pPr>
+            <a:r>
+              <a:t>ระยะที่ 2 (เดือนที่ 4 - 6)</a:t>
+            </a:r>
+          </a:p>
+          <a:p>
+            <a:pPr>
+              <a:defRPr sz="1700" b="1">
+                <a:solidFill>
+                  <a:srgbClr val="1B4332"/>
+                </a:solidFill>
+                <a:latin typeface="Segoe UI"/>
+              </a:defRPr>
+            </a:pPr>
+            <a:r>
+              <a:t>Realtime &amp; Mobile</a:t>
+            </a:r>
+          </a:p>
+          <a:p>
+            <a:pPr>
+              <a:spcAft>
+                <a:spcPts val="1200"/>
+              </a:spcAft>
+              <a:defRPr sz="1050">
+                <a:solidFill>
+                  <a:srgbClr val="5A646E"/>
+                </a:solidFill>
+                <a:latin typeface="Segoe UI"/>
+              </a:defRPr>
+            </a:pPr>
+            <a:r>
+              <a:t>ระบบเวลาจริงและแอปพลิเคชัน</a:t>
+            </a:r>
+          </a:p>
+          <a:p>
+            <a:pPr>
+              <a:spcAft>
+                <a:spcPts val="500"/>
+              </a:spcAft>
+              <a:defRPr sz="1200">
+                <a:solidFill>
+                  <a:srgbClr val="14181B"/>
+                </a:solidFill>
+                <a:latin typeface="Segoe UI"/>
+              </a:defRPr>
+            </a:pPr>
+            <a:r>
+              <a:t>• ติดตั้ง WebSocket Server รองรับ Live Tracking</a:t>
+            </a:r>
+          </a:p>
+          <a:p>
+            <a:pPr>
+              <a:spcAft>
+                <a:spcPts val="500"/>
+              </a:spcAft>
+              <a:defRPr sz="1200">
+                <a:solidFill>
+                  <a:srgbClr val="14181B"/>
+                </a:solidFill>
+                <a:latin typeface="Segoe UI"/>
+              </a:defRPr>
+            </a:pPr>
+            <a:r>
+              <a:t>• พัฒนา Mobile App (iOS / Android) สำหรับนักท่องเที่ยว</a:t>
+            </a:r>
+          </a:p>
+          <a:p>
+            <a:pPr>
+              <a:spcAft>
+                <a:spcPts val="500"/>
+              </a:spcAft>
+              <a:defRPr sz="1200">
+                <a:solidFill>
+                  <a:srgbClr val="14181B"/>
+                </a:solidFill>
+                <a:latin typeface="Segoe UI"/>
+              </a:defRPr>
+            </a:pPr>
+            <a:r>
+              <a:t>• พัฒนาระบบ Queue Management &amp; Smart Balancing</a:t>
+            </a:r>
+          </a:p>
+          <a:p>
+            <a:pPr>
+              <a:spcAft>
+                <a:spcPts val="500"/>
+              </a:spcAft>
+              <a:defRPr sz="1200">
+                <a:solidFill>
+                  <a:srgbClr val="14181B"/>
+                </a:solidFill>
+                <a:latin typeface="Segoe UI"/>
+              </a:defRPr>
+            </a:pPr>
+            <a:r>
+              <a:t>• เชื่อมโยง Geofencing และทดสอบเดินรถ Loop 6 สถานี</a:t>
+            </a:r>
+          </a:p>
+          <a:p>
+            <a:pPr>
+              <a:spcAft>
+                <a:spcPts val="500"/>
+              </a:spcAft>
+              <a:defRPr sz="1200">
+                <a:solidFill>
+                  <a:srgbClr val="14181B"/>
+                </a:solidFill>
+                <a:latin typeface="Segoe UI"/>
+              </a:defRPr>
+            </a:pPr>
+            <a:r>
+              <a:t>• ทดสอบระบบ Check-in สแกน QR Code บนรถจริง</a:t>
+            </a:r>
+          </a:p>
+          <a:p>
+            <a:pPr>
+              <a:spcAft>
+                <a:spcPts val="500"/>
+              </a:spcAft>
+              <a:defRPr sz="1200">
+                <a:solidFill>
+                  <a:srgbClr val="14181B"/>
+                </a:solidFill>
+                <a:latin typeface="Segoe UI"/>
+              </a:defRPr>
+            </a:pPr>
+            <a:r>
+              <a:t>• ทดสอบความเสถียรของสัญญาณสื่อสารในพื้นที่สวนฯ</a:t>
+            </a:r>
+          </a:p>
+        </p:txBody>
+      </p:sp>
+      <p:sp>
+        <p:nvSpPr>
+          <p:cNvPr id="11" name="Rounded Rectangle 10"/>
+          <p:cNvSpPr/>
+          <p:nvPr/>
+        </p:nvSpPr>
+        <p:spPr>
+          <a:xfrm>
+            <a:off x="8046720" y="1691640"/>
+            <a:ext cx="3328416" cy="4480560"/>
+          </a:xfrm>
+          <a:prstGeom prst="roundRect">
+            <a:avLst/>
+          </a:prstGeom>
+          <a:solidFill>
+            <a:srgbClr val="FFFFFF"/>
+          </a:solidFill>
+          <a:ln w="15240">
+            <a:solidFill>
+              <a:srgbClr val="D2E1DA"/>
+            </a:solidFill>
+          </a:ln>
+        </p:spPr>
+        <p:style>
+          <a:lnRef idx="1">
+            <a:schemeClr val="accent1"/>
+          </a:lnRef>
+          <a:fillRef idx="3">
+            <a:schemeClr val="accent1"/>
+          </a:fillRef>
+          <a:effectRef idx="2">
+            <a:schemeClr val="accent1"/>
+          </a:effectRef>
+          <a:fontRef idx="minor">
+            <a:schemeClr val="lt1"/>
+          </a:fontRef>
+        </p:style>
+        <p:txBody>
+          <a:bodyPr rtlCol="0" anchor="ctr"/>
+          <a:lstStyle/>
+          <a:p>
+            <a:pPr algn="ctr"/>
+          </a:p>
+        </p:txBody>
+      </p:sp>
+      <p:sp>
+        <p:nvSpPr>
+          <p:cNvPr id="12" name="Rectangle 11"/>
+          <p:cNvSpPr/>
+          <p:nvPr/>
+        </p:nvSpPr>
+        <p:spPr>
+          <a:xfrm>
+            <a:off x="8046720" y="1691640"/>
+            <a:ext cx="3328416" cy="128016"/>
+          </a:xfrm>
+          <a:prstGeom prst="rect">
+            <a:avLst/>
+          </a:prstGeom>
+          <a:solidFill>
+            <a:srgbClr val="1B4332"/>
+          </a:solidFill>
+          <a:ln>
+            <a:noFill/>
+          </a:ln>
+        </p:spPr>
+        <p:style>
+          <a:lnRef idx="1">
+            <a:schemeClr val="accent1"/>
+          </a:lnRef>
+          <a:fillRef idx="3">
+            <a:schemeClr val="accent1"/>
+          </a:fillRef>
+          <a:effectRef idx="2">
+            <a:schemeClr val="accent1"/>
+          </a:effectRef>
+          <a:fontRef idx="minor">
+            <a:schemeClr val="lt1"/>
+          </a:fontRef>
+        </p:style>
+        <p:txBody>
+          <a:bodyPr rtlCol="0" anchor="ctr"/>
+          <a:lstStyle/>
+          <a:p>
+            <a:pPr algn="ctr"/>
+          </a:p>
+        </p:txBody>
+      </p:sp>
+      <p:sp>
+        <p:nvSpPr>
+          <p:cNvPr id="13" name="TextBox 12"/>
+          <p:cNvSpPr txBox="1"/>
+          <p:nvPr/>
+        </p:nvSpPr>
+        <p:spPr>
+          <a:xfrm>
+            <a:off x="8275320" y="1920240"/>
+            <a:ext cx="2871216" cy="4023360"/>
+          </a:xfrm>
+          <a:prstGeom prst="rect">
+            <a:avLst/>
+          </a:prstGeom>
+          <a:noFill/>
+        </p:spPr>
+        <p:txBody>
+          <a:bodyPr wrap="square">
+            <a:spAutoFit/>
+          </a:bodyPr>
+          <a:lstStyle/>
+          <a:p>
+            <a:pPr>
+              <a:spcAft>
+                <a:spcPts val="200"/>
+              </a:spcAft>
+              <a:defRPr sz="1200" b="1">
+                <a:solidFill>
+                  <a:srgbClr val="1B4332"/>
+                </a:solidFill>
+                <a:latin typeface="Segoe UI"/>
+              </a:defRPr>
+            </a:pPr>
+            <a:r>
+              <a:t>ระยะที่ 3 (เดือนที่ 7 - 9)</a:t>
+            </a:r>
+          </a:p>
+          <a:p>
+            <a:pPr>
+              <a:defRPr sz="1700" b="1">
+                <a:solidFill>
+                  <a:srgbClr val="1B4332"/>
+                </a:solidFill>
+                <a:latin typeface="Segoe UI"/>
+              </a:defRPr>
+            </a:pPr>
+            <a:r>
+              <a:t>Advanced Features &amp; Rollout</a:t>
+            </a:r>
+          </a:p>
+          <a:p>
+            <a:pPr>
+              <a:spcAft>
+                <a:spcPts val="1200"/>
+              </a:spcAft>
+              <a:defRPr sz="1050">
+                <a:solidFill>
+                  <a:srgbClr val="5A646E"/>
+                </a:solidFill>
+                <a:latin typeface="Segoe UI"/>
+              </a:defRPr>
+            </a:pPr>
+            <a:r>
+              <a:t>ฟังก์ชันขั้นสูงและการส่งมอบ</a:t>
+            </a:r>
+          </a:p>
+          <a:p>
+            <a:pPr>
+              <a:spcAft>
+                <a:spcPts val="500"/>
+              </a:spcAft>
+              <a:defRPr sz="1200">
+                <a:solidFill>
+                  <a:srgbClr val="14181B"/>
+                </a:solidFill>
+                <a:latin typeface="Segoe UI"/>
+              </a:defRPr>
+            </a:pPr>
+            <a:r>
+              <a:t>• พัฒนาระบบ Push Notification (App / LINE / SMS)</a:t>
+            </a:r>
+          </a:p>
+          <a:p>
+            <a:pPr>
+              <a:spcAft>
+                <a:spcPts val="500"/>
+              </a:spcAft>
+              <a:defRPr sz="1200">
+                <a:solidFill>
+                  <a:srgbClr val="14181B"/>
+                </a:solidFill>
+                <a:latin typeface="Segoe UI"/>
+              </a:defRPr>
+            </a:pPr>
+            <a:r>
+              <a:t>• พัฒนาระบบ Real-time Analytics Dashboard เชิงพื้นที่</a:t>
+            </a:r>
+          </a:p>
+          <a:p>
+            <a:pPr>
+              <a:spcAft>
+                <a:spcPts val="500"/>
+              </a:spcAft>
+              <a:defRPr sz="1200">
+                <a:solidFill>
+                  <a:srgbClr val="14181B"/>
+                </a:solidFill>
+                <a:latin typeface="Segoe UI"/>
+              </a:defRPr>
+            </a:pPr>
+            <a:r>
+              <a:t>• เปิดใช้งานระบบจองตั๋วออนไลน์ล่วงหน้า (Online Booking)</a:t>
+            </a:r>
+          </a:p>
+          <a:p>
+            <a:pPr>
+              <a:spcAft>
+                <a:spcPts val="500"/>
+              </a:spcAft>
+              <a:defRPr sz="1200">
+                <a:solidFill>
+                  <a:srgbClr val="14181B"/>
+                </a:solidFill>
+                <a:latin typeface="Segoe UI"/>
+              </a:defRPr>
+            </a:pPr>
+            <a:r>
+              <a:t>• จัดทำคู่มือการใช้งานระบบสำหรับผู้ใช้ทุกระดับ</a:t>
+            </a:r>
+          </a:p>
+          <a:p>
+            <a:pPr>
+              <a:spcAft>
+                <a:spcPts val="500"/>
+              </a:spcAft>
+              <a:defRPr sz="1200">
+                <a:solidFill>
+                  <a:srgbClr val="14181B"/>
+                </a:solidFill>
+                <a:latin typeface="Segoe UI"/>
+              </a:defRPr>
+            </a:pPr>
+            <a:r>
+              <a:t>• จัดฝึกอบรมเชิงปฏิบัติการแก่เจ้าหน้าที่และพนักงานขับรถ</a:t>
+            </a:r>
+          </a:p>
+          <a:p>
+            <a:pPr>
+              <a:spcAft>
+                <a:spcPts val="500"/>
+              </a:spcAft>
+              <a:defRPr sz="1200">
+                <a:solidFill>
+                  <a:srgbClr val="14181B"/>
+                </a:solidFill>
+                <a:latin typeface="Segoe UI"/>
+              </a:defRPr>
+            </a:pPr>
+            <a:r>
+              <a:t>• ทดสอบระบบเสร็จสมบูรณ์ และส่งมอบงานสมบูรณ์</a:t>
+            </a:r>
+          </a:p>
+        </p:txBody>
+      </p:sp>
+    </p:spTree>
+  </p:cSld>
+  <p:clrMapOvr>
+    <a:masterClrMapping/>
+  </p:clrMapOvr>
+</p:sld>
+</file>
+
+<file path=ppt/slides/slide12.xml><?xml version="1.0" encoding="utf-8"?>
+<p:sld xmlns:a="http://schemas.openxmlformats.org/drawingml/2006/main" xmlns:p="http://schemas.openxmlformats.org/presentationml/2006/main" xmlns:r="http://schemas.openxmlformats.org/officeDocument/2006/relationships">
+  <p:cSld>
+    <p:bg>
+      <p:bgPr>
+        <a:solidFill>
+          <a:srgbClr val="EEF7F2"/>
+        </a:solidFill>
+        <a:effectLst/>
+      </p:bgPr>
+    </p:bg>
+    <p:spTree>
+      <p:nvGrpSpPr>
+        <p:cNvPr id="1" name=""/>
+        <p:cNvGrpSpPr/>
+        <p:nvPr/>
+      </p:nvGrpSpPr>
+      <p:grpSpPr/>
+      <p:sp>
+        <p:nvSpPr>
+          <p:cNvPr id="2" name="TextBox 1"/>
+          <p:cNvSpPr txBox="1"/>
+          <p:nvPr/>
+        </p:nvSpPr>
+        <p:spPr>
+          <a:xfrm>
+            <a:off x="731520" y="365760"/>
+            <a:ext cx="10698480" cy="320040"/>
+          </a:xfrm>
+          <a:prstGeom prst="rect">
+            <a:avLst/>
+          </a:prstGeom>
+          <a:noFill/>
+        </p:spPr>
+        <p:txBody>
+          <a:bodyPr wrap="square" lIns="0" tIns="0" rIns="0" bIns="0">
+            <a:spAutoFit/>
+          </a:bodyPr>
+          <a:lstStyle/>
+          <a:p>
+            <a:pPr>
+              <a:defRPr sz="1200" b="1">
+                <a:solidFill>
+                  <a:srgbClr val="52B788"/>
+                </a:solidFill>
+                <a:latin typeface="Segoe UI"/>
+              </a:defRPr>
+            </a:pPr>
+            <a:r>
               <a:t>EXPECTED IMPACT &amp; VALUE</a:t>
             </a:r>
           </a:p>
@@ -6392,7 +6993,7 @@
 </p:sld>
 </file>
 
-<file path=ppt/slides/slide12.xml><?xml version="1.0" encoding="utf-8"?>
+<file path=ppt/slides/slide13.xml><?xml version="1.0" encoding="utf-8"?>
 <p:sld xmlns:a="http://schemas.openxmlformats.org/drawingml/2006/main" xmlns:p="http://schemas.openxmlformats.org/presentationml/2006/main" xmlns:r="http://schemas.openxmlformats.org/officeDocument/2006/relationships">
   <p:cSld>
     <p:bg>
@@ -7798,7 +8399,7 @@
               </a:defRPr>
             </a:pPr>
             <a:r>
-              <a:t>SYSTEM ARCHITECTURE</a:t>
+              <a:t>PROJECT SCOPE</a:t>
             </a:r>
           </a:p>
         </p:txBody>
@@ -7834,7 +8435,7 @@
               </a:defRPr>
             </a:pPr>
             <a:r>
-              <a:t>สถาปัตยกรรมระบบโดยรวม (4-Tier Architecture)</a:t>
+              <a:t>ขอบเขตโครงการ (Project Scope)</a:t>
             </a:r>
           </a:p>
         </p:txBody>
@@ -7870,7 +8471,7 @@
               </a:defRPr>
             </a:pPr>
             <a:r>
-              <a:t>โครงสร้างการเชื่อมต่อระหว่างระบบส่วนหน้า การประมวลผล IoT และฐานข้อมูล</a:t>
+              <a:t>กรอบการดำเนินงานพัฒนาระบบสารสนเทศและการบริหารจัดการรถนำเที่ยวไฟฟ้าอย่างครบวงจร</a:t>
             </a:r>
           </a:p>
         </p:txBody>
@@ -7884,7 +8485,7 @@
         <p:spPr>
           <a:xfrm>
             <a:off x="731520" y="1691640"/>
-            <a:ext cx="10698480" cy="1051560"/>
+            <a:ext cx="5120640" cy="2423160"/>
           </a:xfrm>
           <a:prstGeom prst="roundRect">
             <a:avLst/>
@@ -7922,57 +8523,14 @@
       </p:sp>
       <p:sp>
         <p:nvSpPr>
-          <p:cNvPr id="6" name="Rectangle 5"/>
-          <p:cNvSpPr/>
-          <p:nvPr/>
-        </p:nvSpPr>
-        <p:spPr>
-          <a:xfrm>
-            <a:off x="731520" y="1691640"/>
-            <a:ext cx="164592" cy="1051560"/>
-          </a:xfrm>
-          <a:prstGeom prst="rect">
-            <a:avLst/>
-          </a:prstGeom>
-          <a:solidFill>
-            <a:srgbClr val="0B2545"/>
-          </a:solidFill>
-          <a:ln>
-            <a:noFill/>
-          </a:ln>
-        </p:spPr>
-        <p:style>
-          <a:lnRef idx="1">
-            <a:schemeClr val="accent1"/>
-          </a:lnRef>
-          <a:fillRef idx="3">
-            <a:schemeClr val="accent1"/>
-          </a:fillRef>
-          <a:effectRef idx="2">
-            <a:schemeClr val="accent1"/>
-          </a:effectRef>
-          <a:fontRef idx="minor">
-            <a:schemeClr val="lt1"/>
-          </a:fontRef>
-        </p:style>
-        <p:txBody>
-          <a:bodyPr rtlCol="0" anchor="ctr"/>
-          <a:lstStyle/>
-          <a:p>
-            <a:pPr algn="ctr"/>
-          </a:p>
-        </p:txBody>
-      </p:sp>
-      <p:sp>
-        <p:nvSpPr>
-          <p:cNvPr id="7" name="TextBox 6"/>
+          <p:cNvPr id="6" name="TextBox 5"/>
           <p:cNvSpPr txBox="1"/>
           <p:nvPr/>
         </p:nvSpPr>
         <p:spPr>
           <a:xfrm>
-            <a:off x="1051560" y="1801368"/>
-            <a:ext cx="10241280" cy="832104"/>
+            <a:off x="960120" y="1828800"/>
+            <a:ext cx="4663440" cy="2148840"/>
           </a:xfrm>
           <a:prstGeom prst="rect">
             <a:avLst/>
@@ -7986,6 +8544,9 @@
           <a:lstStyle/>
           <a:p>
             <a:pPr>
+              <a:spcAft>
+                <a:spcPts val="800"/>
+              </a:spcAft>
               <a:defRPr sz="1500" b="1">
                 <a:solidFill>
                   <a:srgbClr val="0B2545"/>
@@ -7994,15 +8555,31 @@
               </a:defRPr>
             </a:pPr>
             <a:r>
-              <a:t>ระดับที่ 1 : Frontend &amp; Client Channels (ช่องทางการเข้าใช้งาน)</a:t>
-            </a:r>
-          </a:p>
-          <a:p>
-            <a:pPr>
-              <a:spcBef>
-                <a:spcPts val="400"/>
-              </a:spcBef>
-              <a:defRPr sz="1300">
+              <a:t>กรอบงานวิเคราะห์ ออกแบบ และบูรณาการข้อมูล</a:t>
+            </a:r>
+          </a:p>
+          <a:p>
+            <a:pPr>
+              <a:spcAft>
+                <a:spcPts val="200"/>
+              </a:spcAft>
+              <a:defRPr sz="1300" b="1">
+                <a:solidFill>
+                  <a:srgbClr val="1B4332"/>
+                </a:solidFill>
+                <a:latin typeface="Segoe UI"/>
+              </a:defRPr>
+            </a:pPr>
+            <a:r>
+              <a:t>1. วิเคราะห์และออกแบบฐานข้อมูลระบบจัดการรถนำเที่ยว</a:t>
+            </a:r>
+          </a:p>
+          <a:p>
+            <a:pPr>
+              <a:spcAft>
+                <a:spcPts val="800"/>
+              </a:spcAft>
+              <a:defRPr sz="1100">
                 <a:solidFill>
                   <a:srgbClr val="14181B"/>
                 </a:solidFill>
@@ -8010,25 +8587,50 @@
               </a:defRPr>
             </a:pPr>
             <a:r>
-              <a:t>• Web Application (จองออนไลน์ล่วงหน้า)  |  • Mobile App (iOS / Android สำหรับนักท่องเที่ยว)</a:t>
-            </a:r>
-            <a:br/>
-            <a:r>
-              <a:t>• Kiosk Touchscreen (ตู้ซื้อตั๋วอัตโนมัติประจำสถานี)  |  • Driver App (แอปพลิเคชันบน Tablet คนขับ)</a:t>
-            </a:r>
-          </a:p>
-        </p:txBody>
-      </p:sp>
-      <p:sp>
-        <p:nvSpPr>
-          <p:cNvPr id="8" name="Rounded Rectangle 7"/>
+              <a:t>วางโครงสร้างฐานข้อมูล (Schema) และสถาปัตยกรรมสารสนเทศเพื่อรองรับการบริหารจัดการที่มีเสถียรภาพและแม่นยำ</a:t>
+            </a:r>
+          </a:p>
+          <a:p>
+            <a:pPr>
+              <a:spcAft>
+                <a:spcPts val="200"/>
+              </a:spcAft>
+              <a:defRPr sz="1300" b="1">
+                <a:solidFill>
+                  <a:srgbClr val="1B4332"/>
+                </a:solidFill>
+                <a:latin typeface="Segoe UI"/>
+              </a:defRPr>
+            </a:pPr>
+            <a:r>
+              <a:t>2. ศึกษาและพัฒนารูปแบบการเชื่อมโยงและบูรณาการข้อมูล</a:t>
+            </a:r>
+          </a:p>
+          <a:p>
+            <a:pPr>
+              <a:defRPr sz="1100">
+                <a:solidFill>
+                  <a:srgbClr val="14181B"/>
+                </a:solidFill>
+                <a:latin typeface="Segoe UI"/>
+              </a:defRPr>
+            </a:pPr>
+            <a:r>
+              <a:t>บูรณาการข้อมูลการท่องเที่ยวภายในสวนพฤกษศาสตร์สมเด็จพระนางเจ้าสิริกิติ์ และหน่วยงานอื่นที่เกี่ยวข้อง</a:t>
+            </a:r>
+          </a:p>
+        </p:txBody>
+      </p:sp>
+      <p:sp>
+        <p:nvSpPr>
+          <p:cNvPr id="7" name="Rounded Rectangle 6"/>
           <p:cNvSpPr/>
           <p:nvPr/>
         </p:nvSpPr>
         <p:spPr>
           <a:xfrm>
-            <a:off x="731520" y="2852928"/>
-            <a:ext cx="10698480" cy="1051560"/>
+            <a:off x="731520" y="4251960"/>
+            <a:ext cx="5120640" cy="1920240"/>
           </a:xfrm>
           <a:prstGeom prst="roundRect">
             <a:avLst/>
@@ -8066,57 +8668,14 @@
       </p:sp>
       <p:sp>
         <p:nvSpPr>
-          <p:cNvPr id="9" name="Rectangle 8"/>
-          <p:cNvSpPr/>
-          <p:nvPr/>
-        </p:nvSpPr>
-        <p:spPr>
-          <a:xfrm>
-            <a:off x="731520" y="2852928"/>
-            <a:ext cx="164592" cy="1051560"/>
-          </a:xfrm>
-          <a:prstGeom prst="rect">
-            <a:avLst/>
-          </a:prstGeom>
-          <a:solidFill>
-            <a:srgbClr val="2D6A4F"/>
-          </a:solidFill>
-          <a:ln>
-            <a:noFill/>
-          </a:ln>
-        </p:spPr>
-        <p:style>
-          <a:lnRef idx="1">
-            <a:schemeClr val="accent1"/>
-          </a:lnRef>
-          <a:fillRef idx="3">
-            <a:schemeClr val="accent1"/>
-          </a:fillRef>
-          <a:effectRef idx="2">
-            <a:schemeClr val="accent1"/>
-          </a:effectRef>
-          <a:fontRef idx="minor">
-            <a:schemeClr val="lt1"/>
-          </a:fontRef>
-        </p:style>
-        <p:txBody>
-          <a:bodyPr rtlCol="0" anchor="ctr"/>
-          <a:lstStyle/>
-          <a:p>
-            <a:pPr algn="ctr"/>
-          </a:p>
-        </p:txBody>
-      </p:sp>
-      <p:sp>
-        <p:nvSpPr>
-          <p:cNvPr id="10" name="TextBox 9"/>
+          <p:cNvPr id="8" name="TextBox 7"/>
           <p:cNvSpPr txBox="1"/>
           <p:nvPr/>
         </p:nvSpPr>
         <p:spPr>
           <a:xfrm>
-            <a:off x="1051560" y="2962656"/>
-            <a:ext cx="10241280" cy="832104"/>
+            <a:off x="960120" y="4389120"/>
+            <a:ext cx="4663440" cy="1645920"/>
           </a:xfrm>
           <a:prstGeom prst="rect">
             <a:avLst/>
@@ -8130,7 +8689,10 @@
           <a:lstStyle/>
           <a:p>
             <a:pPr>
-              <a:defRPr sz="1500" b="1">
+              <a:spcAft>
+                <a:spcPts val="600"/>
+              </a:spcAft>
+              <a:defRPr sz="1400" b="1">
                 <a:solidFill>
                   <a:srgbClr val="2D6A4F"/>
                 </a:solidFill>
@@ -8138,15 +8700,28 @@
               </a:defRPr>
             </a:pPr>
             <a:r>
-              <a:t>ระดับที่ 2 : API Gateway &amp; Backend Microservices (ระบบประมวลผลหลัก)</a:t>
-            </a:r>
-          </a:p>
-          <a:p>
-            <a:pPr>
-              <a:spcBef>
-                <a:spcPts val="400"/>
-              </a:spcBef>
-              <a:defRPr sz="1300">
+              <a:t>การฝึกอบรม จัดทำคู่มือ และส่งมอบงาน</a:t>
+            </a:r>
+          </a:p>
+          <a:p>
+            <a:pPr>
+              <a:defRPr sz="1250" b="1">
+                <a:solidFill>
+                  <a:srgbClr val="1B4332"/>
+                </a:solidFill>
+                <a:latin typeface="Segoe UI"/>
+              </a:defRPr>
+            </a:pPr>
+            <a:r>
+              <a:t>4. จัดทำคู่มือการใช้งานระบบและฝึกอบรม</a:t>
+            </a:r>
+          </a:p>
+          <a:p>
+            <a:pPr>
+              <a:spcAft>
+                <a:spcPts val="600"/>
+              </a:spcAft>
+              <a:defRPr sz="1050">
                 <a:solidFill>
                   <a:srgbClr val="14181B"/>
                 </a:solidFill>
@@ -8154,25 +8729,47 @@
               </a:defRPr>
             </a:pPr>
             <a:r>
-              <a:t>• API Gateway : Routing, Authentication &amp; Rate Limiting  |  • Ticket Service : ออกตั๋ว/จอง</a:t>
-            </a:r>
-            <a:br/>
-            <a:r>
-              <a:t>• Bus Tracking Service : ประมวลผลพิกัด/เวลาเดินรถ  |  • Station &amp; Payment Service (จัดการ 6 สถานี &amp; ชำระเงิน)</a:t>
-            </a:r>
-          </a:p>
-        </p:txBody>
-      </p:sp>
-      <p:sp>
-        <p:nvSpPr>
-          <p:cNvPr id="11" name="Rounded Rectangle 10"/>
+              <a:t>จัดทำเอกสารคู่มือครบทุกกลุ่มผู้ใช้ พร้อมจัดฝึกอบรมเชิงปฏิบัติการแก่เจ้าหน้าที่และคนขับรถ</a:t>
+            </a:r>
+          </a:p>
+          <a:p>
+            <a:pPr>
+              <a:defRPr sz="1250" b="1">
+                <a:solidFill>
+                  <a:srgbClr val="1B4332"/>
+                </a:solidFill>
+                <a:latin typeface="Segoe UI"/>
+              </a:defRPr>
+            </a:pPr>
+            <a:r>
+              <a:t>5. ส่งมอบรายงานฉบับสมบูรณ์</a:t>
+            </a:r>
+          </a:p>
+          <a:p>
+            <a:pPr>
+              <a:defRPr sz="1050">
+                <a:solidFill>
+                  <a:srgbClr val="14181B"/>
+                </a:solidFill>
+                <a:latin typeface="Segoe UI"/>
+              </a:defRPr>
+            </a:pPr>
+            <a:r>
+              <a:t>ส่งมอบรายงานฉบับสมบูรณ์พร้อมซอร์สโค้ดและระบบสารสนเทศที่ผ่านการทดสอบมาตรฐาน</a:t>
+            </a:r>
+          </a:p>
+        </p:txBody>
+      </p:sp>
+      <p:sp>
+        <p:nvSpPr>
+          <p:cNvPr id="9" name="Rounded Rectangle 8"/>
           <p:cNvSpPr/>
           <p:nvPr/>
         </p:nvSpPr>
         <p:spPr>
           <a:xfrm>
-            <a:off x="731520" y="4014216"/>
-            <a:ext cx="10698480" cy="1051560"/>
+            <a:off x="6035040" y="1691640"/>
+            <a:ext cx="5394960" cy="4480560"/>
           </a:xfrm>
           <a:prstGeom prst="roundRect">
             <a:avLst/>
@@ -8210,57 +8807,14 @@
       </p:sp>
       <p:sp>
         <p:nvSpPr>
-          <p:cNvPr id="12" name="Rectangle 11"/>
-          <p:cNvSpPr/>
-          <p:nvPr/>
-        </p:nvSpPr>
-        <p:spPr>
-          <a:xfrm>
-            <a:off x="731520" y="4014216"/>
-            <a:ext cx="164592" cy="1051560"/>
-          </a:xfrm>
-          <a:prstGeom prst="rect">
-            <a:avLst/>
-          </a:prstGeom>
-          <a:solidFill>
-            <a:srgbClr val="134074"/>
-          </a:solidFill>
-          <a:ln>
-            <a:noFill/>
-          </a:ln>
-        </p:spPr>
-        <p:style>
-          <a:lnRef idx="1">
-            <a:schemeClr val="accent1"/>
-          </a:lnRef>
-          <a:fillRef idx="3">
-            <a:schemeClr val="accent1"/>
-          </a:fillRef>
-          <a:effectRef idx="2">
-            <a:schemeClr val="accent1"/>
-          </a:effectRef>
-          <a:fontRef idx="minor">
-            <a:schemeClr val="lt1"/>
-          </a:fontRef>
-        </p:style>
-        <p:txBody>
-          <a:bodyPr rtlCol="0" anchor="ctr"/>
-          <a:lstStyle/>
-          <a:p>
-            <a:pPr algn="ctr"/>
-          </a:p>
-        </p:txBody>
-      </p:sp>
-      <p:sp>
-        <p:nvSpPr>
-          <p:cNvPr id="13" name="TextBox 12"/>
+          <p:cNvPr id="10" name="TextBox 9"/>
           <p:cNvSpPr txBox="1"/>
           <p:nvPr/>
         </p:nvSpPr>
         <p:spPr>
           <a:xfrm>
-            <a:off x="1051560" y="4123944"/>
-            <a:ext cx="10241280" cy="832104"/>
+            <a:off x="6263640" y="1828800"/>
+            <a:ext cx="4937760" cy="4206240"/>
           </a:xfrm>
           <a:prstGeom prst="rect">
             <a:avLst/>
@@ -8274,7 +8828,26 @@
           <a:lstStyle/>
           <a:p>
             <a:pPr>
-              <a:defRPr sz="1500" b="1">
+              <a:spcAft>
+                <a:spcPts val="200"/>
+              </a:spcAft>
+              <a:defRPr sz="1600" b="1">
+                <a:solidFill>
+                  <a:srgbClr val="1B4332"/>
+                </a:solidFill>
+                <a:latin typeface="Segoe UI"/>
+              </a:defRPr>
+            </a:pPr>
+            <a:r>
+              <a:t>3. พัฒนาแอพพลิเคชันระบบการจัดการรถนำเที่ยว</a:t>
+            </a:r>
+          </a:p>
+          <a:p>
+            <a:pPr>
+              <a:spcAft>
+                <a:spcPts val="800"/>
+              </a:spcAft>
+              <a:defRPr sz="1150" b="1">
                 <a:solidFill>
                   <a:srgbClr val="134074"/>
                 </a:solidFill>
@@ -8282,15 +8855,31 @@
               </a:defRPr>
             </a:pPr>
             <a:r>
-              <a:t>ระดับที่ 3 : Realtime &amp; IoT Layer (ระบบเชื่อมต่อข้อมูลเวลาจริง)</a:t>
-            </a:r>
-          </a:p>
-          <a:p>
-            <a:pPr>
-              <a:spcBef>
-                <a:spcPts val="400"/>
-              </a:spcBef>
-              <a:defRPr sz="1300">
+              <a:t>ประกอบด้วย 6 ระบบปฏิบัติการหลัก (Core System Modules):</a:t>
+            </a:r>
+          </a:p>
+          <a:p>
+            <a:pPr>
+              <a:spcAft>
+                <a:spcPts val="100"/>
+              </a:spcAft>
+              <a:defRPr sz="1150" b="1">
+                <a:solidFill>
+                  <a:srgbClr val="0B2545"/>
+                </a:solidFill>
+                <a:latin typeface="Segoe UI"/>
+              </a:defRPr>
+            </a:pPr>
+            <a:r>
+              <a:t>• 3.1 ระบบจำหน่ายตั๋วอัตโนมัติ Smart e-Ticket</a:t>
+            </a:r>
+          </a:p>
+          <a:p>
+            <a:pPr>
+              <a:spcAft>
+                <a:spcPts val="500"/>
+              </a:spcAft>
+              <a:defRPr sz="1000">
                 <a:solidFill>
                   <a:srgbClr val="14181B"/>
                 </a:solidFill>
@@ -8298,143 +8887,31 @@
               </a:defRPr>
             </a:pPr>
             <a:r>
-              <a:t>• อุปกรณ์ Tablet GPS บนรถ 3 คัน : ส่งพิกัดตำแหน่ง Real-time ทุก 5 วินาที</a:t>
-            </a:r>
-            <a:br/>
-            <a:r>
-              <a:t>• QR Scanner : ตรวจสอบสิทธิ์ตั๋ว Check-in ขึ้นรถทันที  |  • WebSocket Server : กระจายข้อมูลพิกัดและคิวสด</a:t>
-            </a:r>
-          </a:p>
-        </p:txBody>
-      </p:sp>
-      <p:sp>
-        <p:nvSpPr>
-          <p:cNvPr id="14" name="Rounded Rectangle 13"/>
-          <p:cNvSpPr/>
-          <p:nvPr/>
-        </p:nvSpPr>
-        <p:spPr>
-          <a:xfrm>
-            <a:off x="731520" y="5175504"/>
-            <a:ext cx="10698480" cy="1051560"/>
-          </a:xfrm>
-          <a:prstGeom prst="roundRect">
-            <a:avLst/>
-          </a:prstGeom>
-          <a:solidFill>
-            <a:srgbClr val="FFFFFF"/>
-          </a:solidFill>
-          <a:ln w="15240">
-            <a:solidFill>
-              <a:srgbClr val="D2E1DA"/>
-            </a:solidFill>
-          </a:ln>
-        </p:spPr>
-        <p:style>
-          <a:lnRef idx="1">
-            <a:schemeClr val="accent1"/>
-          </a:lnRef>
-          <a:fillRef idx="3">
-            <a:schemeClr val="accent1"/>
-          </a:fillRef>
-          <a:effectRef idx="2">
-            <a:schemeClr val="accent1"/>
-          </a:effectRef>
-          <a:fontRef idx="minor">
-            <a:schemeClr val="lt1"/>
-          </a:fontRef>
-        </p:style>
-        <p:txBody>
-          <a:bodyPr rtlCol="0" anchor="ctr"/>
-          <a:lstStyle/>
-          <a:p>
-            <a:pPr algn="ctr"/>
-          </a:p>
-        </p:txBody>
-      </p:sp>
-      <p:sp>
-        <p:nvSpPr>
-          <p:cNvPr id="15" name="Rectangle 14"/>
-          <p:cNvSpPr/>
-          <p:nvPr/>
-        </p:nvSpPr>
-        <p:spPr>
-          <a:xfrm>
-            <a:off x="731520" y="5175504"/>
-            <a:ext cx="164592" cy="1051560"/>
-          </a:xfrm>
-          <a:prstGeom prst="rect">
-            <a:avLst/>
-          </a:prstGeom>
-          <a:solidFill>
-            <a:srgbClr val="1B4332"/>
-          </a:solidFill>
-          <a:ln>
-            <a:noFill/>
-          </a:ln>
-        </p:spPr>
-        <p:style>
-          <a:lnRef idx="1">
-            <a:schemeClr val="accent1"/>
-          </a:lnRef>
-          <a:fillRef idx="3">
-            <a:schemeClr val="accent1"/>
-          </a:fillRef>
-          <a:effectRef idx="2">
-            <a:schemeClr val="accent1"/>
-          </a:effectRef>
-          <a:fontRef idx="minor">
-            <a:schemeClr val="lt1"/>
-          </a:fontRef>
-        </p:style>
-        <p:txBody>
-          <a:bodyPr rtlCol="0" anchor="ctr"/>
-          <a:lstStyle/>
-          <a:p>
-            <a:pPr algn="ctr"/>
-          </a:p>
-        </p:txBody>
-      </p:sp>
-      <p:sp>
-        <p:nvSpPr>
-          <p:cNvPr id="16" name="TextBox 15"/>
-          <p:cNvSpPr txBox="1"/>
-          <p:nvPr/>
-        </p:nvSpPr>
-        <p:spPr>
-          <a:xfrm>
-            <a:off x="1051560" y="5285232"/>
-            <a:ext cx="10241280" cy="832104"/>
-          </a:xfrm>
-          <a:prstGeom prst="rect">
-            <a:avLst/>
-          </a:prstGeom>
-          <a:noFill/>
-        </p:spPr>
-        <p:txBody>
-          <a:bodyPr wrap="square">
-            <a:spAutoFit/>
-          </a:bodyPr>
-          <a:lstStyle/>
-          <a:p>
-            <a:pPr>
-              <a:defRPr sz="1500" b="1">
-                <a:solidFill>
-                  <a:srgbClr val="1B4332"/>
-                </a:solidFill>
-                <a:latin typeface="Segoe UI"/>
-              </a:defRPr>
-            </a:pPr>
-            <a:r>
-              <a:t>ระดับที่ 4 : Database &amp; Storage Layer (ระบบจัดเก็บข้อมูลความปลอดภัยสูง)</a:t>
-            </a:r>
-          </a:p>
-          <a:p>
-            <a:pPr>
-              <a:spcBef>
-                <a:spcPts val="400"/>
-              </a:spcBef>
-              <a:defRPr sz="1300">
+              <a:t>   บริการจอง/ซื้อตั๋ว One-time QR Code ผ่าน Web, Mobile App และตู้ Kiosk ประจำสถานี</a:t>
+            </a:r>
+          </a:p>
+          <a:p>
+            <a:pPr>
+              <a:spcAft>
+                <a:spcPts val="100"/>
+              </a:spcAft>
+              <a:defRPr sz="1150" b="1">
+                <a:solidFill>
+                  <a:srgbClr val="0B2545"/>
+                </a:solidFill>
+                <a:latin typeface="Segoe UI"/>
+              </a:defRPr>
+            </a:pPr>
+            <a:r>
+              <a:t>• 3.2 ระบบจัดการเส้นทางและตรวจสอบเวลาการเดินรถ Tour Cart Tracking Service</a:t>
+            </a:r>
+          </a:p>
+          <a:p>
+            <a:pPr>
+              <a:spcAft>
+                <a:spcPts val="500"/>
+              </a:spcAft>
+              <a:defRPr sz="1000">
                 <a:solidFill>
                   <a:srgbClr val="14181B"/>
                 </a:solidFill>
@@ -8442,11 +8919,135 @@
               </a:defRPr>
             </a:pPr>
             <a:r>
-              <a:t>• PostgreSQL : ข้อมูลหลัก (ผู้ใช้ ตั๋ว และการเงิน)  |  • Redis : Cache &amp; Queue ความเร็วสูง</a:t>
-            </a:r>
-            <a:br/>
-            <a:r>
-              <a:t>• TimescaleDB : ขยายขีดความสามารถ PostgreSQL สำหรับจัดเก็บพิกัด GPS Time-series ปริมาณมหาศาล</a:t>
+              <a:t>   ติดตามพิกัด GPS รถแบบ Real-time พร้อมคำนวณเวลาถึงสถานี (Dynamic ETA)</a:t>
+            </a:r>
+          </a:p>
+          <a:p>
+            <a:pPr>
+              <a:spcAft>
+                <a:spcPts val="100"/>
+              </a:spcAft>
+              <a:defRPr sz="1150" b="1">
+                <a:solidFill>
+                  <a:srgbClr val="0B2545"/>
+                </a:solidFill>
+                <a:latin typeface="Segoe UI"/>
+              </a:defRPr>
+            </a:pPr>
+            <a:r>
+              <a:t>• 3.3 ระบบตรวจสอบตั๋วและจัดการคิวผู้โดยสาร Queue Management</a:t>
+            </a:r>
+          </a:p>
+          <a:p>
+            <a:pPr>
+              <a:spcAft>
+                <a:spcPts val="500"/>
+              </a:spcAft>
+              <a:defRPr sz="1000">
+                <a:solidFill>
+                  <a:srgbClr val="14181B"/>
+                </a:solidFill>
+                <a:latin typeface="Segoe UI"/>
+              </a:defRPr>
+            </a:pPr>
+            <a:r>
+              <a:t>   สแกนตรวจสิทธิ์ตั๋ว Check-in ผ่านแท็บเล็ตคนขับ และระบบกระจายคิวลดความแออัด</a:t>
+            </a:r>
+          </a:p>
+          <a:p>
+            <a:pPr>
+              <a:spcAft>
+                <a:spcPts val="100"/>
+              </a:spcAft>
+              <a:defRPr sz="1150" b="1">
+                <a:solidFill>
+                  <a:srgbClr val="0B2545"/>
+                </a:solidFill>
+                <a:latin typeface="Segoe UI"/>
+              </a:defRPr>
+            </a:pPr>
+            <a:r>
+              <a:t>• 3.4 ระบบการแจ้งคิวรับบริการ แจ้งเตือนรถใกล้ถึงสถานี Push Notification</a:t>
+            </a:r>
+          </a:p>
+          <a:p>
+            <a:pPr>
+              <a:spcAft>
+                <a:spcPts val="500"/>
+              </a:spcAft>
+              <a:defRPr sz="1000">
+                <a:solidFill>
+                  <a:srgbClr val="14181B"/>
+                </a:solidFill>
+                <a:latin typeface="Segoe UI"/>
+              </a:defRPr>
+            </a:pPr>
+            <a:r>
+              <a:t>   แจ้งเตือนผู้โดยสารล่วงหน้า 3 นาที ผ่าน App และ LINE เมื่อรถใกล้ถึงสถานี</a:t>
+            </a:r>
+          </a:p>
+          <a:p>
+            <a:pPr>
+              <a:spcAft>
+                <a:spcPts val="100"/>
+              </a:spcAft>
+              <a:defRPr sz="1150" b="1">
+                <a:solidFill>
+                  <a:srgbClr val="0B2545"/>
+                </a:solidFill>
+                <a:latin typeface="Segoe UI"/>
+              </a:defRPr>
+            </a:pPr>
+            <a:r>
+              <a:t>• 3.5 ระบบการให้คำแนะนำและบริการจากแหล่งท่องเที่ยว ณ พิกัดภูมิศาสตร์ Touring Recommendation System with Geofences Technology</a:t>
+            </a:r>
+          </a:p>
+          <a:p>
+            <a:pPr>
+              <a:spcAft>
+                <a:spcPts val="500"/>
+              </a:spcAft>
+              <a:defRPr sz="1000">
+                <a:solidFill>
+                  <a:srgbClr val="14181B"/>
+                </a:solidFill>
+                <a:latin typeface="Segoe UI"/>
+              </a:defRPr>
+            </a:pPr>
+            <a:r>
+              <a:t>   แนะนำจุดท่องเที่ยว พันธุ์ไม้เด่น และเสียงบรรยาย Audio Guide อัตโนมัติตามพิกัด</a:t>
+            </a:r>
+          </a:p>
+          <a:p>
+            <a:pPr>
+              <a:spcAft>
+                <a:spcPts val="100"/>
+              </a:spcAft>
+              <a:defRPr sz="1150" b="1">
+                <a:solidFill>
+                  <a:srgbClr val="0B2545"/>
+                </a:solidFill>
+                <a:latin typeface="Segoe UI"/>
+              </a:defRPr>
+            </a:pPr>
+            <a:r>
+              <a:t>• 3.6 ระบบรายงานผลการปฏิบัติงานแบบเวลาจริง Real-time Dashboard and Report Management</a:t>
+            </a:r>
+          </a:p>
+          <a:p>
+            <a:pPr>
+              <a:spcAft>
+                <a:spcPts val="500"/>
+              </a:spcAft>
+              <a:defRPr sz="1000">
+                <a:solidFill>
+                  <a:srgbClr val="14181B"/>
+                </a:solidFill>
+                <a:latin typeface="Segoe UI"/>
+              </a:defRPr>
+            </a:pPr>
+            <a:r>
+              <a:t>   แดชบอร์ดสรุปสถิติผู้โดยสาร ความหนาแน่นของสถานี และรายได้สำหรับผู้บริหาร</a:t>
             </a:r>
           </a:p>
         </p:txBody>
@@ -8508,7 +9109,7 @@
               </a:defRPr>
             </a:pPr>
             <a:r>
-              <a:t>END-TO-END TICKETING PROCESS</a:t>
+              <a:t>SYSTEM ARCHITECTURE</a:t>
             </a:r>
           </a:p>
         </p:txBody>
@@ -8544,7 +9145,7 @@
               </a:defRPr>
             </a:pPr>
             <a:r>
-              <a:t>e-Ticket Flow — กระบวนการตั้งแต่เลือกซื้อจนขึ้นรถ</a:t>
+              <a:t>สถาปัตยกรรมระบบโดยรวม (4-Tier Architecture)</a:t>
             </a:r>
           </a:p>
         </p:txBody>
@@ -8580,7 +9181,7 @@
               </a:defRPr>
             </a:pPr>
             <a:r>
-              <a:t>ลำดับขั้นตอนการทำงาน 5 ขั้นตอน พร้อมระบบความปลอดภัยป้องกันการใช้ตั๋วซ้ำ</a:t>
+              <a:t>โครงสร้างการเชื่อมต่อระหว่างระบบส่วนหน้า การประมวลผล IoT และฐานข้อมูล</a:t>
             </a:r>
           </a:p>
         </p:txBody>
@@ -8594,7 +9195,7 @@
         <p:spPr>
           <a:xfrm>
             <a:off x="731520" y="1691640"/>
-            <a:ext cx="2029968" cy="3291840"/>
+            <a:ext cx="10698480" cy="1051560"/>
           </a:xfrm>
           <a:prstGeom prst="roundRect">
             <a:avLst/>
@@ -8632,14 +9233,57 @@
       </p:sp>
       <p:sp>
         <p:nvSpPr>
-          <p:cNvPr id="6" name="TextBox 5"/>
+          <p:cNvPr id="6" name="Rectangle 5"/>
+          <p:cNvSpPr/>
+          <p:nvPr/>
+        </p:nvSpPr>
+        <p:spPr>
+          <a:xfrm>
+            <a:off x="731520" y="1691640"/>
+            <a:ext cx="164592" cy="1051560"/>
+          </a:xfrm>
+          <a:prstGeom prst="rect">
+            <a:avLst/>
+          </a:prstGeom>
+          <a:solidFill>
+            <a:srgbClr val="0B2545"/>
+          </a:solidFill>
+          <a:ln>
+            <a:noFill/>
+          </a:ln>
+        </p:spPr>
+        <p:style>
+          <a:lnRef idx="1">
+            <a:schemeClr val="accent1"/>
+          </a:lnRef>
+          <a:fillRef idx="3">
+            <a:schemeClr val="accent1"/>
+          </a:fillRef>
+          <a:effectRef idx="2">
+            <a:schemeClr val="accent1"/>
+          </a:effectRef>
+          <a:fontRef idx="minor">
+            <a:schemeClr val="lt1"/>
+          </a:fontRef>
+        </p:style>
+        <p:txBody>
+          <a:bodyPr rtlCol="0" anchor="ctr"/>
+          <a:lstStyle/>
+          <a:p>
+            <a:pPr algn="ctr"/>
+          </a:p>
+        </p:txBody>
+      </p:sp>
+      <p:sp>
+        <p:nvSpPr>
+          <p:cNvPr id="7" name="TextBox 6"/>
           <p:cNvSpPr txBox="1"/>
           <p:nvPr/>
         </p:nvSpPr>
         <p:spPr>
           <a:xfrm>
-            <a:off x="868680" y="1856232"/>
-            <a:ext cx="1755648" cy="2962656"/>
+            <a:off x="1051560" y="1801368"/>
+            <a:ext cx="10241280" cy="832104"/>
           </a:xfrm>
           <a:prstGeom prst="rect">
             <a:avLst/>
@@ -8653,55 +9297,23 @@
           <a:lstStyle/>
           <a:p>
             <a:pPr>
-              <a:spcAft>
-                <a:spcPts val="200"/>
-              </a:spcAft>
-              <a:defRPr sz="1200" b="1">
-                <a:solidFill>
-                  <a:srgbClr val="52B788"/>
-                </a:solidFill>
-                <a:latin typeface="Segoe UI"/>
-              </a:defRPr>
-            </a:pPr>
-            <a:r>
-              <a:t>ขั้นตอนที่ 1</a:t>
-            </a:r>
-          </a:p>
-          <a:p>
-            <a:pPr>
               <a:defRPr sz="1500" b="1">
                 <a:solidFill>
-                  <a:srgbClr val="1B4332"/>
-                </a:solidFill>
-                <a:latin typeface="Segoe UI"/>
-              </a:defRPr>
-            </a:pPr>
-            <a:r>
-              <a:t>เลือกและซื้อตั๋ว</a:t>
-            </a:r>
-          </a:p>
-          <a:p>
-            <a:pPr>
-              <a:spcAft>
-                <a:spcPts val="1000"/>
-              </a:spcAft>
-              <a:defRPr sz="1000">
-                <a:solidFill>
-                  <a:srgbClr val="5A646E"/>
-                </a:solidFill>
-                <a:latin typeface="Segoe UI"/>
-              </a:defRPr>
-            </a:pPr>
-            <a:r>
-              <a:t>Ticket Selection</a:t>
-            </a:r>
-          </a:p>
-          <a:p>
-            <a:pPr>
-              <a:spcAft>
-                <a:spcPts val="500"/>
-              </a:spcAft>
-              <a:defRPr sz="1200">
+                  <a:srgbClr val="0B2545"/>
+                </a:solidFill>
+                <a:latin typeface="Segoe UI"/>
+              </a:defRPr>
+            </a:pPr>
+            <a:r>
+              <a:t>ระดับที่ 1 : Frontend &amp; Client Channels (ช่องทางการเข้าใช้งาน)</a:t>
+            </a:r>
+          </a:p>
+          <a:p>
+            <a:pPr>
+              <a:spcBef>
+                <a:spcPts val="400"/>
+              </a:spcBef>
+              <a:defRPr sz="1300">
                 <a:solidFill>
                   <a:srgbClr val="14181B"/>
                 </a:solidFill>
@@ -8709,53 +9321,25 @@
               </a:defRPr>
             </a:pPr>
             <a:r>
-              <a:t>• Mobile App : จองออนไลน์ล่วงหน้า</a:t>
-            </a:r>
-          </a:p>
-          <a:p>
-            <a:pPr>
-              <a:spcAft>
-                <a:spcPts val="500"/>
-              </a:spcAft>
-              <a:defRPr sz="1200">
-                <a:solidFill>
-                  <a:srgbClr val="14181B"/>
-                </a:solidFill>
-                <a:latin typeface="Segoe UI"/>
-              </a:defRPr>
-            </a:pPr>
-            <a:r>
-              <a:t>• Web App : สั่งซื้อผ่านเว็บไซต์</a:t>
-            </a:r>
-          </a:p>
-          <a:p>
-            <a:pPr>
-              <a:spcAft>
-                <a:spcPts val="500"/>
-              </a:spcAft>
-              <a:defRPr sz="1200">
-                <a:solidFill>
-                  <a:srgbClr val="14181B"/>
-                </a:solidFill>
-                <a:latin typeface="Segoe UI"/>
-              </a:defRPr>
-            </a:pPr>
-            <a:r>
-              <a:t>• Kiosk : ซื้อตั๋วด้วยตนเองที่สถานี</a:t>
-            </a:r>
-          </a:p>
-        </p:txBody>
-      </p:sp>
-      <p:sp>
-        <p:nvSpPr>
-          <p:cNvPr id="7" name="Rounded Rectangle 6"/>
+              <a:t>• Web Application (จองออนไลน์ล่วงหน้า)  |  • Mobile App (iOS / Android สำหรับนักท่องเที่ยว)</a:t>
+            </a:r>
+            <a:br/>
+            <a:r>
+              <a:t>• Kiosk Touchscreen (ตู้ซื้อตั๋วอัตโนมัติประจำสถานี)  |  • Driver App (แอปพลิเคชันบน Tablet คนขับ)</a:t>
+            </a:r>
+          </a:p>
+        </p:txBody>
+      </p:sp>
+      <p:sp>
+        <p:nvSpPr>
+          <p:cNvPr id="8" name="Rounded Rectangle 7"/>
           <p:cNvSpPr/>
           <p:nvPr/>
         </p:nvSpPr>
         <p:spPr>
           <a:xfrm>
-            <a:off x="2907791" y="1691640"/>
-            <a:ext cx="2029968" cy="3291840"/>
+            <a:off x="731520" y="2852928"/>
+            <a:ext cx="10698480" cy="1051560"/>
           </a:xfrm>
           <a:prstGeom prst="roundRect">
             <a:avLst/>
@@ -8793,14 +9377,57 @@
       </p:sp>
       <p:sp>
         <p:nvSpPr>
-          <p:cNvPr id="8" name="TextBox 7"/>
+          <p:cNvPr id="9" name="Rectangle 8"/>
+          <p:cNvSpPr/>
+          <p:nvPr/>
+        </p:nvSpPr>
+        <p:spPr>
+          <a:xfrm>
+            <a:off x="731520" y="2852928"/>
+            <a:ext cx="164592" cy="1051560"/>
+          </a:xfrm>
+          <a:prstGeom prst="rect">
+            <a:avLst/>
+          </a:prstGeom>
+          <a:solidFill>
+            <a:srgbClr val="2D6A4F"/>
+          </a:solidFill>
+          <a:ln>
+            <a:noFill/>
+          </a:ln>
+        </p:spPr>
+        <p:style>
+          <a:lnRef idx="1">
+            <a:schemeClr val="accent1"/>
+          </a:lnRef>
+          <a:fillRef idx="3">
+            <a:schemeClr val="accent1"/>
+          </a:fillRef>
+          <a:effectRef idx="2">
+            <a:schemeClr val="accent1"/>
+          </a:effectRef>
+          <a:fontRef idx="minor">
+            <a:schemeClr val="lt1"/>
+          </a:fontRef>
+        </p:style>
+        <p:txBody>
+          <a:bodyPr rtlCol="0" anchor="ctr"/>
+          <a:lstStyle/>
+          <a:p>
+            <a:pPr algn="ctr"/>
+          </a:p>
+        </p:txBody>
+      </p:sp>
+      <p:sp>
+        <p:nvSpPr>
+          <p:cNvPr id="10" name="TextBox 9"/>
           <p:cNvSpPr txBox="1"/>
           <p:nvPr/>
         </p:nvSpPr>
         <p:spPr>
           <a:xfrm>
-            <a:off x="3044951" y="1856232"/>
-            <a:ext cx="1755648" cy="2962656"/>
+            <a:off x="1051560" y="2962656"/>
+            <a:ext cx="10241280" cy="832104"/>
           </a:xfrm>
           <a:prstGeom prst="rect">
             <a:avLst/>
@@ -8814,55 +9441,23 @@
           <a:lstStyle/>
           <a:p>
             <a:pPr>
-              <a:spcAft>
-                <a:spcPts val="200"/>
-              </a:spcAft>
-              <a:defRPr sz="1200" b="1">
-                <a:solidFill>
-                  <a:srgbClr val="52B788"/>
-                </a:solidFill>
-                <a:latin typeface="Segoe UI"/>
-              </a:defRPr>
-            </a:pPr>
-            <a:r>
-              <a:t>ขั้นตอนที่ 2</a:t>
-            </a:r>
-          </a:p>
-          <a:p>
-            <a:pPr>
               <a:defRPr sz="1500" b="1">
                 <a:solidFill>
-                  <a:srgbClr val="1B4332"/>
-                </a:solidFill>
-                <a:latin typeface="Segoe UI"/>
-              </a:defRPr>
-            </a:pPr>
-            <a:r>
-              <a:t>ชำระเงิน</a:t>
-            </a:r>
-          </a:p>
-          <a:p>
-            <a:pPr>
-              <a:spcAft>
-                <a:spcPts val="1000"/>
-              </a:spcAft>
-              <a:defRPr sz="1000">
-                <a:solidFill>
-                  <a:srgbClr val="5A646E"/>
-                </a:solidFill>
-                <a:latin typeface="Segoe UI"/>
-              </a:defRPr>
-            </a:pPr>
-            <a:r>
-              <a:t>Payment Methods</a:t>
-            </a:r>
-          </a:p>
-          <a:p>
-            <a:pPr>
-              <a:spcAft>
-                <a:spcPts val="500"/>
-              </a:spcAft>
-              <a:defRPr sz="1200">
+                  <a:srgbClr val="2D6A4F"/>
+                </a:solidFill>
+                <a:latin typeface="Segoe UI"/>
+              </a:defRPr>
+            </a:pPr>
+            <a:r>
+              <a:t>ระดับที่ 2 : API Gateway &amp; Backend Microservices (ระบบประมวลผลหลัก)</a:t>
+            </a:r>
+          </a:p>
+          <a:p>
+            <a:pPr>
+              <a:spcBef>
+                <a:spcPts val="400"/>
+              </a:spcBef>
+              <a:defRPr sz="1300">
                 <a:solidFill>
                   <a:srgbClr val="14181B"/>
                 </a:solidFill>
@@ -8870,69 +9465,25 @@
               </a:defRPr>
             </a:pPr>
             <a:r>
-              <a:t>• QR PromptPay (มาตรฐาน EMVCo)</a:t>
-            </a:r>
-          </a:p>
-          <a:p>
-            <a:pPr>
-              <a:spcAft>
-                <a:spcPts val="500"/>
-              </a:spcAft>
-              <a:defRPr sz="1200">
-                <a:solidFill>
-                  <a:srgbClr val="14181B"/>
-                </a:solidFill>
-                <a:latin typeface="Segoe UI"/>
-              </a:defRPr>
-            </a:pPr>
-            <a:r>
-              <a:t>• บัตรเครดิต / เดบิต สากล</a:t>
-            </a:r>
-          </a:p>
-          <a:p>
-            <a:pPr>
-              <a:spcAft>
-                <a:spcPts val="500"/>
-              </a:spcAft>
-              <a:defRPr sz="1200">
-                <a:solidFill>
-                  <a:srgbClr val="14181B"/>
-                </a:solidFill>
-                <a:latin typeface="Segoe UI"/>
-              </a:defRPr>
-            </a:pPr>
-            <a:r>
-              <a:t>• Mobile Banking ทุกธนาคาร</a:t>
-            </a:r>
-          </a:p>
-          <a:p>
-            <a:pPr>
-              <a:spcAft>
-                <a:spcPts val="500"/>
-              </a:spcAft>
-              <a:defRPr sz="1200">
-                <a:solidFill>
-                  <a:srgbClr val="14181B"/>
-                </a:solidFill>
-                <a:latin typeface="Segoe UI"/>
-              </a:defRPr>
-            </a:pPr>
-            <a:r>
-              <a:t>• เงินสด (ชำระผ่านตู้ Kiosk)</a:t>
-            </a:r>
-          </a:p>
-        </p:txBody>
-      </p:sp>
-      <p:sp>
-        <p:nvSpPr>
-          <p:cNvPr id="9" name="Rounded Rectangle 8"/>
+              <a:t>• API Gateway : Routing, Authentication &amp; Rate Limiting  |  • Ticket Service : ออกตั๋ว/จอง</a:t>
+            </a:r>
+            <a:br/>
+            <a:r>
+              <a:t>• Bus Tracking Service : ประมวลผลพิกัด/เวลาเดินรถ  |  • Station &amp; Payment Service (จัดการ 6 สถานี &amp; ชำระเงิน)</a:t>
+            </a:r>
+          </a:p>
+        </p:txBody>
+      </p:sp>
+      <p:sp>
+        <p:nvSpPr>
+          <p:cNvPr id="11" name="Rounded Rectangle 10"/>
           <p:cNvSpPr/>
           <p:nvPr/>
         </p:nvSpPr>
         <p:spPr>
           <a:xfrm>
-            <a:off x="5084064" y="1691640"/>
-            <a:ext cx="2029968" cy="3291840"/>
+            <a:off x="731520" y="4014216"/>
+            <a:ext cx="10698480" cy="1051560"/>
           </a:xfrm>
           <a:prstGeom prst="roundRect">
             <a:avLst/>
@@ -8970,14 +9521,57 @@
       </p:sp>
       <p:sp>
         <p:nvSpPr>
-          <p:cNvPr id="10" name="TextBox 9"/>
+          <p:cNvPr id="12" name="Rectangle 11"/>
+          <p:cNvSpPr/>
+          <p:nvPr/>
+        </p:nvSpPr>
+        <p:spPr>
+          <a:xfrm>
+            <a:off x="731520" y="4014216"/>
+            <a:ext cx="164592" cy="1051560"/>
+          </a:xfrm>
+          <a:prstGeom prst="rect">
+            <a:avLst/>
+          </a:prstGeom>
+          <a:solidFill>
+            <a:srgbClr val="134074"/>
+          </a:solidFill>
+          <a:ln>
+            <a:noFill/>
+          </a:ln>
+        </p:spPr>
+        <p:style>
+          <a:lnRef idx="1">
+            <a:schemeClr val="accent1"/>
+          </a:lnRef>
+          <a:fillRef idx="3">
+            <a:schemeClr val="accent1"/>
+          </a:fillRef>
+          <a:effectRef idx="2">
+            <a:schemeClr val="accent1"/>
+          </a:effectRef>
+          <a:fontRef idx="minor">
+            <a:schemeClr val="lt1"/>
+          </a:fontRef>
+        </p:style>
+        <p:txBody>
+          <a:bodyPr rtlCol="0" anchor="ctr"/>
+          <a:lstStyle/>
+          <a:p>
+            <a:pPr algn="ctr"/>
+          </a:p>
+        </p:txBody>
+      </p:sp>
+      <p:sp>
+        <p:nvSpPr>
+          <p:cNvPr id="13" name="TextBox 12"/>
           <p:cNvSpPr txBox="1"/>
           <p:nvPr/>
         </p:nvSpPr>
         <p:spPr>
           <a:xfrm>
-            <a:off x="5221224" y="1856232"/>
-            <a:ext cx="1755648" cy="2962656"/>
+            <a:off x="1051560" y="4123944"/>
+            <a:ext cx="10241280" cy="832104"/>
           </a:xfrm>
           <a:prstGeom prst="rect">
             <a:avLst/>
@@ -8991,55 +9585,23 @@
           <a:lstStyle/>
           <a:p>
             <a:pPr>
-              <a:spcAft>
-                <a:spcPts val="200"/>
-              </a:spcAft>
-              <a:defRPr sz="1200" b="1">
-                <a:solidFill>
-                  <a:srgbClr val="52B788"/>
-                </a:solidFill>
-                <a:latin typeface="Segoe UI"/>
-              </a:defRPr>
-            </a:pPr>
-            <a:r>
-              <a:t>ขั้นตอนที่ 3</a:t>
-            </a:r>
-          </a:p>
-          <a:p>
-            <a:pPr>
               <a:defRPr sz="1500" b="1">
                 <a:solidFill>
-                  <a:srgbClr val="1B4332"/>
-                </a:solidFill>
-                <a:latin typeface="Segoe UI"/>
-              </a:defRPr>
-            </a:pPr>
-            <a:r>
-              <a:t>ระบบออก e-Ticket</a:t>
-            </a:r>
-          </a:p>
-          <a:p>
-            <a:pPr>
-              <a:spcAft>
-                <a:spcPts val="1000"/>
-              </a:spcAft>
-              <a:defRPr sz="1000">
-                <a:solidFill>
-                  <a:srgbClr val="5A646E"/>
-                </a:solidFill>
-                <a:latin typeface="Segoe UI"/>
-              </a:defRPr>
-            </a:pPr>
-            <a:r>
-              <a:t>QR Code Generation</a:t>
-            </a:r>
-          </a:p>
-          <a:p>
-            <a:pPr>
-              <a:spcAft>
-                <a:spcPts val="500"/>
-              </a:spcAft>
-              <a:defRPr sz="1200">
+                  <a:srgbClr val="134074"/>
+                </a:solidFill>
+                <a:latin typeface="Segoe UI"/>
+              </a:defRPr>
+            </a:pPr>
+            <a:r>
+              <a:t>ระดับที่ 3 : Realtime &amp; IoT Layer (ระบบเชื่อมต่อข้อมูลเวลาจริง)</a:t>
+            </a:r>
+          </a:p>
+          <a:p>
+            <a:pPr>
+              <a:spcBef>
+                <a:spcPts val="400"/>
+              </a:spcBef>
+              <a:defRPr sz="1300">
                 <a:solidFill>
                   <a:srgbClr val="14181B"/>
                 </a:solidFill>
@@ -9047,53 +9609,25 @@
               </a:defRPr>
             </a:pPr>
             <a:r>
-              <a:t>• QR Generator : ผูก Ticket ID + เส้นทาง + วันที่</a:t>
-            </a:r>
-          </a:p>
-          <a:p>
-            <a:pPr>
-              <a:spcAft>
-                <a:spcPts val="500"/>
-              </a:spcAft>
-              <a:defRPr sz="1200">
-                <a:solidFill>
-                  <a:srgbClr val="14181B"/>
-                </a:solidFill>
-                <a:latin typeface="Segoe UI"/>
-              </a:defRPr>
-            </a:pPr>
-            <a:r>
-              <a:t>• บันทึก DB : สถานะเริ่มต้น 'ยังไม่ใช้'</a:t>
-            </a:r>
-          </a:p>
-          <a:p>
-            <a:pPr>
-              <a:spcAft>
-                <a:spcPts val="500"/>
-              </a:spcAft>
-              <a:defRPr sz="1200">
-                <a:solidFill>
-                  <a:srgbClr val="14181B"/>
-                </a:solidFill>
-                <a:latin typeface="Segoe UI"/>
-              </a:defRPr>
-            </a:pPr>
-            <a:r>
-              <a:t>• ส่งมอบตั๋ว : ทาง App / Email / SMS</a:t>
-            </a:r>
-          </a:p>
-        </p:txBody>
-      </p:sp>
-      <p:sp>
-        <p:nvSpPr>
-          <p:cNvPr id="11" name="Rounded Rectangle 10"/>
+              <a:t>• อุปกรณ์ Tablet GPS บนรถ 3 คัน : ส่งพิกัดตำแหน่ง Real-time ทุก 5 วินาที</a:t>
+            </a:r>
+            <a:br/>
+            <a:r>
+              <a:t>• QR Scanner : ตรวจสอบสิทธิ์ตั๋ว Check-in ขึ้นรถทันที  |  • WebSocket Server : กระจายข้อมูลพิกัดและคิวสด</a:t>
+            </a:r>
+          </a:p>
+        </p:txBody>
+      </p:sp>
+      <p:sp>
+        <p:nvSpPr>
+          <p:cNvPr id="14" name="Rounded Rectangle 13"/>
           <p:cNvSpPr/>
           <p:nvPr/>
         </p:nvSpPr>
         <p:spPr>
           <a:xfrm>
-            <a:off x="7260336" y="1691640"/>
-            <a:ext cx="2029968" cy="3291840"/>
+            <a:off x="731520" y="5175504"/>
+            <a:ext cx="10698480" cy="1051560"/>
           </a:xfrm>
           <a:prstGeom prst="roundRect">
             <a:avLst/>
@@ -9131,141 +9665,23 @@
       </p:sp>
       <p:sp>
         <p:nvSpPr>
-          <p:cNvPr id="12" name="TextBox 11"/>
-          <p:cNvSpPr txBox="1"/>
-          <p:nvPr/>
-        </p:nvSpPr>
-        <p:spPr>
-          <a:xfrm>
-            <a:off x="7397496" y="1856232"/>
-            <a:ext cx="1755648" cy="2962656"/>
-          </a:xfrm>
-          <a:prstGeom prst="rect">
-            <a:avLst/>
-          </a:prstGeom>
-          <a:noFill/>
-        </p:spPr>
-        <p:txBody>
-          <a:bodyPr wrap="square">
-            <a:spAutoFit/>
-          </a:bodyPr>
-          <a:lstStyle/>
-          <a:p>
-            <a:pPr>
-              <a:spcAft>
-                <a:spcPts val="200"/>
-              </a:spcAft>
-              <a:defRPr sz="1200" b="1">
-                <a:solidFill>
-                  <a:srgbClr val="52B788"/>
-                </a:solidFill>
-                <a:latin typeface="Segoe UI"/>
-              </a:defRPr>
-            </a:pPr>
-            <a:r>
-              <a:t>ขั้นตอนที่ 4</a:t>
-            </a:r>
-          </a:p>
-          <a:p>
-            <a:pPr>
-              <a:defRPr sz="1500" b="1">
-                <a:solidFill>
-                  <a:srgbClr val="1B4332"/>
-                </a:solidFill>
-                <a:latin typeface="Segoe UI"/>
-              </a:defRPr>
-            </a:pPr>
-            <a:r>
-              <a:t>รับและแสดงตั๋ว</a:t>
-            </a:r>
-          </a:p>
-          <a:p>
-            <a:pPr>
-              <a:spcAft>
-                <a:spcPts val="1000"/>
-              </a:spcAft>
-              <a:defRPr sz="1000">
-                <a:solidFill>
-                  <a:srgbClr val="5A646E"/>
-                </a:solidFill>
-                <a:latin typeface="Segoe UI"/>
-              </a:defRPr>
-            </a:pPr>
-            <a:r>
-              <a:t>Passenger Display</a:t>
-            </a:r>
-          </a:p>
-          <a:p>
-            <a:pPr>
-              <a:spcAft>
-                <a:spcPts val="500"/>
-              </a:spcAft>
-              <a:defRPr sz="1200">
-                <a:solidFill>
-                  <a:srgbClr val="14181B"/>
-                </a:solidFill>
-                <a:latin typeface="Segoe UI"/>
-              </a:defRPr>
-            </a:pPr>
-            <a:r>
-              <a:t>• QR บน Mobile App : แสดงหน้าจอบนรถ</a:t>
-            </a:r>
-          </a:p>
-          <a:p>
-            <a:pPr>
-              <a:spcAft>
-                <a:spcPts val="500"/>
-              </a:spcAft>
-              <a:defRPr sz="1200">
-                <a:solidFill>
-                  <a:srgbClr val="14181B"/>
-                </a:solidFill>
-                <a:latin typeface="Segoe UI"/>
-              </a:defRPr>
-            </a:pPr>
-            <a:r>
-              <a:t>• QR ทาง Email / SMS : สำหรับผู้ไม่มีแอป</a:t>
-            </a:r>
-          </a:p>
-          <a:p>
-            <a:pPr>
-              <a:spcAft>
-                <a:spcPts val="500"/>
-              </a:spcAft>
-              <a:defRPr sz="1200">
-                <a:solidFill>
-                  <a:srgbClr val="14181B"/>
-                </a:solidFill>
-                <a:latin typeface="Segoe UI"/>
-              </a:defRPr>
-            </a:pPr>
-            <a:r>
-              <a:t>• พิมพ์ QR (Kiosk) : สลิปกระดาษแทนตั๋ว</a:t>
-            </a:r>
-          </a:p>
-        </p:txBody>
-      </p:sp>
-      <p:sp>
-        <p:nvSpPr>
-          <p:cNvPr id="13" name="Rounded Rectangle 12"/>
+          <p:cNvPr id="15" name="Rectangle 14"/>
           <p:cNvSpPr/>
           <p:nvPr/>
         </p:nvSpPr>
         <p:spPr>
           <a:xfrm>
-            <a:off x="9436608" y="1691640"/>
-            <a:ext cx="2029968" cy="3291840"/>
-          </a:xfrm>
-          <a:prstGeom prst="roundRect">
+            <a:off x="731520" y="5175504"/>
+            <a:ext cx="164592" cy="1051560"/>
+          </a:xfrm>
+          <a:prstGeom prst="rect">
             <a:avLst/>
           </a:prstGeom>
           <a:solidFill>
-            <a:srgbClr val="FFFFFF"/>
+            <a:srgbClr val="1B4332"/>
           </a:solidFill>
-          <a:ln w="15240">
-            <a:solidFill>
-              <a:srgbClr val="D2E1DA"/>
-            </a:solidFill>
+          <a:ln>
+            <a:noFill/>
           </a:ln>
         </p:spPr>
         <p:style>
@@ -9292,14 +9708,14 @@
       </p:sp>
       <p:sp>
         <p:nvSpPr>
-          <p:cNvPr id="14" name="TextBox 13"/>
+          <p:cNvPr id="16" name="TextBox 15"/>
           <p:cNvSpPr txBox="1"/>
           <p:nvPr/>
         </p:nvSpPr>
         <p:spPr>
           <a:xfrm>
-            <a:off x="9573768" y="1856232"/>
-            <a:ext cx="1755648" cy="2962656"/>
+            <a:off x="1051560" y="5285232"/>
+            <a:ext cx="10241280" cy="832104"/>
           </a:xfrm>
           <a:prstGeom prst="rect">
             <a:avLst/>
@@ -9313,22 +9729,6 @@
           <a:lstStyle/>
           <a:p>
             <a:pPr>
-              <a:spcAft>
-                <a:spcPts val="200"/>
-              </a:spcAft>
-              <a:defRPr sz="1200" b="1">
-                <a:solidFill>
-                  <a:srgbClr val="52B788"/>
-                </a:solidFill>
-                <a:latin typeface="Segoe UI"/>
-              </a:defRPr>
-            </a:pPr>
-            <a:r>
-              <a:t>ขั้นตอนที่ 5</a:t>
-            </a:r>
-          </a:p>
-          <a:p>
-            <a:pPr>
               <a:defRPr sz="1500" b="1">
                 <a:solidFill>
                   <a:srgbClr val="1B4332"/>
@@ -9337,31 +9737,15 @@
               </a:defRPr>
             </a:pPr>
             <a:r>
-              <a:t>สแกน Check-in บนรถ</a:t>
-            </a:r>
-          </a:p>
-          <a:p>
-            <a:pPr>
-              <a:spcAft>
-                <a:spcPts val="1000"/>
-              </a:spcAft>
-              <a:defRPr sz="1000">
-                <a:solidFill>
-                  <a:srgbClr val="5A646E"/>
-                </a:solidFill>
-                <a:latin typeface="Segoe UI"/>
-              </a:defRPr>
-            </a:pPr>
-            <a:r>
-              <a:t>Driver App Validation</a:t>
-            </a:r>
-          </a:p>
-          <a:p>
-            <a:pPr>
-              <a:spcAft>
-                <a:spcPts val="500"/>
-              </a:spcAft>
-              <a:defRPr sz="1200">
+              <a:t>ระดับที่ 4 : Database &amp; Storage Layer (ระบบจัดเก็บข้อมูลความปลอดภัยสูง)</a:t>
+            </a:r>
+          </a:p>
+          <a:p>
+            <a:pPr>
+              <a:spcBef>
+                <a:spcPts val="400"/>
+              </a:spcBef>
+              <a:defRPr sz="1300">
                 <a:solidFill>
                   <a:srgbClr val="14181B"/>
                 </a:solidFill>
@@ -9369,140 +9753,11 @@
               </a:defRPr>
             </a:pPr>
             <a:r>
-              <a:t>• Driver App : ใช้กล้อง Tablet บนรถสแกน</a:t>
-            </a:r>
-          </a:p>
-          <a:p>
-            <a:pPr>
-              <a:spcAft>
-                <a:spcPts val="500"/>
-              </a:spcAft>
-              <a:defRPr sz="1200">
-                <a:solidFill>
-                  <a:srgbClr val="14181B"/>
-                </a:solidFill>
-                <a:latin typeface="Segoe UI"/>
-              </a:defRPr>
-            </a:pPr>
-            <a:r>
-              <a:t>• Validate + Check-in : อัปเดตสถานะ DB ทันที</a:t>
-            </a:r>
-          </a:p>
-          <a:p>
-            <a:pPr>
-              <a:spcAft>
-                <a:spcPts val="500"/>
-              </a:spcAft>
-              <a:defRPr sz="1200">
-                <a:solidFill>
-                  <a:srgbClr val="14181B"/>
-                </a:solidFill>
-                <a:latin typeface="Segoe UI"/>
-              </a:defRPr>
-            </a:pPr>
-            <a:r>
-              <a:t>• คิวอัปเดต Real-time : ตัดโควตาที่นั่งว่าง</a:t>
-            </a:r>
-          </a:p>
-        </p:txBody>
-      </p:sp>
-      <p:sp>
-        <p:nvSpPr>
-          <p:cNvPr id="15" name="Rounded Rectangle 14"/>
-          <p:cNvSpPr/>
-          <p:nvPr/>
-        </p:nvSpPr>
-        <p:spPr>
-          <a:xfrm>
-            <a:off x="731520" y="5166360"/>
-            <a:ext cx="10698480" cy="1005840"/>
-          </a:xfrm>
-          <a:prstGeom prst="roundRect">
-            <a:avLst/>
-          </a:prstGeom>
-          <a:solidFill>
-            <a:srgbClr val="EEF7F2"/>
-          </a:solidFill>
-          <a:ln w="15240">
-            <a:solidFill>
-              <a:srgbClr val="52B788"/>
-            </a:solidFill>
-          </a:ln>
-        </p:spPr>
-        <p:style>
-          <a:lnRef idx="1">
-            <a:schemeClr val="accent1"/>
-          </a:lnRef>
-          <a:fillRef idx="3">
-            <a:schemeClr val="accent1"/>
-          </a:fillRef>
-          <a:effectRef idx="2">
-            <a:schemeClr val="accent1"/>
-          </a:effectRef>
-          <a:fontRef idx="minor">
-            <a:schemeClr val="lt1"/>
-          </a:fontRef>
-        </p:style>
-        <p:txBody>
-          <a:bodyPr rtlCol="0" anchor="ctr"/>
-          <a:lstStyle/>
-          <a:p>
-            <a:pPr algn="ctr"/>
-          </a:p>
-        </p:txBody>
-      </p:sp>
-      <p:sp>
-        <p:nvSpPr>
-          <p:cNvPr id="16" name="TextBox 15"/>
-          <p:cNvSpPr txBox="1"/>
-          <p:nvPr/>
-        </p:nvSpPr>
-        <p:spPr>
-          <a:xfrm>
-            <a:off x="960120" y="5257800"/>
-            <a:ext cx="10241280" cy="822960"/>
-          </a:xfrm>
-          <a:prstGeom prst="rect">
-            <a:avLst/>
-          </a:prstGeom>
-          <a:noFill/>
-        </p:spPr>
-        <p:txBody>
-          <a:bodyPr wrap="square">
-            <a:spAutoFit/>
-          </a:bodyPr>
-          <a:lstStyle/>
-          <a:p>
-            <a:pPr>
-              <a:spcAft>
-                <a:spcPts val="300"/>
-              </a:spcAft>
-              <a:defRPr sz="1400" b="1">
-                <a:solidFill>
-                  <a:srgbClr val="1B4332"/>
-                </a:solidFill>
-                <a:latin typeface="Segoe UI"/>
-              </a:defRPr>
-            </a:pPr>
-            <a:r>
-              <a:t>ข้อกำหนดความปลอดภัยและการตรวจสอบสิทธิ์ตั๋วโดยสาร (Ticket Integrity)</a:t>
-            </a:r>
-          </a:p>
-          <a:p>
-            <a:pPr>
-              <a:defRPr sz="1250">
-                <a:solidFill>
-                  <a:srgbClr val="14181B"/>
-                </a:solidFill>
-                <a:latin typeface="Segoe UI"/>
-              </a:defRPr>
-            </a:pPr>
-            <a:r>
-              <a:t>• สถานะตั๋ว: เมื่อสแกนแล้วจะเปลี่ยนเป็น 'ใช้แล้ว' ทันที เพื่อป้องกันการนำกลับมาใช้ซ้ำ (One-Time QR Code Policy)</a:t>
+              <a:t>• PostgreSQL : ข้อมูลหลัก (ผู้ใช้ ตั๋ว และการเงิน)  |  • Redis : Cache &amp; Queue ความเร็วสูง</a:t>
             </a:r>
             <a:br/>
             <a:r>
-              <a:t>• รองรับทั้งผู้ใช้ที่มีสมาร์ตโฟนและผู้ใช้ทั่วไปที่พิมพ์ตั๋วกระดาษ QR Code จากตู้ Kiosk หน้าสถานีได้อย่างเท่าเทียม</a:t>
+              <a:t>• TimescaleDB : ขยายขีดความสามารถ PostgreSQL สำหรับจัดเก็บพิกัด GPS Time-series ปริมาณมหาศาล</a:t>
             </a:r>
           </a:p>
         </p:txBody>
@@ -9564,7 +9819,7 @@
               </a:defRPr>
             </a:pPr>
             <a:r>
-              <a:t>FINANCIAL ARCHITECTURE</a:t>
+              <a:t>END-TO-END TICKETING PROCESS</a:t>
             </a:r>
           </a:p>
         </p:txBody>
@@ -9600,7 +9855,7 @@
               </a:defRPr>
             </a:pPr>
             <a:r>
-              <a:t>Payment Gateway Integration Flow — สถาปัตยกรรมระบบชำระเงิน</a:t>
+              <a:t>e-Ticket Flow — กระบวนการตั้งแต่เลือกซื้อจนขึ้นรถ</a:t>
             </a:r>
           </a:p>
         </p:txBody>
@@ -9636,7 +9891,7 @@
               </a:defRPr>
             </a:pPr>
             <a:r>
-              <a:t>กลไกการชำระเงินไร้สัมผัสผ่านระบบคลาวด์ พร้อมการตรวจสอบ Webhook Callback และความปลอดภัย</a:t>
+              <a:t>ลำดับขั้นตอนการทำงาน 5 ขั้นตอน พร้อมระบบความปลอดภัยป้องกันการใช้ตั๋วซ้ำ</a:t>
             </a:r>
           </a:p>
         </p:txBody>
@@ -9650,7 +9905,7 @@
         <p:spPr>
           <a:xfrm>
             <a:off x="731520" y="1691640"/>
-            <a:ext cx="3328416" cy="3246120"/>
+            <a:ext cx="2029968" cy="3291840"/>
           </a:xfrm>
           <a:prstGeom prst="roundRect">
             <a:avLst/>
@@ -9694,8 +9949,8 @@
         </p:nvSpPr>
         <p:spPr>
           <a:xfrm>
-            <a:off x="914400" y="1874519"/>
-            <a:ext cx="2962656" cy="2880360"/>
+            <a:off x="868680" y="1856232"/>
+            <a:ext cx="1755648" cy="2962656"/>
           </a:xfrm>
           <a:prstGeom prst="rect">
             <a:avLst/>
@@ -9710,17 +9965,46 @@
           <a:p>
             <a:pPr>
               <a:spcAft>
+                <a:spcPts val="200"/>
+              </a:spcAft>
+              <a:defRPr sz="1200" b="1">
+                <a:solidFill>
+                  <a:srgbClr val="52B788"/>
+                </a:solidFill>
+                <a:latin typeface="Segoe UI"/>
+              </a:defRPr>
+            </a:pPr>
+            <a:r>
+              <a:t>ขั้นตอนที่ 1</a:t>
+            </a:r>
+          </a:p>
+          <a:p>
+            <a:pPr>
+              <a:defRPr sz="1500" b="1">
+                <a:solidFill>
+                  <a:srgbClr val="1B4332"/>
+                </a:solidFill>
+                <a:latin typeface="Segoe UI"/>
+              </a:defRPr>
+            </a:pPr>
+            <a:r>
+              <a:t>เลือกและซื้อตั๋ว</a:t>
+            </a:r>
+          </a:p>
+          <a:p>
+            <a:pPr>
+              <a:spcAft>
                 <a:spcPts val="1000"/>
               </a:spcAft>
-              <a:defRPr sz="1600" b="1">
-                <a:solidFill>
-                  <a:srgbClr val="0B2545"/>
-                </a:solidFill>
-                <a:latin typeface="Segoe UI"/>
-              </a:defRPr>
-            </a:pPr>
-            <a:r>
-              <a:t>1. การสร้างรายการชำระเงิน</a:t>
+              <a:defRPr sz="1000">
+                <a:solidFill>
+                  <a:srgbClr val="5A646E"/>
+                </a:solidFill>
+                <a:latin typeface="Segoe UI"/>
+              </a:defRPr>
+            </a:pPr>
+            <a:r>
+              <a:t>Ticket Selection</a:t>
             </a:r>
           </a:p>
           <a:p>
@@ -9728,7 +10012,7 @@
               <a:spcAft>
                 <a:spcPts val="500"/>
               </a:spcAft>
-              <a:defRPr sz="1250">
+              <a:defRPr sz="1200">
                 <a:solidFill>
                   <a:srgbClr val="14181B"/>
                 </a:solidFill>
@@ -9736,7 +10020,7 @@
               </a:defRPr>
             </a:pPr>
             <a:r>
-              <a:t>• ผู้โดยสาร : เลือกประเภทตั๋วและกดชำระเงิน</a:t>
+              <a:t>• Mobile App : จองออนไลน์ล่วงหน้า</a:t>
             </a:r>
           </a:p>
           <a:p>
@@ -9744,7 +10028,7 @@
               <a:spcAft>
                 <a:spcPts val="500"/>
               </a:spcAft>
-              <a:defRPr sz="1250">
+              <a:defRPr sz="1200">
                 <a:solidFill>
                   <a:srgbClr val="14181B"/>
                 </a:solidFill>
@@ -9752,7 +10036,7 @@
               </a:defRPr>
             </a:pPr>
             <a:r>
-              <a:t>• Backend ระบบ : สร้าง Order ID และเรียก API ไปยัง Gateway</a:t>
+              <a:t>• Web App : สั่งซื้อผ่านเว็บไซต์</a:t>
             </a:r>
           </a:p>
           <a:p>
@@ -9760,7 +10044,7 @@
               <a:spcAft>
                 <a:spcPts val="500"/>
               </a:spcAft>
-              <a:defRPr sz="1250">
+              <a:defRPr sz="1200">
                 <a:solidFill>
                   <a:srgbClr val="14181B"/>
                 </a:solidFill>
@@ -9768,23 +10052,7 @@
               </a:defRPr>
             </a:pPr>
             <a:r>
-              <a:t>• Payment Gateway (Omise / 2C2P) : สร้าง QR PromptPay ตามมาตรฐาน EMVCo</a:t>
-            </a:r>
-          </a:p>
-          <a:p>
-            <a:pPr>
-              <a:spcAft>
-                <a:spcPts val="500"/>
-              </a:spcAft>
-              <a:defRPr sz="1250">
-                <a:solidFill>
-                  <a:srgbClr val="14181B"/>
-                </a:solidFill>
-                <a:latin typeface="Segoe UI"/>
-              </a:defRPr>
-            </a:pPr>
-            <a:r>
-              <a:t>• รับ QR String : ส่งกลับมาแสดงบนหน้าจอมือถือหรือหน้าจอ Kiosk</a:t>
+              <a:t>• Kiosk : ซื้อตั๋วด้วยตนเองที่สถานี</a:t>
             </a:r>
           </a:p>
         </p:txBody>
@@ -9797,8 +10065,8 @@
         </p:nvSpPr>
         <p:spPr>
           <a:xfrm>
-            <a:off x="4389120" y="1691640"/>
-            <a:ext cx="3328416" cy="3246120"/>
+            <a:off x="2907791" y="1691640"/>
+            <a:ext cx="2029968" cy="3291840"/>
           </a:xfrm>
           <a:prstGeom prst="roundRect">
             <a:avLst/>
@@ -9842,8 +10110,8 @@
         </p:nvSpPr>
         <p:spPr>
           <a:xfrm>
-            <a:off x="4572000" y="1874519"/>
-            <a:ext cx="2962656" cy="2880360"/>
+            <a:off x="3044951" y="1856232"/>
+            <a:ext cx="1755648" cy="2962656"/>
           </a:xfrm>
           <a:prstGeom prst="rect">
             <a:avLst/>
@@ -9858,17 +10126,46 @@
           <a:p>
             <a:pPr>
               <a:spcAft>
+                <a:spcPts val="200"/>
+              </a:spcAft>
+              <a:defRPr sz="1200" b="1">
+                <a:solidFill>
+                  <a:srgbClr val="52B788"/>
+                </a:solidFill>
+                <a:latin typeface="Segoe UI"/>
+              </a:defRPr>
+            </a:pPr>
+            <a:r>
+              <a:t>ขั้นตอนที่ 2</a:t>
+            </a:r>
+          </a:p>
+          <a:p>
+            <a:pPr>
+              <a:defRPr sz="1500" b="1">
+                <a:solidFill>
+                  <a:srgbClr val="1B4332"/>
+                </a:solidFill>
+                <a:latin typeface="Segoe UI"/>
+              </a:defRPr>
+            </a:pPr>
+            <a:r>
+              <a:t>ชำระเงิน</a:t>
+            </a:r>
+          </a:p>
+          <a:p>
+            <a:pPr>
+              <a:spcAft>
                 <a:spcPts val="1000"/>
               </a:spcAft>
-              <a:defRPr sz="1600" b="1">
-                <a:solidFill>
-                  <a:srgbClr val="2D6A4F"/>
-                </a:solidFill>
-                <a:latin typeface="Segoe UI"/>
-              </a:defRPr>
-            </a:pPr>
-            <a:r>
-              <a:t>2. การตัดเงินและยืนยันสิทธิ์</a:t>
+              <a:defRPr sz="1000">
+                <a:solidFill>
+                  <a:srgbClr val="5A646E"/>
+                </a:solidFill>
+                <a:latin typeface="Segoe UI"/>
+              </a:defRPr>
+            </a:pPr>
+            <a:r>
+              <a:t>Payment Methods</a:t>
             </a:r>
           </a:p>
           <a:p>
@@ -9876,7 +10173,7 @@
               <a:spcAft>
                 <a:spcPts val="500"/>
               </a:spcAft>
-              <a:defRPr sz="1250">
+              <a:defRPr sz="1200">
                 <a:solidFill>
                   <a:srgbClr val="14181B"/>
                 </a:solidFill>
@@ -9884,7 +10181,7 @@
               </a:defRPr>
             </a:pPr>
             <a:r>
-              <a:t>• ผู้โดยสารสแกนจ่าย : ผ่าน Mobile Banking ทุกธนาคาร (SCB, KBANK, KTB ฯลฯ)</a:t>
+              <a:t>• QR PromptPay (มาตรฐาน EMVCo)</a:t>
             </a:r>
           </a:p>
           <a:p>
@@ -9892,7 +10189,7 @@
               <a:spcAft>
                 <a:spcPts val="500"/>
               </a:spcAft>
-              <a:defRPr sz="1250">
+              <a:defRPr sz="1200">
                 <a:solidFill>
                   <a:srgbClr val="14181B"/>
                 </a:solidFill>
@@ -9900,7 +10197,7 @@
               </a:defRPr>
             </a:pPr>
             <a:r>
-              <a:t>• ธนาคารยืนยันยอดเงิน : ส่งผลการชำระให้ Payment Gateway</a:t>
+              <a:t>• บัตรเครดิต / เดบิต สากล</a:t>
             </a:r>
           </a:p>
           <a:p>
@@ -9908,7 +10205,7 @@
               <a:spcAft>
                 <a:spcPts val="500"/>
               </a:spcAft>
-              <a:defRPr sz="1250">
+              <a:defRPr sz="1200">
                 <a:solidFill>
                   <a:srgbClr val="14181B"/>
                 </a:solidFill>
@@ -9916,7 +10213,7 @@
               </a:defRPr>
             </a:pPr>
             <a:r>
-              <a:t>• Webhook Callback : Gateway ส่งข้อมูลชำระเงิน POST ไปที่ Backend</a:t>
+              <a:t>• Mobile Banking ทุกธนาคาร</a:t>
             </a:r>
           </a:p>
           <a:p>
@@ -9924,7 +10221,7 @@
               <a:spcAft>
                 <a:spcPts val="500"/>
               </a:spcAft>
-              <a:defRPr sz="1250">
+              <a:defRPr sz="1200">
                 <a:solidFill>
                   <a:srgbClr val="14181B"/>
                 </a:solidFill>
@@ -9932,7 +10229,7 @@
               </a:defRPr>
             </a:pPr>
             <a:r>
-              <a:t>• ตรวจสอบ Signature : ระบบตรวจสอบความถูกต้อง ป้องกัน Webhook ปลอม</a:t>
+              <a:t>• เงินสด (ชำระผ่านตู้ Kiosk)</a:t>
             </a:r>
           </a:p>
         </p:txBody>
@@ -9945,8 +10242,8 @@
         </p:nvSpPr>
         <p:spPr>
           <a:xfrm>
-            <a:off x="8046720" y="1691640"/>
-            <a:ext cx="3328416" cy="3246120"/>
+            <a:off x="5084064" y="1691640"/>
+            <a:ext cx="2029968" cy="3291840"/>
           </a:xfrm>
           <a:prstGeom prst="roundRect">
             <a:avLst/>
@@ -9990,8 +10287,8 @@
         </p:nvSpPr>
         <p:spPr>
           <a:xfrm>
-            <a:off x="8229600" y="1874519"/>
-            <a:ext cx="2962656" cy="2880360"/>
+            <a:off x="5221224" y="1856232"/>
+            <a:ext cx="1755648" cy="2962656"/>
           </a:xfrm>
           <a:prstGeom prst="rect">
             <a:avLst/>
@@ -10006,17 +10303,46 @@
           <a:p>
             <a:pPr>
               <a:spcAft>
+                <a:spcPts val="200"/>
+              </a:spcAft>
+              <a:defRPr sz="1200" b="1">
+                <a:solidFill>
+                  <a:srgbClr val="52B788"/>
+                </a:solidFill>
+                <a:latin typeface="Segoe UI"/>
+              </a:defRPr>
+            </a:pPr>
+            <a:r>
+              <a:t>ขั้นตอนที่ 3</a:t>
+            </a:r>
+          </a:p>
+          <a:p>
+            <a:pPr>
+              <a:defRPr sz="1500" b="1">
+                <a:solidFill>
+                  <a:srgbClr val="1B4332"/>
+                </a:solidFill>
+                <a:latin typeface="Segoe UI"/>
+              </a:defRPr>
+            </a:pPr>
+            <a:r>
+              <a:t>ระบบออก e-Ticket</a:t>
+            </a:r>
+          </a:p>
+          <a:p>
+            <a:pPr>
+              <a:spcAft>
                 <a:spcPts val="1000"/>
               </a:spcAft>
-              <a:defRPr sz="1600" b="1">
-                <a:solidFill>
-                  <a:srgbClr val="1B4332"/>
-                </a:solidFill>
-                <a:latin typeface="Segoe UI"/>
-              </a:defRPr>
-            </a:pPr>
-            <a:r>
-              <a:t>3. การออกตั๋วและแจ้งเตือน</a:t>
+              <a:defRPr sz="1000">
+                <a:solidFill>
+                  <a:srgbClr val="5A646E"/>
+                </a:solidFill>
+                <a:latin typeface="Segoe UI"/>
+              </a:defRPr>
+            </a:pPr>
+            <a:r>
+              <a:t>QR Code Generation</a:t>
             </a:r>
           </a:p>
           <a:p>
@@ -10024,7 +10350,7 @@
               <a:spcAft>
                 <a:spcPts val="500"/>
               </a:spcAft>
-              <a:defRPr sz="1250">
+              <a:defRPr sz="1200">
                 <a:solidFill>
                   <a:srgbClr val="14181B"/>
                 </a:solidFill>
@@ -10032,7 +10358,7 @@
               </a:defRPr>
             </a:pPr>
             <a:r>
-              <a:t>• อัปเดต Order : ปรับสถานะเป็น 'ชำระเงินเรียบร้อยแล้ว'</a:t>
+              <a:t>• QR Generator : ผูก Ticket ID + เส้นทาง + วันที่</a:t>
             </a:r>
           </a:p>
           <a:p>
@@ -10040,7 +10366,7 @@
               <a:spcAft>
                 <a:spcPts val="500"/>
               </a:spcAft>
-              <a:defRPr sz="1250">
+              <a:defRPr sz="1200">
                 <a:solidFill>
                   <a:srgbClr val="14181B"/>
                 </a:solidFill>
@@ -10048,7 +10374,7 @@
               </a:defRPr>
             </a:pPr>
             <a:r>
-              <a:t>• ออก e-Ticket QR Code : ส่งเข้าสู่มือถือของผู้โดยสารทันที</a:t>
+              <a:t>• บันทึก DB : สถานะเริ่มต้น 'ยังไม่ใช้'</a:t>
             </a:r>
           </a:p>
           <a:p>
@@ -10056,7 +10382,7 @@
               <a:spcAft>
                 <a:spcPts val="500"/>
               </a:spcAft>
-              <a:defRPr sz="1250">
+              <a:defRPr sz="1200">
                 <a:solidFill>
                   <a:srgbClr val="14181B"/>
                 </a:solidFill>
@@ -10064,23 +10390,7 @@
               </a:defRPr>
             </a:pPr>
             <a:r>
-              <a:t>• Push Notification : แจ้งเตือนยืนยันการชำระเงินสำเร็จ</a:t>
-            </a:r>
-          </a:p>
-          <a:p>
-            <a:pPr>
-              <a:spcAft>
-                <a:spcPts val="500"/>
-              </a:spcAft>
-              <a:defRPr sz="1250">
-                <a:solidFill>
-                  <a:srgbClr val="14181B"/>
-                </a:solidFill>
-                <a:latin typeface="Segoe UI"/>
-              </a:defRPr>
-            </a:pPr>
-            <a:r>
-              <a:t>• เตรียมพร้อม Check-in : นำไปสแกนขึ้นรถกับคนขับได้ทันที</a:t>
+              <a:t>• ส่งมอบตั๋ว : ทาง App / Email / SMS</a:t>
             </a:r>
           </a:p>
         </p:txBody>
@@ -10093,18 +10403,18 @@
         </p:nvSpPr>
         <p:spPr>
           <a:xfrm>
-            <a:off x="731520" y="5120640"/>
-            <a:ext cx="10698480" cy="1097280"/>
+            <a:off x="7260336" y="1691640"/>
+            <a:ext cx="2029968" cy="3291840"/>
           </a:xfrm>
           <a:prstGeom prst="roundRect">
             <a:avLst/>
           </a:prstGeom>
           <a:solidFill>
-            <a:srgbClr val="FEF2F2"/>
+            <a:srgbClr val="FFFFFF"/>
           </a:solidFill>
           <a:ln w="15240">
             <a:solidFill>
-              <a:srgbClr val="EF4444"/>
+              <a:srgbClr val="D2E1DA"/>
             </a:solidFill>
           </a:ln>
         </p:spPr>
@@ -10138,8 +10448,8 @@
         </p:nvSpPr>
         <p:spPr>
           <a:xfrm>
-            <a:off x="960120" y="5230368"/>
-            <a:ext cx="10241280" cy="868680"/>
+            <a:off x="7397496" y="1856232"/>
+            <a:ext cx="1755648" cy="2962656"/>
           </a:xfrm>
           <a:prstGeom prst="rect">
             <a:avLst/>
@@ -10154,17 +10464,339 @@
           <a:p>
             <a:pPr>
               <a:spcAft>
+                <a:spcPts val="200"/>
+              </a:spcAft>
+              <a:defRPr sz="1200" b="1">
+                <a:solidFill>
+                  <a:srgbClr val="52B788"/>
+                </a:solidFill>
+                <a:latin typeface="Segoe UI"/>
+              </a:defRPr>
+            </a:pPr>
+            <a:r>
+              <a:t>ขั้นตอนที่ 4</a:t>
+            </a:r>
+          </a:p>
+          <a:p>
+            <a:pPr>
+              <a:defRPr sz="1500" b="1">
+                <a:solidFill>
+                  <a:srgbClr val="1B4332"/>
+                </a:solidFill>
+                <a:latin typeface="Segoe UI"/>
+              </a:defRPr>
+            </a:pPr>
+            <a:r>
+              <a:t>รับและแสดงตั๋ว</a:t>
+            </a:r>
+          </a:p>
+          <a:p>
+            <a:pPr>
+              <a:spcAft>
+                <a:spcPts val="1000"/>
+              </a:spcAft>
+              <a:defRPr sz="1000">
+                <a:solidFill>
+                  <a:srgbClr val="5A646E"/>
+                </a:solidFill>
+                <a:latin typeface="Segoe UI"/>
+              </a:defRPr>
+            </a:pPr>
+            <a:r>
+              <a:t>Passenger Display</a:t>
+            </a:r>
+          </a:p>
+          <a:p>
+            <a:pPr>
+              <a:spcAft>
+                <a:spcPts val="500"/>
+              </a:spcAft>
+              <a:defRPr sz="1200">
+                <a:solidFill>
+                  <a:srgbClr val="14181B"/>
+                </a:solidFill>
+                <a:latin typeface="Segoe UI"/>
+              </a:defRPr>
+            </a:pPr>
+            <a:r>
+              <a:t>• QR บน Mobile App : แสดงหน้าจอบนรถ</a:t>
+            </a:r>
+          </a:p>
+          <a:p>
+            <a:pPr>
+              <a:spcAft>
+                <a:spcPts val="500"/>
+              </a:spcAft>
+              <a:defRPr sz="1200">
+                <a:solidFill>
+                  <a:srgbClr val="14181B"/>
+                </a:solidFill>
+                <a:latin typeface="Segoe UI"/>
+              </a:defRPr>
+            </a:pPr>
+            <a:r>
+              <a:t>• QR ทาง Email / SMS : สำหรับผู้ไม่มีแอป</a:t>
+            </a:r>
+          </a:p>
+          <a:p>
+            <a:pPr>
+              <a:spcAft>
+                <a:spcPts val="500"/>
+              </a:spcAft>
+              <a:defRPr sz="1200">
+                <a:solidFill>
+                  <a:srgbClr val="14181B"/>
+                </a:solidFill>
+                <a:latin typeface="Segoe UI"/>
+              </a:defRPr>
+            </a:pPr>
+            <a:r>
+              <a:t>• พิมพ์ QR (Kiosk) : สลิปกระดาษแทนตั๋ว</a:t>
+            </a:r>
+          </a:p>
+        </p:txBody>
+      </p:sp>
+      <p:sp>
+        <p:nvSpPr>
+          <p:cNvPr id="13" name="Rounded Rectangle 12"/>
+          <p:cNvSpPr/>
+          <p:nvPr/>
+        </p:nvSpPr>
+        <p:spPr>
+          <a:xfrm>
+            <a:off x="9436608" y="1691640"/>
+            <a:ext cx="2029968" cy="3291840"/>
+          </a:xfrm>
+          <a:prstGeom prst="roundRect">
+            <a:avLst/>
+          </a:prstGeom>
+          <a:solidFill>
+            <a:srgbClr val="FFFFFF"/>
+          </a:solidFill>
+          <a:ln w="15240">
+            <a:solidFill>
+              <a:srgbClr val="D2E1DA"/>
+            </a:solidFill>
+          </a:ln>
+        </p:spPr>
+        <p:style>
+          <a:lnRef idx="1">
+            <a:schemeClr val="accent1"/>
+          </a:lnRef>
+          <a:fillRef idx="3">
+            <a:schemeClr val="accent1"/>
+          </a:fillRef>
+          <a:effectRef idx="2">
+            <a:schemeClr val="accent1"/>
+          </a:effectRef>
+          <a:fontRef idx="minor">
+            <a:schemeClr val="lt1"/>
+          </a:fontRef>
+        </p:style>
+        <p:txBody>
+          <a:bodyPr rtlCol="0" anchor="ctr"/>
+          <a:lstStyle/>
+          <a:p>
+            <a:pPr algn="ctr"/>
+          </a:p>
+        </p:txBody>
+      </p:sp>
+      <p:sp>
+        <p:nvSpPr>
+          <p:cNvPr id="14" name="TextBox 13"/>
+          <p:cNvSpPr txBox="1"/>
+          <p:nvPr/>
+        </p:nvSpPr>
+        <p:spPr>
+          <a:xfrm>
+            <a:off x="9573768" y="1856232"/>
+            <a:ext cx="1755648" cy="2962656"/>
+          </a:xfrm>
+          <a:prstGeom prst="rect">
+            <a:avLst/>
+          </a:prstGeom>
+          <a:noFill/>
+        </p:spPr>
+        <p:txBody>
+          <a:bodyPr wrap="square">
+            <a:spAutoFit/>
+          </a:bodyPr>
+          <a:lstStyle/>
+          <a:p>
+            <a:pPr>
+              <a:spcAft>
+                <a:spcPts val="200"/>
+              </a:spcAft>
+              <a:defRPr sz="1200" b="1">
+                <a:solidFill>
+                  <a:srgbClr val="52B788"/>
+                </a:solidFill>
+                <a:latin typeface="Segoe UI"/>
+              </a:defRPr>
+            </a:pPr>
+            <a:r>
+              <a:t>ขั้นตอนที่ 5</a:t>
+            </a:r>
+          </a:p>
+          <a:p>
+            <a:pPr>
+              <a:defRPr sz="1500" b="1">
+                <a:solidFill>
+                  <a:srgbClr val="1B4332"/>
+                </a:solidFill>
+                <a:latin typeface="Segoe UI"/>
+              </a:defRPr>
+            </a:pPr>
+            <a:r>
+              <a:t>สแกน Check-in บนรถ</a:t>
+            </a:r>
+          </a:p>
+          <a:p>
+            <a:pPr>
+              <a:spcAft>
+                <a:spcPts val="1000"/>
+              </a:spcAft>
+              <a:defRPr sz="1000">
+                <a:solidFill>
+                  <a:srgbClr val="5A646E"/>
+                </a:solidFill>
+                <a:latin typeface="Segoe UI"/>
+              </a:defRPr>
+            </a:pPr>
+            <a:r>
+              <a:t>Driver App Validation</a:t>
+            </a:r>
+          </a:p>
+          <a:p>
+            <a:pPr>
+              <a:spcAft>
+                <a:spcPts val="500"/>
+              </a:spcAft>
+              <a:defRPr sz="1200">
+                <a:solidFill>
+                  <a:srgbClr val="14181B"/>
+                </a:solidFill>
+                <a:latin typeface="Segoe UI"/>
+              </a:defRPr>
+            </a:pPr>
+            <a:r>
+              <a:t>• Driver App : ใช้กล้อง Tablet บนรถสแกน</a:t>
+            </a:r>
+          </a:p>
+          <a:p>
+            <a:pPr>
+              <a:spcAft>
+                <a:spcPts val="500"/>
+              </a:spcAft>
+              <a:defRPr sz="1200">
+                <a:solidFill>
+                  <a:srgbClr val="14181B"/>
+                </a:solidFill>
+                <a:latin typeface="Segoe UI"/>
+              </a:defRPr>
+            </a:pPr>
+            <a:r>
+              <a:t>• Validate + Check-in : อัปเดตสถานะ DB ทันที</a:t>
+            </a:r>
+          </a:p>
+          <a:p>
+            <a:pPr>
+              <a:spcAft>
+                <a:spcPts val="500"/>
+              </a:spcAft>
+              <a:defRPr sz="1200">
+                <a:solidFill>
+                  <a:srgbClr val="14181B"/>
+                </a:solidFill>
+                <a:latin typeface="Segoe UI"/>
+              </a:defRPr>
+            </a:pPr>
+            <a:r>
+              <a:t>• คิวอัปเดต Real-time : ตัดโควตาที่นั่งว่าง</a:t>
+            </a:r>
+          </a:p>
+        </p:txBody>
+      </p:sp>
+      <p:sp>
+        <p:nvSpPr>
+          <p:cNvPr id="15" name="Rounded Rectangle 14"/>
+          <p:cNvSpPr/>
+          <p:nvPr/>
+        </p:nvSpPr>
+        <p:spPr>
+          <a:xfrm>
+            <a:off x="731520" y="5166360"/>
+            <a:ext cx="10698480" cy="1005840"/>
+          </a:xfrm>
+          <a:prstGeom prst="roundRect">
+            <a:avLst/>
+          </a:prstGeom>
+          <a:solidFill>
+            <a:srgbClr val="EEF7F2"/>
+          </a:solidFill>
+          <a:ln w="15240">
+            <a:solidFill>
+              <a:srgbClr val="52B788"/>
+            </a:solidFill>
+          </a:ln>
+        </p:spPr>
+        <p:style>
+          <a:lnRef idx="1">
+            <a:schemeClr val="accent1"/>
+          </a:lnRef>
+          <a:fillRef idx="3">
+            <a:schemeClr val="accent1"/>
+          </a:fillRef>
+          <a:effectRef idx="2">
+            <a:schemeClr val="accent1"/>
+          </a:effectRef>
+          <a:fontRef idx="minor">
+            <a:schemeClr val="lt1"/>
+          </a:fontRef>
+        </p:style>
+        <p:txBody>
+          <a:bodyPr rtlCol="0" anchor="ctr"/>
+          <a:lstStyle/>
+          <a:p>
+            <a:pPr algn="ctr"/>
+          </a:p>
+        </p:txBody>
+      </p:sp>
+      <p:sp>
+        <p:nvSpPr>
+          <p:cNvPr id="16" name="TextBox 15"/>
+          <p:cNvSpPr txBox="1"/>
+          <p:nvPr/>
+        </p:nvSpPr>
+        <p:spPr>
+          <a:xfrm>
+            <a:off x="960120" y="5257800"/>
+            <a:ext cx="10241280" cy="822960"/>
+          </a:xfrm>
+          <a:prstGeom prst="rect">
+            <a:avLst/>
+          </a:prstGeom>
+          <a:noFill/>
+        </p:spPr>
+        <p:txBody>
+          <a:bodyPr wrap="square">
+            <a:spAutoFit/>
+          </a:bodyPr>
+          <a:lstStyle/>
+          <a:p>
+            <a:pPr>
+              <a:spcAft>
                 <a:spcPts val="300"/>
               </a:spcAft>
               <a:defRPr sz="1400" b="1">
                 <a:solidFill>
-                  <a:srgbClr val="B91C1C"/>
-                </a:solidFill>
-                <a:latin typeface="Segoe UI"/>
-              </a:defRPr>
-            </a:pPr>
-            <a:r>
-              <a:t>กลไกกรณีการชำระเงินไม่สำเร็จ หรือ หมดเวลา (Auto-Expiry Policy)</a:t>
+                  <a:srgbClr val="1B4332"/>
+                </a:solidFill>
+                <a:latin typeface="Segoe UI"/>
+              </a:defRPr>
+            </a:pPr>
+            <a:r>
+              <a:t>ข้อกำหนดความปลอดภัยและการตรวจสอบสิทธิ์ตั๋วโดยสาร (Ticket Integrity)</a:t>
             </a:r>
           </a:p>
           <a:p>
@@ -10177,11 +10809,11 @@
               </a:defRPr>
             </a:pPr>
             <a:r>
-              <a:t>• ระบบกำหนดเวลาชำระเงินภายใน 10 นาที : หากไม่มีการชำระเงิน ระบบจะยกเลิก Order อัตโนมัติทันที</a:t>
+              <a:t>• สถานะตั๋ว: เมื่อสแกนแล้วจะเปลี่ยนเป็น 'ใช้แล้ว' ทันที เพื่อป้องกันการนำกลับมาใช้ซ้ำ (One-Time QR Code Policy)</a:t>
             </a:r>
             <a:br/>
             <a:r>
-              <a:t>• แจ้งเตือนผู้โดยสาร พร้อมคืนโควตาที่นั่งว่างกลับเข้าสู่ระบบ เพื่อไม่ให้เสียโอกาสแก่ผู้โดยสารท่านอื่น</a:t>
+              <a:t>• รองรับทั้งผู้ใช้ที่มีสมาร์ตโฟนและผู้ใช้ทั่วไปที่พิมพ์ตั๋วกระดาษ QR Code จากตู้ Kiosk หน้าสถานีได้อย่างเท่าเทียม</a:t>
             </a:r>
           </a:p>
         </p:txBody>
@@ -10243,7 +10875,7 @@
               </a:defRPr>
             </a:pPr>
             <a:r>
-              <a:t>FLEET TRACKING &amp; OPERATIONS</a:t>
+              <a:t>FINANCIAL ARCHITECTURE</a:t>
             </a:r>
           </a:p>
         </p:txBody>
@@ -10279,7 +10911,7 @@
               </a:defRPr>
             </a:pPr>
             <a:r>
-              <a:t>ระบบติดตามรถและการเดินรถวนรอบ (Loop 6 สถานี)</a:t>
+              <a:t>Payment Gateway Integration Flow — สถาปัตยกรรมระบบชำระเงิน</a:t>
             </a:r>
           </a:p>
         </p:txBody>
@@ -10315,7 +10947,7 @@
               </a:defRPr>
             </a:pPr>
             <a:r>
-              <a:t>การติดตามพิกัดตำแหน่งผ่านสัญญาณดาวเทียมและการคำนวณเวลาเดินรถแบบ Dynamic ETA</a:t>
+              <a:t>กลไกการชำระเงินไร้สัมผัสผ่านระบบคลาวด์ พร้อมการตรวจสอบ Webhook Callback และความปลอดภัย</a:t>
             </a:r>
           </a:p>
         </p:txBody>
@@ -10329,7 +10961,7 @@
         <p:spPr>
           <a:xfrm>
             <a:off x="731520" y="1691640"/>
-            <a:ext cx="4114800" cy="4480560"/>
+            <a:ext cx="3328416" cy="3246120"/>
           </a:xfrm>
           <a:prstGeom prst="roundRect">
             <a:avLst/>
@@ -10374,7 +11006,7 @@
         <p:spPr>
           <a:xfrm>
             <a:off x="914400" y="1874519"/>
-            <a:ext cx="3749040" cy="4114800"/>
+            <a:ext cx="2962656" cy="2880360"/>
           </a:xfrm>
           <a:prstGeom prst="rect">
             <a:avLst/>
@@ -10389,38 +11021,25 @@
           <a:p>
             <a:pPr>
               <a:spcAft>
-                <a:spcPts val="1200"/>
+                <a:spcPts val="1000"/>
               </a:spcAft>
               <a:defRPr sz="1600" b="1">
                 <a:solidFill>
-                  <a:srgbClr val="1B4332"/>
-                </a:solidFill>
-                <a:latin typeface="Segoe UI"/>
-              </a:defRPr>
-            </a:pPr>
-            <a:r>
-              <a:t>กลไกการทำงานของระบบติดตาม</a:t>
-            </a:r>
-          </a:p>
-          <a:p>
-            <a:pPr>
-              <a:defRPr sz="1300" b="1">
-                <a:solidFill>
-                  <a:srgbClr val="134074"/>
-                </a:solidFill>
-                <a:latin typeface="Segoe UI"/>
-              </a:defRPr>
-            </a:pPr>
-            <a:r>
-              <a:t>• อุปกรณ์ Tablet ประจำรถ 3 คัน</a:t>
-            </a:r>
-          </a:p>
-          <a:p>
-            <a:pPr>
-              <a:spcAft>
-                <a:spcPts val="800"/>
-              </a:spcAft>
-              <a:defRPr sz="1150">
+                  <a:srgbClr val="0B2545"/>
+                </a:solidFill>
+                <a:latin typeface="Segoe UI"/>
+              </a:defRPr>
+            </a:pPr>
+            <a:r>
+              <a:t>1. การสร้างรายการชำระเงิน</a:t>
+            </a:r>
+          </a:p>
+          <a:p>
+            <a:pPr>
+              <a:spcAft>
+                <a:spcPts val="500"/>
+              </a:spcAft>
+              <a:defRPr sz="1250">
                 <a:solidFill>
                   <a:srgbClr val="14181B"/>
                 </a:solidFill>
@@ -10428,28 +11047,15 @@
               </a:defRPr>
             </a:pPr>
             <a:r>
-              <a:t>ส่งพิกัด GPS เข้าสู่ระบบทุกๆ 5 วินาที ผ่านสัญญาณสื่อสารความเร็วสูง</a:t>
-            </a:r>
-          </a:p>
-          <a:p>
-            <a:pPr>
-              <a:defRPr sz="1300" b="1">
-                <a:solidFill>
-                  <a:srgbClr val="134074"/>
-                </a:solidFill>
-                <a:latin typeface="Segoe UI"/>
-              </a:defRPr>
-            </a:pPr>
-            <a:r>
-              <a:t>• ระบบรั้วเสมือน (Geofencing)</a:t>
-            </a:r>
-          </a:p>
-          <a:p>
-            <a:pPr>
-              <a:spcAft>
-                <a:spcPts val="800"/>
-              </a:spcAft>
-              <a:defRPr sz="1150">
+              <a:t>• ผู้โดยสาร : เลือกประเภทตั๋วและกดชำระเงิน</a:t>
+            </a:r>
+          </a:p>
+          <a:p>
+            <a:pPr>
+              <a:spcAft>
+                <a:spcPts val="500"/>
+              </a:spcAft>
+              <a:defRPr sz="1250">
                 <a:solidFill>
                   <a:srgbClr val="14181B"/>
                 </a:solidFill>
@@ -10457,28 +11063,15 @@
               </a:defRPr>
             </a:pPr>
             <a:r>
-              <a:t>ตรวจสอบตำแหน่งยานพาหนะเทียบกับสถานี บันทึกเวลาเข้า-ออกอัตโนมัติ</a:t>
-            </a:r>
-          </a:p>
-          <a:p>
-            <a:pPr>
-              <a:defRPr sz="1300" b="1">
-                <a:solidFill>
-                  <a:srgbClr val="134074"/>
-                </a:solidFill>
-                <a:latin typeface="Segoe UI"/>
-              </a:defRPr>
-            </a:pPr>
-            <a:r>
-              <a:t>• การคำนวณ Dynamic ETA</a:t>
-            </a:r>
-          </a:p>
-          <a:p>
-            <a:pPr>
-              <a:spcAft>
-                <a:spcPts val="800"/>
-              </a:spcAft>
-              <a:defRPr sz="1150">
+              <a:t>• Backend ระบบ : สร้าง Order ID และเรียก API ไปยัง Gateway</a:t>
+            </a:r>
+          </a:p>
+          <a:p>
+            <a:pPr>
+              <a:spcAft>
+                <a:spcPts val="500"/>
+              </a:spcAft>
+              <a:defRPr sz="1250">
                 <a:solidFill>
                   <a:srgbClr val="14181B"/>
                 </a:solidFill>
@@ -10486,28 +11079,15 @@
               </a:defRPr>
             </a:pPr>
             <a:r>
-              <a:t>ประมวลผลความเร็วและระยะทาง เพื่อแจ้งเวลารถถึงแต่ละสถานีแบบแม่นยำ</a:t>
-            </a:r>
-          </a:p>
-          <a:p>
-            <a:pPr>
-              <a:defRPr sz="1300" b="1">
-                <a:solidFill>
-                  <a:srgbClr val="134074"/>
-                </a:solidFill>
-                <a:latin typeface="Segoe UI"/>
-              </a:defRPr>
-            </a:pPr>
-            <a:r>
-              <a:t>• Driver Application</a:t>
-            </a:r>
-          </a:p>
-          <a:p>
-            <a:pPr>
-              <a:spcAft>
-                <a:spcPts val="800"/>
-              </a:spcAft>
-              <a:defRPr sz="1150">
+              <a:t>• Payment Gateway (Omise / 2C2P) : สร้าง QR PromptPay ตามมาตรฐาน EMVCo</a:t>
+            </a:r>
+          </a:p>
+          <a:p>
+            <a:pPr>
+              <a:spcAft>
+                <a:spcPts val="500"/>
+              </a:spcAft>
+              <a:defRPr sz="1250">
                 <a:solidFill>
                   <a:srgbClr val="14181B"/>
                 </a:solidFill>
@@ -10515,7 +11095,7 @@
               </a:defRPr>
             </a:pPr>
             <a:r>
-              <a:t>คนขับตรวจสอบจำนวนที่นั่งว่างและสถิติคิวรอในสถานีถัดไปได้ทันที</a:t>
+              <a:t>• รับ QR String : ส่งกลับมาแสดงบนหน้าจอมือถือหรือหน้าจอ Kiosk</a:t>
             </a:r>
           </a:p>
         </p:txBody>
@@ -10528,8 +11108,8 @@
         </p:nvSpPr>
         <p:spPr>
           <a:xfrm>
-            <a:off x="5029200" y="1691640"/>
-            <a:ext cx="4023360" cy="4480560"/>
+            <a:off x="4389120" y="1691640"/>
+            <a:ext cx="3328416" cy="3246120"/>
           </a:xfrm>
           <a:prstGeom prst="roundRect">
             <a:avLst/>
@@ -10573,8 +11153,8 @@
         </p:nvSpPr>
         <p:spPr>
           <a:xfrm>
-            <a:off x="5212080" y="1874519"/>
-            <a:ext cx="3657600" cy="4114800"/>
+            <a:off x="4572000" y="1874519"/>
+            <a:ext cx="2962656" cy="2880360"/>
           </a:xfrm>
           <a:prstGeom prst="rect">
             <a:avLst/>
@@ -10593,200 +11173,77 @@
               </a:spcAft>
               <a:defRPr sz="1600" b="1">
                 <a:solidFill>
-                  <a:srgbClr val="1B4332"/>
-                </a:solidFill>
-                <a:latin typeface="Segoe UI"/>
-              </a:defRPr>
-            </a:pPr>
-            <a:r>
-              <a:t>การเดินรถวนรอบ 6 สถานี (Loop)</a:t>
-            </a:r>
-          </a:p>
-          <a:p>
-            <a:pPr>
-              <a:defRPr sz="1200" b="1">
-                <a:solidFill>
-                  <a:srgbClr val="1B4332"/>
-                </a:solidFill>
-                <a:latin typeface="Segoe UI"/>
-              </a:defRPr>
-            </a:pPr>
-            <a:r>
-              <a:t>สถานีที่ 1 : จุดบริการต้อนรับ/อาคารข้อมูล</a:t>
-            </a:r>
-          </a:p>
-          <a:p>
-            <a:pPr>
-              <a:spcAft>
-                <a:spcPts val="600"/>
-              </a:spcAft>
-              <a:defRPr sz="1100">
-                <a:solidFill>
-                  <a:srgbClr val="5A646E"/>
-                </a:solidFill>
-                <a:latin typeface="Segoe UI"/>
-              </a:defRPr>
-            </a:pPr>
-            <a:r>
-              <a:t>   • คิวรอ 12 ท่าน | ETA 3 นาที</a:t>
-            </a:r>
-          </a:p>
-          <a:p>
-            <a:pPr>
-              <a:defRPr sz="1200" b="1">
-                <a:solidFill>
-                  <a:srgbClr val="1B4332"/>
-                </a:solidFill>
-                <a:latin typeface="Segoe UI"/>
-              </a:defRPr>
-            </a:pPr>
-            <a:r>
-              <a:t>สถานีที่ 2 : พิพิธภัณฑ์ธรรมชาติวิทยา</a:t>
-            </a:r>
-          </a:p>
-          <a:p>
-            <a:pPr>
-              <a:spcAft>
-                <a:spcPts val="600"/>
-              </a:spcAft>
-              <a:defRPr sz="1100">
-                <a:solidFill>
-                  <a:srgbClr val="5A646E"/>
-                </a:solidFill>
-                <a:latin typeface="Segoe UI"/>
-              </a:defRPr>
-            </a:pPr>
-            <a:r>
-              <a:t>   • คิวรอ 5 ท่าน | ETA 8 นาที</a:t>
-            </a:r>
-          </a:p>
-          <a:p>
-            <a:pPr>
-              <a:defRPr sz="1200" b="1">
-                <a:solidFill>
-                  <a:srgbClr val="1B4332"/>
-                </a:solidFill>
-                <a:latin typeface="Segoe UI"/>
-              </a:defRPr>
-            </a:pPr>
-            <a:r>
-              <a:t>สถานีที่ 3 : ทางเดินเรือนยอดไม้ (Canopy Walk)</a:t>
-            </a:r>
-          </a:p>
-          <a:p>
-            <a:pPr>
-              <a:spcAft>
-                <a:spcPts val="600"/>
-              </a:spcAft>
-              <a:defRPr sz="1100">
-                <a:solidFill>
-                  <a:srgbClr val="5A646E"/>
-                </a:solidFill>
-                <a:latin typeface="Segoe UI"/>
-              </a:defRPr>
-            </a:pPr>
-            <a:r>
-              <a:t>   • คิวรอ 8 ท่าน | ETA 14 นาที</a:t>
-            </a:r>
-          </a:p>
-          <a:p>
-            <a:pPr>
-              <a:defRPr sz="1200" b="1">
-                <a:solidFill>
-                  <a:srgbClr val="1B4332"/>
-                </a:solidFill>
-                <a:latin typeface="Segoe UI"/>
-              </a:defRPr>
-            </a:pPr>
-            <a:r>
-              <a:t>สถานีที่ 4 : กลุ่มอาคารเรือนกระจกเฉลิมพระเกียรติ</a:t>
-            </a:r>
-          </a:p>
-          <a:p>
-            <a:pPr>
-              <a:spcAft>
-                <a:spcPts val="600"/>
-              </a:spcAft>
-              <a:defRPr sz="1100">
-                <a:solidFill>
-                  <a:srgbClr val="5A646E"/>
-                </a:solidFill>
-                <a:latin typeface="Segoe UI"/>
-              </a:defRPr>
-            </a:pPr>
-            <a:r>
-              <a:t>   • คิวรอ 2 ท่าน | ETA 19 นาที</a:t>
-            </a:r>
-          </a:p>
-          <a:p>
-            <a:pPr>
-              <a:defRPr sz="1200" b="1">
-                <a:solidFill>
-                  <a:srgbClr val="1B4332"/>
-                </a:solidFill>
-                <a:latin typeface="Segoe UI"/>
-              </a:defRPr>
-            </a:pPr>
-            <a:r>
-              <a:t>สถานีที่ 5 : แปลงรวบรวมพันธุ์ไม้และกล้วยไม้</a:t>
-            </a:r>
-          </a:p>
-          <a:p>
-            <a:pPr>
-              <a:spcAft>
-                <a:spcPts val="600"/>
-              </a:spcAft>
-              <a:defRPr sz="1100">
-                <a:solidFill>
-                  <a:srgbClr val="5A646E"/>
-                </a:solidFill>
-                <a:latin typeface="Segoe UI"/>
-              </a:defRPr>
-            </a:pPr>
-            <a:r>
-              <a:t>   • คิวรอ 15 ท่าน | ETA 24 นาที</a:t>
-            </a:r>
-          </a:p>
-          <a:p>
-            <a:pPr>
-              <a:defRPr sz="1200" b="1">
-                <a:solidFill>
-                  <a:srgbClr val="1B4332"/>
-                </a:solidFill>
-                <a:latin typeface="Segoe UI"/>
-              </a:defRPr>
-            </a:pPr>
-            <a:r>
-              <a:t>สถานีที่ 6 : จุดชมวิวและลานกิจกรรมธรรมชาติ</a:t>
-            </a:r>
-          </a:p>
-          <a:p>
-            <a:pPr>
-              <a:spcAft>
-                <a:spcPts val="600"/>
-              </a:spcAft>
-              <a:defRPr sz="1100">
-                <a:solidFill>
-                  <a:srgbClr val="5A646E"/>
-                </a:solidFill>
-                <a:latin typeface="Segoe UI"/>
-              </a:defRPr>
-            </a:pPr>
-            <a:r>
-              <a:t>   • คิวรอ 7 ท่าน | ETA 30 นาที</a:t>
-            </a:r>
-          </a:p>
-          <a:p>
-            <a:pPr>
-              <a:defRPr sz="1100" b="1">
-                <a:solidFill>
-                  <a:srgbClr val="B45309"/>
-                </a:solidFill>
-                <a:latin typeface="Segoe UI"/>
-              </a:defRPr>
-            </a:pPr>
-            <a:r>
-              <a:t>การเดินรถ: วิ่งวนรอบต่อเนื่อง พร้อมปรับความถี่ตามคิวรอ</a:t>
+                  <a:srgbClr val="2D6A4F"/>
+                </a:solidFill>
+                <a:latin typeface="Segoe UI"/>
+              </a:defRPr>
+            </a:pPr>
+            <a:r>
+              <a:t>2. การตัดเงินและยืนยันสิทธิ์</a:t>
+            </a:r>
+          </a:p>
+          <a:p>
+            <a:pPr>
+              <a:spcAft>
+                <a:spcPts val="500"/>
+              </a:spcAft>
+              <a:defRPr sz="1250">
+                <a:solidFill>
+                  <a:srgbClr val="14181B"/>
+                </a:solidFill>
+                <a:latin typeface="Segoe UI"/>
+              </a:defRPr>
+            </a:pPr>
+            <a:r>
+              <a:t>• ผู้โดยสารสแกนจ่าย : ผ่าน Mobile Banking ทุกธนาคาร (SCB, KBANK, KTB ฯลฯ)</a:t>
+            </a:r>
+          </a:p>
+          <a:p>
+            <a:pPr>
+              <a:spcAft>
+                <a:spcPts val="500"/>
+              </a:spcAft>
+              <a:defRPr sz="1250">
+                <a:solidFill>
+                  <a:srgbClr val="14181B"/>
+                </a:solidFill>
+                <a:latin typeface="Segoe UI"/>
+              </a:defRPr>
+            </a:pPr>
+            <a:r>
+              <a:t>• ธนาคารยืนยันยอดเงิน : ส่งผลการชำระให้ Payment Gateway</a:t>
+            </a:r>
+          </a:p>
+          <a:p>
+            <a:pPr>
+              <a:spcAft>
+                <a:spcPts val="500"/>
+              </a:spcAft>
+              <a:defRPr sz="1250">
+                <a:solidFill>
+                  <a:srgbClr val="14181B"/>
+                </a:solidFill>
+                <a:latin typeface="Segoe UI"/>
+              </a:defRPr>
+            </a:pPr>
+            <a:r>
+              <a:t>• Webhook Callback : Gateway ส่งข้อมูลชำระเงิน POST ไปที่ Backend</a:t>
+            </a:r>
+          </a:p>
+          <a:p>
+            <a:pPr>
+              <a:spcAft>
+                <a:spcPts val="500"/>
+              </a:spcAft>
+              <a:defRPr sz="1250">
+                <a:solidFill>
+                  <a:srgbClr val="14181B"/>
+                </a:solidFill>
+                <a:latin typeface="Segoe UI"/>
+              </a:defRPr>
+            </a:pPr>
+            <a:r>
+              <a:t>• ตรวจสอบ Signature : ระบบตรวจสอบความถูกต้อง ป้องกัน Webhook ปลอม</a:t>
             </a:r>
           </a:p>
         </p:txBody>
@@ -10799,8 +11256,8 @@
         </p:nvSpPr>
         <p:spPr>
           <a:xfrm>
-            <a:off x="9235440" y="1691640"/>
-            <a:ext cx="2194560" cy="4480560"/>
+            <a:off x="8046720" y="1691640"/>
+            <a:ext cx="3328416" cy="3246120"/>
           </a:xfrm>
           <a:prstGeom prst="roundRect">
             <a:avLst/>
@@ -10836,40 +11293,16 @@
           </a:p>
         </p:txBody>
       </p:sp>
-      <p:pic>
-        <p:nvPicPr>
-          <p:cNvPr id="10" name="Picture 9" descr="ev_cart_cockpit_tablet.jpg"/>
-          <p:cNvPicPr>
-            <a:picLocks noChangeAspect="1"/>
-          </p:cNvPicPr>
-          <p:nvPr/>
-        </p:nvPicPr>
-        <p:blipFill>
-          <a:blip r:embed="rId2"/>
-          <a:stretch>
-            <a:fillRect/>
-          </a:stretch>
-        </p:blipFill>
-        <p:spPr>
-          <a:xfrm>
-            <a:off x="9326880" y="1783080"/>
-            <a:ext cx="2011680" cy="3575304"/>
-          </a:xfrm>
-          <a:prstGeom prst="rect">
-            <a:avLst/>
-          </a:prstGeom>
-        </p:spPr>
-      </p:pic>
-      <p:sp>
-        <p:nvSpPr>
-          <p:cNvPr id="11" name="TextBox 10"/>
+      <p:sp>
+        <p:nvSpPr>
+          <p:cNvPr id="10" name="TextBox 9"/>
           <p:cNvSpPr txBox="1"/>
           <p:nvPr/>
         </p:nvSpPr>
         <p:spPr>
           <a:xfrm>
-            <a:off x="9281160" y="5440680"/>
-            <a:ext cx="2103120" cy="685800"/>
+            <a:off x="8229600" y="1874519"/>
+            <a:ext cx="2962656" cy="2880360"/>
           </a:xfrm>
           <a:prstGeom prst="rect">
             <a:avLst/>
@@ -10883,7 +11316,26 @@
           <a:lstStyle/>
           <a:p>
             <a:pPr>
-              <a:defRPr sz="950">
+              <a:spcAft>
+                <a:spcPts val="1000"/>
+              </a:spcAft>
+              <a:defRPr sz="1600" b="1">
+                <a:solidFill>
+                  <a:srgbClr val="1B4332"/>
+                </a:solidFill>
+                <a:latin typeface="Segoe UI"/>
+              </a:defRPr>
+            </a:pPr>
+            <a:r>
+              <a:t>3. การออกตั๋วและแจ้งเตือน</a:t>
+            </a:r>
+          </a:p>
+          <a:p>
+            <a:pPr>
+              <a:spcAft>
+                <a:spcPts val="500"/>
+              </a:spcAft>
+              <a:defRPr sz="1250">
                 <a:solidFill>
                   <a:srgbClr val="14181B"/>
                 </a:solidFill>
@@ -10891,7 +11343,156 @@
               </a:defRPr>
             </a:pPr>
             <a:r>
-              <a:t>ภาพจริง: อุปกรณ์ Tablet ประจำรถ เพื่อส่งพิกัด GPS และระบบ Driver App</a:t>
+              <a:t>• อัปเดต Order : ปรับสถานะเป็น 'ชำระเงินเรียบร้อยแล้ว'</a:t>
+            </a:r>
+          </a:p>
+          <a:p>
+            <a:pPr>
+              <a:spcAft>
+                <a:spcPts val="500"/>
+              </a:spcAft>
+              <a:defRPr sz="1250">
+                <a:solidFill>
+                  <a:srgbClr val="14181B"/>
+                </a:solidFill>
+                <a:latin typeface="Segoe UI"/>
+              </a:defRPr>
+            </a:pPr>
+            <a:r>
+              <a:t>• ออก e-Ticket QR Code : ส่งเข้าสู่มือถือของผู้โดยสารทันที</a:t>
+            </a:r>
+          </a:p>
+          <a:p>
+            <a:pPr>
+              <a:spcAft>
+                <a:spcPts val="500"/>
+              </a:spcAft>
+              <a:defRPr sz="1250">
+                <a:solidFill>
+                  <a:srgbClr val="14181B"/>
+                </a:solidFill>
+                <a:latin typeface="Segoe UI"/>
+              </a:defRPr>
+            </a:pPr>
+            <a:r>
+              <a:t>• Push Notification : แจ้งเตือนยืนยันการชำระเงินสำเร็จ</a:t>
+            </a:r>
+          </a:p>
+          <a:p>
+            <a:pPr>
+              <a:spcAft>
+                <a:spcPts val="500"/>
+              </a:spcAft>
+              <a:defRPr sz="1250">
+                <a:solidFill>
+                  <a:srgbClr val="14181B"/>
+                </a:solidFill>
+                <a:latin typeface="Segoe UI"/>
+              </a:defRPr>
+            </a:pPr>
+            <a:r>
+              <a:t>• เตรียมพร้อม Check-in : นำไปสแกนขึ้นรถกับคนขับได้ทันที</a:t>
+            </a:r>
+          </a:p>
+        </p:txBody>
+      </p:sp>
+      <p:sp>
+        <p:nvSpPr>
+          <p:cNvPr id="11" name="Rounded Rectangle 10"/>
+          <p:cNvSpPr/>
+          <p:nvPr/>
+        </p:nvSpPr>
+        <p:spPr>
+          <a:xfrm>
+            <a:off x="731520" y="5120640"/>
+            <a:ext cx="10698480" cy="1097280"/>
+          </a:xfrm>
+          <a:prstGeom prst="roundRect">
+            <a:avLst/>
+          </a:prstGeom>
+          <a:solidFill>
+            <a:srgbClr val="FEF2F2"/>
+          </a:solidFill>
+          <a:ln w="15240">
+            <a:solidFill>
+              <a:srgbClr val="EF4444"/>
+            </a:solidFill>
+          </a:ln>
+        </p:spPr>
+        <p:style>
+          <a:lnRef idx="1">
+            <a:schemeClr val="accent1"/>
+          </a:lnRef>
+          <a:fillRef idx="3">
+            <a:schemeClr val="accent1"/>
+          </a:fillRef>
+          <a:effectRef idx="2">
+            <a:schemeClr val="accent1"/>
+          </a:effectRef>
+          <a:fontRef idx="minor">
+            <a:schemeClr val="lt1"/>
+          </a:fontRef>
+        </p:style>
+        <p:txBody>
+          <a:bodyPr rtlCol="0" anchor="ctr"/>
+          <a:lstStyle/>
+          <a:p>
+            <a:pPr algn="ctr"/>
+          </a:p>
+        </p:txBody>
+      </p:sp>
+      <p:sp>
+        <p:nvSpPr>
+          <p:cNvPr id="12" name="TextBox 11"/>
+          <p:cNvSpPr txBox="1"/>
+          <p:nvPr/>
+        </p:nvSpPr>
+        <p:spPr>
+          <a:xfrm>
+            <a:off x="960120" y="5230368"/>
+            <a:ext cx="10241280" cy="868680"/>
+          </a:xfrm>
+          <a:prstGeom prst="rect">
+            <a:avLst/>
+          </a:prstGeom>
+          <a:noFill/>
+        </p:spPr>
+        <p:txBody>
+          <a:bodyPr wrap="square">
+            <a:spAutoFit/>
+          </a:bodyPr>
+          <a:lstStyle/>
+          <a:p>
+            <a:pPr>
+              <a:spcAft>
+                <a:spcPts val="300"/>
+              </a:spcAft>
+              <a:defRPr sz="1400" b="1">
+                <a:solidFill>
+                  <a:srgbClr val="B91C1C"/>
+                </a:solidFill>
+                <a:latin typeface="Segoe UI"/>
+              </a:defRPr>
+            </a:pPr>
+            <a:r>
+              <a:t>กลไกกรณีการชำระเงินไม่สำเร็จ หรือ หมดเวลา (Auto-Expiry Policy)</a:t>
+            </a:r>
+          </a:p>
+          <a:p>
+            <a:pPr>
+              <a:defRPr sz="1250">
+                <a:solidFill>
+                  <a:srgbClr val="14181B"/>
+                </a:solidFill>
+                <a:latin typeface="Segoe UI"/>
+              </a:defRPr>
+            </a:pPr>
+            <a:r>
+              <a:t>• ระบบกำหนดเวลาชำระเงินภายใน 10 นาที : หากไม่มีการชำระเงิน ระบบจะยกเลิก Order อัตโนมัติทันที</a:t>
+            </a:r>
+            <a:br/>
+            <a:r>
+              <a:t>• แจ้งเตือนผู้โดยสาร พร้อมคืนโควตาที่นั่งว่างกลับเข้าสู่ระบบ เพื่อไม่ให้เสียโอกาสแก่ผู้โดยสารท่านอื่น</a:t>
             </a:r>
           </a:p>
         </p:txBody>
@@ -10953,7 +11554,7 @@
               </a:defRPr>
             </a:pPr>
             <a:r>
-              <a:t>QUEUE &amp; NOTIFICATION</a:t>
+              <a:t>FLEET TRACKING &amp; OPERATIONS</a:t>
             </a:r>
           </a:p>
         </p:txBody>
@@ -10989,7 +11590,7 @@
               </a:defRPr>
             </a:pPr>
             <a:r>
-              <a:t>การบริหารจัดการคิวและการแจ้งเตือนอัตโนมัติ</a:t>
+              <a:t>ระบบติดตามรถและการเดินรถวนรอบ (Loop 6 สถานี)</a:t>
             </a:r>
           </a:p>
         </p:txBody>
@@ -11025,7 +11626,7 @@
               </a:defRPr>
             </a:pPr>
             <a:r>
-              <a:t>ระบบจัดสรรผู้โดยสารเพื่อลดความแออัด พร้อมการแจ้งเตือนแบบเรียลไทม์</a:t>
+              <a:t>การติดตามพิกัดตำแหน่งผ่านสัญญาณดาวเทียมและการคำนวณเวลาเดินรถแบบ Dynamic ETA</a:t>
             </a:r>
           </a:p>
         </p:txBody>
@@ -11039,7 +11640,7 @@
         <p:spPr>
           <a:xfrm>
             <a:off x="731520" y="1691640"/>
-            <a:ext cx="3328416" cy="4480560"/>
+            <a:ext cx="4114800" cy="4480560"/>
           </a:xfrm>
           <a:prstGeom prst="roundRect">
             <a:avLst/>
@@ -11083,8 +11684,8 @@
         </p:nvSpPr>
         <p:spPr>
           <a:xfrm>
-            <a:off x="960120" y="1920240"/>
-            <a:ext cx="2871216" cy="4023360"/>
+            <a:off x="914400" y="1874519"/>
+            <a:ext cx="3749040" cy="4114800"/>
           </a:xfrm>
           <a:prstGeom prst="rect">
             <a:avLst/>
@@ -11099,25 +11700,9 @@
           <a:p>
             <a:pPr>
               <a:spcAft>
-                <a:spcPts val="400"/>
-              </a:spcAft>
-              <a:defRPr sz="1100" b="1">
-                <a:solidFill>
-                  <a:srgbClr val="52B788"/>
-                </a:solidFill>
-                <a:latin typeface="Segoe UI"/>
-              </a:defRPr>
-            </a:pPr>
-            <a:r>
-              <a:t>การกระจายผู้โดยสารอย่างสมดุล</a:t>
-            </a:r>
-          </a:p>
-          <a:p>
-            <a:pPr>
-              <a:spcAft>
                 <a:spcPts val="1200"/>
               </a:spcAft>
-              <a:defRPr sz="1700" b="1">
+              <a:defRPr sz="1600" b="1">
                 <a:solidFill>
                   <a:srgbClr val="1B4332"/>
                 </a:solidFill>
@@ -11125,15 +11710,28 @@
               </a:defRPr>
             </a:pPr>
             <a:r>
-              <a:t>Smart Queue Balancing</a:t>
-            </a:r>
-          </a:p>
-          <a:p>
-            <a:pPr>
-              <a:spcAft>
-                <a:spcPts val="1600"/>
-              </a:spcAft>
-              <a:defRPr sz="1250">
+              <a:t>กลไกการทำงานของระบบติดตาม</a:t>
+            </a:r>
+          </a:p>
+          <a:p>
+            <a:pPr>
+              <a:defRPr sz="1300" b="1">
+                <a:solidFill>
+                  <a:srgbClr val="134074"/>
+                </a:solidFill>
+                <a:latin typeface="Segoe UI"/>
+              </a:defRPr>
+            </a:pPr>
+            <a:r>
+              <a:t>• อุปกรณ์ Tablet ประจำรถ 3 คัน</a:t>
+            </a:r>
+          </a:p>
+          <a:p>
+            <a:pPr>
+              <a:spcAft>
+                <a:spcPts val="800"/>
+              </a:spcAft>
+              <a:defRPr sz="1150">
                 <a:solidFill>
                   <a:srgbClr val="14181B"/>
                 </a:solidFill>
@@ -11141,12 +11739,12 @@
               </a:defRPr>
             </a:pPr>
             <a:r>
-              <a:t>ระบบประมวลผลจำนวนที่นั่งว่างจริง (Seat Capacity) บนรถแต่ละคัน เทียบกับปริมาณคิวรอในแต่ละสถานี หากพบสถานีใดมีผู้โดยสารหนาแน่นเกินเกณฑ์ ระบบจะแนะนำให้จัดสรรรถเสริมไปยังจุดดังกล่าวทันที เพื่อลดปัญหาคอขวดสะสม</a:t>
-            </a:r>
-          </a:p>
-          <a:p>
-            <a:pPr>
-              <a:defRPr sz="1200" b="1">
+              <a:t>ส่งพิกัด GPS เข้าสู่ระบบทุกๆ 5 วินาที ผ่านสัญญาณสื่อสารความเร็วสูง</a:t>
+            </a:r>
+          </a:p>
+          <a:p>
+            <a:pPr>
+              <a:defRPr sz="1300" b="1">
                 <a:solidFill>
                   <a:srgbClr val="134074"/>
                 </a:solidFill>
@@ -11154,7 +11752,81 @@
               </a:defRPr>
             </a:pPr>
             <a:r>
-              <a:t>• จุดเด่น : ควบคุมความหนาแน่นในจุดท่องเที่ยวหลัก</a:t>
+              <a:t>• ระบบรั้วเสมือน (Geofencing)</a:t>
+            </a:r>
+          </a:p>
+          <a:p>
+            <a:pPr>
+              <a:spcAft>
+                <a:spcPts val="800"/>
+              </a:spcAft>
+              <a:defRPr sz="1150">
+                <a:solidFill>
+                  <a:srgbClr val="14181B"/>
+                </a:solidFill>
+                <a:latin typeface="Segoe UI"/>
+              </a:defRPr>
+            </a:pPr>
+            <a:r>
+              <a:t>ตรวจสอบตำแหน่งยานพาหนะเทียบกับสถานี บันทึกเวลาเข้า-ออกอัตโนมัติ</a:t>
+            </a:r>
+          </a:p>
+          <a:p>
+            <a:pPr>
+              <a:defRPr sz="1300" b="1">
+                <a:solidFill>
+                  <a:srgbClr val="134074"/>
+                </a:solidFill>
+                <a:latin typeface="Segoe UI"/>
+              </a:defRPr>
+            </a:pPr>
+            <a:r>
+              <a:t>• การคำนวณ Dynamic ETA</a:t>
+            </a:r>
+          </a:p>
+          <a:p>
+            <a:pPr>
+              <a:spcAft>
+                <a:spcPts val="800"/>
+              </a:spcAft>
+              <a:defRPr sz="1150">
+                <a:solidFill>
+                  <a:srgbClr val="14181B"/>
+                </a:solidFill>
+                <a:latin typeface="Segoe UI"/>
+              </a:defRPr>
+            </a:pPr>
+            <a:r>
+              <a:t>ประมวลผลความเร็วและระยะทาง เพื่อแจ้งเวลารถถึงแต่ละสถานีแบบแม่นยำ</a:t>
+            </a:r>
+          </a:p>
+          <a:p>
+            <a:pPr>
+              <a:defRPr sz="1300" b="1">
+                <a:solidFill>
+                  <a:srgbClr val="134074"/>
+                </a:solidFill>
+                <a:latin typeface="Segoe UI"/>
+              </a:defRPr>
+            </a:pPr>
+            <a:r>
+              <a:t>• Driver Application</a:t>
+            </a:r>
+          </a:p>
+          <a:p>
+            <a:pPr>
+              <a:spcAft>
+                <a:spcPts val="800"/>
+              </a:spcAft>
+              <a:defRPr sz="1150">
+                <a:solidFill>
+                  <a:srgbClr val="14181B"/>
+                </a:solidFill>
+                <a:latin typeface="Segoe UI"/>
+              </a:defRPr>
+            </a:pPr>
+            <a:r>
+              <a:t>คนขับตรวจสอบจำนวนที่นั่งว่างและสถิติคิวรอในสถานีถัดไปได้ทันที</a:t>
             </a:r>
           </a:p>
         </p:txBody>
@@ -11167,8 +11839,8 @@
         </p:nvSpPr>
         <p:spPr>
           <a:xfrm>
-            <a:off x="4389120" y="1691640"/>
-            <a:ext cx="3328416" cy="4480560"/>
+            <a:off x="5029200" y="1691640"/>
+            <a:ext cx="4023360" cy="4480560"/>
           </a:xfrm>
           <a:prstGeom prst="roundRect">
             <a:avLst/>
@@ -11212,8 +11884,8 @@
         </p:nvSpPr>
         <p:spPr>
           <a:xfrm>
-            <a:off x="4617720" y="1920240"/>
-            <a:ext cx="2871216" cy="4023360"/>
+            <a:off x="5212080" y="1874519"/>
+            <a:ext cx="3657600" cy="4114800"/>
           </a:xfrm>
           <a:prstGeom prst="rect">
             <a:avLst/>
@@ -11228,70 +11900,204 @@
           <a:p>
             <a:pPr>
               <a:spcAft>
-                <a:spcPts val="400"/>
-              </a:spcAft>
+                <a:spcPts val="1000"/>
+              </a:spcAft>
+              <a:defRPr sz="1600" b="1">
+                <a:solidFill>
+                  <a:srgbClr val="1B4332"/>
+                </a:solidFill>
+                <a:latin typeface="Segoe UI"/>
+              </a:defRPr>
+            </a:pPr>
+            <a:r>
+              <a:t>การเดินรถวนรอบ 6 สถานี (Loop)</a:t>
+            </a:r>
+          </a:p>
+          <a:p>
+            <a:pPr>
+              <a:defRPr sz="1200" b="1">
+                <a:solidFill>
+                  <a:srgbClr val="1B4332"/>
+                </a:solidFill>
+                <a:latin typeface="Segoe UI"/>
+              </a:defRPr>
+            </a:pPr>
+            <a:r>
+              <a:t>สถานีที่ 1 : จุดบริการต้อนรับ/อาคารข้อมูล</a:t>
+            </a:r>
+          </a:p>
+          <a:p>
+            <a:pPr>
+              <a:spcAft>
+                <a:spcPts val="600"/>
+              </a:spcAft>
+              <a:defRPr sz="1100">
+                <a:solidFill>
+                  <a:srgbClr val="5A646E"/>
+                </a:solidFill>
+                <a:latin typeface="Segoe UI"/>
+              </a:defRPr>
+            </a:pPr>
+            <a:r>
+              <a:t>   • คิวรอ 12 ท่าน | ETA 3 นาที</a:t>
+            </a:r>
+          </a:p>
+          <a:p>
+            <a:pPr>
+              <a:defRPr sz="1200" b="1">
+                <a:solidFill>
+                  <a:srgbClr val="1B4332"/>
+                </a:solidFill>
+                <a:latin typeface="Segoe UI"/>
+              </a:defRPr>
+            </a:pPr>
+            <a:r>
+              <a:t>สถานีที่ 2 : พิพิธภัณฑ์ธรรมชาติวิทยา</a:t>
+            </a:r>
+          </a:p>
+          <a:p>
+            <a:pPr>
+              <a:spcAft>
+                <a:spcPts val="600"/>
+              </a:spcAft>
+              <a:defRPr sz="1100">
+                <a:solidFill>
+                  <a:srgbClr val="5A646E"/>
+                </a:solidFill>
+                <a:latin typeface="Segoe UI"/>
+              </a:defRPr>
+            </a:pPr>
+            <a:r>
+              <a:t>   • คิวรอ 5 ท่าน | ETA 8 นาที</a:t>
+            </a:r>
+          </a:p>
+          <a:p>
+            <a:pPr>
+              <a:defRPr sz="1200" b="1">
+                <a:solidFill>
+                  <a:srgbClr val="1B4332"/>
+                </a:solidFill>
+                <a:latin typeface="Segoe UI"/>
+              </a:defRPr>
+            </a:pPr>
+            <a:r>
+              <a:t>สถานีที่ 3 : ทางเดินเรือนยอดไม้ (Canopy Walk)</a:t>
+            </a:r>
+          </a:p>
+          <a:p>
+            <a:pPr>
+              <a:spcAft>
+                <a:spcPts val="600"/>
+              </a:spcAft>
+              <a:defRPr sz="1100">
+                <a:solidFill>
+                  <a:srgbClr val="5A646E"/>
+                </a:solidFill>
+                <a:latin typeface="Segoe UI"/>
+              </a:defRPr>
+            </a:pPr>
+            <a:r>
+              <a:t>   • คิวรอ 8 ท่าน | ETA 14 นาที</a:t>
+            </a:r>
+          </a:p>
+          <a:p>
+            <a:pPr>
+              <a:defRPr sz="1200" b="1">
+                <a:solidFill>
+                  <a:srgbClr val="1B4332"/>
+                </a:solidFill>
+                <a:latin typeface="Segoe UI"/>
+              </a:defRPr>
+            </a:pPr>
+            <a:r>
+              <a:t>สถานีที่ 4 : กลุ่มอาคารเรือนกระจกเฉลิมพระเกียรติ</a:t>
+            </a:r>
+          </a:p>
+          <a:p>
+            <a:pPr>
+              <a:spcAft>
+                <a:spcPts val="600"/>
+              </a:spcAft>
+              <a:defRPr sz="1100">
+                <a:solidFill>
+                  <a:srgbClr val="5A646E"/>
+                </a:solidFill>
+                <a:latin typeface="Segoe UI"/>
+              </a:defRPr>
+            </a:pPr>
+            <a:r>
+              <a:t>   • คิวรอ 2 ท่าน | ETA 19 นาที</a:t>
+            </a:r>
+          </a:p>
+          <a:p>
+            <a:pPr>
+              <a:defRPr sz="1200" b="1">
+                <a:solidFill>
+                  <a:srgbClr val="1B4332"/>
+                </a:solidFill>
+                <a:latin typeface="Segoe UI"/>
+              </a:defRPr>
+            </a:pPr>
+            <a:r>
+              <a:t>สถานีที่ 5 : แปลงรวบรวมพันธุ์ไม้และกล้วยไม้</a:t>
+            </a:r>
+          </a:p>
+          <a:p>
+            <a:pPr>
+              <a:spcAft>
+                <a:spcPts val="600"/>
+              </a:spcAft>
+              <a:defRPr sz="1100">
+                <a:solidFill>
+                  <a:srgbClr val="5A646E"/>
+                </a:solidFill>
+                <a:latin typeface="Segoe UI"/>
+              </a:defRPr>
+            </a:pPr>
+            <a:r>
+              <a:t>   • คิวรอ 15 ท่าน | ETA 24 นาที</a:t>
+            </a:r>
+          </a:p>
+          <a:p>
+            <a:pPr>
+              <a:defRPr sz="1200" b="1">
+                <a:solidFill>
+                  <a:srgbClr val="1B4332"/>
+                </a:solidFill>
+                <a:latin typeface="Segoe UI"/>
+              </a:defRPr>
+            </a:pPr>
+            <a:r>
+              <a:t>สถานีที่ 6 : จุดชมวิวและลานกิจกรรมธรรมชาติ</a:t>
+            </a:r>
+          </a:p>
+          <a:p>
+            <a:pPr>
+              <a:spcAft>
+                <a:spcPts val="600"/>
+              </a:spcAft>
+              <a:defRPr sz="1100">
+                <a:solidFill>
+                  <a:srgbClr val="5A646E"/>
+                </a:solidFill>
+                <a:latin typeface="Segoe UI"/>
+              </a:defRPr>
+            </a:pPr>
+            <a:r>
+              <a:t>   • คิวรอ 7 ท่าน | ETA 30 นาที</a:t>
+            </a:r>
+          </a:p>
+          <a:p>
+            <a:pPr>
               <a:defRPr sz="1100" b="1">
                 <a:solidFill>
-                  <a:srgbClr val="52B788"/>
-                </a:solidFill>
-                <a:latin typeface="Segoe UI"/>
-              </a:defRPr>
-            </a:pPr>
-            <a:r>
-              <a:t>การแสดงผลข้อมูลรอบด้าน</a:t>
-            </a:r>
-          </a:p>
-          <a:p>
-            <a:pPr>
-              <a:spcAft>
-                <a:spcPts val="1200"/>
-              </a:spcAft>
-              <a:defRPr sz="1700" b="1">
-                <a:solidFill>
-                  <a:srgbClr val="1B4332"/>
-                </a:solidFill>
-                <a:latin typeface="Segoe UI"/>
-              </a:defRPr>
-            </a:pPr>
-            <a:r>
-              <a:t>Omnichannel Display System</a:t>
-            </a:r>
-          </a:p>
-          <a:p>
-            <a:pPr>
-              <a:spcAft>
-                <a:spcPts val="1600"/>
-              </a:spcAft>
-              <a:defRPr sz="1250">
-                <a:solidFill>
-                  <a:srgbClr val="14181B"/>
-                </a:solidFill>
-                <a:latin typeface="Segoe UI"/>
-              </a:defRPr>
-            </a:pPr>
-            <a:r>
-              <a:t>• Live Map บน Mobile Application : แสดงสัญลักษณ์ตำแหน่งรถเคลื่อนที่แบบ Real-time</a:t>
-            </a:r>
-            <a:br/>
-            <a:r>
-              <a:t>• Station Information Display : จอแสดงผลประจำสถานี แสดงตารางเวลาและจำนวนคิวรอ</a:t>
-            </a:r>
-            <a:br/>
-            <a:r>
-              <a:t>• ตู้ Kiosk : ให้บริการตรวจสอบสิทธิ์และสถานะคิวของผู้โดยสารได้อย่างโปร่งใส</a:t>
-            </a:r>
-          </a:p>
-          <a:p>
-            <a:pPr>
-              <a:defRPr sz="1200" b="1">
-                <a:solidFill>
-                  <a:srgbClr val="134074"/>
-                </a:solidFill>
-                <a:latin typeface="Segoe UI"/>
-              </a:defRPr>
-            </a:pPr>
-            <a:r>
-              <a:t>• จุดเด่น : ข้อมูลชัดเจน เข้าถึงได้จากทุกจุดบริการ</a:t>
+                  <a:srgbClr val="B45309"/>
+                </a:solidFill>
+                <a:latin typeface="Segoe UI"/>
+              </a:defRPr>
+            </a:pPr>
+            <a:r>
+              <a:t>การเดินรถ: วิ่งวนรอบต่อเนื่อง พร้อมปรับความถี่ตามคิวรอ</a:t>
             </a:r>
           </a:p>
         </p:txBody>
@@ -11304,8 +12110,8 @@
         </p:nvSpPr>
         <p:spPr>
           <a:xfrm>
-            <a:off x="8046720" y="1691640"/>
-            <a:ext cx="3328416" cy="4480560"/>
+            <a:off x="9235440" y="1691640"/>
+            <a:ext cx="2194560" cy="4480560"/>
           </a:xfrm>
           <a:prstGeom prst="roundRect">
             <a:avLst/>
@@ -11341,16 +12147,40 @@
           </a:p>
         </p:txBody>
       </p:sp>
-      <p:sp>
-        <p:nvSpPr>
-          <p:cNvPr id="10" name="TextBox 9"/>
+      <p:pic>
+        <p:nvPicPr>
+          <p:cNvPr id="10" name="Picture 9" descr="ev_cart_cockpit_tablet.jpg"/>
+          <p:cNvPicPr>
+            <a:picLocks noChangeAspect="1"/>
+          </p:cNvPicPr>
+          <p:nvPr/>
+        </p:nvPicPr>
+        <p:blipFill>
+          <a:blip r:embed="rId2"/>
+          <a:stretch>
+            <a:fillRect/>
+          </a:stretch>
+        </p:blipFill>
+        <p:spPr>
+          <a:xfrm>
+            <a:off x="9326880" y="1783080"/>
+            <a:ext cx="2011680" cy="3575304"/>
+          </a:xfrm>
+          <a:prstGeom prst="rect">
+            <a:avLst/>
+          </a:prstGeom>
+        </p:spPr>
+      </p:pic>
+      <p:sp>
+        <p:nvSpPr>
+          <p:cNvPr id="11" name="TextBox 10"/>
           <p:cNvSpPr txBox="1"/>
           <p:nvPr/>
         </p:nvSpPr>
         <p:spPr>
           <a:xfrm>
-            <a:off x="8275320" y="1920240"/>
-            <a:ext cx="2871216" cy="4023360"/>
+            <a:off x="9281160" y="5440680"/>
+            <a:ext cx="2103120" cy="685800"/>
           </a:xfrm>
           <a:prstGeom prst="rect">
             <a:avLst/>
@@ -11364,42 +12194,7 @@
           <a:lstStyle/>
           <a:p>
             <a:pPr>
-              <a:spcAft>
-                <a:spcPts val="400"/>
-              </a:spcAft>
-              <a:defRPr sz="1100" b="1">
-                <a:solidFill>
-                  <a:srgbClr val="52B788"/>
-                </a:solidFill>
-                <a:latin typeface="Segoe UI"/>
-              </a:defRPr>
-            </a:pPr>
-            <a:r>
-              <a:t>ระบบแจ้งเตือนล่วงหน้า</a:t>
-            </a:r>
-          </a:p>
-          <a:p>
-            <a:pPr>
-              <a:spcAft>
-                <a:spcPts val="1200"/>
-              </a:spcAft>
-              <a:defRPr sz="1700" b="1">
-                <a:solidFill>
-                  <a:srgbClr val="1B4332"/>
-                </a:solidFill>
-                <a:latin typeface="Segoe UI"/>
-              </a:defRPr>
-            </a:pPr>
-            <a:r>
-              <a:t>Proactive Push Notification</a:t>
-            </a:r>
-          </a:p>
-          <a:p>
-            <a:pPr>
-              <a:spcAft>
-                <a:spcPts val="1600"/>
-              </a:spcAft>
-              <a:defRPr sz="1250">
+              <a:defRPr sz="950">
                 <a:solidFill>
                   <a:srgbClr val="14181B"/>
                 </a:solidFill>
@@ -11407,20 +12202,7 @@
               </a:defRPr>
             </a:pPr>
             <a:r>
-              <a:t>เมื่อยานพาหนะเข้าใกล้สถานีเป้าหมายในระยะที่กำหนด (เช่น ระยะเวลา 3 นาที หรือระยะทาง 500 เมตร) ระบบจะส่งข้อความแจ้งเตือนผ่าน Mobile Application หรือ LINE เพื่อให้นักท่องเที่ยวเตรียมตัวขึ้นรถได้อย่างสะดวก</a:t>
-            </a:r>
-          </a:p>
-          <a:p>
-            <a:pPr>
-              <a:defRPr sz="1200" b="1">
-                <a:solidFill>
-                  <a:srgbClr val="134074"/>
-                </a:solidFill>
-                <a:latin typeface="Segoe UI"/>
-              </a:defRPr>
-            </a:pPr>
-            <a:r>
-              <a:t>• จุดเด่น : ลดเวลาการยืนรอคอยบริเวณสถานี</a:t>
+              <a:t>ภาพจริง: อุปกรณ์ Tablet ประจำรถ เพื่อส่งพิกัด GPS และระบบ Driver App</a:t>
             </a:r>
           </a:p>
         </p:txBody>
@@ -11482,7 +12264,7 @@
               </a:defRPr>
             </a:pPr>
             <a:r>
-              <a:t>GEOFENCE &amp; SMART GUIDE</a:t>
+              <a:t>QUEUE &amp; NOTIFICATION</a:t>
             </a:r>
           </a:p>
         </p:txBody>
@@ -11518,7 +12300,7 @@
               </a:defRPr>
             </a:pPr>
             <a:r>
-              <a:t>ระบบแนะนำแหล่งท่องเที่ยวตามพิกัดภูมิศาสตร์</a:t>
+              <a:t>การบริหารจัดการคิวและการแจ้งเตือนอัตโนมัติ</a:t>
             </a:r>
           </a:p>
         </p:txBody>
@@ -11554,7 +12336,7 @@
               </a:defRPr>
             </a:pPr>
             <a:r>
-              <a:t>การประยุกต์ใช้เทคโนโลยี Geofences เพื่อสนับสนุนการท่องเที่ยวเชิงเรียนรู้</a:t>
+              <a:t>ระบบจัดสรรผู้โดยสารเพื่อลดความแออัด พร้อมการแจ้งเตือนแบบเรียลไทม์</a:t>
             </a:r>
           </a:p>
         </p:txBody>
@@ -11568,7 +12350,7 @@
         <p:spPr>
           <a:xfrm>
             <a:off x="731520" y="1691640"/>
-            <a:ext cx="5120640" cy="4480560"/>
+            <a:ext cx="3328416" cy="4480560"/>
           </a:xfrm>
           <a:prstGeom prst="roundRect">
             <a:avLst/>
@@ -11612,8 +12394,8 @@
         </p:nvSpPr>
         <p:spPr>
           <a:xfrm>
-            <a:off x="1005840" y="1920240"/>
-            <a:ext cx="4572000" cy="4023360"/>
+            <a:off x="960120" y="1920240"/>
+            <a:ext cx="2871216" cy="4023360"/>
           </a:xfrm>
           <a:prstGeom prst="rect">
             <a:avLst/>
@@ -11628,7 +12410,23 @@
           <a:p>
             <a:pPr>
               <a:spcAft>
-                <a:spcPts val="1400"/>
+                <a:spcPts val="400"/>
+              </a:spcAft>
+              <a:defRPr sz="1100" b="1">
+                <a:solidFill>
+                  <a:srgbClr val="52B788"/>
+                </a:solidFill>
+                <a:latin typeface="Segoe UI"/>
+              </a:defRPr>
+            </a:pPr>
+            <a:r>
+              <a:t>การกระจายผู้โดยสารอย่างสมดุล</a:t>
+            </a:r>
+          </a:p>
+          <a:p>
+            <a:pPr>
+              <a:spcAft>
+                <a:spcPts val="1200"/>
               </a:spcAft>
               <a:defRPr sz="1700" b="1">
                 <a:solidFill>
@@ -11638,12 +12436,28 @@
               </a:defRPr>
             </a:pPr>
             <a:r>
-              <a:t>หลักการทำงานของเทคโนโลยี Geofences</a:t>
-            </a:r>
-          </a:p>
-          <a:p>
-            <a:pPr>
-              <a:defRPr sz="1400" b="1">
+              <a:t>Smart Queue Balancing</a:t>
+            </a:r>
+          </a:p>
+          <a:p>
+            <a:pPr>
+              <a:spcAft>
+                <a:spcPts val="1600"/>
+              </a:spcAft>
+              <a:defRPr sz="1250">
+                <a:solidFill>
+                  <a:srgbClr val="14181B"/>
+                </a:solidFill>
+                <a:latin typeface="Segoe UI"/>
+              </a:defRPr>
+            </a:pPr>
+            <a:r>
+              <a:t>ระบบประมวลผลจำนวนที่นั่งว่างจริง (Seat Capacity) บนรถแต่ละคัน เทียบกับปริมาณคิวรอในแต่ละสถานี หากพบสถานีใดมีผู้โดยสารหนาแน่นเกินเกณฑ์ ระบบจะแนะนำให้จัดสรรรถเสริมไปยังจุดดังกล่าวทันที เพื่อลดปัญหาคอขวดสะสม</a:t>
+            </a:r>
+          </a:p>
+          <a:p>
+            <a:pPr>
+              <a:defRPr sz="1200" b="1">
                 <a:solidFill>
                   <a:srgbClr val="134074"/>
                 </a:solidFill>
@@ -11651,81 +12465,7 @@
               </a:defRPr>
             </a:pPr>
             <a:r>
-              <a:t>• การกำหนดรั้วพิกัดเสมือน (Virtual Geofences)</a:t>
-            </a:r>
-          </a:p>
-          <a:p>
-            <a:pPr>
-              <a:spcAft>
-                <a:spcPts val="1000"/>
-              </a:spcAft>
-              <a:defRPr sz="1200">
-                <a:solidFill>
-                  <a:srgbClr val="14181B"/>
-                </a:solidFill>
-                <a:latin typeface="Segoe UI"/>
-              </a:defRPr>
-            </a:pPr>
-            <a:r>
-              <a:t>กำหนดพื้นที่พิกัดจำลองล้อมรอบจุดท่องเที่ยวสำคัญ เมื่อยานพาหนะเข้าสู่พื้นที่ ระบบจะระบุตำแหน่งโดยอัตโนมัติ</a:t>
-            </a:r>
-          </a:p>
-          <a:p>
-            <a:pPr>
-              <a:defRPr sz="1400" b="1">
-                <a:solidFill>
-                  <a:srgbClr val="134074"/>
-                </a:solidFill>
-                <a:latin typeface="Segoe UI"/>
-              </a:defRPr>
-            </a:pPr>
-            <a:r>
-              <a:t>• ระบบมัลติมีเดียและข้อมูลพรรณไม้อัตโนมัติ</a:t>
-            </a:r>
-          </a:p>
-          <a:p>
-            <a:pPr>
-              <a:spcAft>
-                <a:spcPts val="1000"/>
-              </a:spcAft>
-              <a:defRPr sz="1200">
-                <a:solidFill>
-                  <a:srgbClr val="14181B"/>
-                </a:solidFill>
-                <a:latin typeface="Segoe UI"/>
-              </a:defRPr>
-            </a:pPr>
-            <a:r>
-              <a:t>ส่งมอบข้อมูลความรู้ พันธุ์ไม้เด่นประจำโซน และประวัติความเป็นมา แสดงผลขึ้นบนหน้าจอตามจุดที่ยืนอยู่จริง</a:t>
-            </a:r>
-          </a:p>
-          <a:p>
-            <a:pPr>
-              <a:defRPr sz="1400" b="1">
-                <a:solidFill>
-                  <a:srgbClr val="134074"/>
-                </a:solidFill>
-                <a:latin typeface="Segoe UI"/>
-              </a:defRPr>
-            </a:pPr>
-            <a:r>
-              <a:t>• การแนะนำเส้นทางที่เหมาะสม (Smart Route)</a:t>
-            </a:r>
-          </a:p>
-          <a:p>
-            <a:pPr>
-              <a:spcAft>
-                <a:spcPts val="1000"/>
-              </a:spcAft>
-              <a:defRPr sz="1200">
-                <a:solidFill>
-                  <a:srgbClr val="14181B"/>
-                </a:solidFill>
-                <a:latin typeface="Segoe UI"/>
-              </a:defRPr>
-            </a:pPr>
-            <a:r>
-              <a:t>แนะนำเส้นทางท่องเที่ยวที่เหมาะสมตามเวลาที่มี เช่น เส้นทาง 1 ชั่วโมง หรือเส้นทางเจาะลึก 3 ชั่วโมง</a:t>
+              <a:t>• จุดเด่น : ควบคุมความหนาแน่นในจุดท่องเที่ยวหลัก</a:t>
             </a:r>
           </a:p>
         </p:txBody>
@@ -11738,8 +12478,8 @@
         </p:nvSpPr>
         <p:spPr>
           <a:xfrm>
-            <a:off x="6217920" y="1691640"/>
-            <a:ext cx="5120640" cy="4480560"/>
+            <a:off x="4389120" y="1691640"/>
+            <a:ext cx="3328416" cy="4480560"/>
           </a:xfrm>
           <a:prstGeom prst="roundRect">
             <a:avLst/>
@@ -11783,8 +12523,8 @@
         </p:nvSpPr>
         <p:spPr>
           <a:xfrm>
-            <a:off x="6492240" y="1920240"/>
-            <a:ext cx="4572000" cy="4023360"/>
+            <a:off x="4617720" y="1920240"/>
+            <a:ext cx="2871216" cy="4023360"/>
           </a:xfrm>
           <a:prstGeom prst="rect">
             <a:avLst/>
@@ -11799,7 +12539,23 @@
           <a:p>
             <a:pPr>
               <a:spcAft>
-                <a:spcPts val="1400"/>
+                <a:spcPts val="400"/>
+              </a:spcAft>
+              <a:defRPr sz="1100" b="1">
+                <a:solidFill>
+                  <a:srgbClr val="52B788"/>
+                </a:solidFill>
+                <a:latin typeface="Segoe UI"/>
+              </a:defRPr>
+            </a:pPr>
+            <a:r>
+              <a:t>การแสดงผลข้อมูลรอบด้าน</a:t>
+            </a:r>
+          </a:p>
+          <a:p>
+            <a:pPr>
+              <a:spcAft>
+                <a:spcPts val="1200"/>
               </a:spcAft>
               <a:defRPr sz="1700" b="1">
                 <a:solidFill>
@@ -11809,28 +12565,15 @@
               </a:defRPr>
             </a:pPr>
             <a:r>
-              <a:t>จุดแลนด์มาร์กสำคัญที่เชื่อมโยงในระบบ</a:t>
-            </a:r>
-          </a:p>
-          <a:p>
-            <a:pPr>
-              <a:defRPr sz="1350" b="1">
-                <a:solidFill>
-                  <a:srgbClr val="2D6A4F"/>
-                </a:solidFill>
-                <a:latin typeface="Segoe UI"/>
-              </a:defRPr>
-            </a:pPr>
-            <a:r>
-              <a:t>1. ทางเดินเหนือเรือนยอดไม้ (Canopy Walkway)</a:t>
-            </a:r>
-          </a:p>
-          <a:p>
-            <a:pPr>
-              <a:spcAft>
-                <a:spcPts val="800"/>
-              </a:spcAft>
-              <a:defRPr sz="1150">
+              <a:t>Omnichannel Display System</a:t>
+            </a:r>
+          </a:p>
+          <a:p>
+            <a:pPr>
+              <a:spcAft>
+                <a:spcPts val="1600"/>
+              </a:spcAft>
+              <a:defRPr sz="1250">
                 <a:solidFill>
                   <a:srgbClr val="14181B"/>
                 </a:solidFill>
@@ -11838,28 +12581,136 @@
               </a:defRPr>
             </a:pPr>
             <a:r>
-              <a:t>ทางเดินลอยฟ้าศึกษาธรรมชาติเรือนยอดไม้ที่ยาวที่สุด นำเสนอข้อมูลพรรณไม้ระดับเรือนยอดและทัศนียภาพป่าดอยแม่ริม</a:t>
-            </a:r>
-          </a:p>
-          <a:p>
-            <a:pPr>
-              <a:defRPr sz="1350" b="1">
-                <a:solidFill>
-                  <a:srgbClr val="2D6A4F"/>
-                </a:solidFill>
-                <a:latin typeface="Segoe UI"/>
-              </a:defRPr>
-            </a:pPr>
-            <a:r>
-              <a:t>2. กลุ่มอาคารเรือนกระจกเฉลิมพระเกียรติ</a:t>
-            </a:r>
-          </a:p>
-          <a:p>
-            <a:pPr>
-              <a:spcAft>
-                <a:spcPts val="800"/>
-              </a:spcAft>
-              <a:defRPr sz="1150">
+              <a:t>• Live Map บน Mobile Application : แสดงสัญลักษณ์ตำแหน่งรถเคลื่อนที่แบบ Real-time</a:t>
+            </a:r>
+            <a:br/>
+            <a:r>
+              <a:t>• Station Information Display : จอแสดงผลประจำสถานี แสดงตารางเวลาและจำนวนคิวรอ</a:t>
+            </a:r>
+            <a:br/>
+            <a:r>
+              <a:t>• ตู้ Kiosk : ให้บริการตรวจสอบสิทธิ์และสถานะคิวของผู้โดยสารได้อย่างโปร่งใส</a:t>
+            </a:r>
+          </a:p>
+          <a:p>
+            <a:pPr>
+              <a:defRPr sz="1200" b="1">
+                <a:solidFill>
+                  <a:srgbClr val="134074"/>
+                </a:solidFill>
+                <a:latin typeface="Segoe UI"/>
+              </a:defRPr>
+            </a:pPr>
+            <a:r>
+              <a:t>• จุดเด่น : ข้อมูลชัดเจน เข้าถึงได้จากทุกจุดบริการ</a:t>
+            </a:r>
+          </a:p>
+        </p:txBody>
+      </p:sp>
+      <p:sp>
+        <p:nvSpPr>
+          <p:cNvPr id="9" name="Rounded Rectangle 8"/>
+          <p:cNvSpPr/>
+          <p:nvPr/>
+        </p:nvSpPr>
+        <p:spPr>
+          <a:xfrm>
+            <a:off x="8046720" y="1691640"/>
+            <a:ext cx="3328416" cy="4480560"/>
+          </a:xfrm>
+          <a:prstGeom prst="roundRect">
+            <a:avLst/>
+          </a:prstGeom>
+          <a:solidFill>
+            <a:srgbClr val="FFFFFF"/>
+          </a:solidFill>
+          <a:ln w="15240">
+            <a:solidFill>
+              <a:srgbClr val="D2E1DA"/>
+            </a:solidFill>
+          </a:ln>
+        </p:spPr>
+        <p:style>
+          <a:lnRef idx="1">
+            <a:schemeClr val="accent1"/>
+          </a:lnRef>
+          <a:fillRef idx="3">
+            <a:schemeClr val="accent1"/>
+          </a:fillRef>
+          <a:effectRef idx="2">
+            <a:schemeClr val="accent1"/>
+          </a:effectRef>
+          <a:fontRef idx="minor">
+            <a:schemeClr val="lt1"/>
+          </a:fontRef>
+        </p:style>
+        <p:txBody>
+          <a:bodyPr rtlCol="0" anchor="ctr"/>
+          <a:lstStyle/>
+          <a:p>
+            <a:pPr algn="ctr"/>
+          </a:p>
+        </p:txBody>
+      </p:sp>
+      <p:sp>
+        <p:nvSpPr>
+          <p:cNvPr id="10" name="TextBox 9"/>
+          <p:cNvSpPr txBox="1"/>
+          <p:nvPr/>
+        </p:nvSpPr>
+        <p:spPr>
+          <a:xfrm>
+            <a:off x="8275320" y="1920240"/>
+            <a:ext cx="2871216" cy="4023360"/>
+          </a:xfrm>
+          <a:prstGeom prst="rect">
+            <a:avLst/>
+          </a:prstGeom>
+          <a:noFill/>
+        </p:spPr>
+        <p:txBody>
+          <a:bodyPr wrap="square">
+            <a:spAutoFit/>
+          </a:bodyPr>
+          <a:lstStyle/>
+          <a:p>
+            <a:pPr>
+              <a:spcAft>
+                <a:spcPts val="400"/>
+              </a:spcAft>
+              <a:defRPr sz="1100" b="1">
+                <a:solidFill>
+                  <a:srgbClr val="52B788"/>
+                </a:solidFill>
+                <a:latin typeface="Segoe UI"/>
+              </a:defRPr>
+            </a:pPr>
+            <a:r>
+              <a:t>ระบบแจ้งเตือนล่วงหน้า</a:t>
+            </a:r>
+          </a:p>
+          <a:p>
+            <a:pPr>
+              <a:spcAft>
+                <a:spcPts val="1200"/>
+              </a:spcAft>
+              <a:defRPr sz="1700" b="1">
+                <a:solidFill>
+                  <a:srgbClr val="1B4332"/>
+                </a:solidFill>
+                <a:latin typeface="Segoe UI"/>
+              </a:defRPr>
+            </a:pPr>
+            <a:r>
+              <a:t>Proactive Push Notification</a:t>
+            </a:r>
+          </a:p>
+          <a:p>
+            <a:pPr>
+              <a:spcAft>
+                <a:spcPts val="1600"/>
+              </a:spcAft>
+              <a:defRPr sz="1250">
                 <a:solidFill>
                   <a:srgbClr val="14181B"/>
                 </a:solidFill>
@@ -11867,65 +12718,20 @@
               </a:defRPr>
             </a:pPr>
             <a:r>
-              <a:t>รวบรวมพืชทนแล้ง พืชป่าดงดิบ พืชกินแมลง และบัวนานาชนิด นำเสนอข้อมูลความรู้ทางพฤกษศาสตร์เชิงลึก</a:t>
-            </a:r>
-          </a:p>
-          <a:p>
-            <a:pPr>
-              <a:defRPr sz="1350" b="1">
-                <a:solidFill>
-                  <a:srgbClr val="2D6A4F"/>
-                </a:solidFill>
-                <a:latin typeface="Segoe UI"/>
-              </a:defRPr>
-            </a:pPr>
-            <a:r>
-              <a:t>3. พิพิธภัณฑ์ธรรมชาติวิทยา</a:t>
-            </a:r>
-          </a:p>
-          <a:p>
-            <a:pPr>
-              <a:spcAft>
-                <a:spcPts val="800"/>
-              </a:spcAft>
-              <a:defRPr sz="1150">
-                <a:solidFill>
-                  <a:srgbClr val="14181B"/>
-                </a:solidFill>
-                <a:latin typeface="Segoe UI"/>
-              </a:defRPr>
-            </a:pPr>
-            <a:r>
-              <a:t>แหล่งเรียนรู้และนิทรรศการถาวรด้านความหลากหลายทางชีวภาพ เหมาะสำหรับการเรียนรู้ของนักเรียนและครอบครัว</a:t>
-            </a:r>
-          </a:p>
-          <a:p>
-            <a:pPr>
-              <a:defRPr sz="1350" b="1">
-                <a:solidFill>
-                  <a:srgbClr val="2D6A4F"/>
-                </a:solidFill>
-                <a:latin typeface="Segoe UI"/>
-              </a:defRPr>
-            </a:pPr>
-            <a:r>
-              <a:t>4. ลานกิจกรรมและจุดพักผ่อนธรรมชาติ</a:t>
-            </a:r>
-          </a:p>
-          <a:p>
-            <a:pPr>
-              <a:spcAft>
-                <a:spcPts val="800"/>
-              </a:spcAft>
-              <a:defRPr sz="1150">
-                <a:solidFill>
-                  <a:srgbClr val="14181B"/>
-                </a:solidFill>
-                <a:latin typeface="Segoe UI"/>
-              </a:defRPr>
-            </a:pPr>
-            <a:r>
-              <a:t>พื้นที่ศึกษาธรรมชาติเชิงอนุรักษ์ จุดชมทัศนียภาพ และพื้นที่จัดกิจกรรมสิ่งแวดล้อมศึกษา</a:t>
+              <a:t>เมื่อยานพาหนะเข้าใกล้สถานีเป้าหมายในระยะที่กำหนด (เช่น ระยะเวลา 3 นาที หรือระยะทาง 500 เมตร) ระบบจะส่งข้อความแจ้งเตือนผ่าน Mobile Application หรือ LINE เพื่อให้นักท่องเที่ยวเตรียมตัวขึ้นรถได้อย่างสะดวก</a:t>
+            </a:r>
+          </a:p>
+          <a:p>
+            <a:pPr>
+              <a:defRPr sz="1200" b="1">
+                <a:solidFill>
+                  <a:srgbClr val="134074"/>
+                </a:solidFill>
+                <a:latin typeface="Segoe UI"/>
+              </a:defRPr>
+            </a:pPr>
+            <a:r>
+              <a:t>• จุดเด่น : ลดเวลาการยืนรอคอยบริเวณสถานี</a:t>
             </a:r>
           </a:p>
         </p:txBody>

--- a/qsbg_smart_tour_presentation_large_font.pptx
+++ b/qsbg_smart_tour_presentation_large_font.pptx
@@ -674,7 +674,7 @@
           </a:p>
           <a:p>
             <a:r>
-              <a:t>แผนงาน 9 เดือน แบ่งเป็น 3 ระยะชัดเจน: Phase 1 สร้างฐานราก Core Foundation, Phase 2 ระบบ Realtime &amp; Mobile App, และ Phase 3 ฟังก์ชันขั้นสูงและการส่งมอบงานสมบูรณ์ มั่นใจได้ว่าส่งมอบตรงเวลาแน่นอนครับ</a:t>
+              <a:t>แผนงานแบ่งเป็น 3 ระยะชัดเจน (กรอบเวลา ..... เดือน): Phase 1 สร้างฐานราก Core Foundation, Phase 2 ระบบ Realtime &amp; Mobile App, และ Phase 3 ฟังก์ชันขั้นสูงและการส่งมอบงานสมบูรณ์ มั่นใจได้ว่าส่งมอบตรงเวลาแน่นอนครับ</a:t>
             </a:r>
           </a:p>
         </p:txBody>
@@ -4679,7 +4679,7 @@
               </a:defRPr>
             </a:pPr>
             <a:r>
-              <a:t>แผนงานการดำเนินงาน 3 ระยะ (กรอบเวลา 9 เดือน) | เอกสารประกอบการนำเสนอเชิงบริหาร</a:t>
+              <a:t>แผนงานการดำเนินงาน 3 ระยะ (กรอบเวลา ..... เดือน) | เอกสารประกอบการนำเสนอเชิงบริหาร</a:t>
             </a:r>
           </a:p>
         </p:txBody>
@@ -5438,7 +5438,7 @@
               </a:defRPr>
             </a:pPr>
             <a:r>
-              <a:t>แผนการดำเนินงานและส่งมอบโครงการ (กรอบเวลา 9 เดือน)</a:t>
+              <a:t>แผนการดำเนินงานและส่งมอบโครงการ (กรอบเวลา ..... เดือน)</a:t>
             </a:r>
           </a:p>
         </p:txBody>
@@ -5601,7 +5601,7 @@
               </a:defRPr>
             </a:pPr>
             <a:r>
-              <a:t>ระยะที่ 1 (เดือนที่ 1 - 3)</a:t>
+              <a:t>ระยะที่ 1 (Phase 1)</a:t>
             </a:r>
           </a:p>
           <a:p>
@@ -5853,7 +5853,7 @@
               </a:defRPr>
             </a:pPr>
             <a:r>
-              <a:t>ระยะที่ 2 (เดือนที่ 4 - 6)</a:t>
+              <a:t>ระยะที่ 2 (Phase 2)</a:t>
             </a:r>
           </a:p>
           <a:p>
@@ -6105,7 +6105,7 @@
               </a:defRPr>
             </a:pPr>
             <a:r>
-              <a:t>ระยะที่ 3 (เดือนที่ 7 - 9)</a:t>
+              <a:t>ระยะที่ 3 (Phase 3)</a:t>
             </a:r>
           </a:p>
           <a:p>

--- a/qsbg_smart_tour_presentation_large_font.pptx
+++ b/qsbg_smart_tour_presentation_large_font.pptx
@@ -599,7 +599,7 @@
           </a:p>
           <a:p>
             <a:r>
-              <a:t>เทคโนโลยี Geofences ตอบโจทย์การเป็นสวนพฤกษศาสตร์เพื่อการเรียนรู้อย่างแท้จริงครับ เมื่อรถเข้าสู่พิกัดสำคัญ ระบบจะส่งข้อมูลความรู้และมัลติมีเดียขึ้นมาให้ชม เสมือนมีมัคคุเทศก์ส่วนตัวตลอดเส้นทางครับ</a:t>
+              <a:t>เทคโนโลยี Geofences ตอบโจทย์สวนพฤกษศาสตร์อย่างยิ่งครับ เมื่อรถเข้าพิกัดสำคัญ ระบบจะส่งข้อความแจ้งเตือน แนะนำพรรณไม้เด่น ประวัติความเป็นมา และข้อควรระวัง เสมือนมีมัคคุเทศก์ส่วนตัวตลอดเส้นทางครับ</a:t>
             </a:r>
           </a:p>
         </p:txBody>
@@ -824,7 +824,7 @@
           </a:p>
           <a:p>
             <a:r>
-              <a:t>สรุปในตอนท้าย โครงการพัฒนาระบบจัดการรถนำเที่ยวไฟฟ้า สวนพฤกษศาสตร์สมเด็จพระนางเจ้าสิริกิติ์ จะเป็นการผสานเทคโนโลยีสมัยใหม่เข้ากับธรรมชาติอย่างลงตัว ยกระดับการบริการ การจัดการ และความยั่งยืนในทุกมิติ ทางทีมงานมีความพร้อมทั้งด้านบุคลากรและเทคโนโลยีที่จะเริ่มดำเนินงานตามแผนงานระยะที่ 1 ทันทีครับ ขอขอบพระคุณคณะกรรมการทุกท่านเป็นอย่างสูงครับ</a:t>
+              <a:t>สรุปในตอนท้าย โครงการพัฒนาระบบจัดการรถนำเที่ยวไฟฟ้า สวนพฤกษศาสตร์สมเด็จพระนางเจ้าสิริกิติ์ เป็นการผสานเทคโนโลยีเข้ากับธรรมชาติอย่างลงตัว ยกระดับการบริการ การจัดการ และความยั่งยืนในทุกมิติ ทางทีมงานมีความพร้อมทั้งด้านบุคลากรและเทคโนโลยีที่จะดำเนินงานตามแผนงานระยะที่ 1 ทันทีครับ ขอขอบพระคุณคณะกรรมการทุกท่านเป็นอย่างสูงครับ</a:t>
             </a:r>
           </a:p>
         </p:txBody>
@@ -4606,7 +4606,7 @@
                 <a:solidFill>
                   <a:srgbClr val="52B788"/>
                 </a:solidFill>
-                <a:latin typeface="Segoe UI"/>
+                <a:latin typeface="Leelawadee UI"/>
               </a:defRPr>
             </a:pPr>
             <a:r>
@@ -4622,7 +4622,7 @@
                 <a:solidFill>
                   <a:srgbClr val="FFFFFF"/>
                 </a:solidFill>
-                <a:latin typeface="Segoe UI"/>
+                <a:latin typeface="Leelawadee UI"/>
               </a:defRPr>
             </a:pPr>
             <a:r>
@@ -4642,7 +4642,7 @@
                 <a:solidFill>
                   <a:srgbClr val="D8F3DC"/>
                 </a:solidFill>
-                <a:latin typeface="Segoe UI"/>
+                <a:latin typeface="Leelawadee UI"/>
               </a:defRPr>
             </a:pPr>
             <a:r>
@@ -4658,7 +4658,7 @@
                 <a:solidFill>
                   <a:srgbClr val="B7E4C7"/>
                 </a:solidFill>
-                <a:latin typeface="Segoe UI"/>
+                <a:latin typeface="Leelawadee UI"/>
               </a:defRPr>
             </a:pPr>
             <a:r>
@@ -4675,7 +4675,7 @@
                 <a:solidFill>
                   <a:srgbClr val="95D5B2"/>
                 </a:solidFill>
-                <a:latin typeface="Segoe UI"/>
+                <a:latin typeface="Leelawadee UI"/>
               </a:defRPr>
             </a:pPr>
             <a:r>
@@ -4783,7 +4783,7 @@
                 <a:solidFill>
                   <a:srgbClr val="FFFFFF"/>
                 </a:solidFill>
-                <a:latin typeface="Segoe UI"/>
+                <a:latin typeface="Leelawadee UI"/>
               </a:defRPr>
             </a:pPr>
             <a:r>
@@ -4799,7 +4799,7 @@
                 <a:solidFill>
                   <a:srgbClr val="D8F3DC"/>
                 </a:solidFill>
-                <a:latin typeface="Segoe UI"/>
+                <a:latin typeface="Leelawadee UI"/>
               </a:defRPr>
             </a:pPr>
             <a:r>
@@ -4815,7 +4815,7 @@
                 <a:solidFill>
                   <a:srgbClr val="D8F3DC"/>
                 </a:solidFill>
-                <a:latin typeface="Segoe UI"/>
+                <a:latin typeface="Leelawadee UI"/>
               </a:defRPr>
             </a:pPr>
             <a:r>
@@ -4831,7 +4831,7 @@
                 <a:solidFill>
                   <a:srgbClr val="D8F3DC"/>
                 </a:solidFill>
-                <a:latin typeface="Segoe UI"/>
+                <a:latin typeface="Leelawadee UI"/>
               </a:defRPr>
             </a:pPr>
             <a:r>
@@ -4893,7 +4893,7 @@
                 <a:solidFill>
                   <a:srgbClr val="52B788"/>
                 </a:solidFill>
-                <a:latin typeface="Segoe UI"/>
+                <a:latin typeface="Leelawadee UI"/>
               </a:defRPr>
             </a:pPr>
             <a:r>
@@ -4929,11 +4929,11 @@
                 <a:solidFill>
                   <a:srgbClr val="1B4332"/>
                 </a:solidFill>
-                <a:latin typeface="Segoe UI"/>
-              </a:defRPr>
-            </a:pPr>
-            <a:r>
-              <a:t>ระบบแนะนำแหล่งท่องเที่ยวตามพิกัดภูมิศาสตร์</a:t>
+                <a:latin typeface="Leelawadee UI"/>
+              </a:defRPr>
+            </a:pPr>
+            <a:r>
+              <a:t>ระบบแนะนำท่องเที่ยวตามพิกัดอัจฉริยะ</a:t>
             </a:r>
           </a:p>
         </p:txBody>
@@ -4965,11 +4965,11 @@
                 <a:solidFill>
                   <a:srgbClr val="5A646E"/>
                 </a:solidFill>
-                <a:latin typeface="Segoe UI"/>
-              </a:defRPr>
-            </a:pPr>
-            <a:r>
-              <a:t>การประยุกต์ใช้เทคโนโลยี Geofences เพื่อสนับสนุนการท่องเที่ยวเชิงเรียนรู้</a:t>
+                <a:latin typeface="Leelawadee UI"/>
+              </a:defRPr>
+            </a:pPr>
+            <a:r>
+              <a:t>การประยุกต์เทคโนโลยี Geofences เพื่อสนับสนุนการท่องเที่ยวเชิงนิเวศ</a:t>
             </a:r>
           </a:p>
         </p:txBody>
@@ -4983,7 +4983,7 @@
         <p:spPr>
           <a:xfrm>
             <a:off x="731520" y="1691640"/>
-            <a:ext cx="5120640" cy="4480560"/>
+            <a:ext cx="4846320" cy="4572000"/>
           </a:xfrm>
           <a:prstGeom prst="roundRect">
             <a:avLst/>
@@ -5027,8 +5027,8 @@
         </p:nvSpPr>
         <p:spPr>
           <a:xfrm>
-            <a:off x="1005840" y="1920240"/>
-            <a:ext cx="4572000" cy="4023360"/>
+            <a:off x="960120" y="1874519"/>
+            <a:ext cx="4389120" cy="4114800"/>
           </a:xfrm>
           <a:prstGeom prst="rect">
             <a:avLst/>
@@ -5049,7 +5049,7 @@
                 <a:solidFill>
                   <a:srgbClr val="1B4332"/>
                 </a:solidFill>
-                <a:latin typeface="Segoe UI"/>
+                <a:latin typeface="Leelawadee UI"/>
               </a:defRPr>
             </a:pPr>
             <a:r>
@@ -5062,7 +5062,7 @@
                 <a:solidFill>
                   <a:srgbClr val="134074"/>
                 </a:solidFill>
-                <a:latin typeface="Segoe UI"/>
+                <a:latin typeface="Leelawadee UI"/>
               </a:defRPr>
             </a:pPr>
             <a:r>
@@ -5078,11 +5078,11 @@
                 <a:solidFill>
                   <a:srgbClr val="14181B"/>
                 </a:solidFill>
-                <a:latin typeface="Segoe UI"/>
-              </a:defRPr>
-            </a:pPr>
-            <a:r>
-              <a:t>กำหนดพื้นที่พิกัดจำลองล้อมรอบจุดท่องเที่ยวสำคัญ เมื่อยานพาหนะเข้าสู่พื้นที่ ระบบจะระบุตำแหน่งโดยอัตโนมัติ</a:t>
+                <a:latin typeface="Leelawadee UI"/>
+              </a:defRPr>
+            </a:pPr>
+            <a:r>
+              <a:t>กำหนดพื้นที่พิกัดล้อมรอบจุดท่องเที่ยวสำคัญ เมื่อยานพาหนะหรือนักท่องเที่ยวผ่านเข้ามา ระบบจะระบุตำแหน่งอัตโนมัติ</a:t>
             </a:r>
           </a:p>
           <a:p>
@@ -5091,11 +5091,11 @@
                 <a:solidFill>
                   <a:srgbClr val="134074"/>
                 </a:solidFill>
-                <a:latin typeface="Segoe UI"/>
-              </a:defRPr>
-            </a:pPr>
-            <a:r>
-              <a:t>• ระบบมัลติมีเดียและข้อมูลพรรณไม้อัตโนมัติ</a:t>
+                <a:latin typeface="Leelawadee UI"/>
+              </a:defRPr>
+            </a:pPr>
+            <a:r>
+              <a:t>• ระบบส่งต่อข้อมูลพรรณไม้อัตโนมัติ</a:t>
             </a:r>
           </a:p>
           <a:p>
@@ -5107,11 +5107,11 @@
                 <a:solidFill>
                   <a:srgbClr val="14181B"/>
                 </a:solidFill>
-                <a:latin typeface="Segoe UI"/>
-              </a:defRPr>
-            </a:pPr>
-            <a:r>
-              <a:t>ส่งมอบข้อมูลความรู้ พันธุ์ไม้เด่นประจำโซน และประวัติความเป็นมา แสดงผลขึ้นบนหน้าจอตามจุดที่ยืนอยู่จริง</a:t>
+                <a:latin typeface="Leelawadee UI"/>
+              </a:defRPr>
+            </a:pPr>
+            <a:r>
+              <a:t>ส่งข้อความแนะนำพันธุ์ไม้เด่นประจำโซน ข้อมูลนิเวศวิทยา และประวัติความเป็นมา แสดงผลขึ้นบนหน้าจอมือถือหรือแท็บเล็ตประจำรถ</a:t>
             </a:r>
           </a:p>
           <a:p>
@@ -5120,11 +5120,11 @@
                 <a:solidFill>
                   <a:srgbClr val="134074"/>
                 </a:solidFill>
-                <a:latin typeface="Segoe UI"/>
-              </a:defRPr>
-            </a:pPr>
-            <a:r>
-              <a:t>• การแนะนำเส้นทางที่เหมาะสม (Smart Route)</a:t>
+                <a:latin typeface="Leelawadee UI"/>
+              </a:defRPr>
+            </a:pPr>
+            <a:r>
+              <a:t>• แนะนำเส้นทางท่องเที่ยว (Smart Route)</a:t>
             </a:r>
           </a:p>
           <a:p>
@@ -5136,11 +5136,11 @@
                 <a:solidFill>
                   <a:srgbClr val="14181B"/>
                 </a:solidFill>
-                <a:latin typeface="Segoe UI"/>
-              </a:defRPr>
-            </a:pPr>
-            <a:r>
-              <a:t>แนะนำเส้นทางท่องเที่ยวที่เหมาะสมตามเวลาที่มี เช่น เส้นทาง 1 ชั่วโมง หรือเส้นทางเจาะลึก 3 ชั่วโมง</a:t>
+                <a:latin typeface="Leelawadee UI"/>
+              </a:defRPr>
+            </a:pPr>
+            <a:r>
+              <a:t>แนะนำเส้นทางท่องเที่ยวที่เหมาะสมตามเวลา เช่น ทริปสั้น 1 ชม. หรือทริปเจาะลึก 3 ชม. ตอบโจทย์ผู้รักธรรมชาติ</a:t>
             </a:r>
           </a:p>
         </p:txBody>
@@ -5153,8 +5153,8 @@
         </p:nvSpPr>
         <p:spPr>
           <a:xfrm>
-            <a:off x="6217920" y="1691640"/>
-            <a:ext cx="5120640" cy="4480560"/>
+            <a:off x="5760720" y="1691640"/>
+            <a:ext cx="5760720" cy="4572000"/>
           </a:xfrm>
           <a:prstGeom prst="roundRect">
             <a:avLst/>
@@ -5198,8 +5198,8 @@
         </p:nvSpPr>
         <p:spPr>
           <a:xfrm>
-            <a:off x="6492240" y="1920240"/>
-            <a:ext cx="4572000" cy="4023360"/>
+            <a:off x="5989320" y="1828800"/>
+            <a:ext cx="5303520" cy="2514600"/>
           </a:xfrm>
           <a:prstGeom prst="rect">
             <a:avLst/>
@@ -5214,26 +5214,26 @@
           <a:p>
             <a:pPr>
               <a:spcAft>
-                <a:spcPts val="1400"/>
-              </a:spcAft>
-              <a:defRPr sz="1700" b="1">
+                <a:spcPts val="600"/>
+              </a:spcAft>
+              <a:defRPr sz="1650" b="1">
                 <a:solidFill>
                   <a:srgbClr val="1B4332"/>
                 </a:solidFill>
-                <a:latin typeface="Segoe UI"/>
-              </a:defRPr>
-            </a:pPr>
-            <a:r>
-              <a:t>จุดแลนด์มาร์กสำคัญที่เชื่อมโยงในระบบ</a:t>
-            </a:r>
-          </a:p>
-          <a:p>
-            <a:pPr>
-              <a:defRPr sz="1350" b="1">
+                <a:latin typeface="Leelawadee UI"/>
+              </a:defRPr>
+            </a:pPr>
+            <a:r>
+              <a:t>จุดแลนด์มาร์กสำคัญในระบบ</a:t>
+            </a:r>
+          </a:p>
+          <a:p>
+            <a:pPr>
+              <a:defRPr sz="1200" b="1">
                 <a:solidFill>
                   <a:srgbClr val="2D6A4F"/>
                 </a:solidFill>
-                <a:latin typeface="Segoe UI"/>
+                <a:latin typeface="Leelawadee UI"/>
               </a:defRPr>
             </a:pPr>
             <a:r>
@@ -5243,55 +5243,55 @@
           <a:p>
             <a:pPr>
               <a:spcAft>
-                <a:spcPts val="800"/>
-              </a:spcAft>
-              <a:defRPr sz="1150">
+                <a:spcPts val="400"/>
+              </a:spcAft>
+              <a:defRPr sz="1050">
                 <a:solidFill>
                   <a:srgbClr val="14181B"/>
                 </a:solidFill>
-                <a:latin typeface="Segoe UI"/>
-              </a:defRPr>
-            </a:pPr>
-            <a:r>
-              <a:t>ทางเดินลอยฟ้าศึกษาธรรมชาติเรือนยอดไม้ที่ยาวที่สุด นำเสนอข้อมูลพรรณไม้ระดับเรือนยอดและทัศนียภาพป่าดอยแม่ริม</a:t>
-            </a:r>
-          </a:p>
-          <a:p>
-            <a:pPr>
-              <a:defRPr sz="1350" b="1">
+                <a:latin typeface="Leelawadee UI"/>
+              </a:defRPr>
+            </a:pPr>
+            <a:r>
+              <a:t>ทางเดินลอยฟ้าศึกษาธรรมชาติเรือนยอดไม้ที่ยาวที่สุด แนะนำข้อมูลพรรณไม้ยอดไม้และทัศนียภาพป่าดอย</a:t>
+            </a:r>
+          </a:p>
+          <a:p>
+            <a:pPr>
+              <a:defRPr sz="1200" b="1">
                 <a:solidFill>
                   <a:srgbClr val="2D6A4F"/>
                 </a:solidFill>
-                <a:latin typeface="Segoe UI"/>
-              </a:defRPr>
-            </a:pPr>
-            <a:r>
-              <a:t>2. กลุ่มอาคารเรือนกระจกเฉลิมพระเกียรติ</a:t>
-            </a:r>
-          </a:p>
-          <a:p>
-            <a:pPr>
-              <a:spcAft>
-                <a:spcPts val="800"/>
-              </a:spcAft>
-              <a:defRPr sz="1150">
+                <a:latin typeface="Leelawadee UI"/>
+              </a:defRPr>
+            </a:pPr>
+            <a:r>
+              <a:t>2. กลุ่มอาคารเรือนกระจก</a:t>
+            </a:r>
+          </a:p>
+          <a:p>
+            <a:pPr>
+              <a:spcAft>
+                <a:spcPts val="400"/>
+              </a:spcAft>
+              <a:defRPr sz="1050">
                 <a:solidFill>
                   <a:srgbClr val="14181B"/>
                 </a:solidFill>
-                <a:latin typeface="Segoe UI"/>
-              </a:defRPr>
-            </a:pPr>
-            <a:r>
-              <a:t>รวบรวมพืชทนแล้ง พืชป่าดงดิบ พืชกินแมลง และบัวนานาชนิด นำเสนอข้อมูลความรู้ทางพฤกษศาสตร์เชิงลึก</a:t>
-            </a:r>
-          </a:p>
-          <a:p>
-            <a:pPr>
-              <a:defRPr sz="1350" b="1">
+                <a:latin typeface="Leelawadee UI"/>
+              </a:defRPr>
+            </a:pPr>
+            <a:r>
+              <a:t>รวบรวมพืชทนแล้ง พืชป่าดิบชื้น พืชกินแมลง และบัวนานาชนิด แนะนำข้อมูลทางพฤกษศาสตร์เชิงลึก</a:t>
+            </a:r>
+          </a:p>
+          <a:p>
+            <a:pPr>
+              <a:defRPr sz="1200" b="1">
                 <a:solidFill>
                   <a:srgbClr val="2D6A4F"/>
                 </a:solidFill>
-                <a:latin typeface="Segoe UI"/>
+                <a:latin typeface="Leelawadee UI"/>
               </a:defRPr>
             </a:pPr>
             <a:r>
@@ -5301,26 +5301,26 @@
           <a:p>
             <a:pPr>
               <a:spcAft>
-                <a:spcPts val="800"/>
-              </a:spcAft>
-              <a:defRPr sz="1150">
+                <a:spcPts val="400"/>
+              </a:spcAft>
+              <a:defRPr sz="1050">
                 <a:solidFill>
                   <a:srgbClr val="14181B"/>
                 </a:solidFill>
-                <a:latin typeface="Segoe UI"/>
-              </a:defRPr>
-            </a:pPr>
-            <a:r>
-              <a:t>แหล่งเรียนรู้และนิทรรศการถาวรด้านความหลากหลายทางชีวภาพ เหมาะสำหรับการเรียนรู้ของนักเรียนและครอบครัว</a:t>
-            </a:r>
-          </a:p>
-          <a:p>
-            <a:pPr>
-              <a:defRPr sz="1350" b="1">
+                <a:latin typeface="Leelawadee UI"/>
+              </a:defRPr>
+            </a:pPr>
+            <a:r>
+              <a:t>แหล่งเรียนรู้และนิทรรศการความหลากหลายทางชีวภาพ เหมาะสำหรับกลุ่มนักเรียนและครอบครัว</a:t>
+            </a:r>
+          </a:p>
+          <a:p>
+            <a:pPr>
+              <a:defRPr sz="1200" b="1">
                 <a:solidFill>
                   <a:srgbClr val="2D6A4F"/>
                 </a:solidFill>
-                <a:latin typeface="Segoe UI"/>
+                <a:latin typeface="Leelawadee UI"/>
               </a:defRPr>
             </a:pPr>
             <a:r>
@@ -5330,17 +5330,254 @@
           <a:p>
             <a:pPr>
               <a:spcAft>
-                <a:spcPts val="800"/>
-              </a:spcAft>
-              <a:defRPr sz="1150">
+                <a:spcPts val="400"/>
+              </a:spcAft>
+              <a:defRPr sz="1050">
                 <a:solidFill>
                   <a:srgbClr val="14181B"/>
                 </a:solidFill>
-                <a:latin typeface="Segoe UI"/>
-              </a:defRPr>
-            </a:pPr>
-            <a:r>
-              <a:t>พื้นที่ศึกษาธรรมชาติเชิงอนุรักษ์ จุดชมทัศนียภาพ และพื้นที่จัดกิจกรรมสิ่งแวดล้อมศึกษา</a:t>
+                <a:latin typeface="Leelawadee UI"/>
+              </a:defRPr>
+            </a:pPr>
+            <a:r>
+              <a:t>พื้นที่ศึกษาธรรมชาติริมลำธาร จุดชมวิวทิวทัศน์ และพื้นที่จัดกิจกรรมสิ่งแวดล้อมศึกษา</a:t>
+            </a:r>
+          </a:p>
+        </p:txBody>
+      </p:sp>
+      <p:pic>
+        <p:nvPicPr>
+          <p:cNvPr id="9" name="Picture 8" descr="landmark_canopy_walkway.jpg"/>
+          <p:cNvPicPr>
+            <a:picLocks noChangeAspect="1"/>
+          </p:cNvPicPr>
+          <p:nvPr/>
+        </p:nvPicPr>
+        <p:blipFill>
+          <a:blip r:embed="rId2"/>
+          <a:stretch>
+            <a:fillRect/>
+          </a:stretch>
+        </p:blipFill>
+        <p:spPr>
+          <a:xfrm>
+            <a:off x="5989320" y="4434840"/>
+            <a:ext cx="1691640" cy="1115568"/>
+          </a:xfrm>
+          <a:prstGeom prst="rect">
+            <a:avLst/>
+          </a:prstGeom>
+        </p:spPr>
+      </p:pic>
+      <p:sp>
+        <p:nvSpPr>
+          <p:cNvPr id="10" name="Rounded Rectangle 9"/>
+          <p:cNvSpPr/>
+          <p:nvPr/>
+        </p:nvSpPr>
+        <p:spPr>
+          <a:xfrm>
+            <a:off x="5989320" y="5614416"/>
+            <a:ext cx="1691640" cy="292608"/>
+          </a:xfrm>
+          <a:prstGeom prst="roundRect">
+            <a:avLst/>
+          </a:prstGeom>
+          <a:solidFill>
+            <a:srgbClr val="EBF8F0"/>
+          </a:solidFill>
+          <a:ln w="10160">
+            <a:solidFill>
+              <a:srgbClr val="B7E4C7"/>
+            </a:solidFill>
+          </a:ln>
+        </p:spPr>
+        <p:style>
+          <a:lnRef idx="1">
+            <a:schemeClr val="accent1"/>
+          </a:lnRef>
+          <a:fillRef idx="3">
+            <a:schemeClr val="accent1"/>
+          </a:fillRef>
+          <a:effectRef idx="2">
+            <a:schemeClr val="accent1"/>
+          </a:effectRef>
+          <a:fontRef idx="minor">
+            <a:schemeClr val="lt1"/>
+          </a:fontRef>
+        </p:style>
+        <p:txBody>
+          <a:bodyPr rtlCol="0" anchor="ctr" wrap="none" lIns="0" tIns="0" rIns="0" bIns="0"/>
+          <a:lstStyle/>
+          <a:p>
+            <a:pPr algn="ctr">
+              <a:defRPr sz="900" b="1">
+                <a:solidFill>
+                  <a:srgbClr val="1B4332"/>
+                </a:solidFill>
+                <a:latin typeface="Tahoma"/>
+              </a:defRPr>
+            </a:pPr>
+            <a:r>
+              <a:t>Canopy Walkway</a:t>
+            </a:r>
+          </a:p>
+        </p:txBody>
+      </p:sp>
+      <p:pic>
+        <p:nvPicPr>
+          <p:cNvPr id="11" name="Picture 10" descr="landmark_glasshouse.jpg"/>
+          <p:cNvPicPr>
+            <a:picLocks noChangeAspect="1"/>
+          </p:cNvPicPr>
+          <p:nvPr/>
+        </p:nvPicPr>
+        <p:blipFill>
+          <a:blip r:embed="rId3"/>
+          <a:stretch>
+            <a:fillRect/>
+          </a:stretch>
+        </p:blipFill>
+        <p:spPr>
+          <a:xfrm>
+            <a:off x="7845552" y="4434840"/>
+            <a:ext cx="1691640" cy="1115568"/>
+          </a:xfrm>
+          <a:prstGeom prst="rect">
+            <a:avLst/>
+          </a:prstGeom>
+        </p:spPr>
+      </p:pic>
+      <p:sp>
+        <p:nvSpPr>
+          <p:cNvPr id="12" name="Rounded Rectangle 11"/>
+          <p:cNvSpPr/>
+          <p:nvPr/>
+        </p:nvSpPr>
+        <p:spPr>
+          <a:xfrm>
+            <a:off x="7845552" y="5614416"/>
+            <a:ext cx="1691640" cy="292608"/>
+          </a:xfrm>
+          <a:prstGeom prst="roundRect">
+            <a:avLst/>
+          </a:prstGeom>
+          <a:solidFill>
+            <a:srgbClr val="EBF8F0"/>
+          </a:solidFill>
+          <a:ln w="10160">
+            <a:solidFill>
+              <a:srgbClr val="B7E4C7"/>
+            </a:solidFill>
+          </a:ln>
+        </p:spPr>
+        <p:style>
+          <a:lnRef idx="1">
+            <a:schemeClr val="accent1"/>
+          </a:lnRef>
+          <a:fillRef idx="3">
+            <a:schemeClr val="accent1"/>
+          </a:fillRef>
+          <a:effectRef idx="2">
+            <a:schemeClr val="accent1"/>
+          </a:effectRef>
+          <a:fontRef idx="minor">
+            <a:schemeClr val="lt1"/>
+          </a:fontRef>
+        </p:style>
+        <p:txBody>
+          <a:bodyPr rtlCol="0" anchor="ctr" wrap="none" lIns="0" tIns="0" rIns="0" bIns="0"/>
+          <a:lstStyle/>
+          <a:p>
+            <a:pPr algn="ctr">
+              <a:defRPr sz="900" b="1">
+                <a:solidFill>
+                  <a:srgbClr val="1B4332"/>
+                </a:solidFill>
+                <a:latin typeface="Tahoma"/>
+              </a:defRPr>
+            </a:pPr>
+            <a:r>
+              <a:t>กลุ่มอาคารเรือนกระจก</a:t>
+            </a:r>
+          </a:p>
+        </p:txBody>
+      </p:sp>
+      <p:pic>
+        <p:nvPicPr>
+          <p:cNvPr id="13" name="Picture 12" descr="landmark_museum.jpg"/>
+          <p:cNvPicPr>
+            <a:picLocks noChangeAspect="1"/>
+          </p:cNvPicPr>
+          <p:nvPr/>
+        </p:nvPicPr>
+        <p:blipFill>
+          <a:blip r:embed="rId4"/>
+          <a:stretch>
+            <a:fillRect/>
+          </a:stretch>
+        </p:blipFill>
+        <p:spPr>
+          <a:xfrm>
+            <a:off x="9701784" y="4434840"/>
+            <a:ext cx="1691640" cy="1115568"/>
+          </a:xfrm>
+          <a:prstGeom prst="rect">
+            <a:avLst/>
+          </a:prstGeom>
+        </p:spPr>
+      </p:pic>
+      <p:sp>
+        <p:nvSpPr>
+          <p:cNvPr id="14" name="Rounded Rectangle 13"/>
+          <p:cNvSpPr/>
+          <p:nvPr/>
+        </p:nvSpPr>
+        <p:spPr>
+          <a:xfrm>
+            <a:off x="9701784" y="5614416"/>
+            <a:ext cx="1691640" cy="292608"/>
+          </a:xfrm>
+          <a:prstGeom prst="roundRect">
+            <a:avLst/>
+          </a:prstGeom>
+          <a:solidFill>
+            <a:srgbClr val="EBF8F0"/>
+          </a:solidFill>
+          <a:ln w="10160">
+            <a:solidFill>
+              <a:srgbClr val="B7E4C7"/>
+            </a:solidFill>
+          </a:ln>
+        </p:spPr>
+        <p:style>
+          <a:lnRef idx="1">
+            <a:schemeClr val="accent1"/>
+          </a:lnRef>
+          <a:fillRef idx="3">
+            <a:schemeClr val="accent1"/>
+          </a:fillRef>
+          <a:effectRef idx="2">
+            <a:schemeClr val="accent1"/>
+          </a:effectRef>
+          <a:fontRef idx="minor">
+            <a:schemeClr val="lt1"/>
+          </a:fontRef>
+        </p:style>
+        <p:txBody>
+          <a:bodyPr rtlCol="0" anchor="ctr" wrap="none" lIns="0" tIns="0" rIns="0" bIns="0"/>
+          <a:lstStyle/>
+          <a:p>
+            <a:pPr algn="ctr">
+              <a:defRPr sz="900" b="1">
+                <a:solidFill>
+                  <a:srgbClr val="1B4332"/>
+                </a:solidFill>
+                <a:latin typeface="Tahoma"/>
+              </a:defRPr>
+            </a:pPr>
+            <a:r>
+              <a:t>พิพิธภัณฑ์ธรรมชาติวิทยา</a:t>
             </a:r>
           </a:p>
         </p:txBody>
@@ -5398,7 +5635,7 @@
                 <a:solidFill>
                   <a:srgbClr val="52B788"/>
                 </a:solidFill>
-                <a:latin typeface="Segoe UI"/>
+                <a:latin typeface="Leelawadee UI"/>
               </a:defRPr>
             </a:pPr>
             <a:r>
@@ -5434,7 +5671,7 @@
                 <a:solidFill>
                   <a:srgbClr val="1B4332"/>
                 </a:solidFill>
-                <a:latin typeface="Segoe UI"/>
+                <a:latin typeface="Leelawadee UI"/>
               </a:defRPr>
             </a:pPr>
             <a:r>
@@ -5470,7 +5707,7 @@
                 <a:solidFill>
                   <a:srgbClr val="5A646E"/>
                 </a:solidFill>
-                <a:latin typeface="Segoe UI"/>
+                <a:latin typeface="Leelawadee UI"/>
               </a:defRPr>
             </a:pPr>
             <a:r>
@@ -5597,7 +5834,7 @@
                 <a:solidFill>
                   <a:srgbClr val="0B2545"/>
                 </a:solidFill>
-                <a:latin typeface="Segoe UI"/>
+                <a:latin typeface="Leelawadee UI"/>
               </a:defRPr>
             </a:pPr>
             <a:r>
@@ -5610,7 +5847,7 @@
                 <a:solidFill>
                   <a:srgbClr val="1B4332"/>
                 </a:solidFill>
-                <a:latin typeface="Segoe UI"/>
+                <a:latin typeface="Leelawadee UI"/>
               </a:defRPr>
             </a:pPr>
             <a:r>
@@ -5626,7 +5863,7 @@
                 <a:solidFill>
                   <a:srgbClr val="5A646E"/>
                 </a:solidFill>
-                <a:latin typeface="Segoe UI"/>
+                <a:latin typeface="Leelawadee UI"/>
               </a:defRPr>
             </a:pPr>
             <a:r>
@@ -5642,7 +5879,7 @@
                 <a:solidFill>
                   <a:srgbClr val="14181B"/>
                 </a:solidFill>
-                <a:latin typeface="Segoe UI"/>
+                <a:latin typeface="Leelawadee UI"/>
               </a:defRPr>
             </a:pPr>
             <a:r>
@@ -5658,7 +5895,7 @@
                 <a:solidFill>
                   <a:srgbClr val="14181B"/>
                 </a:solidFill>
-                <a:latin typeface="Segoe UI"/>
+                <a:latin typeface="Leelawadee UI"/>
               </a:defRPr>
             </a:pPr>
             <a:r>
@@ -5674,7 +5911,7 @@
                 <a:solidFill>
                   <a:srgbClr val="14181B"/>
                 </a:solidFill>
-                <a:latin typeface="Segoe UI"/>
+                <a:latin typeface="Leelawadee UI"/>
               </a:defRPr>
             </a:pPr>
             <a:r>
@@ -5690,7 +5927,7 @@
                 <a:solidFill>
                   <a:srgbClr val="14181B"/>
                 </a:solidFill>
-                <a:latin typeface="Segoe UI"/>
+                <a:latin typeface="Leelawadee UI"/>
               </a:defRPr>
             </a:pPr>
             <a:r>
@@ -5706,7 +5943,7 @@
                 <a:solidFill>
                   <a:srgbClr val="14181B"/>
                 </a:solidFill>
-                <a:latin typeface="Segoe UI"/>
+                <a:latin typeface="Leelawadee UI"/>
               </a:defRPr>
             </a:pPr>
             <a:r>
@@ -5722,7 +5959,7 @@
                 <a:solidFill>
                   <a:srgbClr val="14181B"/>
                 </a:solidFill>
-                <a:latin typeface="Segoe UI"/>
+                <a:latin typeface="Leelawadee UI"/>
               </a:defRPr>
             </a:pPr>
             <a:r>
@@ -5849,7 +6086,7 @@
                 <a:solidFill>
                   <a:srgbClr val="2D6A4F"/>
                 </a:solidFill>
-                <a:latin typeface="Segoe UI"/>
+                <a:latin typeface="Leelawadee UI"/>
               </a:defRPr>
             </a:pPr>
             <a:r>
@@ -5862,7 +6099,7 @@
                 <a:solidFill>
                   <a:srgbClr val="1B4332"/>
                 </a:solidFill>
-                <a:latin typeface="Segoe UI"/>
+                <a:latin typeface="Leelawadee UI"/>
               </a:defRPr>
             </a:pPr>
             <a:r>
@@ -5878,7 +6115,7 @@
                 <a:solidFill>
                   <a:srgbClr val="5A646E"/>
                 </a:solidFill>
-                <a:latin typeface="Segoe UI"/>
+                <a:latin typeface="Leelawadee UI"/>
               </a:defRPr>
             </a:pPr>
             <a:r>
@@ -5894,7 +6131,7 @@
                 <a:solidFill>
                   <a:srgbClr val="14181B"/>
                 </a:solidFill>
-                <a:latin typeface="Segoe UI"/>
+                <a:latin typeface="Leelawadee UI"/>
               </a:defRPr>
             </a:pPr>
             <a:r>
@@ -5910,7 +6147,7 @@
                 <a:solidFill>
                   <a:srgbClr val="14181B"/>
                 </a:solidFill>
-                <a:latin typeface="Segoe UI"/>
+                <a:latin typeface="Leelawadee UI"/>
               </a:defRPr>
             </a:pPr>
             <a:r>
@@ -5926,7 +6163,7 @@
                 <a:solidFill>
                   <a:srgbClr val="14181B"/>
                 </a:solidFill>
-                <a:latin typeface="Segoe UI"/>
+                <a:latin typeface="Leelawadee UI"/>
               </a:defRPr>
             </a:pPr>
             <a:r>
@@ -5942,7 +6179,7 @@
                 <a:solidFill>
                   <a:srgbClr val="14181B"/>
                 </a:solidFill>
-                <a:latin typeface="Segoe UI"/>
+                <a:latin typeface="Leelawadee UI"/>
               </a:defRPr>
             </a:pPr>
             <a:r>
@@ -5958,7 +6195,7 @@
                 <a:solidFill>
                   <a:srgbClr val="14181B"/>
                 </a:solidFill>
-                <a:latin typeface="Segoe UI"/>
+                <a:latin typeface="Leelawadee UI"/>
               </a:defRPr>
             </a:pPr>
             <a:r>
@@ -5974,7 +6211,7 @@
                 <a:solidFill>
                   <a:srgbClr val="14181B"/>
                 </a:solidFill>
-                <a:latin typeface="Segoe UI"/>
+                <a:latin typeface="Leelawadee UI"/>
               </a:defRPr>
             </a:pPr>
             <a:r>
@@ -6101,7 +6338,7 @@
                 <a:solidFill>
                   <a:srgbClr val="1B4332"/>
                 </a:solidFill>
-                <a:latin typeface="Segoe UI"/>
+                <a:latin typeface="Leelawadee UI"/>
               </a:defRPr>
             </a:pPr>
             <a:r>
@@ -6114,7 +6351,7 @@
                 <a:solidFill>
                   <a:srgbClr val="1B4332"/>
                 </a:solidFill>
-                <a:latin typeface="Segoe UI"/>
+                <a:latin typeface="Leelawadee UI"/>
               </a:defRPr>
             </a:pPr>
             <a:r>
@@ -6130,7 +6367,7 @@
                 <a:solidFill>
                   <a:srgbClr val="5A646E"/>
                 </a:solidFill>
-                <a:latin typeface="Segoe UI"/>
+                <a:latin typeface="Leelawadee UI"/>
               </a:defRPr>
             </a:pPr>
             <a:r>
@@ -6146,7 +6383,7 @@
                 <a:solidFill>
                   <a:srgbClr val="14181B"/>
                 </a:solidFill>
-                <a:latin typeface="Segoe UI"/>
+                <a:latin typeface="Leelawadee UI"/>
               </a:defRPr>
             </a:pPr>
             <a:r>
@@ -6162,7 +6399,7 @@
                 <a:solidFill>
                   <a:srgbClr val="14181B"/>
                 </a:solidFill>
-                <a:latin typeface="Segoe UI"/>
+                <a:latin typeface="Leelawadee UI"/>
               </a:defRPr>
             </a:pPr>
             <a:r>
@@ -6178,7 +6415,7 @@
                 <a:solidFill>
                   <a:srgbClr val="14181B"/>
                 </a:solidFill>
-                <a:latin typeface="Segoe UI"/>
+                <a:latin typeface="Leelawadee UI"/>
               </a:defRPr>
             </a:pPr>
             <a:r>
@@ -6194,7 +6431,7 @@
                 <a:solidFill>
                   <a:srgbClr val="14181B"/>
                 </a:solidFill>
-                <a:latin typeface="Segoe UI"/>
+                <a:latin typeface="Leelawadee UI"/>
               </a:defRPr>
             </a:pPr>
             <a:r>
@@ -6210,7 +6447,7 @@
                 <a:solidFill>
                   <a:srgbClr val="14181B"/>
                 </a:solidFill>
-                <a:latin typeface="Segoe UI"/>
+                <a:latin typeface="Leelawadee UI"/>
               </a:defRPr>
             </a:pPr>
             <a:r>
@@ -6226,7 +6463,7 @@
                 <a:solidFill>
                   <a:srgbClr val="14181B"/>
                 </a:solidFill>
-                <a:latin typeface="Segoe UI"/>
+                <a:latin typeface="Leelawadee UI"/>
               </a:defRPr>
             </a:pPr>
             <a:r>
@@ -6288,7 +6525,7 @@
                 <a:solidFill>
                   <a:srgbClr val="52B788"/>
                 </a:solidFill>
-                <a:latin typeface="Segoe UI"/>
+                <a:latin typeface="Leelawadee UI"/>
               </a:defRPr>
             </a:pPr>
             <a:r>
@@ -6324,7 +6561,7 @@
                 <a:solidFill>
                   <a:srgbClr val="1B4332"/>
                 </a:solidFill>
-                <a:latin typeface="Segoe UI"/>
+                <a:latin typeface="Leelawadee UI"/>
               </a:defRPr>
             </a:pPr>
             <a:r>
@@ -6360,7 +6597,7 @@
                 <a:solidFill>
                   <a:srgbClr val="5A646E"/>
                 </a:solidFill>
-                <a:latin typeface="Segoe UI"/>
+                <a:latin typeface="Leelawadee UI"/>
               </a:defRPr>
             </a:pPr>
             <a:r>
@@ -6444,7 +6681,7 @@
                 <a:solidFill>
                   <a:srgbClr val="1B4332"/>
                 </a:solidFill>
-                <a:latin typeface="Segoe UI"/>
+                <a:latin typeface="Leelawadee UI"/>
               </a:defRPr>
             </a:pPr>
             <a:r>
@@ -6460,7 +6697,7 @@
                 <a:solidFill>
                   <a:srgbClr val="14181B"/>
                 </a:solidFill>
-                <a:latin typeface="Segoe UI"/>
+                <a:latin typeface="Leelawadee UI"/>
               </a:defRPr>
             </a:pPr>
             <a:r>
@@ -6476,7 +6713,7 @@
                 <a:solidFill>
                   <a:srgbClr val="14181B"/>
                 </a:solidFill>
-                <a:latin typeface="Segoe UI"/>
+                <a:latin typeface="Leelawadee UI"/>
               </a:defRPr>
             </a:pPr>
             <a:r>
@@ -6492,7 +6729,7 @@
                 <a:solidFill>
                   <a:srgbClr val="14181B"/>
                 </a:solidFill>
-                <a:latin typeface="Segoe UI"/>
+                <a:latin typeface="Leelawadee UI"/>
               </a:defRPr>
             </a:pPr>
             <a:r>
@@ -6508,7 +6745,7 @@
                 <a:solidFill>
                   <a:srgbClr val="14181B"/>
                 </a:solidFill>
-                <a:latin typeface="Segoe UI"/>
+                <a:latin typeface="Leelawadee UI"/>
               </a:defRPr>
             </a:pPr>
             <a:r>
@@ -6592,7 +6829,7 @@
                 <a:solidFill>
                   <a:srgbClr val="0B2545"/>
                 </a:solidFill>
-                <a:latin typeface="Segoe UI"/>
+                <a:latin typeface="Leelawadee UI"/>
               </a:defRPr>
             </a:pPr>
             <a:r>
@@ -6608,7 +6845,7 @@
                 <a:solidFill>
                   <a:srgbClr val="14181B"/>
                 </a:solidFill>
-                <a:latin typeface="Segoe UI"/>
+                <a:latin typeface="Leelawadee UI"/>
               </a:defRPr>
             </a:pPr>
             <a:r>
@@ -6624,7 +6861,7 @@
                 <a:solidFill>
                   <a:srgbClr val="14181B"/>
                 </a:solidFill>
-                <a:latin typeface="Segoe UI"/>
+                <a:latin typeface="Leelawadee UI"/>
               </a:defRPr>
             </a:pPr>
             <a:r>
@@ -6640,7 +6877,7 @@
                 <a:solidFill>
                   <a:srgbClr val="14181B"/>
                 </a:solidFill>
-                <a:latin typeface="Segoe UI"/>
+                <a:latin typeface="Leelawadee UI"/>
               </a:defRPr>
             </a:pPr>
             <a:r>
@@ -6656,7 +6893,7 @@
                 <a:solidFill>
                   <a:srgbClr val="14181B"/>
                 </a:solidFill>
-                <a:latin typeface="Segoe UI"/>
+                <a:latin typeface="Leelawadee UI"/>
               </a:defRPr>
             </a:pPr>
             <a:r>
@@ -6740,7 +6977,7 @@
                 <a:solidFill>
                   <a:srgbClr val="2D6A4F"/>
                 </a:solidFill>
-                <a:latin typeface="Segoe UI"/>
+                <a:latin typeface="Leelawadee UI"/>
               </a:defRPr>
             </a:pPr>
             <a:r>
@@ -6756,7 +6993,7 @@
                 <a:solidFill>
                   <a:srgbClr val="14181B"/>
                 </a:solidFill>
-                <a:latin typeface="Segoe UI"/>
+                <a:latin typeface="Leelawadee UI"/>
               </a:defRPr>
             </a:pPr>
             <a:r>
@@ -6772,7 +7009,7 @@
                 <a:solidFill>
                   <a:srgbClr val="14181B"/>
                 </a:solidFill>
-                <a:latin typeface="Segoe UI"/>
+                <a:latin typeface="Leelawadee UI"/>
               </a:defRPr>
             </a:pPr>
             <a:r>
@@ -6788,7 +7025,7 @@
                 <a:solidFill>
                   <a:srgbClr val="14181B"/>
                 </a:solidFill>
-                <a:latin typeface="Segoe UI"/>
+                <a:latin typeface="Leelawadee UI"/>
               </a:defRPr>
             </a:pPr>
             <a:r>
@@ -6804,7 +7041,7 @@
                 <a:solidFill>
                   <a:srgbClr val="14181B"/>
                 </a:solidFill>
-                <a:latin typeface="Segoe UI"/>
+                <a:latin typeface="Leelawadee UI"/>
               </a:defRPr>
             </a:pPr>
             <a:r>
@@ -6888,7 +7125,7 @@
                 <a:solidFill>
                   <a:srgbClr val="B45309"/>
                 </a:solidFill>
-                <a:latin typeface="Segoe UI"/>
+                <a:latin typeface="Leelawadee UI"/>
               </a:defRPr>
             </a:pPr>
             <a:r>
@@ -6904,7 +7141,7 @@
                 <a:solidFill>
                   <a:srgbClr val="14181B"/>
                 </a:solidFill>
-                <a:latin typeface="Segoe UI"/>
+                <a:latin typeface="Leelawadee UI"/>
               </a:defRPr>
             </a:pPr>
             <a:r>
@@ -6920,7 +7157,7 @@
                 <a:solidFill>
                   <a:srgbClr val="14181B"/>
                 </a:solidFill>
-                <a:latin typeface="Segoe UI"/>
+                <a:latin typeface="Leelawadee UI"/>
               </a:defRPr>
             </a:pPr>
             <a:r>
@@ -6936,7 +7173,7 @@
                 <a:solidFill>
                   <a:srgbClr val="14181B"/>
                 </a:solidFill>
-                <a:latin typeface="Segoe UI"/>
+                <a:latin typeface="Leelawadee UI"/>
               </a:defRPr>
             </a:pPr>
             <a:r>
@@ -6952,7 +7189,7 @@
                 <a:solidFill>
                   <a:srgbClr val="14181B"/>
                 </a:solidFill>
-                <a:latin typeface="Segoe UI"/>
+                <a:latin typeface="Leelawadee UI"/>
               </a:defRPr>
             </a:pPr>
             <a:r>
@@ -7062,8 +7299,8 @@
         </p:nvSpPr>
         <p:spPr>
           <a:xfrm>
-            <a:off x="1097280" y="1463040"/>
-            <a:ext cx="9875520" cy="4114800"/>
+            <a:off x="822960" y="1280160"/>
+            <a:ext cx="6583680" cy="4754880"/>
           </a:xfrm>
           <a:prstGeom prst="rect">
             <a:avLst/>
@@ -7084,7 +7321,7 @@
                 <a:solidFill>
                   <a:srgbClr val="52B788"/>
                 </a:solidFill>
-                <a:latin typeface="Segoe UI"/>
+                <a:latin typeface="Leelawadee UI"/>
               </a:defRPr>
             </a:pPr>
             <a:r>
@@ -7100,11 +7337,15 @@
                 <a:solidFill>
                   <a:srgbClr val="FFFFFF"/>
                 </a:solidFill>
-                <a:latin typeface="Segoe UI"/>
-              </a:defRPr>
-            </a:pPr>
-            <a:r>
-              <a:t>พร้อมก้าวสู่การเป็นสวนพฤกษศาสตร์ระดับโลกเพื่ออนาคตที่ยั่งยืน</a:t>
+                <a:latin typeface="Leelawadee UI"/>
+              </a:defRPr>
+            </a:pPr>
+            <a:r>
+              <a:t>สวนพฤกษศาสตร์ระดับโลก</a:t>
+            </a:r>
+            <a:br/>
+            <a:r>
+              <a:t>สู่อนาคตที่ยั่งยืน</a:t>
             </a:r>
           </a:p>
           <a:p>
@@ -7112,11 +7353,11 @@
               <a:spcAft>
                 <a:spcPts val="3600"/>
               </a:spcAft>
-              <a:defRPr sz="1600">
+              <a:defRPr sz="1500">
                 <a:solidFill>
                   <a:srgbClr val="D8F3DC"/>
                 </a:solidFill>
-                <a:latin typeface="Segoe UI"/>
+                <a:latin typeface="Leelawadee UI"/>
               </a:defRPr>
             </a:pPr>
             <a:r>
@@ -7133,11 +7374,167 @@
                 <a:solidFill>
                   <a:srgbClr val="B45309"/>
                 </a:solidFill>
-                <a:latin typeface="Segoe UI"/>
+                <a:latin typeface="Leelawadee UI"/>
               </a:defRPr>
             </a:pPr>
             <a:r>
               <a:t>ขอขอบพระคุณคณะกรรมการทุกท่าน  |  ช่วงถาม - ตอบ (Q &amp; A)</a:t>
+            </a:r>
+          </a:p>
+        </p:txBody>
+      </p:sp>
+      <p:sp>
+        <p:nvSpPr>
+          <p:cNvPr id="4" name="Rounded Rectangle 3"/>
+          <p:cNvSpPr/>
+          <p:nvPr/>
+        </p:nvSpPr>
+        <p:spPr>
+          <a:xfrm>
+            <a:off x="7589520" y="1280160"/>
+            <a:ext cx="4114800" cy="4754880"/>
+          </a:xfrm>
+          <a:prstGeom prst="roundRect">
+            <a:avLst/>
+          </a:prstGeom>
+          <a:solidFill>
+            <a:srgbClr val="0F2D21"/>
+          </a:solidFill>
+          <a:ln w="15240">
+            <a:solidFill>
+              <a:srgbClr val="52B788"/>
+            </a:solidFill>
+          </a:ln>
+        </p:spPr>
+        <p:style>
+          <a:lnRef idx="1">
+            <a:schemeClr val="accent1"/>
+          </a:lnRef>
+          <a:fillRef idx="3">
+            <a:schemeClr val="accent1"/>
+          </a:fillRef>
+          <a:effectRef idx="2">
+            <a:schemeClr val="accent1"/>
+          </a:effectRef>
+          <a:fontRef idx="minor">
+            <a:schemeClr val="lt1"/>
+          </a:fontRef>
+        </p:style>
+        <p:txBody>
+          <a:bodyPr rtlCol="0" anchor="ctr"/>
+          <a:lstStyle/>
+          <a:p>
+            <a:pPr algn="ctr"/>
+          </a:p>
+        </p:txBody>
+      </p:sp>
+      <p:pic>
+        <p:nvPicPr>
+          <p:cNvPr id="5" name="Picture 4" descr="landmark_panoramic_garden.jpg"/>
+          <p:cNvPicPr>
+            <a:picLocks noChangeAspect="1"/>
+          </p:cNvPicPr>
+          <p:nvPr/>
+        </p:nvPicPr>
+        <p:blipFill>
+          <a:blip r:embed="rId2"/>
+          <a:stretch>
+            <a:fillRect/>
+          </a:stretch>
+        </p:blipFill>
+        <p:spPr>
+          <a:xfrm>
+            <a:off x="7726679" y="1417320"/>
+            <a:ext cx="3840480" cy="2468880"/>
+          </a:xfrm>
+          <a:prstGeom prst="rect">
+            <a:avLst/>
+          </a:prstGeom>
+        </p:spPr>
+      </p:pic>
+      <p:sp>
+        <p:nvSpPr>
+          <p:cNvPr id="6" name="TextBox 5"/>
+          <p:cNvSpPr txBox="1"/>
+          <p:nvPr/>
+        </p:nvSpPr>
+        <p:spPr>
+          <a:xfrm>
+            <a:off x="7726679" y="4023360"/>
+            <a:ext cx="3840480" cy="1828800"/>
+          </a:xfrm>
+          <a:prstGeom prst="rect">
+            <a:avLst/>
+          </a:prstGeom>
+          <a:noFill/>
+        </p:spPr>
+        <p:txBody>
+          <a:bodyPr wrap="square">
+            <a:spAutoFit/>
+          </a:bodyPr>
+          <a:lstStyle/>
+          <a:p>
+            <a:pPr>
+              <a:spcAft>
+                <a:spcPts val="600"/>
+              </a:spcAft>
+              <a:defRPr sz="1400" b="1">
+                <a:solidFill>
+                  <a:srgbClr val="FFFFFF"/>
+                </a:solidFill>
+                <a:latin typeface="Leelawadee UI"/>
+              </a:defRPr>
+            </a:pPr>
+            <a:r>
+              <a:t>สวนพฤกษศาสตร์สมเด็จพระนางเจ้าสิริกิติ์</a:t>
+            </a:r>
+          </a:p>
+          <a:p>
+            <a:pPr>
+              <a:spcAft>
+                <a:spcPts val="400"/>
+              </a:spcAft>
+              <a:defRPr sz="1200">
+                <a:solidFill>
+                  <a:srgbClr val="D8F3DC"/>
+                </a:solidFill>
+                <a:latin typeface="Leelawadee UI"/>
+              </a:defRPr>
+            </a:pPr>
+            <a:r>
+              <a:t>• มาตรฐานสากลแห่งแรกของประเทศไทย</a:t>
+            </a:r>
+          </a:p>
+          <a:p>
+            <a:pPr>
+              <a:spcAft>
+                <a:spcPts val="400"/>
+              </a:spcAft>
+              <a:defRPr sz="1200">
+                <a:solidFill>
+                  <a:srgbClr val="D8F3DC"/>
+                </a:solidFill>
+                <a:latin typeface="Leelawadee UI"/>
+              </a:defRPr>
+            </a:pPr>
+            <a:r>
+              <a:t>• พื้นที่อนุรักษ์ธรรมชาติ 6,500 ไร่ เชียงใหม่</a:t>
+            </a:r>
+          </a:p>
+          <a:p>
+            <a:pPr>
+              <a:spcAft>
+                <a:spcPts val="400"/>
+              </a:spcAft>
+              <a:defRPr sz="1200">
+                <a:solidFill>
+                  <a:srgbClr val="D8F3DC"/>
+                </a:solidFill>
+                <a:latin typeface="Leelawadee UI"/>
+              </a:defRPr>
+            </a:pPr>
+            <a:r>
+              <a:t>• มุ่งสู่ Smart &amp; Green Eco-Tourism ยั่งยืน</a:t>
             </a:r>
           </a:p>
         </p:txBody>
@@ -7195,7 +7592,7 @@
                 <a:solidFill>
                   <a:srgbClr val="52B788"/>
                 </a:solidFill>
-                <a:latin typeface="Segoe UI"/>
+                <a:latin typeface="Leelawadee UI"/>
               </a:defRPr>
             </a:pPr>
             <a:r>
@@ -7231,7 +7628,7 @@
                 <a:solidFill>
                   <a:srgbClr val="1B4332"/>
                 </a:solidFill>
-                <a:latin typeface="Segoe UI"/>
+                <a:latin typeface="Leelawadee UI"/>
               </a:defRPr>
             </a:pPr>
             <a:r>
@@ -7267,7 +7664,7 @@
                 <a:solidFill>
                   <a:srgbClr val="5A646E"/>
                 </a:solidFill>
-                <a:latin typeface="Segoe UI"/>
+                <a:latin typeface="Leelawadee UI"/>
               </a:defRPr>
             </a:pPr>
             <a:r>
@@ -7351,7 +7748,7 @@
                 <a:solidFill>
                   <a:srgbClr val="1B4332"/>
                 </a:solidFill>
-                <a:latin typeface="Segoe UI"/>
+                <a:latin typeface="Leelawadee UI"/>
               </a:defRPr>
             </a:pPr>
             <a:r>
@@ -7364,7 +7761,7 @@
                 <a:solidFill>
                   <a:srgbClr val="14181B"/>
                 </a:solidFill>
-                <a:latin typeface="Segoe UI"/>
+                <a:latin typeface="Leelawadee UI"/>
               </a:defRPr>
             </a:pPr>
             <a:r>
@@ -7380,7 +7777,7 @@
                 <a:solidFill>
                   <a:srgbClr val="5A646E"/>
                 </a:solidFill>
-                <a:latin typeface="Segoe UI"/>
+                <a:latin typeface="Leelawadee UI"/>
               </a:defRPr>
             </a:pPr>
             <a:r>
@@ -7396,7 +7793,7 @@
                 <a:solidFill>
                   <a:srgbClr val="14181B"/>
                 </a:solidFill>
-                <a:latin typeface="Segoe UI"/>
+                <a:latin typeface="Leelawadee UI"/>
               </a:defRPr>
             </a:pPr>
             <a:r>
@@ -7412,7 +7809,7 @@
                 <a:solidFill>
                   <a:srgbClr val="14181B"/>
                 </a:solidFill>
-                <a:latin typeface="Segoe UI"/>
+                <a:latin typeface="Leelawadee UI"/>
               </a:defRPr>
             </a:pPr>
             <a:r>
@@ -7428,7 +7825,7 @@
                 <a:solidFill>
                   <a:srgbClr val="14181B"/>
                 </a:solidFill>
-                <a:latin typeface="Segoe UI"/>
+                <a:latin typeface="Leelawadee UI"/>
               </a:defRPr>
             </a:pPr>
             <a:r>
@@ -7444,7 +7841,7 @@
                 <a:solidFill>
                   <a:srgbClr val="14181B"/>
                 </a:solidFill>
-                <a:latin typeface="Segoe UI"/>
+                <a:latin typeface="Leelawadee UI"/>
               </a:defRPr>
             </a:pPr>
             <a:r>
@@ -7528,7 +7925,7 @@
                 <a:solidFill>
                   <a:srgbClr val="134074"/>
                 </a:solidFill>
-                <a:latin typeface="Segoe UI"/>
+                <a:latin typeface="Leelawadee UI"/>
               </a:defRPr>
             </a:pPr>
             <a:r>
@@ -7541,7 +7938,7 @@
                 <a:solidFill>
                   <a:srgbClr val="14181B"/>
                 </a:solidFill>
-                <a:latin typeface="Segoe UI"/>
+                <a:latin typeface="Leelawadee UI"/>
               </a:defRPr>
             </a:pPr>
             <a:r>
@@ -7557,7 +7954,7 @@
                 <a:solidFill>
                   <a:srgbClr val="5A646E"/>
                 </a:solidFill>
-                <a:latin typeface="Segoe UI"/>
+                <a:latin typeface="Leelawadee UI"/>
               </a:defRPr>
             </a:pPr>
             <a:r>
@@ -7573,7 +7970,7 @@
                 <a:solidFill>
                   <a:srgbClr val="14181B"/>
                 </a:solidFill>
-                <a:latin typeface="Segoe UI"/>
+                <a:latin typeface="Leelawadee UI"/>
               </a:defRPr>
             </a:pPr>
             <a:r>
@@ -7589,7 +7986,7 @@
                 <a:solidFill>
                   <a:srgbClr val="14181B"/>
                 </a:solidFill>
-                <a:latin typeface="Segoe UI"/>
+                <a:latin typeface="Leelawadee UI"/>
               </a:defRPr>
             </a:pPr>
             <a:r>
@@ -7605,7 +8002,7 @@
                 <a:solidFill>
                   <a:srgbClr val="14181B"/>
                 </a:solidFill>
-                <a:latin typeface="Segoe UI"/>
+                <a:latin typeface="Leelawadee UI"/>
               </a:defRPr>
             </a:pPr>
             <a:r>
@@ -7621,7 +8018,7 @@
                 <a:solidFill>
                   <a:srgbClr val="14181B"/>
                 </a:solidFill>
-                <a:latin typeface="Segoe UI"/>
+                <a:latin typeface="Leelawadee UI"/>
               </a:defRPr>
             </a:pPr>
             <a:r>
@@ -7705,7 +8102,7 @@
                 <a:solidFill>
                   <a:srgbClr val="B45309"/>
                 </a:solidFill>
-                <a:latin typeface="Segoe UI"/>
+                <a:latin typeface="Leelawadee UI"/>
               </a:defRPr>
             </a:pPr>
             <a:r>
@@ -7718,7 +8115,7 @@
                 <a:solidFill>
                   <a:srgbClr val="14181B"/>
                 </a:solidFill>
-                <a:latin typeface="Segoe UI"/>
+                <a:latin typeface="Leelawadee UI"/>
               </a:defRPr>
             </a:pPr>
             <a:r>
@@ -7734,7 +8131,7 @@
                 <a:solidFill>
                   <a:srgbClr val="5A646E"/>
                 </a:solidFill>
-                <a:latin typeface="Segoe UI"/>
+                <a:latin typeface="Leelawadee UI"/>
               </a:defRPr>
             </a:pPr>
             <a:r>
@@ -7750,7 +8147,7 @@
                 <a:solidFill>
                   <a:srgbClr val="14181B"/>
                 </a:solidFill>
-                <a:latin typeface="Segoe UI"/>
+                <a:latin typeface="Leelawadee UI"/>
               </a:defRPr>
             </a:pPr>
             <a:r>
@@ -7766,7 +8163,7 @@
                 <a:solidFill>
                   <a:srgbClr val="14181B"/>
                 </a:solidFill>
-                <a:latin typeface="Segoe UI"/>
+                <a:latin typeface="Leelawadee UI"/>
               </a:defRPr>
             </a:pPr>
             <a:r>
@@ -7782,7 +8179,7 @@
                 <a:solidFill>
                   <a:srgbClr val="14181B"/>
                 </a:solidFill>
-                <a:latin typeface="Segoe UI"/>
+                <a:latin typeface="Leelawadee UI"/>
               </a:defRPr>
             </a:pPr>
             <a:r>
@@ -7798,7 +8195,7 @@
                 <a:solidFill>
                   <a:srgbClr val="14181B"/>
                 </a:solidFill>
-                <a:latin typeface="Segoe UI"/>
+                <a:latin typeface="Leelawadee UI"/>
               </a:defRPr>
             </a:pPr>
             <a:r>
@@ -7860,7 +8257,7 @@
                 <a:solidFill>
                   <a:srgbClr val="52B788"/>
                 </a:solidFill>
-                <a:latin typeface="Segoe UI"/>
+                <a:latin typeface="Leelawadee UI"/>
               </a:defRPr>
             </a:pPr>
             <a:r>
@@ -7896,7 +8293,7 @@
                 <a:solidFill>
                   <a:srgbClr val="1B4332"/>
                 </a:solidFill>
-                <a:latin typeface="Segoe UI"/>
+                <a:latin typeface="Leelawadee UI"/>
               </a:defRPr>
             </a:pPr>
             <a:r>
@@ -7932,7 +8329,7 @@
                 <a:solidFill>
                   <a:srgbClr val="5A646E"/>
                 </a:solidFill>
-                <a:latin typeface="Segoe UI"/>
+                <a:latin typeface="Leelawadee UI"/>
               </a:defRPr>
             </a:pPr>
             <a:r>
@@ -8016,7 +8413,7 @@
                 <a:solidFill>
                   <a:srgbClr val="1B4332"/>
                 </a:solidFill>
-                <a:latin typeface="Segoe UI"/>
+                <a:latin typeface="Leelawadee UI"/>
               </a:defRPr>
             </a:pPr>
             <a:r>
@@ -8032,7 +8429,7 @@
                 <a:solidFill>
                   <a:srgbClr val="134074"/>
                 </a:solidFill>
-                <a:latin typeface="Segoe UI"/>
+                <a:latin typeface="Leelawadee UI"/>
               </a:defRPr>
             </a:pPr>
             <a:r>
@@ -8048,7 +8445,7 @@
                 <a:solidFill>
                   <a:srgbClr val="14181B"/>
                 </a:solidFill>
-                <a:latin typeface="Segoe UI"/>
+                <a:latin typeface="Leelawadee UI"/>
               </a:defRPr>
             </a:pPr>
             <a:r>
@@ -8064,7 +8461,7 @@
                 <a:solidFill>
                   <a:srgbClr val="134074"/>
                 </a:solidFill>
-                <a:latin typeface="Segoe UI"/>
+                <a:latin typeface="Leelawadee UI"/>
               </a:defRPr>
             </a:pPr>
             <a:r>
@@ -8080,7 +8477,7 @@
                 <a:solidFill>
                   <a:srgbClr val="14181B"/>
                 </a:solidFill>
-                <a:latin typeface="Segoe UI"/>
+                <a:latin typeface="Leelawadee UI"/>
               </a:defRPr>
             </a:pPr>
             <a:r>
@@ -8188,7 +8585,7 @@
                 <a:solidFill>
                   <a:srgbClr val="1B4332"/>
                 </a:solidFill>
-                <a:latin typeface="Segoe UI"/>
+                <a:latin typeface="Leelawadee UI"/>
               </a:defRPr>
             </a:pPr>
             <a:r>
@@ -8201,7 +8598,7 @@
                 <a:solidFill>
                   <a:srgbClr val="14181B"/>
                 </a:solidFill>
-                <a:latin typeface="Segoe UI"/>
+                <a:latin typeface="Leelawadee UI"/>
               </a:defRPr>
             </a:pPr>
             <a:r>
@@ -8285,7 +8682,7 @@
                 <a:solidFill>
                   <a:srgbClr val="1B4332"/>
                 </a:solidFill>
-                <a:latin typeface="Segoe UI"/>
+                <a:latin typeface="Leelawadee UI"/>
               </a:defRPr>
             </a:pPr>
             <a:r>
@@ -8301,7 +8698,7 @@
                 <a:solidFill>
                   <a:srgbClr val="14181B"/>
                 </a:solidFill>
-                <a:latin typeface="Segoe UI"/>
+                <a:latin typeface="Leelawadee UI"/>
               </a:defRPr>
             </a:pPr>
             <a:r>
@@ -8317,7 +8714,7 @@
                 <a:solidFill>
                   <a:srgbClr val="14181B"/>
                 </a:solidFill>
-                <a:latin typeface="Segoe UI"/>
+                <a:latin typeface="Leelawadee UI"/>
               </a:defRPr>
             </a:pPr>
             <a:r>
@@ -8333,7 +8730,7 @@
                 <a:solidFill>
                   <a:srgbClr val="14181B"/>
                 </a:solidFill>
-                <a:latin typeface="Segoe UI"/>
+                <a:latin typeface="Leelawadee UI"/>
               </a:defRPr>
             </a:pPr>
             <a:r>
@@ -8395,7 +8792,7 @@
                 <a:solidFill>
                   <a:srgbClr val="52B788"/>
                 </a:solidFill>
-                <a:latin typeface="Segoe UI"/>
+                <a:latin typeface="Leelawadee UI"/>
               </a:defRPr>
             </a:pPr>
             <a:r>
@@ -8431,7 +8828,7 @@
                 <a:solidFill>
                   <a:srgbClr val="1B4332"/>
                 </a:solidFill>
-                <a:latin typeface="Segoe UI"/>
+                <a:latin typeface="Leelawadee UI"/>
               </a:defRPr>
             </a:pPr>
             <a:r>
@@ -8467,7 +8864,7 @@
                 <a:solidFill>
                   <a:srgbClr val="5A646E"/>
                 </a:solidFill>
-                <a:latin typeface="Segoe UI"/>
+                <a:latin typeface="Leelawadee UI"/>
               </a:defRPr>
             </a:pPr>
             <a:r>
@@ -8551,7 +8948,7 @@
                 <a:solidFill>
                   <a:srgbClr val="0B2545"/>
                 </a:solidFill>
-                <a:latin typeface="Segoe UI"/>
+                <a:latin typeface="Leelawadee UI"/>
               </a:defRPr>
             </a:pPr>
             <a:r>
@@ -8567,7 +8964,7 @@
                 <a:solidFill>
                   <a:srgbClr val="1B4332"/>
                 </a:solidFill>
-                <a:latin typeface="Segoe UI"/>
+                <a:latin typeface="Leelawadee UI"/>
               </a:defRPr>
             </a:pPr>
             <a:r>
@@ -8583,7 +8980,7 @@
                 <a:solidFill>
                   <a:srgbClr val="14181B"/>
                 </a:solidFill>
-                <a:latin typeface="Segoe UI"/>
+                <a:latin typeface="Leelawadee UI"/>
               </a:defRPr>
             </a:pPr>
             <a:r>
@@ -8599,7 +8996,7 @@
                 <a:solidFill>
                   <a:srgbClr val="1B4332"/>
                 </a:solidFill>
-                <a:latin typeface="Segoe UI"/>
+                <a:latin typeface="Leelawadee UI"/>
               </a:defRPr>
             </a:pPr>
             <a:r>
@@ -8612,7 +9009,7 @@
                 <a:solidFill>
                   <a:srgbClr val="14181B"/>
                 </a:solidFill>
-                <a:latin typeface="Segoe UI"/>
+                <a:latin typeface="Leelawadee UI"/>
               </a:defRPr>
             </a:pPr>
             <a:r>
@@ -8696,7 +9093,7 @@
                 <a:solidFill>
                   <a:srgbClr val="2D6A4F"/>
                 </a:solidFill>
-                <a:latin typeface="Segoe UI"/>
+                <a:latin typeface="Leelawadee UI"/>
               </a:defRPr>
             </a:pPr>
             <a:r>
@@ -8709,7 +9106,7 @@
                 <a:solidFill>
                   <a:srgbClr val="1B4332"/>
                 </a:solidFill>
-                <a:latin typeface="Segoe UI"/>
+                <a:latin typeface="Leelawadee UI"/>
               </a:defRPr>
             </a:pPr>
             <a:r>
@@ -8725,7 +9122,7 @@
                 <a:solidFill>
                   <a:srgbClr val="14181B"/>
                 </a:solidFill>
-                <a:latin typeface="Segoe UI"/>
+                <a:latin typeface="Leelawadee UI"/>
               </a:defRPr>
             </a:pPr>
             <a:r>
@@ -8738,7 +9135,7 @@
                 <a:solidFill>
                   <a:srgbClr val="1B4332"/>
                 </a:solidFill>
-                <a:latin typeface="Segoe UI"/>
+                <a:latin typeface="Leelawadee UI"/>
               </a:defRPr>
             </a:pPr>
             <a:r>
@@ -8751,7 +9148,7 @@
                 <a:solidFill>
                   <a:srgbClr val="14181B"/>
                 </a:solidFill>
-                <a:latin typeface="Segoe UI"/>
+                <a:latin typeface="Leelawadee UI"/>
               </a:defRPr>
             </a:pPr>
             <a:r>
@@ -8835,7 +9232,7 @@
                 <a:solidFill>
                   <a:srgbClr val="1B4332"/>
                 </a:solidFill>
-                <a:latin typeface="Segoe UI"/>
+                <a:latin typeface="Leelawadee UI"/>
               </a:defRPr>
             </a:pPr>
             <a:r>
@@ -8851,7 +9248,7 @@
                 <a:solidFill>
                   <a:srgbClr val="134074"/>
                 </a:solidFill>
-                <a:latin typeface="Segoe UI"/>
+                <a:latin typeface="Leelawadee UI"/>
               </a:defRPr>
             </a:pPr>
             <a:r>
@@ -8867,7 +9264,7 @@
                 <a:solidFill>
                   <a:srgbClr val="0B2545"/>
                 </a:solidFill>
-                <a:latin typeface="Segoe UI"/>
+                <a:latin typeface="Leelawadee UI"/>
               </a:defRPr>
             </a:pPr>
             <a:r>
@@ -8883,7 +9280,7 @@
                 <a:solidFill>
                   <a:srgbClr val="14181B"/>
                 </a:solidFill>
-                <a:latin typeface="Segoe UI"/>
+                <a:latin typeface="Leelawadee UI"/>
               </a:defRPr>
             </a:pPr>
             <a:r>
@@ -8899,7 +9296,7 @@
                 <a:solidFill>
                   <a:srgbClr val="0B2545"/>
                 </a:solidFill>
-                <a:latin typeface="Segoe UI"/>
+                <a:latin typeface="Leelawadee UI"/>
               </a:defRPr>
             </a:pPr>
             <a:r>
@@ -8915,7 +9312,7 @@
                 <a:solidFill>
                   <a:srgbClr val="14181B"/>
                 </a:solidFill>
-                <a:latin typeface="Segoe UI"/>
+                <a:latin typeface="Leelawadee UI"/>
               </a:defRPr>
             </a:pPr>
             <a:r>
@@ -8931,7 +9328,7 @@
                 <a:solidFill>
                   <a:srgbClr val="0B2545"/>
                 </a:solidFill>
-                <a:latin typeface="Segoe UI"/>
+                <a:latin typeface="Leelawadee UI"/>
               </a:defRPr>
             </a:pPr>
             <a:r>
@@ -8947,7 +9344,7 @@
                 <a:solidFill>
                   <a:srgbClr val="14181B"/>
                 </a:solidFill>
-                <a:latin typeface="Segoe UI"/>
+                <a:latin typeface="Leelawadee UI"/>
               </a:defRPr>
             </a:pPr>
             <a:r>
@@ -8963,7 +9360,7 @@
                 <a:solidFill>
                   <a:srgbClr val="0B2545"/>
                 </a:solidFill>
-                <a:latin typeface="Segoe UI"/>
+                <a:latin typeface="Leelawadee UI"/>
               </a:defRPr>
             </a:pPr>
             <a:r>
@@ -8979,7 +9376,7 @@
                 <a:solidFill>
                   <a:srgbClr val="14181B"/>
                 </a:solidFill>
-                <a:latin typeface="Segoe UI"/>
+                <a:latin typeface="Leelawadee UI"/>
               </a:defRPr>
             </a:pPr>
             <a:r>
@@ -8995,7 +9392,7 @@
                 <a:solidFill>
                   <a:srgbClr val="0B2545"/>
                 </a:solidFill>
-                <a:latin typeface="Segoe UI"/>
+                <a:latin typeface="Leelawadee UI"/>
               </a:defRPr>
             </a:pPr>
             <a:r>
@@ -9011,7 +9408,7 @@
                 <a:solidFill>
                   <a:srgbClr val="14181B"/>
                 </a:solidFill>
-                <a:latin typeface="Segoe UI"/>
+                <a:latin typeface="Leelawadee UI"/>
               </a:defRPr>
             </a:pPr>
             <a:r>
@@ -9027,7 +9424,7 @@
                 <a:solidFill>
                   <a:srgbClr val="0B2545"/>
                 </a:solidFill>
-                <a:latin typeface="Segoe UI"/>
+                <a:latin typeface="Leelawadee UI"/>
               </a:defRPr>
             </a:pPr>
             <a:r>
@@ -9043,7 +9440,7 @@
                 <a:solidFill>
                   <a:srgbClr val="14181B"/>
                 </a:solidFill>
-                <a:latin typeface="Segoe UI"/>
+                <a:latin typeface="Leelawadee UI"/>
               </a:defRPr>
             </a:pPr>
             <a:r>
@@ -9105,7 +9502,7 @@
                 <a:solidFill>
                   <a:srgbClr val="52B788"/>
                 </a:solidFill>
-                <a:latin typeface="Segoe UI"/>
+                <a:latin typeface="Leelawadee UI"/>
               </a:defRPr>
             </a:pPr>
             <a:r>
@@ -9141,7 +9538,7 @@
                 <a:solidFill>
                   <a:srgbClr val="1B4332"/>
                 </a:solidFill>
-                <a:latin typeface="Segoe UI"/>
+                <a:latin typeface="Leelawadee UI"/>
               </a:defRPr>
             </a:pPr>
             <a:r>
@@ -9177,7 +9574,7 @@
                 <a:solidFill>
                   <a:srgbClr val="5A646E"/>
                 </a:solidFill>
-                <a:latin typeface="Segoe UI"/>
+                <a:latin typeface="Leelawadee UI"/>
               </a:defRPr>
             </a:pPr>
             <a:r>
@@ -9301,7 +9698,7 @@
                 <a:solidFill>
                   <a:srgbClr val="0B2545"/>
                 </a:solidFill>
-                <a:latin typeface="Segoe UI"/>
+                <a:latin typeface="Leelawadee UI"/>
               </a:defRPr>
             </a:pPr>
             <a:r>
@@ -9317,7 +9714,7 @@
                 <a:solidFill>
                   <a:srgbClr val="14181B"/>
                 </a:solidFill>
-                <a:latin typeface="Segoe UI"/>
+                <a:latin typeface="Leelawadee UI"/>
               </a:defRPr>
             </a:pPr>
             <a:r>
@@ -9445,7 +9842,7 @@
                 <a:solidFill>
                   <a:srgbClr val="2D6A4F"/>
                 </a:solidFill>
-                <a:latin typeface="Segoe UI"/>
+                <a:latin typeface="Leelawadee UI"/>
               </a:defRPr>
             </a:pPr>
             <a:r>
@@ -9461,7 +9858,7 @@
                 <a:solidFill>
                   <a:srgbClr val="14181B"/>
                 </a:solidFill>
-                <a:latin typeface="Segoe UI"/>
+                <a:latin typeface="Leelawadee UI"/>
               </a:defRPr>
             </a:pPr>
             <a:r>
@@ -9589,7 +9986,7 @@
                 <a:solidFill>
                   <a:srgbClr val="134074"/>
                 </a:solidFill>
-                <a:latin typeface="Segoe UI"/>
+                <a:latin typeface="Leelawadee UI"/>
               </a:defRPr>
             </a:pPr>
             <a:r>
@@ -9605,7 +10002,7 @@
                 <a:solidFill>
                   <a:srgbClr val="14181B"/>
                 </a:solidFill>
-                <a:latin typeface="Segoe UI"/>
+                <a:latin typeface="Leelawadee UI"/>
               </a:defRPr>
             </a:pPr>
             <a:r>
@@ -9733,7 +10130,7 @@
                 <a:solidFill>
                   <a:srgbClr val="1B4332"/>
                 </a:solidFill>
-                <a:latin typeface="Segoe UI"/>
+                <a:latin typeface="Leelawadee UI"/>
               </a:defRPr>
             </a:pPr>
             <a:r>
@@ -9749,7 +10146,7 @@
                 <a:solidFill>
                   <a:srgbClr val="14181B"/>
                 </a:solidFill>
-                <a:latin typeface="Segoe UI"/>
+                <a:latin typeface="Leelawadee UI"/>
               </a:defRPr>
             </a:pPr>
             <a:r>
@@ -9815,7 +10212,7 @@
                 <a:solidFill>
                   <a:srgbClr val="52B788"/>
                 </a:solidFill>
-                <a:latin typeface="Segoe UI"/>
+                <a:latin typeface="Leelawadee UI"/>
               </a:defRPr>
             </a:pPr>
             <a:r>
@@ -9851,7 +10248,7 @@
                 <a:solidFill>
                   <a:srgbClr val="1B4332"/>
                 </a:solidFill>
-                <a:latin typeface="Segoe UI"/>
+                <a:latin typeface="Leelawadee UI"/>
               </a:defRPr>
             </a:pPr>
             <a:r>
@@ -9887,7 +10284,7 @@
                 <a:solidFill>
                   <a:srgbClr val="5A646E"/>
                 </a:solidFill>
-                <a:latin typeface="Segoe UI"/>
+                <a:latin typeface="Leelawadee UI"/>
               </a:defRPr>
             </a:pPr>
             <a:r>
@@ -9971,7 +10368,7 @@
                 <a:solidFill>
                   <a:srgbClr val="52B788"/>
                 </a:solidFill>
-                <a:latin typeface="Segoe UI"/>
+                <a:latin typeface="Leelawadee UI"/>
               </a:defRPr>
             </a:pPr>
             <a:r>
@@ -9984,7 +10381,7 @@
                 <a:solidFill>
                   <a:srgbClr val="1B4332"/>
                 </a:solidFill>
-                <a:latin typeface="Segoe UI"/>
+                <a:latin typeface="Leelawadee UI"/>
               </a:defRPr>
             </a:pPr>
             <a:r>
@@ -10000,7 +10397,7 @@
                 <a:solidFill>
                   <a:srgbClr val="5A646E"/>
                 </a:solidFill>
-                <a:latin typeface="Segoe UI"/>
+                <a:latin typeface="Leelawadee UI"/>
               </a:defRPr>
             </a:pPr>
             <a:r>
@@ -10016,7 +10413,7 @@
                 <a:solidFill>
                   <a:srgbClr val="14181B"/>
                 </a:solidFill>
-                <a:latin typeface="Segoe UI"/>
+                <a:latin typeface="Leelawadee UI"/>
               </a:defRPr>
             </a:pPr>
             <a:r>
@@ -10032,7 +10429,7 @@
                 <a:solidFill>
                   <a:srgbClr val="14181B"/>
                 </a:solidFill>
-                <a:latin typeface="Segoe UI"/>
+                <a:latin typeface="Leelawadee UI"/>
               </a:defRPr>
             </a:pPr>
             <a:r>
@@ -10048,7 +10445,7 @@
                 <a:solidFill>
                   <a:srgbClr val="14181B"/>
                 </a:solidFill>
-                <a:latin typeface="Segoe UI"/>
+                <a:latin typeface="Leelawadee UI"/>
               </a:defRPr>
             </a:pPr>
             <a:r>
@@ -10132,7 +10529,7 @@
                 <a:solidFill>
                   <a:srgbClr val="52B788"/>
                 </a:solidFill>
-                <a:latin typeface="Segoe UI"/>
+                <a:latin typeface="Leelawadee UI"/>
               </a:defRPr>
             </a:pPr>
             <a:r>
@@ -10145,7 +10542,7 @@
                 <a:solidFill>
                   <a:srgbClr val="1B4332"/>
                 </a:solidFill>
-                <a:latin typeface="Segoe UI"/>
+                <a:latin typeface="Leelawadee UI"/>
               </a:defRPr>
             </a:pPr>
             <a:r>
@@ -10161,7 +10558,7 @@
                 <a:solidFill>
                   <a:srgbClr val="5A646E"/>
                 </a:solidFill>
-                <a:latin typeface="Segoe UI"/>
+                <a:latin typeface="Leelawadee UI"/>
               </a:defRPr>
             </a:pPr>
             <a:r>
@@ -10177,7 +10574,7 @@
                 <a:solidFill>
                   <a:srgbClr val="14181B"/>
                 </a:solidFill>
-                <a:latin typeface="Segoe UI"/>
+                <a:latin typeface="Leelawadee UI"/>
               </a:defRPr>
             </a:pPr>
             <a:r>
@@ -10193,7 +10590,7 @@
                 <a:solidFill>
                   <a:srgbClr val="14181B"/>
                 </a:solidFill>
-                <a:latin typeface="Segoe UI"/>
+                <a:latin typeface="Leelawadee UI"/>
               </a:defRPr>
             </a:pPr>
             <a:r>
@@ -10209,7 +10606,7 @@
                 <a:solidFill>
                   <a:srgbClr val="14181B"/>
                 </a:solidFill>
-                <a:latin typeface="Segoe UI"/>
+                <a:latin typeface="Leelawadee UI"/>
               </a:defRPr>
             </a:pPr>
             <a:r>
@@ -10225,7 +10622,7 @@
                 <a:solidFill>
                   <a:srgbClr val="14181B"/>
                 </a:solidFill>
-                <a:latin typeface="Segoe UI"/>
+                <a:latin typeface="Leelawadee UI"/>
               </a:defRPr>
             </a:pPr>
             <a:r>
@@ -10309,7 +10706,7 @@
                 <a:solidFill>
                   <a:srgbClr val="52B788"/>
                 </a:solidFill>
-                <a:latin typeface="Segoe UI"/>
+                <a:latin typeface="Leelawadee UI"/>
               </a:defRPr>
             </a:pPr>
             <a:r>
@@ -10322,7 +10719,7 @@
                 <a:solidFill>
                   <a:srgbClr val="1B4332"/>
                 </a:solidFill>
-                <a:latin typeface="Segoe UI"/>
+                <a:latin typeface="Leelawadee UI"/>
               </a:defRPr>
             </a:pPr>
             <a:r>
@@ -10338,7 +10735,7 @@
                 <a:solidFill>
                   <a:srgbClr val="5A646E"/>
                 </a:solidFill>
-                <a:latin typeface="Segoe UI"/>
+                <a:latin typeface="Leelawadee UI"/>
               </a:defRPr>
             </a:pPr>
             <a:r>
@@ -10354,7 +10751,7 @@
                 <a:solidFill>
                   <a:srgbClr val="14181B"/>
                 </a:solidFill>
-                <a:latin typeface="Segoe UI"/>
+                <a:latin typeface="Leelawadee UI"/>
               </a:defRPr>
             </a:pPr>
             <a:r>
@@ -10370,7 +10767,7 @@
                 <a:solidFill>
                   <a:srgbClr val="14181B"/>
                 </a:solidFill>
-                <a:latin typeface="Segoe UI"/>
+                <a:latin typeface="Leelawadee UI"/>
               </a:defRPr>
             </a:pPr>
             <a:r>
@@ -10386,7 +10783,7 @@
                 <a:solidFill>
                   <a:srgbClr val="14181B"/>
                 </a:solidFill>
-                <a:latin typeface="Segoe UI"/>
+                <a:latin typeface="Leelawadee UI"/>
               </a:defRPr>
             </a:pPr>
             <a:r>
@@ -10470,7 +10867,7 @@
                 <a:solidFill>
                   <a:srgbClr val="52B788"/>
                 </a:solidFill>
-                <a:latin typeface="Segoe UI"/>
+                <a:latin typeface="Leelawadee UI"/>
               </a:defRPr>
             </a:pPr>
             <a:r>
@@ -10483,7 +10880,7 @@
                 <a:solidFill>
                   <a:srgbClr val="1B4332"/>
                 </a:solidFill>
-                <a:latin typeface="Segoe UI"/>
+                <a:latin typeface="Leelawadee UI"/>
               </a:defRPr>
             </a:pPr>
             <a:r>
@@ -10499,7 +10896,7 @@
                 <a:solidFill>
                   <a:srgbClr val="5A646E"/>
                 </a:solidFill>
-                <a:latin typeface="Segoe UI"/>
+                <a:latin typeface="Leelawadee UI"/>
               </a:defRPr>
             </a:pPr>
             <a:r>
@@ -10515,7 +10912,7 @@
                 <a:solidFill>
                   <a:srgbClr val="14181B"/>
                 </a:solidFill>
-                <a:latin typeface="Segoe UI"/>
+                <a:latin typeface="Leelawadee UI"/>
               </a:defRPr>
             </a:pPr>
             <a:r>
@@ -10531,7 +10928,7 @@
                 <a:solidFill>
                   <a:srgbClr val="14181B"/>
                 </a:solidFill>
-                <a:latin typeface="Segoe UI"/>
+                <a:latin typeface="Leelawadee UI"/>
               </a:defRPr>
             </a:pPr>
             <a:r>
@@ -10547,7 +10944,7 @@
                 <a:solidFill>
                   <a:srgbClr val="14181B"/>
                 </a:solidFill>
-                <a:latin typeface="Segoe UI"/>
+                <a:latin typeface="Leelawadee UI"/>
               </a:defRPr>
             </a:pPr>
             <a:r>
@@ -10631,7 +11028,7 @@
                 <a:solidFill>
                   <a:srgbClr val="52B788"/>
                 </a:solidFill>
-                <a:latin typeface="Segoe UI"/>
+                <a:latin typeface="Leelawadee UI"/>
               </a:defRPr>
             </a:pPr>
             <a:r>
@@ -10644,7 +11041,7 @@
                 <a:solidFill>
                   <a:srgbClr val="1B4332"/>
                 </a:solidFill>
-                <a:latin typeface="Segoe UI"/>
+                <a:latin typeface="Leelawadee UI"/>
               </a:defRPr>
             </a:pPr>
             <a:r>
@@ -10660,7 +11057,7 @@
                 <a:solidFill>
                   <a:srgbClr val="5A646E"/>
                 </a:solidFill>
-                <a:latin typeface="Segoe UI"/>
+                <a:latin typeface="Leelawadee UI"/>
               </a:defRPr>
             </a:pPr>
             <a:r>
@@ -10676,7 +11073,7 @@
                 <a:solidFill>
                   <a:srgbClr val="14181B"/>
                 </a:solidFill>
-                <a:latin typeface="Segoe UI"/>
+                <a:latin typeface="Leelawadee UI"/>
               </a:defRPr>
             </a:pPr>
             <a:r>
@@ -10692,7 +11089,7 @@
                 <a:solidFill>
                   <a:srgbClr val="14181B"/>
                 </a:solidFill>
-                <a:latin typeface="Segoe UI"/>
+                <a:latin typeface="Leelawadee UI"/>
               </a:defRPr>
             </a:pPr>
             <a:r>
@@ -10708,7 +11105,7 @@
                 <a:solidFill>
                   <a:srgbClr val="14181B"/>
                 </a:solidFill>
-                <a:latin typeface="Segoe UI"/>
+                <a:latin typeface="Leelawadee UI"/>
               </a:defRPr>
             </a:pPr>
             <a:r>
@@ -10792,7 +11189,7 @@
                 <a:solidFill>
                   <a:srgbClr val="1B4332"/>
                 </a:solidFill>
-                <a:latin typeface="Segoe UI"/>
+                <a:latin typeface="Leelawadee UI"/>
               </a:defRPr>
             </a:pPr>
             <a:r>
@@ -10805,7 +11202,7 @@
                 <a:solidFill>
                   <a:srgbClr val="14181B"/>
                 </a:solidFill>
-                <a:latin typeface="Segoe UI"/>
+                <a:latin typeface="Leelawadee UI"/>
               </a:defRPr>
             </a:pPr>
             <a:r>
@@ -10871,7 +11268,7 @@
                 <a:solidFill>
                   <a:srgbClr val="52B788"/>
                 </a:solidFill>
-                <a:latin typeface="Segoe UI"/>
+                <a:latin typeface="Leelawadee UI"/>
               </a:defRPr>
             </a:pPr>
             <a:r>
@@ -10907,7 +11304,7 @@
                 <a:solidFill>
                   <a:srgbClr val="1B4332"/>
                 </a:solidFill>
-                <a:latin typeface="Segoe UI"/>
+                <a:latin typeface="Leelawadee UI"/>
               </a:defRPr>
             </a:pPr>
             <a:r>
@@ -10943,7 +11340,7 @@
                 <a:solidFill>
                   <a:srgbClr val="5A646E"/>
                 </a:solidFill>
-                <a:latin typeface="Segoe UI"/>
+                <a:latin typeface="Leelawadee UI"/>
               </a:defRPr>
             </a:pPr>
             <a:r>
@@ -11027,7 +11424,7 @@
                 <a:solidFill>
                   <a:srgbClr val="0B2545"/>
                 </a:solidFill>
-                <a:latin typeface="Segoe UI"/>
+                <a:latin typeface="Leelawadee UI"/>
               </a:defRPr>
             </a:pPr>
             <a:r>
@@ -11043,7 +11440,7 @@
                 <a:solidFill>
                   <a:srgbClr val="14181B"/>
                 </a:solidFill>
-                <a:latin typeface="Segoe UI"/>
+                <a:latin typeface="Leelawadee UI"/>
               </a:defRPr>
             </a:pPr>
             <a:r>
@@ -11059,7 +11456,7 @@
                 <a:solidFill>
                   <a:srgbClr val="14181B"/>
                 </a:solidFill>
-                <a:latin typeface="Segoe UI"/>
+                <a:latin typeface="Leelawadee UI"/>
               </a:defRPr>
             </a:pPr>
             <a:r>
@@ -11075,7 +11472,7 @@
                 <a:solidFill>
                   <a:srgbClr val="14181B"/>
                 </a:solidFill>
-                <a:latin typeface="Segoe UI"/>
+                <a:latin typeface="Leelawadee UI"/>
               </a:defRPr>
             </a:pPr>
             <a:r>
@@ -11091,7 +11488,7 @@
                 <a:solidFill>
                   <a:srgbClr val="14181B"/>
                 </a:solidFill>
-                <a:latin typeface="Segoe UI"/>
+                <a:latin typeface="Leelawadee UI"/>
               </a:defRPr>
             </a:pPr>
             <a:r>
@@ -11175,7 +11572,7 @@
                 <a:solidFill>
                   <a:srgbClr val="2D6A4F"/>
                 </a:solidFill>
-                <a:latin typeface="Segoe UI"/>
+                <a:latin typeface="Leelawadee UI"/>
               </a:defRPr>
             </a:pPr>
             <a:r>
@@ -11191,7 +11588,7 @@
                 <a:solidFill>
                   <a:srgbClr val="14181B"/>
                 </a:solidFill>
-                <a:latin typeface="Segoe UI"/>
+                <a:latin typeface="Leelawadee UI"/>
               </a:defRPr>
             </a:pPr>
             <a:r>
@@ -11207,7 +11604,7 @@
                 <a:solidFill>
                   <a:srgbClr val="14181B"/>
                 </a:solidFill>
-                <a:latin typeface="Segoe UI"/>
+                <a:latin typeface="Leelawadee UI"/>
               </a:defRPr>
             </a:pPr>
             <a:r>
@@ -11223,7 +11620,7 @@
                 <a:solidFill>
                   <a:srgbClr val="14181B"/>
                 </a:solidFill>
-                <a:latin typeface="Segoe UI"/>
+                <a:latin typeface="Leelawadee UI"/>
               </a:defRPr>
             </a:pPr>
             <a:r>
@@ -11239,7 +11636,7 @@
                 <a:solidFill>
                   <a:srgbClr val="14181B"/>
                 </a:solidFill>
-                <a:latin typeface="Segoe UI"/>
+                <a:latin typeface="Leelawadee UI"/>
               </a:defRPr>
             </a:pPr>
             <a:r>
@@ -11323,7 +11720,7 @@
                 <a:solidFill>
                   <a:srgbClr val="1B4332"/>
                 </a:solidFill>
-                <a:latin typeface="Segoe UI"/>
+                <a:latin typeface="Leelawadee UI"/>
               </a:defRPr>
             </a:pPr>
             <a:r>
@@ -11339,7 +11736,7 @@
                 <a:solidFill>
                   <a:srgbClr val="14181B"/>
                 </a:solidFill>
-                <a:latin typeface="Segoe UI"/>
+                <a:latin typeface="Leelawadee UI"/>
               </a:defRPr>
             </a:pPr>
             <a:r>
@@ -11355,7 +11752,7 @@
                 <a:solidFill>
                   <a:srgbClr val="14181B"/>
                 </a:solidFill>
-                <a:latin typeface="Segoe UI"/>
+                <a:latin typeface="Leelawadee UI"/>
               </a:defRPr>
             </a:pPr>
             <a:r>
@@ -11371,7 +11768,7 @@
                 <a:solidFill>
                   <a:srgbClr val="14181B"/>
                 </a:solidFill>
-                <a:latin typeface="Segoe UI"/>
+                <a:latin typeface="Leelawadee UI"/>
               </a:defRPr>
             </a:pPr>
             <a:r>
@@ -11387,7 +11784,7 @@
                 <a:solidFill>
                   <a:srgbClr val="14181B"/>
                 </a:solidFill>
-                <a:latin typeface="Segoe UI"/>
+                <a:latin typeface="Leelawadee UI"/>
               </a:defRPr>
             </a:pPr>
             <a:r>
@@ -11471,7 +11868,7 @@
                 <a:solidFill>
                   <a:srgbClr val="B91C1C"/>
                 </a:solidFill>
-                <a:latin typeface="Segoe UI"/>
+                <a:latin typeface="Leelawadee UI"/>
               </a:defRPr>
             </a:pPr>
             <a:r>
@@ -11484,7 +11881,7 @@
                 <a:solidFill>
                   <a:srgbClr val="14181B"/>
                 </a:solidFill>
-                <a:latin typeface="Segoe UI"/>
+                <a:latin typeface="Leelawadee UI"/>
               </a:defRPr>
             </a:pPr>
             <a:r>
@@ -11550,7 +11947,7 @@
                 <a:solidFill>
                   <a:srgbClr val="52B788"/>
                 </a:solidFill>
-                <a:latin typeface="Segoe UI"/>
+                <a:latin typeface="Leelawadee UI"/>
               </a:defRPr>
             </a:pPr>
             <a:r>
@@ -11586,7 +11983,7 @@
                 <a:solidFill>
                   <a:srgbClr val="1B4332"/>
                 </a:solidFill>
-                <a:latin typeface="Segoe UI"/>
+                <a:latin typeface="Leelawadee UI"/>
               </a:defRPr>
             </a:pPr>
             <a:r>
@@ -11622,7 +12019,7 @@
                 <a:solidFill>
                   <a:srgbClr val="5A646E"/>
                 </a:solidFill>
-                <a:latin typeface="Segoe UI"/>
+                <a:latin typeface="Leelawadee UI"/>
               </a:defRPr>
             </a:pPr>
             <a:r>
@@ -11706,7 +12103,7 @@
                 <a:solidFill>
                   <a:srgbClr val="1B4332"/>
                 </a:solidFill>
-                <a:latin typeface="Segoe UI"/>
+                <a:latin typeface="Leelawadee UI"/>
               </a:defRPr>
             </a:pPr>
             <a:r>
@@ -11719,7 +12116,7 @@
                 <a:solidFill>
                   <a:srgbClr val="134074"/>
                 </a:solidFill>
-                <a:latin typeface="Segoe UI"/>
+                <a:latin typeface="Leelawadee UI"/>
               </a:defRPr>
             </a:pPr>
             <a:r>
@@ -11735,7 +12132,7 @@
                 <a:solidFill>
                   <a:srgbClr val="14181B"/>
                 </a:solidFill>
-                <a:latin typeface="Segoe UI"/>
+                <a:latin typeface="Leelawadee UI"/>
               </a:defRPr>
             </a:pPr>
             <a:r>
@@ -11748,7 +12145,7 @@
                 <a:solidFill>
                   <a:srgbClr val="134074"/>
                 </a:solidFill>
-                <a:latin typeface="Segoe UI"/>
+                <a:latin typeface="Leelawadee UI"/>
               </a:defRPr>
             </a:pPr>
             <a:r>
@@ -11764,7 +12161,7 @@
                 <a:solidFill>
                   <a:srgbClr val="14181B"/>
                 </a:solidFill>
-                <a:latin typeface="Segoe UI"/>
+                <a:latin typeface="Leelawadee UI"/>
               </a:defRPr>
             </a:pPr>
             <a:r>
@@ -11777,7 +12174,7 @@
                 <a:solidFill>
                   <a:srgbClr val="134074"/>
                 </a:solidFill>
-                <a:latin typeface="Segoe UI"/>
+                <a:latin typeface="Leelawadee UI"/>
               </a:defRPr>
             </a:pPr>
             <a:r>
@@ -11793,7 +12190,7 @@
                 <a:solidFill>
                   <a:srgbClr val="14181B"/>
                 </a:solidFill>
-                <a:latin typeface="Segoe UI"/>
+                <a:latin typeface="Leelawadee UI"/>
               </a:defRPr>
             </a:pPr>
             <a:r>
@@ -11806,7 +12203,7 @@
                 <a:solidFill>
                   <a:srgbClr val="134074"/>
                 </a:solidFill>
-                <a:latin typeface="Segoe UI"/>
+                <a:latin typeface="Leelawadee UI"/>
               </a:defRPr>
             </a:pPr>
             <a:r>
@@ -11822,7 +12219,7 @@
                 <a:solidFill>
                   <a:srgbClr val="14181B"/>
                 </a:solidFill>
-                <a:latin typeface="Segoe UI"/>
+                <a:latin typeface="Leelawadee UI"/>
               </a:defRPr>
             </a:pPr>
             <a:r>
@@ -11906,7 +12303,7 @@
                 <a:solidFill>
                   <a:srgbClr val="1B4332"/>
                 </a:solidFill>
-                <a:latin typeface="Segoe UI"/>
+                <a:latin typeface="Leelawadee UI"/>
               </a:defRPr>
             </a:pPr>
             <a:r>
@@ -11919,7 +12316,7 @@
                 <a:solidFill>
                   <a:srgbClr val="1B4332"/>
                 </a:solidFill>
-                <a:latin typeface="Segoe UI"/>
+                <a:latin typeface="Leelawadee UI"/>
               </a:defRPr>
             </a:pPr>
             <a:r>
@@ -11935,7 +12332,7 @@
                 <a:solidFill>
                   <a:srgbClr val="5A646E"/>
                 </a:solidFill>
-                <a:latin typeface="Segoe UI"/>
+                <a:latin typeface="Leelawadee UI"/>
               </a:defRPr>
             </a:pPr>
             <a:r>
@@ -11948,7 +12345,7 @@
                 <a:solidFill>
                   <a:srgbClr val="1B4332"/>
                 </a:solidFill>
-                <a:latin typeface="Segoe UI"/>
+                <a:latin typeface="Leelawadee UI"/>
               </a:defRPr>
             </a:pPr>
             <a:r>
@@ -11964,7 +12361,7 @@
                 <a:solidFill>
                   <a:srgbClr val="5A646E"/>
                 </a:solidFill>
-                <a:latin typeface="Segoe UI"/>
+                <a:latin typeface="Leelawadee UI"/>
               </a:defRPr>
             </a:pPr>
             <a:r>
@@ -11977,7 +12374,7 @@
                 <a:solidFill>
                   <a:srgbClr val="1B4332"/>
                 </a:solidFill>
-                <a:latin typeface="Segoe UI"/>
+                <a:latin typeface="Leelawadee UI"/>
               </a:defRPr>
             </a:pPr>
             <a:r>
@@ -11993,7 +12390,7 @@
                 <a:solidFill>
                   <a:srgbClr val="5A646E"/>
                 </a:solidFill>
-                <a:latin typeface="Segoe UI"/>
+                <a:latin typeface="Leelawadee UI"/>
               </a:defRPr>
             </a:pPr>
             <a:r>
@@ -12006,7 +12403,7 @@
                 <a:solidFill>
                   <a:srgbClr val="1B4332"/>
                 </a:solidFill>
-                <a:latin typeface="Segoe UI"/>
+                <a:latin typeface="Leelawadee UI"/>
               </a:defRPr>
             </a:pPr>
             <a:r>
@@ -12022,7 +12419,7 @@
                 <a:solidFill>
                   <a:srgbClr val="5A646E"/>
                 </a:solidFill>
-                <a:latin typeface="Segoe UI"/>
+                <a:latin typeface="Leelawadee UI"/>
               </a:defRPr>
             </a:pPr>
             <a:r>
@@ -12035,7 +12432,7 @@
                 <a:solidFill>
                   <a:srgbClr val="1B4332"/>
                 </a:solidFill>
-                <a:latin typeface="Segoe UI"/>
+                <a:latin typeface="Leelawadee UI"/>
               </a:defRPr>
             </a:pPr>
             <a:r>
@@ -12051,7 +12448,7 @@
                 <a:solidFill>
                   <a:srgbClr val="5A646E"/>
                 </a:solidFill>
-                <a:latin typeface="Segoe UI"/>
+                <a:latin typeface="Leelawadee UI"/>
               </a:defRPr>
             </a:pPr>
             <a:r>
@@ -12064,7 +12461,7 @@
                 <a:solidFill>
                   <a:srgbClr val="1B4332"/>
                 </a:solidFill>
-                <a:latin typeface="Segoe UI"/>
+                <a:latin typeface="Leelawadee UI"/>
               </a:defRPr>
             </a:pPr>
             <a:r>
@@ -12080,7 +12477,7 @@
                 <a:solidFill>
                   <a:srgbClr val="5A646E"/>
                 </a:solidFill>
-                <a:latin typeface="Segoe UI"/>
+                <a:latin typeface="Leelawadee UI"/>
               </a:defRPr>
             </a:pPr>
             <a:r>
@@ -12093,7 +12490,7 @@
                 <a:solidFill>
                   <a:srgbClr val="B45309"/>
                 </a:solidFill>
-                <a:latin typeface="Segoe UI"/>
+                <a:latin typeface="Leelawadee UI"/>
               </a:defRPr>
             </a:pPr>
             <a:r>
@@ -12198,7 +12595,7 @@
                 <a:solidFill>
                   <a:srgbClr val="14181B"/>
                 </a:solidFill>
-                <a:latin typeface="Segoe UI"/>
+                <a:latin typeface="Leelawadee UI"/>
               </a:defRPr>
             </a:pPr>
             <a:r>
@@ -12260,7 +12657,7 @@
                 <a:solidFill>
                   <a:srgbClr val="52B788"/>
                 </a:solidFill>
-                <a:latin typeface="Segoe UI"/>
+                <a:latin typeface="Leelawadee UI"/>
               </a:defRPr>
             </a:pPr>
             <a:r>
@@ -12296,7 +12693,7 @@
                 <a:solidFill>
                   <a:srgbClr val="1B4332"/>
                 </a:solidFill>
-                <a:latin typeface="Segoe UI"/>
+                <a:latin typeface="Leelawadee UI"/>
               </a:defRPr>
             </a:pPr>
             <a:r>
@@ -12332,7 +12729,7 @@
                 <a:solidFill>
                   <a:srgbClr val="5A646E"/>
                 </a:solidFill>
-                <a:latin typeface="Segoe UI"/>
+                <a:latin typeface="Leelawadee UI"/>
               </a:defRPr>
             </a:pPr>
             <a:r>
@@ -12416,7 +12813,7 @@
                 <a:solidFill>
                   <a:srgbClr val="52B788"/>
                 </a:solidFill>
-                <a:latin typeface="Segoe UI"/>
+                <a:latin typeface="Leelawadee UI"/>
               </a:defRPr>
             </a:pPr>
             <a:r>
@@ -12432,7 +12829,7 @@
                 <a:solidFill>
                   <a:srgbClr val="1B4332"/>
                 </a:solidFill>
-                <a:latin typeface="Segoe UI"/>
+                <a:latin typeface="Leelawadee UI"/>
               </a:defRPr>
             </a:pPr>
             <a:r>
@@ -12448,7 +12845,7 @@
                 <a:solidFill>
                   <a:srgbClr val="14181B"/>
                 </a:solidFill>
-                <a:latin typeface="Segoe UI"/>
+                <a:latin typeface="Leelawadee UI"/>
               </a:defRPr>
             </a:pPr>
             <a:r>
@@ -12461,7 +12858,7 @@
                 <a:solidFill>
                   <a:srgbClr val="134074"/>
                 </a:solidFill>
-                <a:latin typeface="Segoe UI"/>
+                <a:latin typeface="Leelawadee UI"/>
               </a:defRPr>
             </a:pPr>
             <a:r>
@@ -12545,7 +12942,7 @@
                 <a:solidFill>
                   <a:srgbClr val="52B788"/>
                 </a:solidFill>
-                <a:latin typeface="Segoe UI"/>
+                <a:latin typeface="Leelawadee UI"/>
               </a:defRPr>
             </a:pPr>
             <a:r>
@@ -12561,7 +12958,7 @@
                 <a:solidFill>
                   <a:srgbClr val="1B4332"/>
                 </a:solidFill>
-                <a:latin typeface="Segoe UI"/>
+                <a:latin typeface="Leelawadee UI"/>
               </a:defRPr>
             </a:pPr>
             <a:r>
@@ -12577,7 +12974,7 @@
                 <a:solidFill>
                   <a:srgbClr val="14181B"/>
                 </a:solidFill>
-                <a:latin typeface="Segoe UI"/>
+                <a:latin typeface="Leelawadee UI"/>
               </a:defRPr>
             </a:pPr>
             <a:r>
@@ -12598,7 +12995,7 @@
                 <a:solidFill>
                   <a:srgbClr val="134074"/>
                 </a:solidFill>
-                <a:latin typeface="Segoe UI"/>
+                <a:latin typeface="Leelawadee UI"/>
               </a:defRPr>
             </a:pPr>
             <a:r>
@@ -12682,7 +13079,7 @@
                 <a:solidFill>
                   <a:srgbClr val="52B788"/>
                 </a:solidFill>
-                <a:latin typeface="Segoe UI"/>
+                <a:latin typeface="Leelawadee UI"/>
               </a:defRPr>
             </a:pPr>
             <a:r>
@@ -12698,7 +13095,7 @@
                 <a:solidFill>
                   <a:srgbClr val="1B4332"/>
                 </a:solidFill>
-                <a:latin typeface="Segoe UI"/>
+                <a:latin typeface="Leelawadee UI"/>
               </a:defRPr>
             </a:pPr>
             <a:r>
@@ -12714,7 +13111,7 @@
                 <a:solidFill>
                   <a:srgbClr val="14181B"/>
                 </a:solidFill>
-                <a:latin typeface="Segoe UI"/>
+                <a:latin typeface="Leelawadee UI"/>
               </a:defRPr>
             </a:pPr>
             <a:r>
@@ -12727,7 +13124,7 @@
                 <a:solidFill>
                   <a:srgbClr val="134074"/>
                 </a:solidFill>
-                <a:latin typeface="Segoe UI"/>
+                <a:latin typeface="Leelawadee UI"/>
               </a:defRPr>
             </a:pPr>
             <a:r>

--- a/qsbg_smart_tour_presentation_large_font.pptx
+++ b/qsbg_smart_tour_presentation_large_font.pptx
@@ -8119,7 +8119,7 @@
               </a:defRPr>
             </a:pPr>
             <a:r>
-              <a:t>ขาดข้อมูลเชิงสถิติเพื่อการวางแผน</a:t>
+              <a:t>การบูรณาการข้อมูลองค์กรสมัยใหม่</a:t>
             </a:r>
           </a:p>
           <a:p>
@@ -8135,7 +8135,7 @@
               </a:defRPr>
             </a:pPr>
             <a:r>
-              <a:t>No Data-Driven Analytics</a:t>
+              <a:t>Holistic Data Integration for Modern Governance</a:t>
             </a:r>
           </a:p>
           <a:p>
@@ -8151,7 +8151,7 @@
               </a:defRPr>
             </a:pPr>
             <a:r>
-              <a:t>• ขาดระบบจัดเก็บข้อมูลการใช้บริการในรูปแบบดิจิทัล</a:t>
+              <a:t>• การพัฒนาองค์กรสมัยใหม่บนพื้นฐานเทคโนโลยีดิจิทัล ต้องการระบบจัดเก็บและบูรณาการข้อมูลแบบองค์รวม</a:t>
             </a:r>
           </a:p>
           <a:p>
@@ -8167,7 +8167,7 @@
               </a:defRPr>
             </a:pPr>
             <a:r>
-              <a:t>• ไม่มีข้อมูลเชิงพื้นที่และเวลา (Spatial Data) วิเคราะห์จุดหนาแน่น</a:t>
+              <a:t>• ข้อมูลต้องมีความถูกต้อง แม่นยำ เป็นปัจจุบัน และเรียกใช้ได้ตลอดเวลาในทุกแพลตฟอร์ม</a:t>
             </a:r>
           </a:p>
           <a:p>
@@ -8183,7 +8183,7 @@
               </a:defRPr>
             </a:pPr>
             <a:r>
-              <a:t>• ผู้บริหารไม่สามารถนำข้อมูลมาใช้วางแผนจัดสรรทรัพยากรได้อย่างแม่นยำ</a:t>
+              <a:t>• เชื่อมโยงข้อมูลการเดินรถ การจำหน่ายตั๋ว และการบริการเข้าสู่ฐานข้อมูลศูนย์กลาง</a:t>
             </a:r>
           </a:p>
           <a:p>
@@ -8199,7 +8199,7 @@
               </a:defRPr>
             </a:pPr>
             <a:r>
-              <a:t>• ระบบจำหน่ายตั๋วและการตรวจสอบยังไม่เชื่อมโยงกับฐานข้อมูลกลาง</a:t>
+              <a:t>• สนับสนุนการนำข้อมูลเชิงพื้นที่ (Spatial Data) มาวิเคราะห์เพื่อการวางแผนเชิงรุก</a:t>
             </a:r>
           </a:p>
         </p:txBody>

--- a/qsbg_smart_tour_presentation_large_font.pptx
+++ b/qsbg_smart_tour_presentation_large_font.pptx
@@ -7726,8 +7726,8 @@
         </p:nvSpPr>
         <p:spPr>
           <a:xfrm>
-            <a:off x="960120" y="1920240"/>
-            <a:ext cx="2871216" cy="4023360"/>
+            <a:off x="896112" y="1874520"/>
+            <a:ext cx="2999232" cy="4114800"/>
           </a:xfrm>
           <a:prstGeom prst="rect">
             <a:avLst/>
@@ -7735,7 +7735,7 @@
           <a:noFill/>
         </p:spPr>
         <p:txBody>
-          <a:bodyPr wrap="square">
+          <a:bodyPr wrap="square" lIns="73152" rIns="73152">
             <a:spAutoFit/>
           </a:bodyPr>
           <a:lstStyle/>
@@ -7757,7 +7757,7 @@
           </a:p>
           <a:p>
             <a:pPr>
-              <a:defRPr sz="1700" b="1">
+              <a:defRPr sz="1350" b="1">
                 <a:solidFill>
                   <a:srgbClr val="14181B"/>
                 </a:solidFill>
@@ -7903,8 +7903,8 @@
         </p:nvSpPr>
         <p:spPr>
           <a:xfrm>
-            <a:off x="4617720" y="1920240"/>
-            <a:ext cx="2871216" cy="4023360"/>
+            <a:off x="4553712" y="1874520"/>
+            <a:ext cx="2999232" cy="4114800"/>
           </a:xfrm>
           <a:prstGeom prst="rect">
             <a:avLst/>
@@ -7912,7 +7912,7 @@
           <a:noFill/>
         </p:spPr>
         <p:txBody>
-          <a:bodyPr wrap="square">
+          <a:bodyPr wrap="square" lIns="73152" rIns="73152">
             <a:spAutoFit/>
           </a:bodyPr>
           <a:lstStyle/>
@@ -7934,7 +7934,7 @@
           </a:p>
           <a:p>
             <a:pPr>
-              <a:defRPr sz="1700" b="1">
+              <a:defRPr sz="1350" b="1">
                 <a:solidFill>
                   <a:srgbClr val="14181B"/>
                 </a:solidFill>
@@ -8080,8 +8080,8 @@
         </p:nvSpPr>
         <p:spPr>
           <a:xfrm>
-            <a:off x="8275320" y="1920240"/>
-            <a:ext cx="2871216" cy="4023360"/>
+            <a:off x="8211312" y="1874520"/>
+            <a:ext cx="2999232" cy="4114800"/>
           </a:xfrm>
           <a:prstGeom prst="rect">
             <a:avLst/>
@@ -8089,7 +8089,7 @@
           <a:noFill/>
         </p:spPr>
         <p:txBody>
-          <a:bodyPr wrap="square">
+          <a:bodyPr wrap="square" lIns="73152" rIns="73152">
             <a:spAutoFit/>
           </a:bodyPr>
           <a:lstStyle/>
@@ -8111,7 +8111,7 @@
           </a:p>
           <a:p>
             <a:pPr>
-              <a:defRPr sz="1700" b="1">
+              <a:defRPr sz="1350" b="1">
                 <a:solidFill>
                   <a:srgbClr val="14181B"/>
                 </a:solidFill>
@@ -8119,7 +8119,11 @@
               </a:defRPr>
             </a:pPr>
             <a:r>
-              <a:t>การบูรณาการข้อมูลองค์กรสมัยใหม่</a:t>
+              <a:t>การพัฒนาองค์กรสมัยใหม่</a:t>
+            </a:r>
+            <a:br/>
+            <a:r>
+              <a:t>บนพื้นฐานเทคโนโลยีดิจิทัล</a:t>
             </a:r>
           </a:p>
           <a:p>
@@ -8135,7 +8139,7 @@
               </a:defRPr>
             </a:pPr>
             <a:r>
-              <a:t>Holistic Data Integration for Modern Governance</a:t>
+              <a:t>Modern Digital Organization</a:t>
             </a:r>
           </a:p>
           <a:p>
@@ -8151,7 +8155,7 @@
               </a:defRPr>
             </a:pPr>
             <a:r>
-              <a:t>• การพัฒนาองค์กรสมัยใหม่บนพื้นฐานเทคโนโลยีดิจิทัล ต้องการระบบจัดเก็บและบูรณาการข้อมูลแบบองค์รวม</a:t>
+              <a:t>• ต้องการระบบจัดเก็บและบูรณาการข้อมูลแบบองค์รวม</a:t>
             </a:r>
           </a:p>
           <a:p>
